--- a/documentation/Presentacion_MultiAgentLab_Javier_Ariel.pptx
+++ b/documentation/Presentacion_MultiAgentLab_Javier_Ariel.pptx
@@ -5,37 +5,37 @@
     <p:sldMasterId id="2147483648" r:id="rId1"/>
   </p:sldMasterIdLst>
   <p:sldIdLst>
-    <p:sldId id="256" r:id="rId7"/>
-    <p:sldId id="257" r:id="rId8"/>
-    <p:sldId id="258" r:id="rId9"/>
-    <p:sldId id="259" r:id="rId10"/>
-    <p:sldId id="260" r:id="rId11"/>
-    <p:sldId id="261" r:id="rId12"/>
-    <p:sldId id="262" r:id="rId13"/>
-    <p:sldId id="263" r:id="rId14"/>
-    <p:sldId id="264" r:id="rId15"/>
-    <p:sldId id="265" r:id="rId16"/>
-    <p:sldId id="266" r:id="rId17"/>
-    <p:sldId id="267" r:id="rId18"/>
-    <p:sldId id="268" r:id="rId19"/>
-    <p:sldId id="269" r:id="rId20"/>
-    <p:sldId id="270" r:id="rId21"/>
-    <p:sldId id="271" r:id="rId22"/>
-    <p:sldId id="272" r:id="rId23"/>
-    <p:sldId id="273" r:id="rId24"/>
-    <p:sldId id="274" r:id="rId25"/>
-    <p:sldId id="275" r:id="rId26"/>
-    <p:sldId id="276" r:id="rId27"/>
-    <p:sldId id="277" r:id="rId28"/>
-    <p:sldId id="278" r:id="rId29"/>
-    <p:sldId id="279" r:id="rId30"/>
-    <p:sldId id="280" r:id="rId31"/>
-    <p:sldId id="281" r:id="rId32"/>
-    <p:sldId id="282" r:id="rId33"/>
-    <p:sldId id="283" r:id="rId34"/>
-    <p:sldId id="284" r:id="rId35"/>
+    <p:sldId id="256" r:id="rId2"/>
+    <p:sldId id="257" r:id="rId3"/>
+    <p:sldId id="258" r:id="rId4"/>
+    <p:sldId id="259" r:id="rId5"/>
+    <p:sldId id="260" r:id="rId6"/>
+    <p:sldId id="261" r:id="rId7"/>
+    <p:sldId id="262" r:id="rId8"/>
+    <p:sldId id="263" r:id="rId9"/>
+    <p:sldId id="264" r:id="rId10"/>
+    <p:sldId id="265" r:id="rId11"/>
+    <p:sldId id="266" r:id="rId12"/>
+    <p:sldId id="267" r:id="rId13"/>
+    <p:sldId id="268" r:id="rId14"/>
+    <p:sldId id="269" r:id="rId15"/>
+    <p:sldId id="270" r:id="rId16"/>
+    <p:sldId id="272" r:id="rId17"/>
+    <p:sldId id="271" r:id="rId18"/>
+    <p:sldId id="273" r:id="rId19"/>
+    <p:sldId id="274" r:id="rId20"/>
+    <p:sldId id="275" r:id="rId21"/>
+    <p:sldId id="276" r:id="rId22"/>
+    <p:sldId id="277" r:id="rId23"/>
+    <p:sldId id="278" r:id="rId24"/>
+    <p:sldId id="279" r:id="rId25"/>
+    <p:sldId id="280" r:id="rId26"/>
+    <p:sldId id="281" r:id="rId27"/>
+    <p:sldId id="282" r:id="rId28"/>
+    <p:sldId id="283" r:id="rId29"/>
+    <p:sldId id="284" r:id="rId30"/>
   </p:sldIdLst>
-  <p:sldSz cx="12191695" cy="6858000" type="screen4x3"/>
+  <p:sldSz cx="12192000" cy="6858000"/>
   <p:notesSz cx="6858000" cy="9144000"/>
   <p:defaultTextStyle>
     <a:defPPr>
@@ -132,6 +132,22 @@
       </a:defRPr>
     </a:lvl9pPr>
   </p:defaultTextStyle>
+  <p:extLst>
+    <p:ext uri="{EFAFB233-063F-42B5-8137-9DF3F51BA10A}">
+      <p15:sldGuideLst xmlns:p15="http://schemas.microsoft.com/office/powerpoint/2012/main">
+        <p15:guide id="1" orient="horz" pos="2160">
+          <p15:clr>
+            <a:srgbClr val="A4A3A4"/>
+          </p15:clr>
+        </p15:guide>
+        <p15:guide id="2" pos="2880">
+          <p15:clr>
+            <a:srgbClr val="A4A3A4"/>
+          </p15:clr>
+        </p15:guide>
+      </p15:sldGuideLst>
+    </p:ext>
+  </p:extLst>
 </p:presentation>
 </file>
 
@@ -173,10 +189,9 @@
           <a:lstStyle/>
           <a:p>
             <a:r>
-              <a:rPr lang="en-US" smtClean="0"/>
+              <a:rPr lang="en-US"/>
               <a:t>Click to edit Master title style</a:t>
             </a:r>
-            <a:endParaRPr lang="en-US"/>
           </a:p>
         </p:txBody>
       </p:sp>
@@ -292,10 +307,9 @@
           </a:lstStyle>
           <a:p>
             <a:r>
-              <a:rPr lang="en-US" smtClean="0"/>
+              <a:rPr lang="en-US"/>
               <a:t>Click to edit Master subtitle style</a:t>
             </a:r>
-            <a:endParaRPr lang="en-US"/>
           </a:p>
         </p:txBody>
       </p:sp>
@@ -316,7 +330,7 @@
           <a:p>
             <a:fld id="{5BCAD085-E8A6-8845-BD4E-CB4CCA059FC4}" type="datetimeFigureOut">
               <a:rPr lang="en-US" smtClean="0"/>
-              <a:t>1/27/13</a:t>
+              <a:t>5/14/2026</a:t>
             </a:fld>
             <a:endParaRPr lang="en-US"/>
           </a:p>
@@ -410,10 +424,9 @@
           <a:lstStyle/>
           <a:p>
             <a:r>
-              <a:rPr lang="en-US" smtClean="0"/>
+              <a:rPr lang="en-US"/>
               <a:t>Click to edit Master title style</a:t>
             </a:r>
-            <a:endParaRPr lang="en-US"/>
           </a:p>
         </p:txBody>
       </p:sp>
@@ -434,38 +447,37 @@
           <a:p>
             <a:pPr lvl="0"/>
             <a:r>
-              <a:rPr lang="en-US" smtClean="0"/>
+              <a:rPr lang="en-US"/>
               <a:t>Click to edit Master text styles</a:t>
             </a:r>
           </a:p>
           <a:p>
             <a:pPr lvl="1"/>
             <a:r>
-              <a:rPr lang="en-US" smtClean="0"/>
+              <a:rPr lang="en-US"/>
               <a:t>Second level</a:t>
             </a:r>
           </a:p>
           <a:p>
             <a:pPr lvl="2"/>
             <a:r>
-              <a:rPr lang="en-US" smtClean="0"/>
+              <a:rPr lang="en-US"/>
               <a:t>Third level</a:t>
             </a:r>
           </a:p>
           <a:p>
             <a:pPr lvl="3"/>
             <a:r>
-              <a:rPr lang="en-US" smtClean="0"/>
+              <a:rPr lang="en-US"/>
               <a:t>Fourth level</a:t>
             </a:r>
           </a:p>
           <a:p>
             <a:pPr lvl="4"/>
             <a:r>
-              <a:rPr lang="en-US" smtClean="0"/>
+              <a:rPr lang="en-US"/>
               <a:t>Fifth level</a:t>
             </a:r>
-            <a:endParaRPr lang="en-US"/>
           </a:p>
         </p:txBody>
       </p:sp>
@@ -486,7 +498,7 @@
           <a:p>
             <a:fld id="{5BCAD085-E8A6-8845-BD4E-CB4CCA059FC4}" type="datetimeFigureOut">
               <a:rPr lang="en-US" smtClean="0"/>
-              <a:t>1/27/13</a:t>
+              <a:t>5/14/2026</a:t>
             </a:fld>
             <a:endParaRPr lang="en-US"/>
           </a:p>
@@ -585,10 +597,9 @@
           <a:lstStyle/>
           <a:p>
             <a:r>
-              <a:rPr lang="en-US" smtClean="0"/>
+              <a:rPr lang="en-US"/>
               <a:t>Click to edit Master title style</a:t>
             </a:r>
-            <a:endParaRPr lang="en-US"/>
           </a:p>
         </p:txBody>
       </p:sp>
@@ -614,38 +625,37 @@
           <a:p>
             <a:pPr lvl="0"/>
             <a:r>
-              <a:rPr lang="en-US" smtClean="0"/>
+              <a:rPr lang="en-US"/>
               <a:t>Click to edit Master text styles</a:t>
             </a:r>
           </a:p>
           <a:p>
             <a:pPr lvl="1"/>
             <a:r>
-              <a:rPr lang="en-US" smtClean="0"/>
+              <a:rPr lang="en-US"/>
               <a:t>Second level</a:t>
             </a:r>
           </a:p>
           <a:p>
             <a:pPr lvl="2"/>
             <a:r>
-              <a:rPr lang="en-US" smtClean="0"/>
+              <a:rPr lang="en-US"/>
               <a:t>Third level</a:t>
             </a:r>
           </a:p>
           <a:p>
             <a:pPr lvl="3"/>
             <a:r>
-              <a:rPr lang="en-US" smtClean="0"/>
+              <a:rPr lang="en-US"/>
               <a:t>Fourth level</a:t>
             </a:r>
           </a:p>
           <a:p>
             <a:pPr lvl="4"/>
             <a:r>
-              <a:rPr lang="en-US" smtClean="0"/>
+              <a:rPr lang="en-US"/>
               <a:t>Fifth level</a:t>
             </a:r>
-            <a:endParaRPr lang="en-US"/>
           </a:p>
         </p:txBody>
       </p:sp>
@@ -666,7 +676,7 @@
           <a:p>
             <a:fld id="{5BCAD085-E8A6-8845-BD4E-CB4CCA059FC4}" type="datetimeFigureOut">
               <a:rPr lang="en-US" smtClean="0"/>
-              <a:t>1/27/13</a:t>
+              <a:t>5/14/2026</a:t>
             </a:fld>
             <a:endParaRPr lang="en-US"/>
           </a:p>
@@ -760,10 +770,9 @@
           <a:lstStyle/>
           <a:p>
             <a:r>
-              <a:rPr lang="en-US" smtClean="0"/>
+              <a:rPr lang="en-US"/>
               <a:t>Click to edit Master title style</a:t>
             </a:r>
-            <a:endParaRPr lang="en-US"/>
           </a:p>
         </p:txBody>
       </p:sp>
@@ -784,38 +793,37 @@
           <a:p>
             <a:pPr lvl="0"/>
             <a:r>
-              <a:rPr lang="en-US" smtClean="0"/>
+              <a:rPr lang="en-US"/>
               <a:t>Click to edit Master text styles</a:t>
             </a:r>
           </a:p>
           <a:p>
             <a:pPr lvl="1"/>
             <a:r>
-              <a:rPr lang="en-US" smtClean="0"/>
+              <a:rPr lang="en-US"/>
               <a:t>Second level</a:t>
             </a:r>
           </a:p>
           <a:p>
             <a:pPr lvl="2"/>
             <a:r>
-              <a:rPr lang="en-US" smtClean="0"/>
+              <a:rPr lang="en-US"/>
               <a:t>Third level</a:t>
             </a:r>
           </a:p>
           <a:p>
             <a:pPr lvl="3"/>
             <a:r>
-              <a:rPr lang="en-US" smtClean="0"/>
+              <a:rPr lang="en-US"/>
               <a:t>Fourth level</a:t>
             </a:r>
           </a:p>
           <a:p>
             <a:pPr lvl="4"/>
             <a:r>
-              <a:rPr lang="en-US" smtClean="0"/>
+              <a:rPr lang="en-US"/>
               <a:t>Fifth level</a:t>
             </a:r>
-            <a:endParaRPr lang="en-US"/>
           </a:p>
         </p:txBody>
       </p:sp>
@@ -836,7 +844,7 @@
           <a:p>
             <a:fld id="{5BCAD085-E8A6-8845-BD4E-CB4CCA059FC4}" type="datetimeFigureOut">
               <a:rPr lang="en-US" smtClean="0"/>
-              <a:t>1/27/13</a:t>
+              <a:t>5/14/2026</a:t>
             </a:fld>
             <a:endParaRPr lang="en-US"/>
           </a:p>
@@ -939,10 +947,9 @@
           </a:lstStyle>
           <a:p>
             <a:r>
-              <a:rPr lang="en-US" smtClean="0"/>
+              <a:rPr lang="en-US"/>
               <a:t>Click to edit Master title style</a:t>
             </a:r>
-            <a:endParaRPr lang="en-US"/>
           </a:p>
         </p:txBody>
       </p:sp>
@@ -1059,7 +1066,7 @@
           <a:p>
             <a:pPr lvl="0"/>
             <a:r>
-              <a:rPr lang="en-US" smtClean="0"/>
+              <a:rPr lang="en-US"/>
               <a:t>Click to edit Master text styles</a:t>
             </a:r>
           </a:p>
@@ -1082,7 +1089,7 @@
           <a:p>
             <a:fld id="{5BCAD085-E8A6-8845-BD4E-CB4CCA059FC4}" type="datetimeFigureOut">
               <a:rPr lang="en-US" smtClean="0"/>
-              <a:t>1/27/13</a:t>
+              <a:t>5/14/2026</a:t>
             </a:fld>
             <a:endParaRPr lang="en-US"/>
           </a:p>
@@ -1176,10 +1183,9 @@
           <a:lstStyle/>
           <a:p>
             <a:r>
-              <a:rPr lang="en-US" smtClean="0"/>
+              <a:rPr lang="en-US"/>
               <a:t>Click to edit Master title style</a:t>
             </a:r>
-            <a:endParaRPr lang="en-US"/>
           </a:p>
         </p:txBody>
       </p:sp>
@@ -1233,38 +1239,37 @@
           <a:p>
             <a:pPr lvl="0"/>
             <a:r>
-              <a:rPr lang="en-US" smtClean="0"/>
+              <a:rPr lang="en-US"/>
               <a:t>Click to edit Master text styles</a:t>
             </a:r>
           </a:p>
           <a:p>
             <a:pPr lvl="1"/>
             <a:r>
-              <a:rPr lang="en-US" smtClean="0"/>
+              <a:rPr lang="en-US"/>
               <a:t>Second level</a:t>
             </a:r>
           </a:p>
           <a:p>
             <a:pPr lvl="2"/>
             <a:r>
-              <a:rPr lang="en-US" smtClean="0"/>
+              <a:rPr lang="en-US"/>
               <a:t>Third level</a:t>
             </a:r>
           </a:p>
           <a:p>
             <a:pPr lvl="3"/>
             <a:r>
-              <a:rPr lang="en-US" smtClean="0"/>
+              <a:rPr lang="en-US"/>
               <a:t>Fourth level</a:t>
             </a:r>
           </a:p>
           <a:p>
             <a:pPr lvl="4"/>
             <a:r>
-              <a:rPr lang="en-US" smtClean="0"/>
+              <a:rPr lang="en-US"/>
               <a:t>Fifth level</a:t>
             </a:r>
-            <a:endParaRPr lang="en-US"/>
           </a:p>
         </p:txBody>
       </p:sp>
@@ -1318,38 +1323,37 @@
           <a:p>
             <a:pPr lvl="0"/>
             <a:r>
-              <a:rPr lang="en-US" smtClean="0"/>
+              <a:rPr lang="en-US"/>
               <a:t>Click to edit Master text styles</a:t>
             </a:r>
           </a:p>
           <a:p>
             <a:pPr lvl="1"/>
             <a:r>
-              <a:rPr lang="en-US" smtClean="0"/>
+              <a:rPr lang="en-US"/>
               <a:t>Second level</a:t>
             </a:r>
           </a:p>
           <a:p>
             <a:pPr lvl="2"/>
             <a:r>
-              <a:rPr lang="en-US" smtClean="0"/>
+              <a:rPr lang="en-US"/>
               <a:t>Third level</a:t>
             </a:r>
           </a:p>
           <a:p>
             <a:pPr lvl="3"/>
             <a:r>
-              <a:rPr lang="en-US" smtClean="0"/>
+              <a:rPr lang="en-US"/>
               <a:t>Fourth level</a:t>
             </a:r>
           </a:p>
           <a:p>
             <a:pPr lvl="4"/>
             <a:r>
-              <a:rPr lang="en-US" smtClean="0"/>
+              <a:rPr lang="en-US"/>
               <a:t>Fifth level</a:t>
             </a:r>
-            <a:endParaRPr lang="en-US"/>
           </a:p>
         </p:txBody>
       </p:sp>
@@ -1370,7 +1374,7 @@
           <a:p>
             <a:fld id="{5BCAD085-E8A6-8845-BD4E-CB4CCA059FC4}" type="datetimeFigureOut">
               <a:rPr lang="en-US" smtClean="0"/>
-              <a:t>1/27/13</a:t>
+              <a:t>5/14/2026</a:t>
             </a:fld>
             <a:endParaRPr lang="en-US"/>
           </a:p>
@@ -1468,10 +1472,9 @@
           </a:lstStyle>
           <a:p>
             <a:r>
-              <a:rPr lang="en-US" smtClean="0"/>
+              <a:rPr lang="en-US"/>
               <a:t>Click to edit Master title style</a:t>
             </a:r>
-            <a:endParaRPr lang="en-US"/>
           </a:p>
         </p:txBody>
       </p:sp>
@@ -1534,7 +1537,7 @@
           <a:p>
             <a:pPr lvl="0"/>
             <a:r>
-              <a:rPr lang="en-US" smtClean="0"/>
+              <a:rPr lang="en-US"/>
               <a:t>Click to edit Master text styles</a:t>
             </a:r>
           </a:p>
@@ -1590,38 +1593,37 @@
           <a:p>
             <a:pPr lvl="0"/>
             <a:r>
-              <a:rPr lang="en-US" smtClean="0"/>
+              <a:rPr lang="en-US"/>
               <a:t>Click to edit Master text styles</a:t>
             </a:r>
           </a:p>
           <a:p>
             <a:pPr lvl="1"/>
             <a:r>
-              <a:rPr lang="en-US" smtClean="0"/>
+              <a:rPr lang="en-US"/>
               <a:t>Second level</a:t>
             </a:r>
           </a:p>
           <a:p>
             <a:pPr lvl="2"/>
             <a:r>
-              <a:rPr lang="en-US" smtClean="0"/>
+              <a:rPr lang="en-US"/>
               <a:t>Third level</a:t>
             </a:r>
           </a:p>
           <a:p>
             <a:pPr lvl="3"/>
             <a:r>
-              <a:rPr lang="en-US" smtClean="0"/>
+              <a:rPr lang="en-US"/>
               <a:t>Fourth level</a:t>
             </a:r>
           </a:p>
           <a:p>
             <a:pPr lvl="4"/>
             <a:r>
-              <a:rPr lang="en-US" smtClean="0"/>
+              <a:rPr lang="en-US"/>
               <a:t>Fifth level</a:t>
             </a:r>
-            <a:endParaRPr lang="en-US"/>
           </a:p>
         </p:txBody>
       </p:sp>
@@ -1684,7 +1686,7 @@
           <a:p>
             <a:pPr lvl="0"/>
             <a:r>
-              <a:rPr lang="en-US" smtClean="0"/>
+              <a:rPr lang="en-US"/>
               <a:t>Click to edit Master text styles</a:t>
             </a:r>
           </a:p>
@@ -1740,38 +1742,37 @@
           <a:p>
             <a:pPr lvl="0"/>
             <a:r>
-              <a:rPr lang="en-US" smtClean="0"/>
+              <a:rPr lang="en-US"/>
               <a:t>Click to edit Master text styles</a:t>
             </a:r>
           </a:p>
           <a:p>
             <a:pPr lvl="1"/>
             <a:r>
-              <a:rPr lang="en-US" smtClean="0"/>
+              <a:rPr lang="en-US"/>
               <a:t>Second level</a:t>
             </a:r>
           </a:p>
           <a:p>
             <a:pPr lvl="2"/>
             <a:r>
-              <a:rPr lang="en-US" smtClean="0"/>
+              <a:rPr lang="en-US"/>
               <a:t>Third level</a:t>
             </a:r>
           </a:p>
           <a:p>
             <a:pPr lvl="3"/>
             <a:r>
-              <a:rPr lang="en-US" smtClean="0"/>
+              <a:rPr lang="en-US"/>
               <a:t>Fourth level</a:t>
             </a:r>
           </a:p>
           <a:p>
             <a:pPr lvl="4"/>
             <a:r>
-              <a:rPr lang="en-US" smtClean="0"/>
+              <a:rPr lang="en-US"/>
               <a:t>Fifth level</a:t>
             </a:r>
-            <a:endParaRPr lang="en-US"/>
           </a:p>
         </p:txBody>
       </p:sp>
@@ -1792,7 +1793,7 @@
           <a:p>
             <a:fld id="{5BCAD085-E8A6-8845-BD4E-CB4CCA059FC4}" type="datetimeFigureOut">
               <a:rPr lang="en-US" smtClean="0"/>
-              <a:t>1/27/13</a:t>
+              <a:t>5/14/2026</a:t>
             </a:fld>
             <a:endParaRPr lang="en-US"/>
           </a:p>
@@ -1886,10 +1887,9 @@
           <a:lstStyle/>
           <a:p>
             <a:r>
-              <a:rPr lang="en-US" smtClean="0"/>
+              <a:rPr lang="en-US"/>
               <a:t>Click to edit Master title style</a:t>
             </a:r>
-            <a:endParaRPr lang="en-US"/>
           </a:p>
         </p:txBody>
       </p:sp>
@@ -1910,7 +1910,7 @@
           <a:p>
             <a:fld id="{5BCAD085-E8A6-8845-BD4E-CB4CCA059FC4}" type="datetimeFigureOut">
               <a:rPr lang="en-US" smtClean="0"/>
-              <a:t>1/27/13</a:t>
+              <a:t>5/14/2026</a:t>
             </a:fld>
             <a:endParaRPr lang="en-US"/>
           </a:p>
@@ -2005,7 +2005,7 @@
           <a:p>
             <a:fld id="{5BCAD085-E8A6-8845-BD4E-CB4CCA059FC4}" type="datetimeFigureOut">
               <a:rPr lang="en-US" smtClean="0"/>
-              <a:t>1/27/13</a:t>
+              <a:t>5/14/2026</a:t>
             </a:fld>
             <a:endParaRPr lang="en-US"/>
           </a:p>
@@ -2108,10 +2108,9 @@
           </a:lstStyle>
           <a:p>
             <a:r>
-              <a:rPr lang="en-US" smtClean="0"/>
+              <a:rPr lang="en-US"/>
               <a:t>Click to edit Master title style</a:t>
             </a:r>
-            <a:endParaRPr lang="en-US"/>
           </a:p>
         </p:txBody>
       </p:sp>
@@ -2165,38 +2164,37 @@
           <a:p>
             <a:pPr lvl="0"/>
             <a:r>
-              <a:rPr lang="en-US" smtClean="0"/>
+              <a:rPr lang="en-US"/>
               <a:t>Click to edit Master text styles</a:t>
             </a:r>
           </a:p>
           <a:p>
             <a:pPr lvl="1"/>
             <a:r>
-              <a:rPr lang="en-US" smtClean="0"/>
+              <a:rPr lang="en-US"/>
               <a:t>Second level</a:t>
             </a:r>
           </a:p>
           <a:p>
             <a:pPr lvl="2"/>
             <a:r>
-              <a:rPr lang="en-US" smtClean="0"/>
+              <a:rPr lang="en-US"/>
               <a:t>Third level</a:t>
             </a:r>
           </a:p>
           <a:p>
             <a:pPr lvl="3"/>
             <a:r>
-              <a:rPr lang="en-US" smtClean="0"/>
+              <a:rPr lang="en-US"/>
               <a:t>Fourth level</a:t>
             </a:r>
           </a:p>
           <a:p>
             <a:pPr lvl="4"/>
             <a:r>
-              <a:rPr lang="en-US" smtClean="0"/>
+              <a:rPr lang="en-US"/>
               <a:t>Fifth level</a:t>
             </a:r>
-            <a:endParaRPr lang="en-US"/>
           </a:p>
         </p:txBody>
       </p:sp>
@@ -2259,7 +2257,7 @@
           <a:p>
             <a:pPr lvl="0"/>
             <a:r>
-              <a:rPr lang="en-US" smtClean="0"/>
+              <a:rPr lang="en-US"/>
               <a:t>Click to edit Master text styles</a:t>
             </a:r>
           </a:p>
@@ -2282,7 +2280,7 @@
           <a:p>
             <a:fld id="{5BCAD085-E8A6-8845-BD4E-CB4CCA059FC4}" type="datetimeFigureOut">
               <a:rPr lang="en-US" smtClean="0"/>
-              <a:t>1/27/13</a:t>
+              <a:t>5/14/2026</a:t>
             </a:fld>
             <a:endParaRPr lang="en-US"/>
           </a:p>
@@ -2385,10 +2383,9 @@
           </a:lstStyle>
           <a:p>
             <a:r>
-              <a:rPr lang="en-US" smtClean="0"/>
+              <a:rPr lang="en-US"/>
               <a:t>Click to edit Master title style</a:t>
             </a:r>
-            <a:endParaRPr lang="en-US"/>
           </a:p>
         </p:txBody>
       </p:sp>
@@ -2512,7 +2509,7 @@
           <a:p>
             <a:pPr lvl="0"/>
             <a:r>
-              <a:rPr lang="en-US" smtClean="0"/>
+              <a:rPr lang="en-US"/>
               <a:t>Click to edit Master text styles</a:t>
             </a:r>
           </a:p>
@@ -2535,7 +2532,7 @@
           <a:p>
             <a:fld id="{5BCAD085-E8A6-8845-BD4E-CB4CCA059FC4}" type="datetimeFigureOut">
               <a:rPr lang="en-US" smtClean="0"/>
-              <a:t>1/27/13</a:t>
+              <a:t>5/14/2026</a:t>
             </a:fld>
             <a:endParaRPr lang="en-US"/>
           </a:p>
@@ -2644,10 +2641,9 @@
           <a:lstStyle/>
           <a:p>
             <a:r>
-              <a:rPr lang="en-US" smtClean="0"/>
+              <a:rPr lang="en-US"/>
               <a:t>Click to edit Master title style</a:t>
             </a:r>
-            <a:endParaRPr lang="en-US"/>
           </a:p>
         </p:txBody>
       </p:sp>
@@ -2678,38 +2674,37 @@
           <a:p>
             <a:pPr lvl="0"/>
             <a:r>
-              <a:rPr lang="en-US" smtClean="0"/>
+              <a:rPr lang="en-US"/>
               <a:t>Click to edit Master text styles</a:t>
             </a:r>
           </a:p>
           <a:p>
             <a:pPr lvl="1"/>
             <a:r>
-              <a:rPr lang="en-US" smtClean="0"/>
+              <a:rPr lang="en-US"/>
               <a:t>Second level</a:t>
             </a:r>
           </a:p>
           <a:p>
             <a:pPr lvl="2"/>
             <a:r>
-              <a:rPr lang="en-US" smtClean="0"/>
+              <a:rPr lang="en-US"/>
               <a:t>Third level</a:t>
             </a:r>
           </a:p>
           <a:p>
             <a:pPr lvl="3"/>
             <a:r>
-              <a:rPr lang="en-US" smtClean="0"/>
+              <a:rPr lang="en-US"/>
               <a:t>Fourth level</a:t>
             </a:r>
           </a:p>
           <a:p>
             <a:pPr lvl="4"/>
             <a:r>
-              <a:rPr lang="en-US" smtClean="0"/>
+              <a:rPr lang="en-US"/>
               <a:t>Fifth level</a:t>
             </a:r>
-            <a:endParaRPr lang="en-US"/>
           </a:p>
         </p:txBody>
       </p:sp>
@@ -2748,7 +2743,7 @@
           <a:p>
             <a:fld id="{5BCAD085-E8A6-8845-BD4E-CB4CCA059FC4}" type="datetimeFigureOut">
               <a:rPr lang="en-US" smtClean="0"/>
-              <a:t>1/27/13</a:t>
+              <a:t>5/14/2026</a:t>
             </a:fld>
             <a:endParaRPr lang="en-US"/>
           </a:p>
@@ -3107,7 +3102,7 @@
 </file>
 
 <file path=ppt/slides/slide1.xml><?xml version="1.0" encoding="utf-8"?>
-<p:sld xmlns:a="http://schemas.openxmlformats.org/drawingml/2006/main" xmlns:p="http://schemas.openxmlformats.org/presentationml/2006/main" xmlns:r="http://schemas.openxmlformats.org/officeDocument/2006/relationships">
+<p:sld xmlns:a="http://schemas.openxmlformats.org/drawingml/2006/main" xmlns:r="http://schemas.openxmlformats.org/officeDocument/2006/relationships" xmlns:p="http://schemas.openxmlformats.org/presentationml/2006/main">
   <p:cSld>
     <p:bg>
       <p:bgPr>
@@ -3123,7 +3118,14 @@
         <p:cNvGrpSpPr/>
         <p:nvPr/>
       </p:nvGrpSpPr>
-      <p:grpSpPr/>
+      <p:grpSpPr>
+        <a:xfrm>
+          <a:off x="0" y="0"/>
+          <a:ext cx="0" cy="0"/>
+          <a:chOff x="0" y="0"/>
+          <a:chExt cx="0" cy="0"/>
+        </a:xfrm>
+      </p:grpSpPr>
       <p:sp>
         <p:nvSpPr>
           <p:cNvPr id="2" name="TextBox 1"/>
@@ -3234,6 +3236,7 @@
           <a:lstStyle/>
           <a:p>
             <a:pPr algn="ctr"/>
+            <a:endParaRPr/>
           </a:p>
         </p:txBody>
       </p:sp>
@@ -3351,7 +3354,7 @@
 </file>
 
 <file path=ppt/slides/slide10.xml><?xml version="1.0" encoding="utf-8"?>
-<p:sld xmlns:a="http://schemas.openxmlformats.org/drawingml/2006/main" xmlns:p="http://schemas.openxmlformats.org/presentationml/2006/main" xmlns:r="http://schemas.openxmlformats.org/officeDocument/2006/relationships">
+<p:sld xmlns:a="http://schemas.openxmlformats.org/drawingml/2006/main" xmlns:r="http://schemas.openxmlformats.org/officeDocument/2006/relationships" xmlns:p="http://schemas.openxmlformats.org/presentationml/2006/main">
   <p:cSld>
     <p:bg>
       <p:bgPr>
@@ -3367,7 +3370,14 @@
         <p:cNvGrpSpPr/>
         <p:nvPr/>
       </p:nvGrpSpPr>
-      <p:grpSpPr/>
+      <p:grpSpPr>
+        <a:xfrm>
+          <a:off x="0" y="0"/>
+          <a:ext cx="0" cy="0"/>
+          <a:chOff x="0" y="0"/>
+          <a:chExt cx="0" cy="0"/>
+        </a:xfrm>
+      </p:grpSpPr>
       <p:sp>
         <p:nvSpPr>
           <p:cNvPr id="2" name="TextBox 1"/>
@@ -3443,6 +3453,7 @@
           <a:lstStyle/>
           <a:p>
             <a:pPr algn="ctr"/>
+            <a:endParaRPr/>
           </a:p>
         </p:txBody>
       </p:sp>
@@ -3486,6 +3497,7 @@
           <a:lstStyle/>
           <a:p>
             <a:pPr algn="ctr"/>
+            <a:endParaRPr/>
           </a:p>
         </p:txBody>
       </p:sp>
@@ -3599,6 +3611,7 @@
           <a:lstStyle/>
           <a:p>
             <a:pPr algn="ctr"/>
+            <a:endParaRPr/>
           </a:p>
         </p:txBody>
       </p:sp>
@@ -3642,6 +3655,7 @@
           <a:lstStyle/>
           <a:p>
             <a:pPr algn="ctr"/>
+            <a:endParaRPr/>
           </a:p>
         </p:txBody>
       </p:sp>
@@ -3755,6 +3769,7 @@
           <a:lstStyle/>
           <a:p>
             <a:pPr algn="ctr"/>
+            <a:endParaRPr/>
           </a:p>
         </p:txBody>
       </p:sp>
@@ -3798,6 +3813,7 @@
           <a:lstStyle/>
           <a:p>
             <a:pPr algn="ctr"/>
+            <a:endParaRPr/>
           </a:p>
         </p:txBody>
       </p:sp>
@@ -3911,6 +3927,7 @@
           <a:lstStyle/>
           <a:p>
             <a:pPr algn="ctr"/>
+            <a:endParaRPr/>
           </a:p>
         </p:txBody>
       </p:sp>
@@ -3954,6 +3971,7 @@
           <a:lstStyle/>
           <a:p>
             <a:pPr algn="ctr"/>
+            <a:endParaRPr/>
           </a:p>
         </p:txBody>
       </p:sp>
@@ -4067,6 +4085,7 @@
           <a:lstStyle/>
           <a:p>
             <a:pPr algn="ctr"/>
+            <a:endParaRPr/>
           </a:p>
         </p:txBody>
       </p:sp>
@@ -4110,6 +4129,7 @@
           <a:lstStyle/>
           <a:p>
             <a:pPr algn="ctr"/>
+            <a:endParaRPr/>
           </a:p>
         </p:txBody>
       </p:sp>
@@ -4192,7 +4212,7 @@
 </file>
 
 <file path=ppt/slides/slide11.xml><?xml version="1.0" encoding="utf-8"?>
-<p:sld xmlns:a="http://schemas.openxmlformats.org/drawingml/2006/main" xmlns:p="http://schemas.openxmlformats.org/presentationml/2006/main" xmlns:r="http://schemas.openxmlformats.org/officeDocument/2006/relationships">
+<p:sld xmlns:a="http://schemas.openxmlformats.org/drawingml/2006/main" xmlns:r="http://schemas.openxmlformats.org/officeDocument/2006/relationships" xmlns:p="http://schemas.openxmlformats.org/presentationml/2006/main">
   <p:cSld>
     <p:bg>
       <p:bgPr>
@@ -4208,7 +4228,14 @@
         <p:cNvGrpSpPr/>
         <p:nvPr/>
       </p:nvGrpSpPr>
-      <p:grpSpPr/>
+      <p:grpSpPr>
+        <a:xfrm>
+          <a:off x="0" y="0"/>
+          <a:ext cx="0" cy="0"/>
+          <a:chOff x="0" y="0"/>
+          <a:chExt cx="0" cy="0"/>
+        </a:xfrm>
+      </p:grpSpPr>
       <p:sp>
         <p:nvSpPr>
           <p:cNvPr id="2" name="TextBox 1"/>
@@ -4284,6 +4311,7 @@
           <a:lstStyle/>
           <a:p>
             <a:pPr algn="ctr"/>
+            <a:endParaRPr/>
           </a:p>
         </p:txBody>
       </p:sp>
@@ -4468,7 +4496,7 @@
 </file>
 
 <file path=ppt/slides/slide12.xml><?xml version="1.0" encoding="utf-8"?>
-<p:sld xmlns:a="http://schemas.openxmlformats.org/drawingml/2006/main" xmlns:p="http://schemas.openxmlformats.org/presentationml/2006/main" xmlns:r="http://schemas.openxmlformats.org/officeDocument/2006/relationships">
+<p:sld xmlns:a="http://schemas.openxmlformats.org/drawingml/2006/main" xmlns:r="http://schemas.openxmlformats.org/officeDocument/2006/relationships" xmlns:p="http://schemas.openxmlformats.org/presentationml/2006/main">
   <p:cSld>
     <p:bg>
       <p:bgPr>
@@ -4484,7 +4512,14 @@
         <p:cNvGrpSpPr/>
         <p:nvPr/>
       </p:nvGrpSpPr>
-      <p:grpSpPr/>
+      <p:grpSpPr>
+        <a:xfrm>
+          <a:off x="0" y="0"/>
+          <a:ext cx="0" cy="0"/>
+          <a:chOff x="0" y="0"/>
+          <a:chExt cx="0" cy="0"/>
+        </a:xfrm>
+      </p:grpSpPr>
       <p:sp>
         <p:nvSpPr>
           <p:cNvPr id="2" name="TextBox 1"/>
@@ -4595,6 +4630,7 @@
           <a:lstStyle/>
           <a:p>
             <a:pPr algn="ctr"/>
+            <a:endParaRPr/>
           </a:p>
         </p:txBody>
       </p:sp>
@@ -4607,7 +4643,7 @@
 </file>
 
 <file path=ppt/slides/slide13.xml><?xml version="1.0" encoding="utf-8"?>
-<p:sld xmlns:a="http://schemas.openxmlformats.org/drawingml/2006/main" xmlns:p="http://schemas.openxmlformats.org/presentationml/2006/main" xmlns:r="http://schemas.openxmlformats.org/officeDocument/2006/relationships">
+<p:sld xmlns:a="http://schemas.openxmlformats.org/drawingml/2006/main" xmlns:r="http://schemas.openxmlformats.org/officeDocument/2006/relationships" xmlns:p="http://schemas.openxmlformats.org/presentationml/2006/main">
   <p:cSld>
     <p:bg>
       <p:bgPr>
@@ -4623,7 +4659,14 @@
         <p:cNvGrpSpPr/>
         <p:nvPr/>
       </p:nvGrpSpPr>
-      <p:grpSpPr/>
+      <p:grpSpPr>
+        <a:xfrm>
+          <a:off x="0" y="0"/>
+          <a:ext cx="0" cy="0"/>
+          <a:chOff x="0" y="0"/>
+          <a:chExt cx="0" cy="0"/>
+        </a:xfrm>
+      </p:grpSpPr>
       <p:sp>
         <p:nvSpPr>
           <p:cNvPr id="2" name="TextBox 1"/>
@@ -4699,6 +4742,7 @@
           <a:lstStyle/>
           <a:p>
             <a:pPr algn="ctr"/>
+            <a:endParaRPr/>
           </a:p>
         </p:txBody>
       </p:sp>
@@ -4777,6 +4821,7 @@
           <a:lstStyle/>
           <a:p>
             <a:pPr algn="ctr"/>
+            <a:endParaRPr/>
           </a:p>
         </p:txBody>
       </p:sp>
@@ -4890,6 +4935,7 @@
           <a:lstStyle/>
           <a:p>
             <a:pPr algn="ctr"/>
+            <a:endParaRPr/>
           </a:p>
         </p:txBody>
       </p:sp>
@@ -5003,6 +5049,7 @@
           <a:lstStyle/>
           <a:p>
             <a:pPr algn="ctr"/>
+            <a:endParaRPr/>
           </a:p>
         </p:txBody>
       </p:sp>
@@ -5116,6 +5163,7 @@
           <a:lstStyle/>
           <a:p>
             <a:pPr algn="ctr"/>
+            <a:endParaRPr/>
           </a:p>
         </p:txBody>
       </p:sp>
@@ -5229,6 +5277,7 @@
           <a:lstStyle/>
           <a:p>
             <a:pPr algn="ctr"/>
+            <a:endParaRPr/>
           </a:p>
         </p:txBody>
       </p:sp>
@@ -5311,7 +5360,7 @@
 </file>
 
 <file path=ppt/slides/slide14.xml><?xml version="1.0" encoding="utf-8"?>
-<p:sld xmlns:a="http://schemas.openxmlformats.org/drawingml/2006/main" xmlns:p="http://schemas.openxmlformats.org/presentationml/2006/main" xmlns:r="http://schemas.openxmlformats.org/officeDocument/2006/relationships">
+<p:sld xmlns:a="http://schemas.openxmlformats.org/drawingml/2006/main" xmlns:r="http://schemas.openxmlformats.org/officeDocument/2006/relationships" xmlns:p="http://schemas.openxmlformats.org/presentationml/2006/main">
   <p:cSld>
     <p:bg>
       <p:bgPr>
@@ -5327,7 +5376,14 @@
         <p:cNvGrpSpPr/>
         <p:nvPr/>
       </p:nvGrpSpPr>
-      <p:grpSpPr/>
+      <p:grpSpPr>
+        <a:xfrm>
+          <a:off x="0" y="0"/>
+          <a:ext cx="0" cy="0"/>
+          <a:chOff x="0" y="0"/>
+          <a:chExt cx="0" cy="0"/>
+        </a:xfrm>
+      </p:grpSpPr>
       <p:sp>
         <p:nvSpPr>
           <p:cNvPr id="2" name="TextBox 1"/>
@@ -5403,6 +5459,7 @@
           <a:lstStyle/>
           <a:p>
             <a:pPr algn="ctr"/>
+            <a:endParaRPr/>
           </a:p>
         </p:txBody>
       </p:sp>
@@ -5442,7 +5499,7 @@
           </a:fontRef>
         </p:style>
         <p:txBody>
-          <a:bodyPr rtlCol="0" anchor="ctr" wrap="square"/>
+          <a:bodyPr wrap="square" rtlCol="0" anchor="ctr"/>
           <a:lstStyle/>
           <a:p>
             <a:pPr algn="ctr">
@@ -5580,6 +5637,7 @@
           <a:lstStyle/>
           <a:p>
             <a:pPr algn="ctr"/>
+            <a:endParaRPr/>
           </a:p>
         </p:txBody>
       </p:sp>
@@ -5619,7 +5677,7 @@
           </a:fontRef>
         </p:style>
         <p:txBody>
-          <a:bodyPr rtlCol="0" anchor="ctr" wrap="square"/>
+          <a:bodyPr wrap="square" rtlCol="0" anchor="ctr"/>
           <a:lstStyle/>
           <a:p>
             <a:pPr algn="ctr">
@@ -5757,6 +5815,7 @@
           <a:lstStyle/>
           <a:p>
             <a:pPr algn="ctr"/>
+            <a:endParaRPr/>
           </a:p>
         </p:txBody>
       </p:sp>
@@ -5796,7 +5855,7 @@
           </a:fontRef>
         </p:style>
         <p:txBody>
-          <a:bodyPr rtlCol="0" anchor="ctr" wrap="square"/>
+          <a:bodyPr wrap="square" rtlCol="0" anchor="ctr"/>
           <a:lstStyle/>
           <a:p>
             <a:pPr algn="ctr">
@@ -5934,6 +5993,7 @@
           <a:lstStyle/>
           <a:p>
             <a:pPr algn="ctr"/>
+            <a:endParaRPr/>
           </a:p>
         </p:txBody>
       </p:sp>
@@ -5973,7 +6033,7 @@
           </a:fontRef>
         </p:style>
         <p:txBody>
-          <a:bodyPr rtlCol="0" anchor="ctr" wrap="square"/>
+          <a:bodyPr wrap="square" rtlCol="0" anchor="ctr"/>
           <a:lstStyle/>
           <a:p>
             <a:pPr algn="ctr">
@@ -6111,6 +6171,7 @@
           <a:lstStyle/>
           <a:p>
             <a:pPr algn="ctr"/>
+            <a:endParaRPr/>
           </a:p>
         </p:txBody>
       </p:sp>
@@ -6150,7 +6211,7 @@
           </a:fontRef>
         </p:style>
         <p:txBody>
-          <a:bodyPr rtlCol="0" anchor="ctr" wrap="square"/>
+          <a:bodyPr wrap="square" rtlCol="0" anchor="ctr"/>
           <a:lstStyle/>
           <a:p>
             <a:pPr algn="ctr">
@@ -6288,6 +6349,7 @@
           <a:lstStyle/>
           <a:p>
             <a:pPr algn="ctr"/>
+            <a:endParaRPr/>
           </a:p>
         </p:txBody>
       </p:sp>
@@ -6327,7 +6389,7 @@
           </a:fontRef>
         </p:style>
         <p:txBody>
-          <a:bodyPr rtlCol="0" anchor="ctr" wrap="square"/>
+          <a:bodyPr wrap="square" rtlCol="0" anchor="ctr"/>
           <a:lstStyle/>
           <a:p>
             <a:pPr algn="ctr">
@@ -6469,7 +6531,7 @@
 </file>
 
 <file path=ppt/slides/slide15.xml><?xml version="1.0" encoding="utf-8"?>
-<p:sld xmlns:a="http://schemas.openxmlformats.org/drawingml/2006/main" xmlns:p="http://schemas.openxmlformats.org/presentationml/2006/main" xmlns:r="http://schemas.openxmlformats.org/officeDocument/2006/relationships">
+<p:sld xmlns:a="http://schemas.openxmlformats.org/drawingml/2006/main" xmlns:r="http://schemas.openxmlformats.org/officeDocument/2006/relationships" xmlns:p="http://schemas.openxmlformats.org/presentationml/2006/main">
   <p:cSld>
     <p:bg>
       <p:bgPr>
@@ -6485,7 +6547,14 @@
         <p:cNvGrpSpPr/>
         <p:nvPr/>
       </p:nvGrpSpPr>
-      <p:grpSpPr/>
+      <p:grpSpPr>
+        <a:xfrm>
+          <a:off x="0" y="0"/>
+          <a:ext cx="0" cy="0"/>
+          <a:chOff x="0" y="0"/>
+          <a:chExt cx="0" cy="0"/>
+        </a:xfrm>
+      </p:grpSpPr>
       <p:sp>
         <p:nvSpPr>
           <p:cNvPr id="2" name="TextBox 1"/>
@@ -6596,6 +6665,7 @@
           <a:lstStyle/>
           <a:p>
             <a:pPr algn="ctr"/>
+            <a:endParaRPr/>
           </a:p>
         </p:txBody>
       </p:sp>
@@ -6608,7 +6678,7 @@
 </file>
 
 <file path=ppt/slides/slide16.xml><?xml version="1.0" encoding="utf-8"?>
-<p:sld xmlns:a="http://schemas.openxmlformats.org/drawingml/2006/main" xmlns:p="http://schemas.openxmlformats.org/presentationml/2006/main" xmlns:r="http://schemas.openxmlformats.org/officeDocument/2006/relationships">
+<p:sld xmlns:a="http://schemas.openxmlformats.org/drawingml/2006/main" xmlns:r="http://schemas.openxmlformats.org/officeDocument/2006/relationships" xmlns:p="http://schemas.openxmlformats.org/presentationml/2006/main">
   <p:cSld>
     <p:bg>
       <p:bgPr>
@@ -6624,7 +6694,14 @@
         <p:cNvGrpSpPr/>
         <p:nvPr/>
       </p:nvGrpSpPr>
-      <p:grpSpPr/>
+      <p:grpSpPr>
+        <a:xfrm>
+          <a:off x="0" y="0"/>
+          <a:ext cx="0" cy="0"/>
+          <a:chOff x="0" y="0"/>
+          <a:chExt cx="0" cy="0"/>
+        </a:xfrm>
+      </p:grpSpPr>
       <p:sp>
         <p:nvSpPr>
           <p:cNvPr id="2" name="TextBox 1"/>
@@ -6655,7 +6732,7 @@
               </a:defRPr>
             </a:pPr>
             <a:r>
-              <a:t>Selección dinámica de agentes</a:t>
+              <a:t>Los cinco agentes especializados</a:t>
             </a:r>
           </a:p>
         </p:txBody>
@@ -6668,8 +6745,8 @@
         </p:nvSpPr>
         <p:spPr>
           <a:xfrm>
-            <a:off x="731520" y="1554480"/>
-            <a:ext cx="10515600" cy="731520"/>
+            <a:off x="365760" y="1554480"/>
+            <a:ext cx="2103120" cy="4572000"/>
           </a:xfrm>
           <a:prstGeom prst="roundRect">
             <a:avLst/>
@@ -6700,6 +6777,7 @@
           <a:lstStyle/>
           <a:p>
             <a:pPr algn="ctr"/>
+            <a:endParaRPr/>
           </a:p>
         </p:txBody>
       </p:sp>
@@ -6711,8 +6789,8 @@
         </p:nvSpPr>
         <p:spPr>
           <a:xfrm>
-            <a:off x="731520" y="1554480"/>
-            <a:ext cx="137160" cy="50800"/>
+            <a:off x="365760" y="1554480"/>
+            <a:ext cx="2103120" cy="50800"/>
           </a:xfrm>
           <a:prstGeom prst="rect">
             <a:avLst/>
@@ -6743,6 +6821,7 @@
           <a:lstStyle/>
           <a:p>
             <a:pPr algn="ctr"/>
+            <a:endParaRPr/>
           </a:p>
         </p:txBody>
       </p:sp>
@@ -6754,8 +6833,8 @@
         </p:nvSpPr>
         <p:spPr>
           <a:xfrm>
-            <a:off x="1097280" y="1645920"/>
-            <a:ext cx="1828800" cy="320040"/>
+            <a:off x="475488" y="1828800"/>
+            <a:ext cx="1874519" cy="320040"/>
           </a:xfrm>
           <a:prstGeom prst="rect">
             <a:avLst/>
@@ -6769,14 +6848,14 @@
           <a:lstStyle/>
           <a:p>
             <a:pPr algn="l">
-              <a:defRPr sz="1600" b="1">
+              <a:defRPr sz="1400" b="1">
                 <a:solidFill>
                   <a:srgbClr val="60A5FA"/>
                 </a:solidFill>
               </a:defRPr>
             </a:pPr>
             <a:r>
-              <a:t>clarity</a:t>
+              <a:t>ClarityAgent</a:t>
             </a:r>
           </a:p>
         </p:txBody>
@@ -6789,8 +6868,8 @@
         </p:nvSpPr>
         <p:spPr>
           <a:xfrm>
-            <a:off x="3200400" y="1645920"/>
-            <a:ext cx="7772400" cy="502920"/>
+            <a:off x="475488" y="2194560"/>
+            <a:ext cx="1874519" cy="274320"/>
           </a:xfrm>
           <a:prstGeom prst="rect">
             <a:avLst/>
@@ -6804,28 +6883,76 @@
           <a:lstStyle/>
           <a:p>
             <a:pPr algn="l">
-              <a:defRPr sz="1300" b="0">
+              <a:defRPr sz="1200" b="1">
+                <a:solidFill>
+                  <a:srgbClr val="FFFFFF"/>
+                </a:solidFill>
+              </a:defRPr>
+            </a:pPr>
+            <a:r>
+              <a:t>Claridad funcional</a:t>
+            </a:r>
+          </a:p>
+        </p:txBody>
+      </p:sp>
+      <p:sp>
+        <p:nvSpPr>
+          <p:cNvPr id="7" name="TextBox 6"/>
+          <p:cNvSpPr txBox="1"/>
+          <p:nvPr/>
+        </p:nvSpPr>
+        <p:spPr>
+          <a:xfrm>
+            <a:off x="475488" y="2560320"/>
+            <a:ext cx="1874519" cy="3291840"/>
+          </a:xfrm>
+          <a:prstGeom prst="rect">
+            <a:avLst/>
+          </a:prstGeom>
+          <a:noFill/>
+        </p:spPr>
+        <p:txBody>
+          <a:bodyPr wrap="square">
+            <a:spAutoFit/>
+          </a:bodyPr>
+          <a:lstStyle/>
+          <a:p>
+            <a:pPr algn="l">
+              <a:defRPr sz="1100" b="0">
                 <a:solidFill>
                   <a:srgbClr val="94A3B8"/>
                 </a:solidFill>
               </a:defRPr>
             </a:pPr>
             <a:r>
-              <a:t>Siempre</a:t>
-            </a:r>
-          </a:p>
-        </p:txBody>
-      </p:sp>
-      <p:sp>
-        <p:nvSpPr>
-          <p:cNvPr id="7" name="Rounded Rectangle 6"/>
+              <a:t>Ambigüedades · reglas implícitas ·</a:t>
+            </a:r>
+            <a:br/>
+            <a:r>
+              <a:t>comportamientos no definidos</a:t>
+            </a:r>
+            <a:br/>
+            <a:br/>
+            <a:r>
+              <a:t>"No se define qué pasa si</a:t>
+            </a:r>
+            <a:br/>
+            <a:r>
+              <a:t>el email no existe"</a:t>
+            </a:r>
+          </a:p>
+        </p:txBody>
+      </p:sp>
+      <p:sp>
+        <p:nvSpPr>
+          <p:cNvPr id="8" name="Rounded Rectangle 7"/>
           <p:cNvSpPr/>
           <p:nvPr/>
         </p:nvSpPr>
         <p:spPr>
           <a:xfrm>
-            <a:off x="731520" y="2423160"/>
-            <a:ext cx="10515600" cy="731520"/>
+            <a:off x="2697479" y="1554480"/>
+            <a:ext cx="2103120" cy="4572000"/>
           </a:xfrm>
           <a:prstGeom prst="roundRect">
             <a:avLst/>
@@ -6856,19 +6983,20 @@
           <a:lstStyle/>
           <a:p>
             <a:pPr algn="ctr"/>
-          </a:p>
-        </p:txBody>
-      </p:sp>
-      <p:sp>
-        <p:nvSpPr>
-          <p:cNvPr id="8" name="Rectangle 7"/>
+            <a:endParaRPr/>
+          </a:p>
+        </p:txBody>
+      </p:sp>
+      <p:sp>
+        <p:nvSpPr>
+          <p:cNvPr id="9" name="Rectangle 8"/>
           <p:cNvSpPr/>
           <p:nvPr/>
         </p:nvSpPr>
         <p:spPr>
           <a:xfrm>
-            <a:off x="731520" y="2423160"/>
-            <a:ext cx="137160" cy="50800"/>
+            <a:off x="2697479" y="1554480"/>
+            <a:ext cx="2103120" cy="50800"/>
           </a:xfrm>
           <a:prstGeom prst="rect">
             <a:avLst/>
@@ -6899,19 +7027,20 @@
           <a:lstStyle/>
           <a:p>
             <a:pPr algn="ctr"/>
-          </a:p>
-        </p:txBody>
-      </p:sp>
-      <p:sp>
-        <p:nvSpPr>
-          <p:cNvPr id="9" name="TextBox 8"/>
-          <p:cNvSpPr txBox="1"/>
-          <p:nvPr/>
-        </p:nvSpPr>
-        <p:spPr>
-          <a:xfrm>
-            <a:off x="1097280" y="2514600"/>
-            <a:ext cx="1828800" cy="320040"/>
+            <a:endParaRPr/>
+          </a:p>
+        </p:txBody>
+      </p:sp>
+      <p:sp>
+        <p:nvSpPr>
+          <p:cNvPr id="10" name="TextBox 9"/>
+          <p:cNvSpPr txBox="1"/>
+          <p:nvPr/>
+        </p:nvSpPr>
+        <p:spPr>
+          <a:xfrm>
+            <a:off x="2807207" y="1828800"/>
+            <a:ext cx="1874519" cy="320040"/>
           </a:xfrm>
           <a:prstGeom prst="rect">
             <a:avLst/>
@@ -6925,28 +7054,28 @@
           <a:lstStyle/>
           <a:p>
             <a:pPr algn="l">
-              <a:defRPr sz="1600" b="1">
+              <a:defRPr sz="1400" b="1">
                 <a:solidFill>
                   <a:srgbClr val="34D399"/>
                 </a:solidFill>
               </a:defRPr>
             </a:pPr>
             <a:r>
-              <a:t>qa</a:t>
-            </a:r>
-          </a:p>
-        </p:txBody>
-      </p:sp>
-      <p:sp>
-        <p:nvSpPr>
-          <p:cNvPr id="10" name="TextBox 9"/>
-          <p:cNvSpPr txBox="1"/>
-          <p:nvPr/>
-        </p:nvSpPr>
-        <p:spPr>
-          <a:xfrm>
-            <a:off x="3200400" y="2514600"/>
-            <a:ext cx="7772400" cy="502920"/>
+              <a:t>QaAgent</a:t>
+            </a:r>
+          </a:p>
+        </p:txBody>
+      </p:sp>
+      <p:sp>
+        <p:nvSpPr>
+          <p:cNvPr id="11" name="TextBox 10"/>
+          <p:cNvSpPr txBox="1"/>
+          <p:nvPr/>
+        </p:nvSpPr>
+        <p:spPr>
+          <a:xfrm>
+            <a:off x="2807207" y="2194560"/>
+            <a:ext cx="1874519" cy="274320"/>
           </a:xfrm>
           <a:prstGeom prst="rect">
             <a:avLst/>
@@ -6960,28 +7089,76 @@
           <a:lstStyle/>
           <a:p>
             <a:pPr algn="l">
-              <a:defRPr sz="1300" b="0">
+              <a:defRPr sz="1200" b="1">
+                <a:solidFill>
+                  <a:srgbClr val="FFFFFF"/>
+                </a:solidFill>
+              </a:defRPr>
+            </a:pPr>
+            <a:r>
+              <a:t>Testabilidad</a:t>
+            </a:r>
+          </a:p>
+        </p:txBody>
+      </p:sp>
+      <p:sp>
+        <p:nvSpPr>
+          <p:cNvPr id="12" name="TextBox 11"/>
+          <p:cNvSpPr txBox="1"/>
+          <p:nvPr/>
+        </p:nvSpPr>
+        <p:spPr>
+          <a:xfrm>
+            <a:off x="2807207" y="2560320"/>
+            <a:ext cx="1874519" cy="3291840"/>
+          </a:xfrm>
+          <a:prstGeom prst="rect">
+            <a:avLst/>
+          </a:prstGeom>
+          <a:noFill/>
+        </p:spPr>
+        <p:txBody>
+          <a:bodyPr wrap="square">
+            <a:spAutoFit/>
+          </a:bodyPr>
+          <a:lstStyle/>
+          <a:p>
+            <a:pPr algn="l">
+              <a:defRPr sz="1100" b="0">
                 <a:solidFill>
                   <a:srgbClr val="94A3B8"/>
                 </a:solidFill>
               </a:defRPr>
             </a:pPr>
             <a:r>
-              <a:t>validation · error · state · criteria · failure · expiration…</a:t>
-            </a:r>
-          </a:p>
-        </p:txBody>
-      </p:sp>
-      <p:sp>
-        <p:nvSpPr>
-          <p:cNvPr id="11" name="Rounded Rectangle 10"/>
+              <a:t>Criterios de aceptación faltantes ·</a:t>
+            </a:r>
+            <a:br/>
+            <a:r>
+              <a:t>flujos de error no definidos</a:t>
+            </a:r>
+            <a:br/>
+            <a:br/>
+            <a:r>
+              <a:t>"Faltan escenarios para</a:t>
+            </a:r>
+            <a:br/>
+            <a:r>
+              <a:t>intentos inválidos"</a:t>
+            </a:r>
+          </a:p>
+        </p:txBody>
+      </p:sp>
+      <p:sp>
+        <p:nvSpPr>
+          <p:cNvPr id="13" name="Rounded Rectangle 12"/>
           <p:cNvSpPr/>
           <p:nvPr/>
         </p:nvSpPr>
         <p:spPr>
           <a:xfrm>
-            <a:off x="731520" y="3291839"/>
-            <a:ext cx="10515600" cy="731520"/>
+            <a:off x="5029200" y="1554480"/>
+            <a:ext cx="2103120" cy="4572000"/>
           </a:xfrm>
           <a:prstGeom prst="roundRect">
             <a:avLst/>
@@ -7012,19 +7189,20 @@
           <a:lstStyle/>
           <a:p>
             <a:pPr algn="ctr"/>
-          </a:p>
-        </p:txBody>
-      </p:sp>
-      <p:sp>
-        <p:nvSpPr>
-          <p:cNvPr id="12" name="Rectangle 11"/>
+            <a:endParaRPr/>
+          </a:p>
+        </p:txBody>
+      </p:sp>
+      <p:sp>
+        <p:nvSpPr>
+          <p:cNvPr id="14" name="Rectangle 13"/>
           <p:cNvSpPr/>
           <p:nvPr/>
         </p:nvSpPr>
         <p:spPr>
           <a:xfrm>
-            <a:off x="731520" y="3291839"/>
-            <a:ext cx="137160" cy="50800"/>
+            <a:off x="5029200" y="1554480"/>
+            <a:ext cx="2103120" cy="50800"/>
           </a:xfrm>
           <a:prstGeom prst="rect">
             <a:avLst/>
@@ -7055,19 +7233,20 @@
           <a:lstStyle/>
           <a:p>
             <a:pPr algn="ctr"/>
-          </a:p>
-        </p:txBody>
-      </p:sp>
-      <p:sp>
-        <p:nvSpPr>
-          <p:cNvPr id="13" name="TextBox 12"/>
-          <p:cNvSpPr txBox="1"/>
-          <p:nvPr/>
-        </p:nvSpPr>
-        <p:spPr>
-          <a:xfrm>
-            <a:off x="1097280" y="3383279"/>
-            <a:ext cx="1828800" cy="320040"/>
+            <a:endParaRPr/>
+          </a:p>
+        </p:txBody>
+      </p:sp>
+      <p:sp>
+        <p:nvSpPr>
+          <p:cNvPr id="15" name="TextBox 14"/>
+          <p:cNvSpPr txBox="1"/>
+          <p:nvPr/>
+        </p:nvSpPr>
+        <p:spPr>
+          <a:xfrm>
+            <a:off x="5138928" y="1828800"/>
+            <a:ext cx="1874519" cy="320040"/>
           </a:xfrm>
           <a:prstGeom prst="rect">
             <a:avLst/>
@@ -7081,28 +7260,28 @@
           <a:lstStyle/>
           <a:p>
             <a:pPr algn="l">
-              <a:defRPr sz="1600" b="1">
+              <a:defRPr sz="1400" b="1">
                 <a:solidFill>
                   <a:srgbClr val="FBBF24"/>
                 </a:solidFill>
               </a:defRPr>
             </a:pPr>
             <a:r>
-              <a:t>technical</a:t>
-            </a:r>
-          </a:p>
-        </p:txBody>
-      </p:sp>
-      <p:sp>
-        <p:nvSpPr>
-          <p:cNvPr id="14" name="TextBox 13"/>
-          <p:cNvSpPr txBox="1"/>
-          <p:nvPr/>
-        </p:nvSpPr>
-        <p:spPr>
-          <a:xfrm>
-            <a:off x="3200400" y="3383279"/>
-            <a:ext cx="7772400" cy="502920"/>
+              <a:t>TechnicalAgent</a:t>
+            </a:r>
+          </a:p>
+        </p:txBody>
+      </p:sp>
+      <p:sp>
+        <p:nvSpPr>
+          <p:cNvPr id="16" name="TextBox 15"/>
+          <p:cNvSpPr txBox="1"/>
+          <p:nvPr/>
+        </p:nvSpPr>
+        <p:spPr>
+          <a:xfrm>
+            <a:off x="5138928" y="2194560"/>
+            <a:ext cx="1874519" cy="274320"/>
           </a:xfrm>
           <a:prstGeom prst="rect">
             <a:avLst/>
@@ -7116,28 +7295,76 @@
           <a:lstStyle/>
           <a:p>
             <a:pPr algn="l">
-              <a:defRPr sz="1300" b="0">
+              <a:defRPr sz="1200" b="1">
+                <a:solidFill>
+                  <a:srgbClr val="FFFFFF"/>
+                </a:solidFill>
+              </a:defRPr>
+            </a:pPr>
+            <a:r>
+              <a:t>Impacto técnico</a:t>
+            </a:r>
+          </a:p>
+        </p:txBody>
+      </p:sp>
+      <p:sp>
+        <p:nvSpPr>
+          <p:cNvPr id="17" name="TextBox 16"/>
+          <p:cNvSpPr txBox="1"/>
+          <p:nvPr/>
+        </p:nvSpPr>
+        <p:spPr>
+          <a:xfrm>
+            <a:off x="5138928" y="2560320"/>
+            <a:ext cx="1874519" cy="3291840"/>
+          </a:xfrm>
+          <a:prstGeom prst="rect">
+            <a:avLst/>
+          </a:prstGeom>
+          <a:noFill/>
+        </p:spPr>
+        <p:txBody>
+          <a:bodyPr wrap="square">
+            <a:spAutoFit/>
+          </a:bodyPr>
+          <a:lstStyle/>
+          <a:p>
+            <a:pPr algn="l">
+              <a:defRPr sz="1100" b="0">
                 <a:solidFill>
                   <a:srgbClr val="94A3B8"/>
                 </a:solidFill>
               </a:defRPr>
             </a:pPr>
             <a:r>
-              <a:t>retry · queue · integration · async · database · webhook…</a:t>
-            </a:r>
-          </a:p>
-        </p:txBody>
-      </p:sp>
-      <p:sp>
-        <p:nvSpPr>
-          <p:cNvPr id="15" name="Rounded Rectangle 14"/>
+              <a:t>Riesgos de arquitectura ·</a:t>
+            </a:r>
+            <a:br/>
+            <a:r>
+              <a:t>idempotencia · observabilidad</a:t>
+            </a:r>
+            <a:br/>
+            <a:br/>
+            <a:r>
+              <a:t>"Se recomienda una cola para</a:t>
+            </a:r>
+            <a:br/>
+            <a:r>
+              <a:t>garantizar entrega única"</a:t>
+            </a:r>
+          </a:p>
+        </p:txBody>
+      </p:sp>
+      <p:sp>
+        <p:nvSpPr>
+          <p:cNvPr id="18" name="Rounded Rectangle 17"/>
           <p:cNvSpPr/>
           <p:nvPr/>
         </p:nvSpPr>
         <p:spPr>
           <a:xfrm>
-            <a:off x="731520" y="4160520"/>
-            <a:ext cx="10515600" cy="731520"/>
+            <a:off x="7360919" y="1554480"/>
+            <a:ext cx="2103120" cy="4572000"/>
           </a:xfrm>
           <a:prstGeom prst="roundRect">
             <a:avLst/>
@@ -7168,19 +7395,20 @@
           <a:lstStyle/>
           <a:p>
             <a:pPr algn="ctr"/>
-          </a:p>
-        </p:txBody>
-      </p:sp>
-      <p:sp>
-        <p:nvSpPr>
-          <p:cNvPr id="16" name="Rectangle 15"/>
+            <a:endParaRPr/>
+          </a:p>
+        </p:txBody>
+      </p:sp>
+      <p:sp>
+        <p:nvSpPr>
+          <p:cNvPr id="19" name="Rectangle 18"/>
           <p:cNvSpPr/>
           <p:nvPr/>
         </p:nvSpPr>
         <p:spPr>
           <a:xfrm>
-            <a:off x="731520" y="4160520"/>
-            <a:ext cx="137160" cy="50800"/>
+            <a:off x="7360919" y="1554480"/>
+            <a:ext cx="2103120" cy="50800"/>
           </a:xfrm>
           <a:prstGeom prst="rect">
             <a:avLst/>
@@ -7211,19 +7439,20 @@
           <a:lstStyle/>
           <a:p>
             <a:pPr algn="ctr"/>
-          </a:p>
-        </p:txBody>
-      </p:sp>
-      <p:sp>
-        <p:nvSpPr>
-          <p:cNvPr id="17" name="TextBox 16"/>
-          <p:cNvSpPr txBox="1"/>
-          <p:nvPr/>
-        </p:nvSpPr>
-        <p:spPr>
-          <a:xfrm>
-            <a:off x="1097280" y="4251960"/>
-            <a:ext cx="1828800" cy="320040"/>
+            <a:endParaRPr/>
+          </a:p>
+        </p:txBody>
+      </p:sp>
+      <p:sp>
+        <p:nvSpPr>
+          <p:cNvPr id="20" name="TextBox 19"/>
+          <p:cNvSpPr txBox="1"/>
+          <p:nvPr/>
+        </p:nvSpPr>
+        <p:spPr>
+          <a:xfrm>
+            <a:off x="7470647" y="1828800"/>
+            <a:ext cx="1874519" cy="320040"/>
           </a:xfrm>
           <a:prstGeom prst="rect">
             <a:avLst/>
@@ -7237,28 +7466,28 @@
           <a:lstStyle/>
           <a:p>
             <a:pPr algn="l">
-              <a:defRPr sz="1600" b="1">
+              <a:defRPr sz="1400" b="1">
                 <a:solidFill>
                   <a:srgbClr val="A78BFA"/>
                 </a:solidFill>
               </a:defRPr>
             </a:pPr>
             <a:r>
-              <a:t>ux</a:t>
-            </a:r>
-          </a:p>
-        </p:txBody>
-      </p:sp>
-      <p:sp>
-        <p:nvSpPr>
-          <p:cNvPr id="18" name="TextBox 17"/>
-          <p:cNvSpPr txBox="1"/>
-          <p:nvPr/>
-        </p:nvSpPr>
-        <p:spPr>
-          <a:xfrm>
-            <a:off x="3200400" y="4251960"/>
-            <a:ext cx="7772400" cy="502920"/>
+              <a:t>UxAgent</a:t>
+            </a:r>
+          </a:p>
+        </p:txBody>
+      </p:sp>
+      <p:sp>
+        <p:nvSpPr>
+          <p:cNvPr id="21" name="TextBox 20"/>
+          <p:cNvSpPr txBox="1"/>
+          <p:nvPr/>
+        </p:nvSpPr>
+        <p:spPr>
+          <a:xfrm>
+            <a:off x="7470647" y="2194560"/>
+            <a:ext cx="1874519" cy="274320"/>
           </a:xfrm>
           <a:prstGeom prst="rect">
             <a:avLst/>
@@ -7272,28 +7501,76 @@
           <a:lstStyle/>
           <a:p>
             <a:pPr algn="l">
-              <a:defRPr sz="1300" b="0">
+              <a:defRPr sz="1200" b="1">
+                <a:solidFill>
+                  <a:srgbClr val="FFFFFF"/>
+                </a:solidFill>
+              </a:defRPr>
+            </a:pPr>
+            <a:r>
+              <a:t>Experiencia de usuario</a:t>
+            </a:r>
+          </a:p>
+        </p:txBody>
+      </p:sp>
+      <p:sp>
+        <p:nvSpPr>
+          <p:cNvPr id="22" name="TextBox 21"/>
+          <p:cNvSpPr txBox="1"/>
+          <p:nvPr/>
+        </p:nvSpPr>
+        <p:spPr>
+          <a:xfrm>
+            <a:off x="7470647" y="2560320"/>
+            <a:ext cx="1874519" cy="3291840"/>
+          </a:xfrm>
+          <a:prstGeom prst="rect">
+            <a:avLst/>
+          </a:prstGeom>
+          <a:noFill/>
+        </p:spPr>
+        <p:txBody>
+          <a:bodyPr wrap="square">
+            <a:spAutoFit/>
+          </a:bodyPr>
+          <a:lstStyle/>
+          <a:p>
+            <a:pPr algn="l">
+              <a:defRPr sz="1100" b="0">
                 <a:solidFill>
                   <a:srgbClr val="94A3B8"/>
                 </a:solidFill>
               </a:defRPr>
             </a:pPr>
             <a:r>
-              <a:t>screen · button · form · login · label · feedback…</a:t>
-            </a:r>
-          </a:p>
-        </p:txBody>
-      </p:sp>
-      <p:sp>
-        <p:nvSpPr>
-          <p:cNvPr id="19" name="Rounded Rectangle 18"/>
+              <a:t>Fricción · mensajes confusos ·</a:t>
+            </a:r>
+            <a:br/>
+            <a:r>
+              <a:t>feedback visual ausente</a:t>
+            </a:r>
+            <a:br/>
+            <a:br/>
+            <a:r>
+              <a:t>"El mensaje no debería revelar</a:t>
+            </a:r>
+            <a:br/>
+            <a:r>
+              <a:t>si el email existe"</a:t>
+            </a:r>
+          </a:p>
+        </p:txBody>
+      </p:sp>
+      <p:sp>
+        <p:nvSpPr>
+          <p:cNvPr id="23" name="Rounded Rectangle 22"/>
           <p:cNvSpPr/>
           <p:nvPr/>
         </p:nvSpPr>
         <p:spPr>
           <a:xfrm>
-            <a:off x="731520" y="5029200"/>
-            <a:ext cx="10515600" cy="731520"/>
+            <a:off x="9692640" y="1554480"/>
+            <a:ext cx="2103120" cy="4572000"/>
           </a:xfrm>
           <a:prstGeom prst="roundRect">
             <a:avLst/>
@@ -7324,19 +7601,20 @@
           <a:lstStyle/>
           <a:p>
             <a:pPr algn="ctr"/>
-          </a:p>
-        </p:txBody>
-      </p:sp>
-      <p:sp>
-        <p:nvSpPr>
-          <p:cNvPr id="20" name="Rectangle 19"/>
+            <a:endParaRPr/>
+          </a:p>
+        </p:txBody>
+      </p:sp>
+      <p:sp>
+        <p:nvSpPr>
+          <p:cNvPr id="24" name="Rectangle 23"/>
           <p:cNvSpPr/>
           <p:nvPr/>
         </p:nvSpPr>
         <p:spPr>
           <a:xfrm>
-            <a:off x="731520" y="5029200"/>
-            <a:ext cx="137160" cy="50800"/>
+            <a:off x="9692640" y="1554480"/>
+            <a:ext cx="2103120" cy="50800"/>
           </a:xfrm>
           <a:prstGeom prst="rect">
             <a:avLst/>
@@ -7367,89 +7645,20 @@
           <a:lstStyle/>
           <a:p>
             <a:pPr algn="ctr"/>
-          </a:p>
-        </p:txBody>
-      </p:sp>
-      <p:sp>
-        <p:nvSpPr>
-          <p:cNvPr id="21" name="TextBox 20"/>
-          <p:cNvSpPr txBox="1"/>
-          <p:nvPr/>
-        </p:nvSpPr>
-        <p:spPr>
-          <a:xfrm>
-            <a:off x="1097280" y="5120640"/>
-            <a:ext cx="1828800" cy="320040"/>
-          </a:xfrm>
-          <a:prstGeom prst="rect">
-            <a:avLst/>
-          </a:prstGeom>
-          <a:noFill/>
-        </p:spPr>
-        <p:txBody>
-          <a:bodyPr wrap="square">
-            <a:spAutoFit/>
-          </a:bodyPr>
-          <a:lstStyle/>
-          <a:p>
-            <a:pPr algn="l">
-              <a:defRPr sz="1600" b="1">
-                <a:solidFill>
-                  <a:srgbClr val="F472B6"/>
-                </a:solidFill>
-              </a:defRPr>
-            </a:pPr>
-            <a:r>
-              <a:t>compliance</a:t>
-            </a:r>
-          </a:p>
-        </p:txBody>
-      </p:sp>
-      <p:sp>
-        <p:nvSpPr>
-          <p:cNvPr id="22" name="TextBox 21"/>
-          <p:cNvSpPr txBox="1"/>
-          <p:nvPr/>
-        </p:nvSpPr>
-        <p:spPr>
-          <a:xfrm>
-            <a:off x="3200400" y="5120640"/>
-            <a:ext cx="7772400" cy="502920"/>
-          </a:xfrm>
-          <a:prstGeom prst="rect">
-            <a:avLst/>
-          </a:prstGeom>
-          <a:noFill/>
-        </p:spPr>
-        <p:txBody>
-          <a:bodyPr wrap="square">
-            <a:spAutoFit/>
-          </a:bodyPr>
-          <a:lstStyle/>
-          <a:p>
-            <a:pPr algn="l">
-              <a:defRPr sz="1300" b="0">
-                <a:solidFill>
-                  <a:srgbClr val="94A3B8"/>
-                </a:solidFill>
-              </a:defRPr>
-            </a:pPr>
-            <a:r>
-              <a:t>personal data · audit · download · gdpr · encryption…</a:t>
-            </a:r>
-          </a:p>
-        </p:txBody>
-      </p:sp>
-      <p:sp>
-        <p:nvSpPr>
-          <p:cNvPr id="23" name="TextBox 22"/>
-          <p:cNvSpPr txBox="1"/>
-          <p:nvPr/>
-        </p:nvSpPr>
-        <p:spPr>
-          <a:xfrm>
-            <a:off x="731520" y="6035040"/>
-            <a:ext cx="10515600" cy="457200"/>
+            <a:endParaRPr/>
+          </a:p>
+        </p:txBody>
+      </p:sp>
+      <p:sp>
+        <p:nvSpPr>
+          <p:cNvPr id="25" name="TextBox 24"/>
+          <p:cNvSpPr txBox="1"/>
+          <p:nvPr/>
+        </p:nvSpPr>
+        <p:spPr>
+          <a:xfrm>
+            <a:off x="9802368" y="1828800"/>
+            <a:ext cx="1874519" cy="320040"/>
           </a:xfrm>
           <a:prstGeom prst="rect">
             <a:avLst/>
@@ -7465,12 +7674,95 @@
             <a:pPr algn="l">
               <a:defRPr sz="1400" b="1">
                 <a:solidFill>
-                  <a:srgbClr val="FBBF24"/>
-                </a:solidFill>
-              </a:defRPr>
-            </a:pPr>
-            <a:r>
-              <a:t>Sin llamada al LLM para la selección — determinístico, costo cero, predecible en demo</a:t>
+                  <a:srgbClr val="F472B6"/>
+                </a:solidFill>
+              </a:defRPr>
+            </a:pPr>
+            <a:r>
+              <a:t>ComplianceAgent</a:t>
+            </a:r>
+          </a:p>
+        </p:txBody>
+      </p:sp>
+      <p:sp>
+        <p:nvSpPr>
+          <p:cNvPr id="26" name="TextBox 25"/>
+          <p:cNvSpPr txBox="1"/>
+          <p:nvPr/>
+        </p:nvSpPr>
+        <p:spPr>
+          <a:xfrm>
+            <a:off x="9802368" y="2194560"/>
+            <a:ext cx="1874519" cy="274320"/>
+          </a:xfrm>
+          <a:prstGeom prst="rect">
+            <a:avLst/>
+          </a:prstGeom>
+          <a:noFill/>
+        </p:spPr>
+        <p:txBody>
+          <a:bodyPr wrap="square">
+            <a:spAutoFit/>
+          </a:bodyPr>
+          <a:lstStyle/>
+          <a:p>
+            <a:pPr algn="l">
+              <a:defRPr sz="1200" b="1">
+                <a:solidFill>
+                  <a:srgbClr val="FFFFFF"/>
+                </a:solidFill>
+              </a:defRPr>
+            </a:pPr>
+            <a:r>
+              <a:t>Seguridad y privacidad</a:t>
+            </a:r>
+          </a:p>
+        </p:txBody>
+      </p:sp>
+      <p:sp>
+        <p:nvSpPr>
+          <p:cNvPr id="27" name="TextBox 26"/>
+          <p:cNvSpPr txBox="1"/>
+          <p:nvPr/>
+        </p:nvSpPr>
+        <p:spPr>
+          <a:xfrm>
+            <a:off x="9802368" y="2560320"/>
+            <a:ext cx="1874519" cy="3291840"/>
+          </a:xfrm>
+          <a:prstGeom prst="rect">
+            <a:avLst/>
+          </a:prstGeom>
+          <a:noFill/>
+        </p:spPr>
+        <p:txBody>
+          <a:bodyPr wrap="square">
+            <a:spAutoFit/>
+          </a:bodyPr>
+          <a:lstStyle/>
+          <a:p>
+            <a:pPr algn="l">
+              <a:defRPr sz="1100" b="0">
+                <a:solidFill>
+                  <a:srgbClr val="94A3B8"/>
+                </a:solidFill>
+              </a:defRPr>
+            </a:pPr>
+            <a:r>
+              <a:t>Exposición de PII · autorización</a:t>
+            </a:r>
+            <a:br/>
+            <a:r>
+              <a:t>insuficiente · auditoría</a:t>
+            </a:r>
+            <a:br/>
+            <a:br/>
+            <a:r>
+              <a:t>"La descarga requiere</a:t>
+            </a:r>
+            <a:br/>
+            <a:r>
+              <a:t>verificación de identidad"</a:t>
             </a:r>
           </a:p>
         </p:txBody>
@@ -7484,7 +7776,7 @@
 </file>
 
 <file path=ppt/slides/slide17.xml><?xml version="1.0" encoding="utf-8"?>
-<p:sld xmlns:a="http://schemas.openxmlformats.org/drawingml/2006/main" xmlns:p="http://schemas.openxmlformats.org/presentationml/2006/main" xmlns:r="http://schemas.openxmlformats.org/officeDocument/2006/relationships">
+<p:sld xmlns:a="http://schemas.openxmlformats.org/drawingml/2006/main" xmlns:r="http://schemas.openxmlformats.org/officeDocument/2006/relationships" xmlns:p="http://schemas.openxmlformats.org/presentationml/2006/main">
   <p:cSld>
     <p:bg>
       <p:bgPr>
@@ -7500,7 +7792,14 @@
         <p:cNvGrpSpPr/>
         <p:nvPr/>
       </p:nvGrpSpPr>
-      <p:grpSpPr/>
+      <p:grpSpPr>
+        <a:xfrm>
+          <a:off x="0" y="0"/>
+          <a:ext cx="0" cy="0"/>
+          <a:chOff x="0" y="0"/>
+          <a:chExt cx="0" cy="0"/>
+        </a:xfrm>
+      </p:grpSpPr>
       <p:sp>
         <p:nvSpPr>
           <p:cNvPr id="2" name="TextBox 1"/>
@@ -7531,7 +7830,7 @@
               </a:defRPr>
             </a:pPr>
             <a:r>
-              <a:t>Los cinco agentes especializados</a:t>
+              <a:t>Selección dinámica de agentes</a:t>
             </a:r>
           </a:p>
         </p:txBody>
@@ -7544,8 +7843,8 @@
         </p:nvSpPr>
         <p:spPr>
           <a:xfrm>
-            <a:off x="365760" y="1554480"/>
-            <a:ext cx="2103120" cy="4572000"/>
+            <a:off x="731520" y="1554480"/>
+            <a:ext cx="10515600" cy="731520"/>
           </a:xfrm>
           <a:prstGeom prst="roundRect">
             <a:avLst/>
@@ -7576,6 +7875,7 @@
           <a:lstStyle/>
           <a:p>
             <a:pPr algn="ctr"/>
+            <a:endParaRPr/>
           </a:p>
         </p:txBody>
       </p:sp>
@@ -7587,8 +7887,8 @@
         </p:nvSpPr>
         <p:spPr>
           <a:xfrm>
-            <a:off x="365760" y="1554480"/>
-            <a:ext cx="2103120" cy="50800"/>
+            <a:off x="731520" y="1554480"/>
+            <a:ext cx="137160" cy="50800"/>
           </a:xfrm>
           <a:prstGeom prst="rect">
             <a:avLst/>
@@ -7619,6 +7919,7 @@
           <a:lstStyle/>
           <a:p>
             <a:pPr algn="ctr"/>
+            <a:endParaRPr/>
           </a:p>
         </p:txBody>
       </p:sp>
@@ -7630,8 +7931,8 @@
         </p:nvSpPr>
         <p:spPr>
           <a:xfrm>
-            <a:off x="475488" y="1828800"/>
-            <a:ext cx="1874519" cy="320040"/>
+            <a:off x="1097280" y="1645920"/>
+            <a:ext cx="1828800" cy="320040"/>
           </a:xfrm>
           <a:prstGeom prst="rect">
             <a:avLst/>
@@ -7645,14 +7946,14 @@
           <a:lstStyle/>
           <a:p>
             <a:pPr algn="l">
-              <a:defRPr sz="1400" b="1">
+              <a:defRPr sz="1600" b="1">
                 <a:solidFill>
                   <a:srgbClr val="60A5FA"/>
                 </a:solidFill>
               </a:defRPr>
             </a:pPr>
             <a:r>
-              <a:t>ClarityAgent</a:t>
+              <a:t>clarity</a:t>
             </a:r>
           </a:p>
         </p:txBody>
@@ -7665,8 +7966,8 @@
         </p:nvSpPr>
         <p:spPr>
           <a:xfrm>
-            <a:off x="475488" y="2194560"/>
-            <a:ext cx="1874519" cy="274320"/>
+            <a:off x="3200400" y="1645920"/>
+            <a:ext cx="7772400" cy="502920"/>
           </a:xfrm>
           <a:prstGeom prst="rect">
             <a:avLst/>
@@ -7680,76 +7981,28 @@
           <a:lstStyle/>
           <a:p>
             <a:pPr algn="l">
-              <a:defRPr sz="1200" b="1">
-                <a:solidFill>
-                  <a:srgbClr val="FFFFFF"/>
-                </a:solidFill>
-              </a:defRPr>
-            </a:pPr>
-            <a:r>
-              <a:t>Claridad funcional</a:t>
-            </a:r>
-          </a:p>
-        </p:txBody>
-      </p:sp>
-      <p:sp>
-        <p:nvSpPr>
-          <p:cNvPr id="7" name="TextBox 6"/>
-          <p:cNvSpPr txBox="1"/>
-          <p:nvPr/>
-        </p:nvSpPr>
-        <p:spPr>
-          <a:xfrm>
-            <a:off x="475488" y="2560320"/>
-            <a:ext cx="1874519" cy="3291840"/>
-          </a:xfrm>
-          <a:prstGeom prst="rect">
-            <a:avLst/>
-          </a:prstGeom>
-          <a:noFill/>
-        </p:spPr>
-        <p:txBody>
-          <a:bodyPr wrap="square">
-            <a:spAutoFit/>
-          </a:bodyPr>
-          <a:lstStyle/>
-          <a:p>
-            <a:pPr algn="l">
-              <a:defRPr sz="1100" b="0">
+              <a:defRPr sz="1300" b="0">
                 <a:solidFill>
                   <a:srgbClr val="94A3B8"/>
                 </a:solidFill>
               </a:defRPr>
             </a:pPr>
             <a:r>
-              <a:t>Ambigüedades · reglas implícitas ·</a:t>
-            </a:r>
-            <a:br/>
-            <a:r>
-              <a:t>comportamientos no definidos</a:t>
-            </a:r>
-            <a:br/>
-            <a:br/>
-            <a:r>
-              <a:t>"No se define qué pasa si</a:t>
-            </a:r>
-            <a:br/>
-            <a:r>
-              <a:t>el email no existe"</a:t>
-            </a:r>
-          </a:p>
-        </p:txBody>
-      </p:sp>
-      <p:sp>
-        <p:nvSpPr>
-          <p:cNvPr id="8" name="Rounded Rectangle 7"/>
+              <a:t>Siempre</a:t>
+            </a:r>
+          </a:p>
+        </p:txBody>
+      </p:sp>
+      <p:sp>
+        <p:nvSpPr>
+          <p:cNvPr id="7" name="Rounded Rectangle 6"/>
           <p:cNvSpPr/>
           <p:nvPr/>
         </p:nvSpPr>
         <p:spPr>
           <a:xfrm>
-            <a:off x="2697479" y="1554480"/>
-            <a:ext cx="2103120" cy="4572000"/>
+            <a:off x="731520" y="2423160"/>
+            <a:ext cx="10515600" cy="731520"/>
           </a:xfrm>
           <a:prstGeom prst="roundRect">
             <a:avLst/>
@@ -7780,19 +8033,20 @@
           <a:lstStyle/>
           <a:p>
             <a:pPr algn="ctr"/>
-          </a:p>
-        </p:txBody>
-      </p:sp>
-      <p:sp>
-        <p:nvSpPr>
-          <p:cNvPr id="9" name="Rectangle 8"/>
+            <a:endParaRPr/>
+          </a:p>
+        </p:txBody>
+      </p:sp>
+      <p:sp>
+        <p:nvSpPr>
+          <p:cNvPr id="8" name="Rectangle 7"/>
           <p:cNvSpPr/>
           <p:nvPr/>
         </p:nvSpPr>
         <p:spPr>
           <a:xfrm>
-            <a:off x="2697479" y="1554480"/>
-            <a:ext cx="2103120" cy="50800"/>
+            <a:off x="731520" y="2423160"/>
+            <a:ext cx="137160" cy="50800"/>
           </a:xfrm>
           <a:prstGeom prst="rect">
             <a:avLst/>
@@ -7823,6 +8077,42 @@
           <a:lstStyle/>
           <a:p>
             <a:pPr algn="ctr"/>
+            <a:endParaRPr/>
+          </a:p>
+        </p:txBody>
+      </p:sp>
+      <p:sp>
+        <p:nvSpPr>
+          <p:cNvPr id="9" name="TextBox 8"/>
+          <p:cNvSpPr txBox="1"/>
+          <p:nvPr/>
+        </p:nvSpPr>
+        <p:spPr>
+          <a:xfrm>
+            <a:off x="1097280" y="2514600"/>
+            <a:ext cx="1828800" cy="320040"/>
+          </a:xfrm>
+          <a:prstGeom prst="rect">
+            <a:avLst/>
+          </a:prstGeom>
+          <a:noFill/>
+        </p:spPr>
+        <p:txBody>
+          <a:bodyPr wrap="square">
+            <a:spAutoFit/>
+          </a:bodyPr>
+          <a:lstStyle/>
+          <a:p>
+            <a:pPr algn="l">
+              <a:defRPr sz="1600" b="1">
+                <a:solidFill>
+                  <a:srgbClr val="34D399"/>
+                </a:solidFill>
+              </a:defRPr>
+            </a:pPr>
+            <a:r>
+              <a:t>qa</a:t>
+            </a:r>
           </a:p>
         </p:txBody>
       </p:sp>
@@ -7834,8 +8124,8 @@
         </p:nvSpPr>
         <p:spPr>
           <a:xfrm>
-            <a:off x="2807207" y="1828800"/>
-            <a:ext cx="1874519" cy="320040"/>
+            <a:off x="3200400" y="2514600"/>
+            <a:ext cx="7772400" cy="502920"/>
           </a:xfrm>
           <a:prstGeom prst="rect">
             <a:avLst/>
@@ -7849,111 +8139,29 @@
           <a:lstStyle/>
           <a:p>
             <a:pPr algn="l">
-              <a:defRPr sz="1400" b="1">
-                <a:solidFill>
-                  <a:srgbClr val="34D399"/>
-                </a:solidFill>
-              </a:defRPr>
-            </a:pPr>
-            <a:r>
-              <a:t>QaAgent</a:t>
-            </a:r>
-          </a:p>
-        </p:txBody>
-      </p:sp>
-      <p:sp>
-        <p:nvSpPr>
-          <p:cNvPr id="11" name="TextBox 10"/>
-          <p:cNvSpPr txBox="1"/>
-          <p:nvPr/>
-        </p:nvSpPr>
-        <p:spPr>
-          <a:xfrm>
-            <a:off x="2807207" y="2194560"/>
-            <a:ext cx="1874519" cy="274320"/>
-          </a:xfrm>
-          <a:prstGeom prst="rect">
-            <a:avLst/>
-          </a:prstGeom>
-          <a:noFill/>
-        </p:spPr>
-        <p:txBody>
-          <a:bodyPr wrap="square">
-            <a:spAutoFit/>
-          </a:bodyPr>
-          <a:lstStyle/>
-          <a:p>
-            <a:pPr algn="l">
-              <a:defRPr sz="1200" b="1">
-                <a:solidFill>
-                  <a:srgbClr val="FFFFFF"/>
-                </a:solidFill>
-              </a:defRPr>
-            </a:pPr>
-            <a:r>
-              <a:t>Testabilidad</a:t>
-            </a:r>
-          </a:p>
-        </p:txBody>
-      </p:sp>
-      <p:sp>
-        <p:nvSpPr>
-          <p:cNvPr id="12" name="TextBox 11"/>
-          <p:cNvSpPr txBox="1"/>
-          <p:nvPr/>
-        </p:nvSpPr>
-        <p:spPr>
-          <a:xfrm>
-            <a:off x="2807207" y="2560320"/>
-            <a:ext cx="1874519" cy="3291840"/>
-          </a:xfrm>
-          <a:prstGeom prst="rect">
-            <a:avLst/>
-          </a:prstGeom>
-          <a:noFill/>
-        </p:spPr>
-        <p:txBody>
-          <a:bodyPr wrap="square">
-            <a:spAutoFit/>
-          </a:bodyPr>
-          <a:lstStyle/>
-          <a:p>
-            <a:pPr algn="l">
-              <a:defRPr sz="1100" b="0">
+              <a:defRPr sz="1300" b="0">
                 <a:solidFill>
                   <a:srgbClr val="94A3B8"/>
                 </a:solidFill>
               </a:defRPr>
             </a:pPr>
             <a:r>
-              <a:t>Criterios de aceptación faltantes ·</a:t>
-            </a:r>
-            <a:br/>
-            <a:r>
-              <a:t>flujos de error no definidos</a:t>
-            </a:r>
-            <a:br/>
-            <a:br/>
-            <a:r>
-              <a:t>"Faltan escenarios para</a:t>
-            </a:r>
-            <a:br/>
-            <a:r>
-              <a:t>intentos inválidos"</a:t>
-            </a:r>
-          </a:p>
-        </p:txBody>
-      </p:sp>
-      <p:sp>
-        <p:nvSpPr>
-          <p:cNvPr id="13" name="Rounded Rectangle 12"/>
+              <a:rPr dirty="0"/>
+              <a:t>validation · error · state · criteria · failure · expiration…</a:t>
+            </a:r>
+          </a:p>
+        </p:txBody>
+      </p:sp>
+      <p:sp>
+        <p:nvSpPr>
+          <p:cNvPr id="11" name="Rounded Rectangle 10"/>
           <p:cNvSpPr/>
           <p:nvPr/>
         </p:nvSpPr>
         <p:spPr>
           <a:xfrm>
-            <a:off x="5029200" y="1554480"/>
-            <a:ext cx="2103120" cy="4572000"/>
+            <a:off x="731520" y="3291839"/>
+            <a:ext cx="10515600" cy="731520"/>
           </a:xfrm>
           <a:prstGeom prst="roundRect">
             <a:avLst/>
@@ -7984,19 +8192,20 @@
           <a:lstStyle/>
           <a:p>
             <a:pPr algn="ctr"/>
-          </a:p>
-        </p:txBody>
-      </p:sp>
-      <p:sp>
-        <p:nvSpPr>
-          <p:cNvPr id="14" name="Rectangle 13"/>
+            <a:endParaRPr/>
+          </a:p>
+        </p:txBody>
+      </p:sp>
+      <p:sp>
+        <p:nvSpPr>
+          <p:cNvPr id="12" name="Rectangle 11"/>
           <p:cNvSpPr/>
           <p:nvPr/>
         </p:nvSpPr>
         <p:spPr>
           <a:xfrm>
-            <a:off x="5029200" y="1554480"/>
-            <a:ext cx="2103120" cy="50800"/>
+            <a:off x="731520" y="3291839"/>
+            <a:ext cx="137160" cy="50800"/>
           </a:xfrm>
           <a:prstGeom prst="rect">
             <a:avLst/>
@@ -8027,19 +8236,20 @@
           <a:lstStyle/>
           <a:p>
             <a:pPr algn="ctr"/>
-          </a:p>
-        </p:txBody>
-      </p:sp>
-      <p:sp>
-        <p:nvSpPr>
-          <p:cNvPr id="15" name="TextBox 14"/>
-          <p:cNvSpPr txBox="1"/>
-          <p:nvPr/>
-        </p:nvSpPr>
-        <p:spPr>
-          <a:xfrm>
-            <a:off x="5138928" y="1828800"/>
-            <a:ext cx="1874519" cy="320040"/>
+            <a:endParaRPr/>
+          </a:p>
+        </p:txBody>
+      </p:sp>
+      <p:sp>
+        <p:nvSpPr>
+          <p:cNvPr id="13" name="TextBox 12"/>
+          <p:cNvSpPr txBox="1"/>
+          <p:nvPr/>
+        </p:nvSpPr>
+        <p:spPr>
+          <a:xfrm>
+            <a:off x="1097280" y="3383279"/>
+            <a:ext cx="1828800" cy="320040"/>
           </a:xfrm>
           <a:prstGeom prst="rect">
             <a:avLst/>
@@ -8053,28 +8263,28 @@
           <a:lstStyle/>
           <a:p>
             <a:pPr algn="l">
-              <a:defRPr sz="1400" b="1">
+              <a:defRPr sz="1600" b="1">
                 <a:solidFill>
                   <a:srgbClr val="FBBF24"/>
                 </a:solidFill>
               </a:defRPr>
             </a:pPr>
             <a:r>
-              <a:t>TechnicalAgent</a:t>
-            </a:r>
-          </a:p>
-        </p:txBody>
-      </p:sp>
-      <p:sp>
-        <p:nvSpPr>
-          <p:cNvPr id="16" name="TextBox 15"/>
-          <p:cNvSpPr txBox="1"/>
-          <p:nvPr/>
-        </p:nvSpPr>
-        <p:spPr>
-          <a:xfrm>
-            <a:off x="5138928" y="2194560"/>
-            <a:ext cx="1874519" cy="274320"/>
+              <a:t>technical</a:t>
+            </a:r>
+          </a:p>
+        </p:txBody>
+      </p:sp>
+      <p:sp>
+        <p:nvSpPr>
+          <p:cNvPr id="14" name="TextBox 13"/>
+          <p:cNvSpPr txBox="1"/>
+          <p:nvPr/>
+        </p:nvSpPr>
+        <p:spPr>
+          <a:xfrm>
+            <a:off x="3200400" y="3383279"/>
+            <a:ext cx="7772400" cy="502920"/>
           </a:xfrm>
           <a:prstGeom prst="rect">
             <a:avLst/>
@@ -8088,76 +8298,28 @@
           <a:lstStyle/>
           <a:p>
             <a:pPr algn="l">
-              <a:defRPr sz="1200" b="1">
-                <a:solidFill>
-                  <a:srgbClr val="FFFFFF"/>
-                </a:solidFill>
-              </a:defRPr>
-            </a:pPr>
-            <a:r>
-              <a:t>Impacto técnico</a:t>
-            </a:r>
-          </a:p>
-        </p:txBody>
-      </p:sp>
-      <p:sp>
-        <p:nvSpPr>
-          <p:cNvPr id="17" name="TextBox 16"/>
-          <p:cNvSpPr txBox="1"/>
-          <p:nvPr/>
-        </p:nvSpPr>
-        <p:spPr>
-          <a:xfrm>
-            <a:off x="5138928" y="2560320"/>
-            <a:ext cx="1874519" cy="3291840"/>
-          </a:xfrm>
-          <a:prstGeom prst="rect">
-            <a:avLst/>
-          </a:prstGeom>
-          <a:noFill/>
-        </p:spPr>
-        <p:txBody>
-          <a:bodyPr wrap="square">
-            <a:spAutoFit/>
-          </a:bodyPr>
-          <a:lstStyle/>
-          <a:p>
-            <a:pPr algn="l">
-              <a:defRPr sz="1100" b="0">
+              <a:defRPr sz="1300" b="0">
                 <a:solidFill>
                   <a:srgbClr val="94A3B8"/>
                 </a:solidFill>
               </a:defRPr>
             </a:pPr>
             <a:r>
-              <a:t>Riesgos de arquitectura ·</a:t>
-            </a:r>
-            <a:br/>
-            <a:r>
-              <a:t>idempotencia · observabilidad</a:t>
-            </a:r>
-            <a:br/>
-            <a:br/>
-            <a:r>
-              <a:t>"Se recomienda una cola para</a:t>
-            </a:r>
-            <a:br/>
-            <a:r>
-              <a:t>garantizar entrega única"</a:t>
-            </a:r>
-          </a:p>
-        </p:txBody>
-      </p:sp>
-      <p:sp>
-        <p:nvSpPr>
-          <p:cNvPr id="18" name="Rounded Rectangle 17"/>
+              <a:t>retry · queue · integration · async · database · webhook…</a:t>
+            </a:r>
+          </a:p>
+        </p:txBody>
+      </p:sp>
+      <p:sp>
+        <p:nvSpPr>
+          <p:cNvPr id="15" name="Rounded Rectangle 14"/>
           <p:cNvSpPr/>
           <p:nvPr/>
         </p:nvSpPr>
         <p:spPr>
           <a:xfrm>
-            <a:off x="7360919" y="1554480"/>
-            <a:ext cx="2103120" cy="4572000"/>
+            <a:off x="731520" y="4160520"/>
+            <a:ext cx="10515600" cy="731520"/>
           </a:xfrm>
           <a:prstGeom prst="roundRect">
             <a:avLst/>
@@ -8188,19 +8350,20 @@
           <a:lstStyle/>
           <a:p>
             <a:pPr algn="ctr"/>
-          </a:p>
-        </p:txBody>
-      </p:sp>
-      <p:sp>
-        <p:nvSpPr>
-          <p:cNvPr id="19" name="Rectangle 18"/>
+            <a:endParaRPr/>
+          </a:p>
+        </p:txBody>
+      </p:sp>
+      <p:sp>
+        <p:nvSpPr>
+          <p:cNvPr id="16" name="Rectangle 15"/>
           <p:cNvSpPr/>
           <p:nvPr/>
         </p:nvSpPr>
         <p:spPr>
           <a:xfrm>
-            <a:off x="7360919" y="1554480"/>
-            <a:ext cx="2103120" cy="50800"/>
+            <a:off x="731520" y="4160520"/>
+            <a:ext cx="137160" cy="50800"/>
           </a:xfrm>
           <a:prstGeom prst="rect">
             <a:avLst/>
@@ -8231,19 +8394,20 @@
           <a:lstStyle/>
           <a:p>
             <a:pPr algn="ctr"/>
-          </a:p>
-        </p:txBody>
-      </p:sp>
-      <p:sp>
-        <p:nvSpPr>
-          <p:cNvPr id="20" name="TextBox 19"/>
-          <p:cNvSpPr txBox="1"/>
-          <p:nvPr/>
-        </p:nvSpPr>
-        <p:spPr>
-          <a:xfrm>
-            <a:off x="7470647" y="1828800"/>
-            <a:ext cx="1874519" cy="320040"/>
+            <a:endParaRPr/>
+          </a:p>
+        </p:txBody>
+      </p:sp>
+      <p:sp>
+        <p:nvSpPr>
+          <p:cNvPr id="17" name="TextBox 16"/>
+          <p:cNvSpPr txBox="1"/>
+          <p:nvPr/>
+        </p:nvSpPr>
+        <p:spPr>
+          <a:xfrm>
+            <a:off x="1097280" y="4251960"/>
+            <a:ext cx="1828800" cy="320040"/>
           </a:xfrm>
           <a:prstGeom prst="rect">
             <a:avLst/>
@@ -8257,28 +8421,28 @@
           <a:lstStyle/>
           <a:p>
             <a:pPr algn="l">
-              <a:defRPr sz="1400" b="1">
+              <a:defRPr sz="1600" b="1">
                 <a:solidFill>
                   <a:srgbClr val="A78BFA"/>
                 </a:solidFill>
               </a:defRPr>
             </a:pPr>
             <a:r>
-              <a:t>UxAgent</a:t>
-            </a:r>
-          </a:p>
-        </p:txBody>
-      </p:sp>
-      <p:sp>
-        <p:nvSpPr>
-          <p:cNvPr id="21" name="TextBox 20"/>
-          <p:cNvSpPr txBox="1"/>
-          <p:nvPr/>
-        </p:nvSpPr>
-        <p:spPr>
-          <a:xfrm>
-            <a:off x="7470647" y="2194560"/>
-            <a:ext cx="1874519" cy="274320"/>
+              <a:t>ux</a:t>
+            </a:r>
+          </a:p>
+        </p:txBody>
+      </p:sp>
+      <p:sp>
+        <p:nvSpPr>
+          <p:cNvPr id="18" name="TextBox 17"/>
+          <p:cNvSpPr txBox="1"/>
+          <p:nvPr/>
+        </p:nvSpPr>
+        <p:spPr>
+          <a:xfrm>
+            <a:off x="3200400" y="4251960"/>
+            <a:ext cx="7772400" cy="502920"/>
           </a:xfrm>
           <a:prstGeom prst="rect">
             <a:avLst/>
@@ -8292,76 +8456,28 @@
           <a:lstStyle/>
           <a:p>
             <a:pPr algn="l">
-              <a:defRPr sz="1200" b="1">
-                <a:solidFill>
-                  <a:srgbClr val="FFFFFF"/>
-                </a:solidFill>
-              </a:defRPr>
-            </a:pPr>
-            <a:r>
-              <a:t>Experiencia de usuario</a:t>
-            </a:r>
-          </a:p>
-        </p:txBody>
-      </p:sp>
-      <p:sp>
-        <p:nvSpPr>
-          <p:cNvPr id="22" name="TextBox 21"/>
-          <p:cNvSpPr txBox="1"/>
-          <p:nvPr/>
-        </p:nvSpPr>
-        <p:spPr>
-          <a:xfrm>
-            <a:off x="7470647" y="2560320"/>
-            <a:ext cx="1874519" cy="3291840"/>
-          </a:xfrm>
-          <a:prstGeom prst="rect">
-            <a:avLst/>
-          </a:prstGeom>
-          <a:noFill/>
-        </p:spPr>
-        <p:txBody>
-          <a:bodyPr wrap="square">
-            <a:spAutoFit/>
-          </a:bodyPr>
-          <a:lstStyle/>
-          <a:p>
-            <a:pPr algn="l">
-              <a:defRPr sz="1100" b="0">
+              <a:defRPr sz="1300" b="0">
                 <a:solidFill>
                   <a:srgbClr val="94A3B8"/>
                 </a:solidFill>
               </a:defRPr>
             </a:pPr>
             <a:r>
-              <a:t>Fricción · mensajes confusos ·</a:t>
-            </a:r>
-            <a:br/>
-            <a:r>
-              <a:t>feedback visual ausente</a:t>
-            </a:r>
-            <a:br/>
-            <a:br/>
-            <a:r>
-              <a:t>"El mensaje no debería revelar</a:t>
-            </a:r>
-            <a:br/>
-            <a:r>
-              <a:t>si el email existe"</a:t>
-            </a:r>
-          </a:p>
-        </p:txBody>
-      </p:sp>
-      <p:sp>
-        <p:nvSpPr>
-          <p:cNvPr id="23" name="Rounded Rectangle 22"/>
+              <a:t>screen · button · form · login · label · feedback…</a:t>
+            </a:r>
+          </a:p>
+        </p:txBody>
+      </p:sp>
+      <p:sp>
+        <p:nvSpPr>
+          <p:cNvPr id="19" name="Rounded Rectangle 18"/>
           <p:cNvSpPr/>
           <p:nvPr/>
         </p:nvSpPr>
         <p:spPr>
           <a:xfrm>
-            <a:off x="9692640" y="1554480"/>
-            <a:ext cx="2103120" cy="4572000"/>
+            <a:off x="731520" y="5029200"/>
+            <a:ext cx="10515600" cy="731520"/>
           </a:xfrm>
           <a:prstGeom prst="roundRect">
             <a:avLst/>
@@ -8392,19 +8508,20 @@
           <a:lstStyle/>
           <a:p>
             <a:pPr algn="ctr"/>
-          </a:p>
-        </p:txBody>
-      </p:sp>
-      <p:sp>
-        <p:nvSpPr>
-          <p:cNvPr id="24" name="Rectangle 23"/>
+            <a:endParaRPr/>
+          </a:p>
+        </p:txBody>
+      </p:sp>
+      <p:sp>
+        <p:nvSpPr>
+          <p:cNvPr id="20" name="Rectangle 19"/>
           <p:cNvSpPr/>
           <p:nvPr/>
         </p:nvSpPr>
         <p:spPr>
           <a:xfrm>
-            <a:off x="9692640" y="1554480"/>
-            <a:ext cx="2103120" cy="50800"/>
+            <a:off x="731520" y="5029200"/>
+            <a:ext cx="137160" cy="50800"/>
           </a:xfrm>
           <a:prstGeom prst="rect">
             <a:avLst/>
@@ -8435,19 +8552,90 @@
           <a:lstStyle/>
           <a:p>
             <a:pPr algn="ctr"/>
-          </a:p>
-        </p:txBody>
-      </p:sp>
-      <p:sp>
-        <p:nvSpPr>
-          <p:cNvPr id="25" name="TextBox 24"/>
-          <p:cNvSpPr txBox="1"/>
-          <p:nvPr/>
-        </p:nvSpPr>
-        <p:spPr>
-          <a:xfrm>
-            <a:off x="9802368" y="1828800"/>
-            <a:ext cx="1874519" cy="320040"/>
+            <a:endParaRPr/>
+          </a:p>
+        </p:txBody>
+      </p:sp>
+      <p:sp>
+        <p:nvSpPr>
+          <p:cNvPr id="21" name="TextBox 20"/>
+          <p:cNvSpPr txBox="1"/>
+          <p:nvPr/>
+        </p:nvSpPr>
+        <p:spPr>
+          <a:xfrm>
+            <a:off x="1097280" y="5120640"/>
+            <a:ext cx="1828800" cy="320040"/>
+          </a:xfrm>
+          <a:prstGeom prst="rect">
+            <a:avLst/>
+          </a:prstGeom>
+          <a:noFill/>
+        </p:spPr>
+        <p:txBody>
+          <a:bodyPr wrap="square">
+            <a:spAutoFit/>
+          </a:bodyPr>
+          <a:lstStyle/>
+          <a:p>
+            <a:pPr algn="l">
+              <a:defRPr sz="1600" b="1">
+                <a:solidFill>
+                  <a:srgbClr val="F472B6"/>
+                </a:solidFill>
+              </a:defRPr>
+            </a:pPr>
+            <a:r>
+              <a:t>compliance</a:t>
+            </a:r>
+          </a:p>
+        </p:txBody>
+      </p:sp>
+      <p:sp>
+        <p:nvSpPr>
+          <p:cNvPr id="22" name="TextBox 21"/>
+          <p:cNvSpPr txBox="1"/>
+          <p:nvPr/>
+        </p:nvSpPr>
+        <p:spPr>
+          <a:xfrm>
+            <a:off x="3200400" y="5120640"/>
+            <a:ext cx="7772400" cy="502920"/>
+          </a:xfrm>
+          <a:prstGeom prst="rect">
+            <a:avLst/>
+          </a:prstGeom>
+          <a:noFill/>
+        </p:spPr>
+        <p:txBody>
+          <a:bodyPr wrap="square">
+            <a:spAutoFit/>
+          </a:bodyPr>
+          <a:lstStyle/>
+          <a:p>
+            <a:pPr algn="l">
+              <a:defRPr sz="1300" b="0">
+                <a:solidFill>
+                  <a:srgbClr val="94A3B8"/>
+                </a:solidFill>
+              </a:defRPr>
+            </a:pPr>
+            <a:r>
+              <a:t>personal data · audit · download · gdpr · encryption…</a:t>
+            </a:r>
+          </a:p>
+        </p:txBody>
+      </p:sp>
+      <p:sp>
+        <p:nvSpPr>
+          <p:cNvPr id="23" name="TextBox 22"/>
+          <p:cNvSpPr txBox="1"/>
+          <p:nvPr/>
+        </p:nvSpPr>
+        <p:spPr>
+          <a:xfrm>
+            <a:off x="731520" y="6035040"/>
+            <a:ext cx="10515600" cy="457200"/>
           </a:xfrm>
           <a:prstGeom prst="rect">
             <a:avLst/>
@@ -8463,95 +8651,12 @@
             <a:pPr algn="l">
               <a:defRPr sz="1400" b="1">
                 <a:solidFill>
-                  <a:srgbClr val="F472B6"/>
-                </a:solidFill>
-              </a:defRPr>
-            </a:pPr>
-            <a:r>
-              <a:t>ComplianceAgent</a:t>
-            </a:r>
-          </a:p>
-        </p:txBody>
-      </p:sp>
-      <p:sp>
-        <p:nvSpPr>
-          <p:cNvPr id="26" name="TextBox 25"/>
-          <p:cNvSpPr txBox="1"/>
-          <p:nvPr/>
-        </p:nvSpPr>
-        <p:spPr>
-          <a:xfrm>
-            <a:off x="9802368" y="2194560"/>
-            <a:ext cx="1874519" cy="274320"/>
-          </a:xfrm>
-          <a:prstGeom prst="rect">
-            <a:avLst/>
-          </a:prstGeom>
-          <a:noFill/>
-        </p:spPr>
-        <p:txBody>
-          <a:bodyPr wrap="square">
-            <a:spAutoFit/>
-          </a:bodyPr>
-          <a:lstStyle/>
-          <a:p>
-            <a:pPr algn="l">
-              <a:defRPr sz="1200" b="1">
-                <a:solidFill>
-                  <a:srgbClr val="FFFFFF"/>
-                </a:solidFill>
-              </a:defRPr>
-            </a:pPr>
-            <a:r>
-              <a:t>Seguridad y privacidad</a:t>
-            </a:r>
-          </a:p>
-        </p:txBody>
-      </p:sp>
-      <p:sp>
-        <p:nvSpPr>
-          <p:cNvPr id="27" name="TextBox 26"/>
-          <p:cNvSpPr txBox="1"/>
-          <p:nvPr/>
-        </p:nvSpPr>
-        <p:spPr>
-          <a:xfrm>
-            <a:off x="9802368" y="2560320"/>
-            <a:ext cx="1874519" cy="3291840"/>
-          </a:xfrm>
-          <a:prstGeom prst="rect">
-            <a:avLst/>
-          </a:prstGeom>
-          <a:noFill/>
-        </p:spPr>
-        <p:txBody>
-          <a:bodyPr wrap="square">
-            <a:spAutoFit/>
-          </a:bodyPr>
-          <a:lstStyle/>
-          <a:p>
-            <a:pPr algn="l">
-              <a:defRPr sz="1100" b="0">
-                <a:solidFill>
-                  <a:srgbClr val="94A3B8"/>
-                </a:solidFill>
-              </a:defRPr>
-            </a:pPr>
-            <a:r>
-              <a:t>Exposición de PII · autorización</a:t>
-            </a:r>
-            <a:br/>
-            <a:r>
-              <a:t>insuficiente · auditoría</a:t>
-            </a:r>
-            <a:br/>
-            <a:br/>
-            <a:r>
-              <a:t>"La descarga requiere</a:t>
-            </a:r>
-            <a:br/>
-            <a:r>
-              <a:t>verificación de identidad"</a:t>
+                  <a:srgbClr val="FBBF24"/>
+                </a:solidFill>
+              </a:defRPr>
+            </a:pPr>
+            <a:r>
+              <a:t>Sin llamada al LLM para la selección — determinístico, costo cero, predecible en demo</a:t>
             </a:r>
           </a:p>
         </p:txBody>
@@ -8565,7 +8670,7 @@
 </file>
 
 <file path=ppt/slides/slide18.xml><?xml version="1.0" encoding="utf-8"?>
-<p:sld xmlns:a="http://schemas.openxmlformats.org/drawingml/2006/main" xmlns:p="http://schemas.openxmlformats.org/presentationml/2006/main" xmlns:r="http://schemas.openxmlformats.org/officeDocument/2006/relationships">
+<p:sld xmlns:a="http://schemas.openxmlformats.org/drawingml/2006/main" xmlns:r="http://schemas.openxmlformats.org/officeDocument/2006/relationships" xmlns:p="http://schemas.openxmlformats.org/presentationml/2006/main">
   <p:cSld>
     <p:bg>
       <p:bgPr>
@@ -8581,7 +8686,14 @@
         <p:cNvGrpSpPr/>
         <p:nvPr/>
       </p:nvGrpSpPr>
-      <p:grpSpPr/>
+      <p:grpSpPr>
+        <a:xfrm>
+          <a:off x="0" y="0"/>
+          <a:ext cx="0" cy="0"/>
+          <a:chOff x="0" y="0"/>
+          <a:chExt cx="0" cy="0"/>
+        </a:xfrm>
+      </p:grpSpPr>
       <p:sp>
         <p:nvSpPr>
           <p:cNvPr id="2" name="TextBox 1"/>
@@ -8692,6 +8804,7 @@
           <a:lstStyle/>
           <a:p>
             <a:pPr algn="ctr"/>
+            <a:endParaRPr/>
           </a:p>
         </p:txBody>
       </p:sp>
@@ -8704,7 +8817,7 @@
 </file>
 
 <file path=ppt/slides/slide19.xml><?xml version="1.0" encoding="utf-8"?>
-<p:sld xmlns:a="http://schemas.openxmlformats.org/drawingml/2006/main" xmlns:p="http://schemas.openxmlformats.org/presentationml/2006/main" xmlns:r="http://schemas.openxmlformats.org/officeDocument/2006/relationships">
+<p:sld xmlns:a="http://schemas.openxmlformats.org/drawingml/2006/main" xmlns:r="http://schemas.openxmlformats.org/officeDocument/2006/relationships" xmlns:p="http://schemas.openxmlformats.org/presentationml/2006/main">
   <p:cSld>
     <p:bg>
       <p:bgPr>
@@ -8720,7 +8833,14 @@
         <p:cNvGrpSpPr/>
         <p:nvPr/>
       </p:nvGrpSpPr>
-      <p:grpSpPr/>
+      <p:grpSpPr>
+        <a:xfrm>
+          <a:off x="0" y="0"/>
+          <a:ext cx="0" cy="0"/>
+          <a:chOff x="0" y="0"/>
+          <a:chExt cx="0" cy="0"/>
+        </a:xfrm>
+      </p:grpSpPr>
       <p:sp>
         <p:nvSpPr>
           <p:cNvPr id="2" name="TextBox 1"/>
@@ -8796,6 +8916,7 @@
           <a:lstStyle/>
           <a:p>
             <a:pPr algn="ctr"/>
+            <a:endParaRPr/>
           </a:p>
         </p:txBody>
       </p:sp>
@@ -8895,6 +9016,7 @@
           <a:lstStyle/>
           <a:p>
             <a:pPr algn="ctr"/>
+            <a:endParaRPr/>
           </a:p>
         </p:txBody>
       </p:sp>
@@ -8942,7 +9064,7 @@
         <p:spPr>
           <a:xfrm>
             <a:off x="7955279" y="2011680"/>
-            <a:ext cx="3474720" cy="1371600"/>
+            <a:ext cx="3474720" cy="795089"/>
           </a:xfrm>
           <a:prstGeom prst="rect">
             <a:avLst/>
@@ -8966,8 +9088,22 @@
               </a:defRPr>
             </a:pPr>
             <a:r>
-              <a:t>•  Agentes son independientes</a:t>
-            </a:r>
+              <a:rPr dirty="0"/>
+              <a:t>•  </a:t>
+            </a:r>
+            <a:r>
+              <a:rPr dirty="0" err="1"/>
+              <a:t>Agentes</a:t>
+            </a:r>
+            <a:r>
+              <a:rPr dirty="0"/>
+              <a:t> son </a:t>
+            </a:r>
+            <a:r>
+              <a:rPr dirty="0" err="1"/>
+              <a:t>independientes</a:t>
+            </a:r>
+            <a:endParaRPr dirty="0"/>
           </a:p>
           <a:p>
             <a:pPr>
@@ -8981,8 +9117,22 @@
               </a:defRPr>
             </a:pPr>
             <a:r>
-              <a:t>•  No hay estado compartido</a:t>
-            </a:r>
+              <a:rPr dirty="0"/>
+              <a:t>•  No hay </a:t>
+            </a:r>
+            <a:r>
+              <a:rPr dirty="0" err="1"/>
+              <a:t>estado</a:t>
+            </a:r>
+            <a:r>
+              <a:rPr dirty="0"/>
+              <a:t> </a:t>
+            </a:r>
+            <a:r>
+              <a:rPr dirty="0" err="1"/>
+              <a:t>compartido</a:t>
+            </a:r>
+            <a:endParaRPr dirty="0"/>
           </a:p>
           <a:p>
             <a:pPr>
@@ -8996,23 +9146,34 @@
               </a:defRPr>
             </a:pPr>
             <a:r>
-              <a:t>•  5 agentes tardan lo mismo que 1</a:t>
-            </a:r>
-          </a:p>
-          <a:p>
-            <a:pPr>
-              <a:spcBef>
-                <a:spcPts val="400"/>
-              </a:spcBef>
-              <a:defRPr sz="1300">
-                <a:solidFill>
-                  <a:srgbClr val="E2E8F0"/>
-                </a:solidFill>
-              </a:defRPr>
-            </a:pPr>
-            <a:r>
-              <a:t>•  Forzó separación limpia</a:t>
-            </a:r>
+              <a:rPr dirty="0"/>
+              <a:t>•  </a:t>
+            </a:r>
+            <a:r>
+              <a:rPr lang="en-US" dirty="0"/>
+              <a:t>Menor </a:t>
+            </a:r>
+            <a:r>
+              <a:rPr lang="en-US" dirty="0" err="1"/>
+              <a:t>tiempo</a:t>
+            </a:r>
+            <a:r>
+              <a:rPr lang="en-US" dirty="0"/>
+              <a:t> de </a:t>
+            </a:r>
+            <a:r>
+              <a:rPr lang="en-US" dirty="0" err="1"/>
+              <a:t>ejecuci</a:t>
+            </a:r>
+            <a:r>
+              <a:rPr lang="es-UY" dirty="0" err="1"/>
+              <a:t>ó</a:t>
+            </a:r>
+            <a:r>
+              <a:rPr lang="en-US" dirty="0"/>
+              <a:t>n</a:t>
+            </a:r>
+            <a:endParaRPr dirty="0"/>
           </a:p>
         </p:txBody>
       </p:sp>
@@ -9122,7 +9283,7 @@
           </a:fontRef>
         </p:style>
         <p:txBody>
-          <a:bodyPr rtlCol="0" anchor="ctr" wrap="square"/>
+          <a:bodyPr wrap="square" rtlCol="0" anchor="ctr"/>
           <a:lstStyle/>
           <a:p>
             <a:pPr algn="l">
@@ -9174,7 +9335,7 @@
           </a:fontRef>
         </p:style>
         <p:txBody>
-          <a:bodyPr rtlCol="0" anchor="ctr" wrap="square"/>
+          <a:bodyPr wrap="square" rtlCol="0" anchor="ctr"/>
           <a:lstStyle/>
           <a:p>
             <a:pPr algn="l">
@@ -9226,7 +9387,7 @@
           </a:fontRef>
         </p:style>
         <p:txBody>
-          <a:bodyPr rtlCol="0" anchor="ctr" wrap="square"/>
+          <a:bodyPr wrap="square" rtlCol="0" anchor="ctr"/>
           <a:lstStyle/>
           <a:p>
             <a:pPr algn="l">
@@ -9278,7 +9439,7 @@
           </a:fontRef>
         </p:style>
         <p:txBody>
-          <a:bodyPr rtlCol="0" anchor="ctr" wrap="square"/>
+          <a:bodyPr wrap="square" rtlCol="0" anchor="ctr"/>
           <a:lstStyle/>
           <a:p>
             <a:pPr algn="l">
@@ -9330,7 +9491,7 @@
           </a:fontRef>
         </p:style>
         <p:txBody>
-          <a:bodyPr rtlCol="0" anchor="ctr" wrap="square"/>
+          <a:bodyPr wrap="square" rtlCol="0" anchor="ctr"/>
           <a:lstStyle/>
           <a:p>
             <a:pPr algn="l">
@@ -9417,7 +9578,7 @@
           </a:fontRef>
         </p:style>
         <p:txBody>
-          <a:bodyPr rtlCol="0" anchor="ctr" wrap="square"/>
+          <a:bodyPr wrap="square" rtlCol="0" anchor="ctr"/>
           <a:lstStyle/>
           <a:p>
             <a:pPr algn="l">
@@ -9469,7 +9630,7 @@
           </a:fontRef>
         </p:style>
         <p:txBody>
-          <a:bodyPr rtlCol="0" anchor="ctr" wrap="square"/>
+          <a:bodyPr wrap="square" rtlCol="0" anchor="ctr"/>
           <a:lstStyle/>
           <a:p>
             <a:pPr algn="l">
@@ -9521,7 +9682,7 @@
           </a:fontRef>
         </p:style>
         <p:txBody>
-          <a:bodyPr rtlCol="0" anchor="ctr" wrap="square"/>
+          <a:bodyPr wrap="square" rtlCol="0" anchor="ctr"/>
           <a:lstStyle/>
           <a:p>
             <a:pPr algn="l">
@@ -9573,7 +9734,7 @@
           </a:fontRef>
         </p:style>
         <p:txBody>
-          <a:bodyPr rtlCol="0" anchor="ctr" wrap="square"/>
+          <a:bodyPr wrap="square" rtlCol="0" anchor="ctr"/>
           <a:lstStyle/>
           <a:p>
             <a:pPr algn="l">
@@ -9625,7 +9786,7 @@
           </a:fontRef>
         </p:style>
         <p:txBody>
-          <a:bodyPr rtlCol="0" anchor="ctr" wrap="square"/>
+          <a:bodyPr wrap="square" rtlCol="0" anchor="ctr"/>
           <a:lstStyle/>
           <a:p>
             <a:pPr algn="l">
@@ -9685,7 +9846,7 @@
 </file>
 
 <file path=ppt/slides/slide2.xml><?xml version="1.0" encoding="utf-8"?>
-<p:sld xmlns:a="http://schemas.openxmlformats.org/drawingml/2006/main" xmlns:p="http://schemas.openxmlformats.org/presentationml/2006/main" xmlns:r="http://schemas.openxmlformats.org/officeDocument/2006/relationships">
+<p:sld xmlns:a="http://schemas.openxmlformats.org/drawingml/2006/main" xmlns:r="http://schemas.openxmlformats.org/officeDocument/2006/relationships" xmlns:p="http://schemas.openxmlformats.org/presentationml/2006/main">
   <p:cSld>
     <p:bg>
       <p:bgPr>
@@ -9701,7 +9862,14 @@
         <p:cNvGrpSpPr/>
         <p:nvPr/>
       </p:nvGrpSpPr>
-      <p:grpSpPr/>
+      <p:grpSpPr>
+        <a:xfrm>
+          <a:off x="0" y="0"/>
+          <a:ext cx="0" cy="0"/>
+          <a:chOff x="0" y="0"/>
+          <a:chExt cx="0" cy="0"/>
+        </a:xfrm>
+      </p:grpSpPr>
       <p:sp>
         <p:nvSpPr>
           <p:cNvPr id="2" name="TextBox 1"/>
@@ -9777,6 +9945,7 @@
           <a:lstStyle/>
           <a:p>
             <a:pPr algn="ctr"/>
+            <a:endParaRPr/>
           </a:p>
         </p:txBody>
       </p:sp>
@@ -9810,8 +9979,18 @@
               </a:defRPr>
             </a:pPr>
             <a:r>
-              <a:t>Parte I — Conceptos Teóricos</a:t>
-            </a:r>
+              <a:rPr dirty="0" err="1"/>
+              <a:t>Conceptos</a:t>
+            </a:r>
+            <a:r>
+              <a:rPr dirty="0"/>
+              <a:t> </a:t>
+            </a:r>
+            <a:r>
+              <a:rPr dirty="0" err="1"/>
+              <a:t>Teóricos</a:t>
+            </a:r>
+            <a:endParaRPr dirty="0"/>
           </a:p>
         </p:txBody>
       </p:sp>
@@ -9848,7 +10027,32 @@
               </a:defRPr>
             </a:pPr>
             <a:r>
-              <a:t>•  ¿Qué es un sistema multi-agente?</a:t>
+              <a:rPr dirty="0"/>
+              <a:t>•  ¿</a:t>
+            </a:r>
+            <a:r>
+              <a:rPr dirty="0" err="1"/>
+              <a:t>Qué</a:t>
+            </a:r>
+            <a:r>
+              <a:rPr dirty="0"/>
+              <a:t> es un </a:t>
+            </a:r>
+            <a:r>
+              <a:rPr dirty="0" err="1"/>
+              <a:t>sistema</a:t>
+            </a:r>
+            <a:r>
+              <a:rPr dirty="0"/>
+              <a:t> multi-</a:t>
+            </a:r>
+            <a:r>
+              <a:rPr dirty="0" err="1"/>
+              <a:t>agente</a:t>
+            </a:r>
+            <a:r>
+              <a:rPr dirty="0"/>
+              <a:t>?</a:t>
             </a:r>
           </a:p>
           <a:p>
@@ -9863,8 +10067,30 @@
               </a:defRPr>
             </a:pPr>
             <a:r>
-              <a:t>•  Agente único vs multi-agente</a:t>
-            </a:r>
+              <a:rPr dirty="0"/>
+              <a:t>•  </a:t>
+            </a:r>
+            <a:r>
+              <a:rPr dirty="0" err="1"/>
+              <a:t>Agente</a:t>
+            </a:r>
+            <a:r>
+              <a:rPr dirty="0"/>
+              <a:t> </a:t>
+            </a:r>
+            <a:r>
+              <a:rPr dirty="0" err="1"/>
+              <a:t>único</a:t>
+            </a:r>
+            <a:r>
+              <a:rPr dirty="0"/>
+              <a:t> vs multi-</a:t>
+            </a:r>
+            <a:r>
+              <a:rPr dirty="0" err="1"/>
+              <a:t>agente</a:t>
+            </a:r>
+            <a:endParaRPr dirty="0"/>
           </a:p>
           <a:p>
             <a:pPr>
@@ -9878,8 +10104,22 @@
               </a:defRPr>
             </a:pPr>
             <a:r>
-              <a:t>•  Patrones de orquestación</a:t>
-            </a:r>
+              <a:rPr dirty="0"/>
+              <a:t>•  </a:t>
+            </a:r>
+            <a:r>
+              <a:rPr dirty="0" err="1"/>
+              <a:t>Patrones</a:t>
+            </a:r>
+            <a:r>
+              <a:rPr dirty="0"/>
+              <a:t> de </a:t>
+            </a:r>
+            <a:r>
+              <a:rPr dirty="0" err="1"/>
+              <a:t>orquestación</a:t>
+            </a:r>
+            <a:endParaRPr dirty="0"/>
           </a:p>
           <a:p>
             <a:pPr>
@@ -9893,7 +10133,16 @@
               </a:defRPr>
             </a:pPr>
             <a:r>
-              <a:t>•  El patrón Supervisor</a:t>
+              <a:rPr dirty="0"/>
+              <a:t>•  El </a:t>
+            </a:r>
+            <a:r>
+              <a:rPr dirty="0" err="1"/>
+              <a:t>patrón</a:t>
+            </a:r>
+            <a:r>
+              <a:rPr dirty="0"/>
+              <a:t> Supervisor</a:t>
             </a:r>
           </a:p>
           <a:p>
@@ -9908,8 +10157,22 @@
               </a:defRPr>
             </a:pPr>
             <a:r>
-              <a:t>•  LLMs como motor de razonamiento</a:t>
-            </a:r>
+              <a:rPr dirty="0"/>
+              <a:t>•  LLMs </a:t>
+            </a:r>
+            <a:r>
+              <a:rPr dirty="0" err="1"/>
+              <a:t>como</a:t>
+            </a:r>
+            <a:r>
+              <a:rPr dirty="0"/>
+              <a:t> motor de </a:t>
+            </a:r>
+            <a:r>
+              <a:rPr dirty="0" err="1"/>
+              <a:t>razonamiento</a:t>
+            </a:r>
+            <a:endParaRPr dirty="0"/>
           </a:p>
         </p:txBody>
       </p:sp>
@@ -9953,6 +10216,7 @@
           <a:lstStyle/>
           <a:p>
             <a:pPr algn="ctr"/>
+            <a:endParaRPr/>
           </a:p>
         </p:txBody>
       </p:sp>
@@ -9986,8 +10250,18 @@
               </a:defRPr>
             </a:pPr>
             <a:r>
-              <a:t>Parte II — Implementación: MultiAgentLab</a:t>
-            </a:r>
+              <a:rPr dirty="0" err="1"/>
+              <a:t>Implementación</a:t>
+            </a:r>
+            <a:r>
+              <a:rPr dirty="0"/>
+              <a:t>: </a:t>
+            </a:r>
+            <a:r>
+              <a:rPr dirty="0" err="1"/>
+              <a:t>MultiAgentLab</a:t>
+            </a:r>
+            <a:endParaRPr dirty="0"/>
           </a:p>
         </p:txBody>
       </p:sp>
@@ -10024,7 +10298,24 @@
               </a:defRPr>
             </a:pPr>
             <a:r>
-              <a:t>•  El problema y la pregunta del POC</a:t>
+              <a:rPr dirty="0"/>
+              <a:t>•  El </a:t>
+            </a:r>
+            <a:r>
+              <a:rPr dirty="0" err="1"/>
+              <a:t>problema</a:t>
+            </a:r>
+            <a:r>
+              <a:rPr dirty="0"/>
+              <a:t> y la </a:t>
+            </a:r>
+            <a:r>
+              <a:rPr dirty="0" err="1"/>
+              <a:t>pregunta</a:t>
+            </a:r>
+            <a:r>
+              <a:rPr dirty="0"/>
+              <a:t> del POC</a:t>
             </a:r>
           </a:p>
           <a:p>
@@ -10039,7 +10330,24 @@
               </a:defRPr>
             </a:pPr>
             <a:r>
-              <a:t>•  La arquitectura y flujo paso a paso</a:t>
+              <a:rPr dirty="0"/>
+              <a:t>•  La </a:t>
+            </a:r>
+            <a:r>
+              <a:rPr dirty="0" err="1"/>
+              <a:t>arquitectura</a:t>
+            </a:r>
+            <a:r>
+              <a:rPr dirty="0"/>
+              <a:t> y </a:t>
+            </a:r>
+            <a:r>
+              <a:rPr dirty="0" err="1"/>
+              <a:t>flujo</a:t>
+            </a:r>
+            <a:r>
+              <a:rPr dirty="0"/>
+              <a:t> paso a paso</a:t>
             </a:r>
           </a:p>
           <a:p>
@@ -10054,8 +10362,38 @@
               </a:defRPr>
             </a:pPr>
             <a:r>
-              <a:t>•  Agentes especializados y selección dinámica</a:t>
-            </a:r>
+              <a:rPr dirty="0"/>
+              <a:t>•  </a:t>
+            </a:r>
+            <a:r>
+              <a:rPr dirty="0" err="1"/>
+              <a:t>Agentes</a:t>
+            </a:r>
+            <a:r>
+              <a:rPr dirty="0"/>
+              <a:t> </a:t>
+            </a:r>
+            <a:r>
+              <a:rPr dirty="0" err="1"/>
+              <a:t>especializados</a:t>
+            </a:r>
+            <a:r>
+              <a:rPr dirty="0"/>
+              <a:t> y </a:t>
+            </a:r>
+            <a:r>
+              <a:rPr dirty="0" err="1"/>
+              <a:t>selección</a:t>
+            </a:r>
+            <a:r>
+              <a:rPr dirty="0"/>
+              <a:t> </a:t>
+            </a:r>
+            <a:r>
+              <a:rPr dirty="0" err="1"/>
+              <a:t>dinámica</a:t>
+            </a:r>
+            <a:endParaRPr dirty="0"/>
           </a:p>
           <a:p>
             <a:pPr>
@@ -10069,7 +10407,24 @@
               </a:defRPr>
             </a:pPr>
             <a:r>
-              <a:t>•  Decisiones técnicas clave</a:t>
+              <a:rPr dirty="0"/>
+              <a:t>•  </a:t>
+            </a:r>
+            <a:r>
+              <a:rPr dirty="0" err="1"/>
+              <a:t>Decisiones</a:t>
+            </a:r>
+            <a:r>
+              <a:rPr dirty="0"/>
+              <a:t> </a:t>
+            </a:r>
+            <a:r>
+              <a:rPr dirty="0" err="1"/>
+              <a:t>técnicas</a:t>
+            </a:r>
+            <a:r>
+              <a:rPr dirty="0"/>
+              <a:t> clave</a:t>
             </a:r>
           </a:p>
           <a:p>
@@ -10084,8 +10439,22 @@
               </a:defRPr>
             </a:pPr>
             <a:r>
-              <a:t>•  Lo que aprendimos</a:t>
-            </a:r>
+              <a:rPr dirty="0"/>
+              <a:t>•  Lo </a:t>
+            </a:r>
+            <a:r>
+              <a:rPr dirty="0" err="1"/>
+              <a:t>que</a:t>
+            </a:r>
+            <a:r>
+              <a:rPr dirty="0"/>
+              <a:t> </a:t>
+            </a:r>
+            <a:r>
+              <a:rPr dirty="0" err="1"/>
+              <a:t>aprendimos</a:t>
+            </a:r>
+            <a:endParaRPr dirty="0"/>
           </a:p>
           <a:p>
             <a:pPr>
@@ -10099,6 +10468,7 @@
               </a:defRPr>
             </a:pPr>
             <a:r>
+              <a:rPr dirty="0"/>
               <a:t>•  Demo</a:t>
             </a:r>
           </a:p>
@@ -10114,8 +10484,22 @@
               </a:defRPr>
             </a:pPr>
             <a:r>
-              <a:t>•  Resumen y stack técnico</a:t>
-            </a:r>
+              <a:rPr dirty="0"/>
+              <a:t>•  </a:t>
+            </a:r>
+            <a:r>
+              <a:rPr dirty="0" err="1"/>
+              <a:t>Resumen</a:t>
+            </a:r>
+            <a:r>
+              <a:rPr dirty="0"/>
+              <a:t> y stack </a:t>
+            </a:r>
+            <a:r>
+              <a:rPr dirty="0" err="1"/>
+              <a:t>técnico</a:t>
+            </a:r>
+            <a:endParaRPr dirty="0"/>
           </a:p>
         </p:txBody>
       </p:sp>
@@ -10128,7 +10512,7 @@
 </file>
 
 <file path=ppt/slides/slide20.xml><?xml version="1.0" encoding="utf-8"?>
-<p:sld xmlns:a="http://schemas.openxmlformats.org/drawingml/2006/main" xmlns:p="http://schemas.openxmlformats.org/presentationml/2006/main" xmlns:r="http://schemas.openxmlformats.org/officeDocument/2006/relationships">
+<p:sld xmlns:a="http://schemas.openxmlformats.org/drawingml/2006/main" xmlns:r="http://schemas.openxmlformats.org/officeDocument/2006/relationships" xmlns:p="http://schemas.openxmlformats.org/presentationml/2006/main">
   <p:cSld>
     <p:bg>
       <p:bgPr>
@@ -10144,7 +10528,14 @@
         <p:cNvGrpSpPr/>
         <p:nvPr/>
       </p:nvGrpSpPr>
-      <p:grpSpPr/>
+      <p:grpSpPr>
+        <a:xfrm>
+          <a:off x="0" y="0"/>
+          <a:ext cx="0" cy="0"/>
+          <a:chOff x="0" y="0"/>
+          <a:chExt cx="0" cy="0"/>
+        </a:xfrm>
+      </p:grpSpPr>
       <p:sp>
         <p:nvSpPr>
           <p:cNvPr id="2" name="TextBox 1"/>
@@ -10220,6 +10611,7 @@
           <a:lstStyle/>
           <a:p>
             <a:pPr algn="ctr"/>
+            <a:endParaRPr/>
           </a:p>
         </p:txBody>
       </p:sp>
@@ -10298,6 +10690,7 @@
           <a:lstStyle/>
           <a:p>
             <a:pPr algn="ctr"/>
+            <a:endParaRPr/>
           </a:p>
         </p:txBody>
       </p:sp>
@@ -10376,6 +10769,7 @@
           <a:lstStyle/>
           <a:p>
             <a:pPr algn="ctr"/>
+            <a:endParaRPr/>
           </a:p>
         </p:txBody>
       </p:sp>
@@ -10419,6 +10813,7 @@
           <a:lstStyle/>
           <a:p>
             <a:pPr algn="ctr"/>
+            <a:endParaRPr/>
           </a:p>
         </p:txBody>
       </p:sp>
@@ -10565,6 +10960,7 @@
           <a:lstStyle/>
           <a:p>
             <a:pPr algn="ctr"/>
+            <a:endParaRPr/>
           </a:p>
         </p:txBody>
       </p:sp>
@@ -10608,6 +11004,7 @@
           <a:lstStyle/>
           <a:p>
             <a:pPr algn="ctr"/>
+            <a:endParaRPr/>
           </a:p>
         </p:txBody>
       </p:sp>
@@ -10758,7 +11155,7 @@
 </file>
 
 <file path=ppt/slides/slide21.xml><?xml version="1.0" encoding="utf-8"?>
-<p:sld xmlns:a="http://schemas.openxmlformats.org/drawingml/2006/main" xmlns:p="http://schemas.openxmlformats.org/presentationml/2006/main" xmlns:r="http://schemas.openxmlformats.org/officeDocument/2006/relationships">
+<p:sld xmlns:a="http://schemas.openxmlformats.org/drawingml/2006/main" xmlns:r="http://schemas.openxmlformats.org/officeDocument/2006/relationships" xmlns:p="http://schemas.openxmlformats.org/presentationml/2006/main">
   <p:cSld>
     <p:bg>
       <p:bgPr>
@@ -10774,7 +11171,14 @@
         <p:cNvGrpSpPr/>
         <p:nvPr/>
       </p:nvGrpSpPr>
-      <p:grpSpPr/>
+      <p:grpSpPr>
+        <a:xfrm>
+          <a:off x="0" y="0"/>
+          <a:ext cx="0" cy="0"/>
+          <a:chOff x="0" y="0"/>
+          <a:chExt cx="0" cy="0"/>
+        </a:xfrm>
+      </p:grpSpPr>
       <p:sp>
         <p:nvSpPr>
           <p:cNvPr id="2" name="TextBox 1"/>
@@ -10885,6 +11289,7 @@
           <a:lstStyle/>
           <a:p>
             <a:pPr algn="ctr"/>
+            <a:endParaRPr/>
           </a:p>
         </p:txBody>
       </p:sp>
@@ -10928,6 +11333,7 @@
           <a:lstStyle/>
           <a:p>
             <a:pPr algn="ctr"/>
+            <a:endParaRPr/>
           </a:p>
         </p:txBody>
       </p:sp>
@@ -11076,6 +11482,7 @@
           <a:lstStyle/>
           <a:p>
             <a:pPr algn="ctr"/>
+            <a:endParaRPr/>
           </a:p>
         </p:txBody>
       </p:sp>
@@ -11119,6 +11526,7 @@
           <a:lstStyle/>
           <a:p>
             <a:pPr algn="ctr"/>
+            <a:endParaRPr/>
           </a:p>
         </p:txBody>
       </p:sp>
@@ -11271,6 +11679,7 @@
           <a:lstStyle/>
           <a:p>
             <a:pPr algn="ctr"/>
+            <a:endParaRPr/>
           </a:p>
         </p:txBody>
       </p:sp>
@@ -11314,6 +11723,7 @@
           <a:lstStyle/>
           <a:p>
             <a:pPr algn="ctr"/>
+            <a:endParaRPr/>
           </a:p>
         </p:txBody>
       </p:sp>
@@ -11474,6 +11884,7 @@
           <a:lstStyle/>
           <a:p>
             <a:pPr algn="ctr"/>
+            <a:endParaRPr/>
           </a:p>
         </p:txBody>
       </p:sp>
@@ -11517,6 +11928,7 @@
           <a:lstStyle/>
           <a:p>
             <a:pPr algn="ctr"/>
+            <a:endParaRPr/>
           </a:p>
         </p:txBody>
       </p:sp>
@@ -11638,6 +12050,7 @@
           <a:lstStyle/>
           <a:p>
             <a:pPr algn="ctr"/>
+            <a:endParaRPr/>
           </a:p>
         </p:txBody>
       </p:sp>
@@ -11755,7 +12168,7 @@
 </file>
 
 <file path=ppt/slides/slide22.xml><?xml version="1.0" encoding="utf-8"?>
-<p:sld xmlns:a="http://schemas.openxmlformats.org/drawingml/2006/main" xmlns:p="http://schemas.openxmlformats.org/presentationml/2006/main" xmlns:r="http://schemas.openxmlformats.org/officeDocument/2006/relationships">
+<p:sld xmlns:a="http://schemas.openxmlformats.org/drawingml/2006/main" xmlns:r="http://schemas.openxmlformats.org/officeDocument/2006/relationships" xmlns:p="http://schemas.openxmlformats.org/presentationml/2006/main">
   <p:cSld>
     <p:bg>
       <p:bgPr>
@@ -11771,7 +12184,14 @@
         <p:cNvGrpSpPr/>
         <p:nvPr/>
       </p:nvGrpSpPr>
-      <p:grpSpPr/>
+      <p:grpSpPr>
+        <a:xfrm>
+          <a:off x="0" y="0"/>
+          <a:ext cx="0" cy="0"/>
+          <a:chOff x="0" y="0"/>
+          <a:chExt cx="0" cy="0"/>
+        </a:xfrm>
+      </p:grpSpPr>
       <p:sp>
         <p:nvSpPr>
           <p:cNvPr id="2" name="TextBox 1"/>
@@ -11882,6 +12302,7 @@
           <a:lstStyle/>
           <a:p>
             <a:pPr algn="ctr"/>
+            <a:endParaRPr/>
           </a:p>
         </p:txBody>
       </p:sp>
@@ -11894,7 +12315,7 @@
 </file>
 
 <file path=ppt/slides/slide23.xml><?xml version="1.0" encoding="utf-8"?>
-<p:sld xmlns:a="http://schemas.openxmlformats.org/drawingml/2006/main" xmlns:p="http://schemas.openxmlformats.org/presentationml/2006/main" xmlns:r="http://schemas.openxmlformats.org/officeDocument/2006/relationships">
+<p:sld xmlns:a="http://schemas.openxmlformats.org/drawingml/2006/main" xmlns:r="http://schemas.openxmlformats.org/officeDocument/2006/relationships" xmlns:p="http://schemas.openxmlformats.org/presentationml/2006/main">
   <p:cSld>
     <p:bg>
       <p:bgPr>
@@ -11910,7 +12331,14 @@
         <p:cNvGrpSpPr/>
         <p:nvPr/>
       </p:nvGrpSpPr>
-      <p:grpSpPr/>
+      <p:grpSpPr>
+        <a:xfrm>
+          <a:off x="0" y="0"/>
+          <a:ext cx="0" cy="0"/>
+          <a:chOff x="0" y="0"/>
+          <a:chExt cx="0" cy="0"/>
+        </a:xfrm>
+      </p:grpSpPr>
       <p:sp>
         <p:nvSpPr>
           <p:cNvPr id="2" name="TextBox 1"/>
@@ -11986,6 +12414,7 @@
           <a:lstStyle/>
           <a:p>
             <a:pPr algn="ctr"/>
+            <a:endParaRPr/>
           </a:p>
         </p:txBody>
       </p:sp>
@@ -12134,6 +12563,7 @@
           <a:lstStyle/>
           <a:p>
             <a:pPr algn="ctr"/>
+            <a:endParaRPr/>
           </a:p>
         </p:txBody>
       </p:sp>
@@ -12282,6 +12712,7 @@
           <a:lstStyle/>
           <a:p>
             <a:pPr algn="ctr"/>
+            <a:endParaRPr/>
           </a:p>
         </p:txBody>
       </p:sp>
@@ -12392,13 +12823,13 @@
       </p:sp>
       <p:sp>
         <p:nvSpPr>
-          <p:cNvPr id="15" name="Rounded Rectangle 14"/>
+          <p:cNvPr id="19" name="Rounded Rectangle 18"/>
           <p:cNvSpPr/>
           <p:nvPr/>
         </p:nvSpPr>
         <p:spPr>
           <a:xfrm>
-            <a:off x="731520" y="3346704"/>
+            <a:off x="731520" y="3355848"/>
             <a:ext cx="10515600" cy="548640"/>
           </a:xfrm>
           <a:prstGeom prst="roundRect">
@@ -12430,18 +12861,19 @@
           <a:lstStyle/>
           <a:p>
             <a:pPr algn="ctr"/>
-          </a:p>
-        </p:txBody>
-      </p:sp>
-      <p:sp>
-        <p:nvSpPr>
-          <p:cNvPr id="16" name="TextBox 15"/>
-          <p:cNvSpPr txBox="1"/>
-          <p:nvPr/>
-        </p:nvSpPr>
-        <p:spPr>
-          <a:xfrm>
-            <a:off x="914400" y="3364992"/>
+            <a:endParaRPr/>
+          </a:p>
+        </p:txBody>
+      </p:sp>
+      <p:sp>
+        <p:nvSpPr>
+          <p:cNvPr id="20" name="TextBox 19"/>
+          <p:cNvSpPr txBox="1"/>
+          <p:nvPr/>
+        </p:nvSpPr>
+        <p:spPr>
+          <a:xfrm>
+            <a:off x="914400" y="3374136"/>
             <a:ext cx="365760" cy="274320"/>
           </a:xfrm>
           <a:prstGeom prst="rect">
@@ -12458,7 +12890,7 @@
             <a:pPr algn="l">
               <a:defRPr sz="1300" b="1">
                 <a:solidFill>
-                  <a:srgbClr val="F87171"/>
+                  <a:srgbClr val="A78BFA"/>
                 </a:solidFill>
               </a:defRPr>
             </a:pPr>
@@ -12470,14 +12902,14 @@
       </p:sp>
       <p:sp>
         <p:nvSpPr>
-          <p:cNvPr id="17" name="TextBox 16"/>
-          <p:cNvSpPr txBox="1"/>
-          <p:nvPr/>
-        </p:nvSpPr>
-        <p:spPr>
-          <a:xfrm>
-            <a:off x="1280160" y="3364992"/>
-            <a:ext cx="5029200" cy="274320"/>
+          <p:cNvPr id="21" name="TextBox 20"/>
+          <p:cNvSpPr txBox="1"/>
+          <p:nvPr/>
+        </p:nvSpPr>
+        <p:spPr>
+          <a:xfrm>
+            <a:off x="1280160" y="3374136"/>
+            <a:ext cx="5029200" cy="292388"/>
           </a:xfrm>
           <a:prstGeom prst="rect">
             <a:avLst/>
@@ -12493,25 +12925,59 @@
             <a:pPr algn="l">
               <a:defRPr sz="1300" b="1">
                 <a:solidFill>
-                  <a:srgbClr val="F87171"/>
-                </a:solidFill>
-              </a:defRPr>
-            </a:pPr>
-            <a:r>
-              <a:t>[FromBody] en tipos con 'required'</a:t>
-            </a:r>
-          </a:p>
-        </p:txBody>
-      </p:sp>
-      <p:sp>
-        <p:nvSpPr>
-          <p:cNvPr id="18" name="TextBox 17"/>
-          <p:cNvSpPr txBox="1"/>
-          <p:nvPr/>
-        </p:nvSpPr>
-        <p:spPr>
-          <a:xfrm>
-            <a:off x="1280160" y="3621024"/>
+                  <a:srgbClr val="A78BFA"/>
+                </a:solidFill>
+              </a:defRPr>
+            </a:pPr>
+            <a:r>
+              <a:rPr dirty="0"/>
+              <a:t>La </a:t>
+            </a:r>
+            <a:r>
+              <a:rPr dirty="0" err="1"/>
+              <a:t>abstracción</a:t>
+            </a:r>
+            <a:r>
+              <a:rPr dirty="0"/>
+              <a:t> de </a:t>
+            </a:r>
+            <a:r>
+              <a:rPr dirty="0" err="1"/>
+              <a:t>proveedor</a:t>
+            </a:r>
+            <a:r>
+              <a:rPr dirty="0"/>
+              <a:t> </a:t>
+            </a:r>
+            <a:r>
+              <a:rPr lang="en-US" dirty="0"/>
+              <a:t>da </a:t>
+            </a:r>
+            <a:r>
+              <a:rPr lang="en-US" dirty="0" err="1"/>
+              <a:t>mucha</a:t>
+            </a:r>
+            <a:r>
+              <a:rPr lang="en-US" dirty="0"/>
+              <a:t> </a:t>
+            </a:r>
+            <a:r>
+              <a:rPr lang="en-US" dirty="0" err="1"/>
+              <a:t>flexibilidad</a:t>
+            </a:r>
+            <a:endParaRPr dirty="0"/>
+          </a:p>
+        </p:txBody>
+      </p:sp>
+      <p:sp>
+        <p:nvSpPr>
+          <p:cNvPr id="22" name="TextBox 21"/>
+          <p:cNvSpPr txBox="1"/>
+          <p:nvPr/>
+        </p:nvSpPr>
+        <p:spPr>
+          <a:xfrm>
+            <a:off x="1280160" y="3630168"/>
             <a:ext cx="9601200" cy="256032"/>
           </a:xfrm>
           <a:prstGeom prst="rect">
@@ -12533,20 +12999,77 @@
               </a:defRPr>
             </a:pPr>
             <a:r>
-              <a:t>Sin él, el framework tira InvalidOperationException en startup y deja todos los endpoints offline</a:t>
-            </a:r>
-          </a:p>
-        </p:txBody>
-      </p:sp>
-      <p:sp>
-        <p:nvSpPr>
-          <p:cNvPr id="19" name="Rounded Rectangle 18"/>
+              <a:rPr dirty="0"/>
+              <a:t>Cambiar de </a:t>
+            </a:r>
+            <a:r>
+              <a:rPr dirty="0" err="1"/>
+              <a:t>Ollama</a:t>
+            </a:r>
+            <a:r>
+              <a:rPr dirty="0"/>
+              <a:t> a Bedrock no </a:t>
+            </a:r>
+            <a:r>
+              <a:rPr dirty="0" err="1"/>
+              <a:t>requirió</a:t>
+            </a:r>
+            <a:r>
+              <a:rPr dirty="0"/>
+              <a:t> </a:t>
+            </a:r>
+            <a:r>
+              <a:rPr dirty="0" err="1"/>
+              <a:t>tocar</a:t>
+            </a:r>
+            <a:r>
+              <a:rPr dirty="0"/>
+              <a:t> </a:t>
+            </a:r>
+            <a:r>
+              <a:rPr dirty="0" err="1"/>
+              <a:t>ningún</a:t>
+            </a:r>
+            <a:r>
+              <a:rPr dirty="0"/>
+              <a:t> </a:t>
+            </a:r>
+            <a:r>
+              <a:rPr dirty="0" err="1"/>
+              <a:t>agente</a:t>
+            </a:r>
+            <a:r>
+              <a:rPr dirty="0"/>
+              <a:t> </a:t>
+            </a:r>
+            <a:r>
+              <a:rPr dirty="0" err="1"/>
+              <a:t>ni</a:t>
+            </a:r>
+            <a:r>
+              <a:rPr dirty="0"/>
+              <a:t> </a:t>
+            </a:r>
+            <a:r>
+              <a:rPr dirty="0" err="1"/>
+              <a:t>el</a:t>
+            </a:r>
+            <a:r>
+              <a:rPr dirty="0"/>
+              <a:t> supervisor</a:t>
+            </a:r>
+          </a:p>
+        </p:txBody>
+      </p:sp>
+      <p:sp>
+        <p:nvSpPr>
+          <p:cNvPr id="23" name="Rounded Rectangle 22"/>
           <p:cNvSpPr/>
           <p:nvPr/>
         </p:nvSpPr>
         <p:spPr>
           <a:xfrm>
-            <a:off x="731520" y="4005072"/>
+            <a:off x="731520" y="4014216"/>
             <a:ext cx="10515600" cy="548640"/>
           </a:xfrm>
           <a:prstGeom prst="roundRect">
@@ -12578,18 +13101,19 @@
           <a:lstStyle/>
           <a:p>
             <a:pPr algn="ctr"/>
-          </a:p>
-        </p:txBody>
-      </p:sp>
-      <p:sp>
-        <p:nvSpPr>
-          <p:cNvPr id="20" name="TextBox 19"/>
-          <p:cNvSpPr txBox="1"/>
-          <p:nvPr/>
-        </p:nvSpPr>
-        <p:spPr>
-          <a:xfrm>
-            <a:off x="914400" y="4023360"/>
+            <a:endParaRPr/>
+          </a:p>
+        </p:txBody>
+      </p:sp>
+      <p:sp>
+        <p:nvSpPr>
+          <p:cNvPr id="24" name="TextBox 23"/>
+          <p:cNvSpPr txBox="1"/>
+          <p:nvPr/>
+        </p:nvSpPr>
+        <p:spPr>
+          <a:xfrm>
+            <a:off x="914400" y="4032504"/>
             <a:ext cx="365760" cy="274320"/>
           </a:xfrm>
           <a:prstGeom prst="rect">
@@ -12606,7 +13130,7 @@
             <a:pPr algn="l">
               <a:defRPr sz="1300" b="1">
                 <a:solidFill>
-                  <a:srgbClr val="A78BFA"/>
+                  <a:srgbClr val="F472B6"/>
                 </a:solidFill>
               </a:defRPr>
             </a:pPr>
@@ -12618,14 +13142,14 @@
       </p:sp>
       <p:sp>
         <p:nvSpPr>
-          <p:cNvPr id="21" name="TextBox 20"/>
-          <p:cNvSpPr txBox="1"/>
-          <p:nvPr/>
-        </p:nvSpPr>
-        <p:spPr>
-          <a:xfrm>
-            <a:off x="1280160" y="4023360"/>
-            <a:ext cx="5029200" cy="274320"/>
+          <p:cNvPr id="25" name="TextBox 24"/>
+          <p:cNvSpPr txBox="1"/>
+          <p:nvPr/>
+        </p:nvSpPr>
+        <p:spPr>
+          <a:xfrm>
+            <a:off x="1280159" y="4032504"/>
+            <a:ext cx="8522602" cy="292388"/>
           </a:xfrm>
           <a:prstGeom prst="rect">
             <a:avLst/>
@@ -12641,26 +13165,116 @@
             <a:pPr algn="l">
               <a:defRPr sz="1300" b="1">
                 <a:solidFill>
-                  <a:srgbClr val="A78BFA"/>
-                </a:solidFill>
-              </a:defRPr>
-            </a:pPr>
-            <a:r>
-              <a:t>La abstracción de proveedor se paga de inmediato</a:t>
-            </a:r>
-          </a:p>
-        </p:txBody>
-      </p:sp>
-      <p:sp>
-        <p:nvSpPr>
-          <p:cNvPr id="22" name="TextBox 21"/>
-          <p:cNvSpPr txBox="1"/>
-          <p:nvPr/>
-        </p:nvSpPr>
-        <p:spPr>
-          <a:xfrm>
-            <a:off x="1280160" y="4279392"/>
-            <a:ext cx="9601200" cy="256032"/>
+                  <a:srgbClr val="F472B6"/>
+                </a:solidFill>
+              </a:defRPr>
+            </a:pPr>
+            <a:r>
+              <a:rPr lang="en-US" dirty="0"/>
+              <a:t>En la </a:t>
+            </a:r>
+            <a:r>
+              <a:rPr lang="en-US" dirty="0" err="1"/>
+              <a:t>comparacion</a:t>
+            </a:r>
+            <a:r>
+              <a:rPr lang="en-US" dirty="0"/>
+              <a:t> de </a:t>
+            </a:r>
+            <a:r>
+              <a:rPr lang="en-US" dirty="0" err="1"/>
+              <a:t>resultados</a:t>
+            </a:r>
+            <a:r>
+              <a:rPr lang="en-US" dirty="0"/>
+              <a:t> de </a:t>
+            </a:r>
+            <a:r>
+              <a:rPr lang="en-US" dirty="0" err="1"/>
+              <a:t>diferentes</a:t>
+            </a:r>
+            <a:r>
+              <a:rPr lang="en-US" dirty="0"/>
+              <a:t> </a:t>
+            </a:r>
+            <a:r>
+              <a:rPr lang="en-US" dirty="0" err="1"/>
+              <a:t>modelos</a:t>
+            </a:r>
+            <a:r>
+              <a:rPr lang="en-US" dirty="0"/>
+              <a:t> </a:t>
+            </a:r>
+            <a:r>
+              <a:rPr lang="en-US" dirty="0" err="1"/>
+              <a:t>el</a:t>
+            </a:r>
+            <a:r>
+              <a:rPr lang="en-US" dirty="0"/>
+              <a:t> </a:t>
+            </a:r>
+            <a:r>
+              <a:rPr lang="en-US" dirty="0" err="1"/>
+              <a:t>analisis</a:t>
+            </a:r>
+            <a:r>
+              <a:rPr lang="en-US" dirty="0"/>
+              <a:t> </a:t>
+            </a:r>
+            <a:r>
+              <a:rPr dirty="0" err="1"/>
+              <a:t>semántico</a:t>
+            </a:r>
+            <a:r>
+              <a:rPr dirty="0"/>
+              <a:t> </a:t>
+            </a:r>
+            <a:r>
+              <a:rPr dirty="0" err="1"/>
+              <a:t>supera</a:t>
+            </a:r>
+            <a:r>
+              <a:rPr dirty="0"/>
+              <a:t> a</a:t>
+            </a:r>
+            <a:r>
+              <a:rPr lang="en-US" dirty="0"/>
+              <a:t> la </a:t>
+            </a:r>
+            <a:r>
+              <a:rPr lang="en-US" dirty="0" err="1"/>
+              <a:t>comparacion</a:t>
+            </a:r>
+            <a:r>
+              <a:rPr lang="en-US" dirty="0"/>
+              <a:t> de </a:t>
+            </a:r>
+            <a:r>
+              <a:rPr lang="en-US" dirty="0" err="1"/>
+              <a:t>texto</a:t>
+            </a:r>
+            <a:r>
+              <a:rPr lang="en-US" dirty="0"/>
+              <a:t> </a:t>
+            </a:r>
+            <a:r>
+              <a:rPr dirty="0" err="1"/>
+              <a:t>exacto</a:t>
+            </a:r>
+            <a:endParaRPr dirty="0"/>
+          </a:p>
+        </p:txBody>
+      </p:sp>
+      <p:sp>
+        <p:nvSpPr>
+          <p:cNvPr id="26" name="TextBox 25"/>
+          <p:cNvSpPr txBox="1"/>
+          <p:nvPr/>
+        </p:nvSpPr>
+        <p:spPr>
+          <a:xfrm>
+            <a:off x="1280160" y="4288536"/>
+            <a:ext cx="9601200" cy="261610"/>
           </a:xfrm>
           <a:prstGeom prst="rect">
             <a:avLst/>
@@ -12681,20 +13295,118 @@
               </a:defRPr>
             </a:pPr>
             <a:r>
-              <a:t>Cambiar de Ollama a Bedrock no requirió tocar ningún agente ni el supervisor</a:t>
-            </a:r>
-          </a:p>
-        </p:txBody>
-      </p:sp>
-      <p:sp>
-        <p:nvSpPr>
-          <p:cNvPr id="23" name="Rounded Rectangle 22"/>
+              <a:rPr dirty="0"/>
+              <a:t>"</a:t>
+            </a:r>
+            <a:r>
+              <a:rPr dirty="0" err="1"/>
+              <a:t>Expiración</a:t>
+            </a:r>
+            <a:r>
+              <a:rPr dirty="0"/>
+              <a:t> del link" ≠ "</a:t>
+            </a:r>
+            <a:r>
+              <a:rPr dirty="0" err="1"/>
+              <a:t>regla</a:t>
+            </a:r>
+            <a:r>
+              <a:rPr dirty="0"/>
+              <a:t> de </a:t>
+            </a:r>
+            <a:r>
+              <a:rPr dirty="0" err="1"/>
+              <a:t>vencimiento</a:t>
+            </a:r>
+            <a:r>
+              <a:rPr lang="en-US" dirty="0"/>
+              <a:t> de </a:t>
+            </a:r>
+            <a:r>
+              <a:rPr lang="en-US" dirty="0" err="1"/>
+              <a:t>validación</a:t>
+            </a:r>
+            <a:r>
+              <a:rPr lang="en-US" dirty="0"/>
+              <a:t> de email</a:t>
+            </a:r>
+            <a:r>
+              <a:rPr dirty="0"/>
+              <a:t>" </a:t>
+            </a:r>
+            <a:r>
+              <a:rPr dirty="0" err="1"/>
+              <a:t>en</a:t>
+            </a:r>
+            <a:r>
+              <a:rPr dirty="0"/>
+              <a:t> </a:t>
+            </a:r>
+            <a:r>
+              <a:rPr lang="en-US" dirty="0"/>
+              <a:t> </a:t>
+            </a:r>
+            <a:r>
+              <a:rPr lang="en-US" dirty="0" err="1"/>
+              <a:t>comparación</a:t>
+            </a:r>
+            <a:r>
+              <a:rPr lang="en-US" dirty="0"/>
+              <a:t> de </a:t>
+            </a:r>
+            <a:r>
+              <a:rPr lang="en-US" dirty="0" err="1"/>
+              <a:t>texto</a:t>
+            </a:r>
+            <a:r>
+              <a:rPr lang="en-US" dirty="0"/>
+              <a:t> </a:t>
+            </a:r>
+            <a:r>
+              <a:rPr lang="en-US" dirty="0" err="1"/>
+              <a:t>exacto</a:t>
+            </a:r>
+            <a:r>
+              <a:rPr lang="en-US" dirty="0"/>
+              <a:t> </a:t>
+            </a:r>
+            <a:r>
+              <a:rPr dirty="0"/>
+              <a:t>— </a:t>
+            </a:r>
+            <a:r>
+              <a:rPr dirty="0" err="1"/>
+              <a:t>pero</a:t>
+            </a:r>
+            <a:r>
+              <a:rPr dirty="0"/>
+              <a:t> son la </a:t>
+            </a:r>
+            <a:r>
+              <a:rPr dirty="0" err="1"/>
+              <a:t>misma</a:t>
+            </a:r>
+            <a:r>
+              <a:rPr dirty="0"/>
+              <a:t> </a:t>
+            </a:r>
+            <a:r>
+              <a:rPr dirty="0" err="1"/>
+              <a:t>preocupación</a:t>
+            </a:r>
+            <a:endParaRPr dirty="0"/>
+          </a:p>
+        </p:txBody>
+      </p:sp>
+      <p:sp>
+        <p:nvSpPr>
+          <p:cNvPr id="27" name="Rounded Rectangle 26"/>
           <p:cNvSpPr/>
           <p:nvPr/>
         </p:nvSpPr>
         <p:spPr>
           <a:xfrm>
-            <a:off x="731520" y="4663440"/>
+            <a:off x="731520" y="4672584"/>
             <a:ext cx="10515600" cy="548640"/>
           </a:xfrm>
           <a:prstGeom prst="roundRect">
@@ -12726,18 +13438,19 @@
           <a:lstStyle/>
           <a:p>
             <a:pPr algn="ctr"/>
-          </a:p>
-        </p:txBody>
-      </p:sp>
-      <p:sp>
-        <p:nvSpPr>
-          <p:cNvPr id="24" name="TextBox 23"/>
-          <p:cNvSpPr txBox="1"/>
-          <p:nvPr/>
-        </p:nvSpPr>
-        <p:spPr>
-          <a:xfrm>
-            <a:off x="914400" y="4681728"/>
+            <a:endParaRPr/>
+          </a:p>
+        </p:txBody>
+      </p:sp>
+      <p:sp>
+        <p:nvSpPr>
+          <p:cNvPr id="28" name="TextBox 27"/>
+          <p:cNvSpPr txBox="1"/>
+          <p:nvPr/>
+        </p:nvSpPr>
+        <p:spPr>
+          <a:xfrm>
+            <a:off x="914400" y="4690872"/>
             <a:ext cx="365760" cy="274320"/>
           </a:xfrm>
           <a:prstGeom prst="rect">
@@ -12754,7 +13467,7 @@
             <a:pPr algn="l">
               <a:defRPr sz="1300" b="1">
                 <a:solidFill>
-                  <a:srgbClr val="F472B6"/>
+                  <a:srgbClr val="60A5FA"/>
                 </a:solidFill>
               </a:defRPr>
             </a:pPr>
@@ -12766,13 +13479,13 @@
       </p:sp>
       <p:sp>
         <p:nvSpPr>
-          <p:cNvPr id="25" name="TextBox 24"/>
-          <p:cNvSpPr txBox="1"/>
-          <p:nvPr/>
-        </p:nvSpPr>
-        <p:spPr>
-          <a:xfrm>
-            <a:off x="1280160" y="4681728"/>
+          <p:cNvPr id="29" name="TextBox 28"/>
+          <p:cNvSpPr txBox="1"/>
+          <p:nvPr/>
+        </p:nvSpPr>
+        <p:spPr>
+          <a:xfrm>
+            <a:off x="1280160" y="4690872"/>
             <a:ext cx="5029200" cy="274320"/>
           </a:xfrm>
           <a:prstGeom prst="rect">
@@ -12789,25 +13502,25 @@
             <a:pPr algn="l">
               <a:defRPr sz="1300" b="1">
                 <a:solidFill>
-                  <a:srgbClr val="F472B6"/>
-                </a:solidFill>
-              </a:defRPr>
-            </a:pPr>
-            <a:r>
-              <a:t>El diff semántico supera al diff exacto</a:t>
-            </a:r>
-          </a:p>
-        </p:txBody>
-      </p:sp>
-      <p:sp>
-        <p:nvSpPr>
-          <p:cNvPr id="26" name="TextBox 25"/>
-          <p:cNvSpPr txBox="1"/>
-          <p:nvPr/>
-        </p:nvSpPr>
-        <p:spPr>
-          <a:xfrm>
-            <a:off x="1280160" y="4937760"/>
+                  <a:srgbClr val="60A5FA"/>
+                </a:solidFill>
+              </a:defRPr>
+            </a:pPr>
+            <a:r>
+              <a:t>Prompts necesitan schema de output explícito</a:t>
+            </a:r>
+          </a:p>
+        </p:txBody>
+      </p:sp>
+      <p:sp>
+        <p:nvSpPr>
+          <p:cNvPr id="30" name="TextBox 29"/>
+          <p:cNvSpPr txBox="1"/>
+          <p:nvPr/>
+        </p:nvSpPr>
+        <p:spPr>
+          <a:xfrm>
+            <a:off x="1280160" y="4946904"/>
             <a:ext cx="9601200" cy="256032"/>
           </a:xfrm>
           <a:prstGeom prst="rect">
@@ -12829,303 +13542,7 @@
               </a:defRPr>
             </a:pPr>
             <a:r>
-              <a:t>"Expiración del link" ≠ "regla de vencimiento" en string diff — pero son la misma preocupación</a:t>
-            </a:r>
-          </a:p>
-        </p:txBody>
-      </p:sp>
-      <p:sp>
-        <p:nvSpPr>
-          <p:cNvPr id="27" name="Rounded Rectangle 26"/>
-          <p:cNvSpPr/>
-          <p:nvPr/>
-        </p:nvSpPr>
-        <p:spPr>
-          <a:xfrm>
-            <a:off x="731520" y="5321808"/>
-            <a:ext cx="10515600" cy="548640"/>
-          </a:xfrm>
-          <a:prstGeom prst="roundRect">
-            <a:avLst/>
-          </a:prstGeom>
-          <a:solidFill>
-            <a:srgbClr val="27344A"/>
-          </a:solidFill>
-          <a:ln>
-            <a:noFill/>
-          </a:ln>
-        </p:spPr>
-        <p:style>
-          <a:lnRef idx="1">
-            <a:schemeClr val="accent1"/>
-          </a:lnRef>
-          <a:fillRef idx="3">
-            <a:schemeClr val="accent1"/>
-          </a:fillRef>
-          <a:effectRef idx="2">
-            <a:schemeClr val="accent1"/>
-          </a:effectRef>
-          <a:fontRef idx="minor">
-            <a:schemeClr val="lt1"/>
-          </a:fontRef>
-        </p:style>
-        <p:txBody>
-          <a:bodyPr rtlCol="0" anchor="ctr"/>
-          <a:lstStyle/>
-          <a:p>
-            <a:pPr algn="ctr"/>
-          </a:p>
-        </p:txBody>
-      </p:sp>
-      <p:sp>
-        <p:nvSpPr>
-          <p:cNvPr id="28" name="TextBox 27"/>
-          <p:cNvSpPr txBox="1"/>
-          <p:nvPr/>
-        </p:nvSpPr>
-        <p:spPr>
-          <a:xfrm>
-            <a:off x="914400" y="5340096"/>
-            <a:ext cx="365760" cy="274320"/>
-          </a:xfrm>
-          <a:prstGeom prst="rect">
-            <a:avLst/>
-          </a:prstGeom>
-          <a:noFill/>
-        </p:spPr>
-        <p:txBody>
-          <a:bodyPr wrap="square">
-            <a:spAutoFit/>
-          </a:bodyPr>
-          <a:lstStyle/>
-          <a:p>
-            <a:pPr algn="l">
-              <a:defRPr sz="1300" b="1">
-                <a:solidFill>
-                  <a:srgbClr val="60A5FA"/>
-                </a:solidFill>
-              </a:defRPr>
-            </a:pPr>
-            <a:r>
-              <a:t>✦</a:t>
-            </a:r>
-          </a:p>
-        </p:txBody>
-      </p:sp>
-      <p:sp>
-        <p:nvSpPr>
-          <p:cNvPr id="29" name="TextBox 28"/>
-          <p:cNvSpPr txBox="1"/>
-          <p:nvPr/>
-        </p:nvSpPr>
-        <p:spPr>
-          <a:xfrm>
-            <a:off x="1280160" y="5340096"/>
-            <a:ext cx="5029200" cy="274320"/>
-          </a:xfrm>
-          <a:prstGeom prst="rect">
-            <a:avLst/>
-          </a:prstGeom>
-          <a:noFill/>
-        </p:spPr>
-        <p:txBody>
-          <a:bodyPr wrap="square">
-            <a:spAutoFit/>
-          </a:bodyPr>
-          <a:lstStyle/>
-          <a:p>
-            <a:pPr algn="l">
-              <a:defRPr sz="1300" b="1">
-                <a:solidFill>
-                  <a:srgbClr val="60A5FA"/>
-                </a:solidFill>
-              </a:defRPr>
-            </a:pPr>
-            <a:r>
-              <a:t>Prompts necesitan schema de output explícito</a:t>
-            </a:r>
-          </a:p>
-        </p:txBody>
-      </p:sp>
-      <p:sp>
-        <p:nvSpPr>
-          <p:cNvPr id="30" name="TextBox 29"/>
-          <p:cNvSpPr txBox="1"/>
-          <p:nvPr/>
-        </p:nvSpPr>
-        <p:spPr>
-          <a:xfrm>
-            <a:off x="1280160" y="5596128"/>
-            <a:ext cx="9601200" cy="256032"/>
-          </a:xfrm>
-          <a:prstGeom prst="rect">
-            <a:avLst/>
-          </a:prstGeom>
-          <a:noFill/>
-        </p:spPr>
-        <p:txBody>
-          <a:bodyPr wrap="square">
-            <a:spAutoFit/>
-          </a:bodyPr>
-          <a:lstStyle/>
-          <a:p>
-            <a:pPr algn="l">
-              <a:defRPr sz="1100" b="0">
-                <a:solidFill>
-                  <a:srgbClr val="94A3B8"/>
-                </a:solidFill>
-              </a:defRPr>
-            </a:pPr>
-            <a:r>
               <a:t>Incluir nombres de propiedades + tipos + ejemplo → parse success rate dramáticamente mayor</a:t>
-            </a:r>
-          </a:p>
-        </p:txBody>
-      </p:sp>
-      <p:sp>
-        <p:nvSpPr>
-          <p:cNvPr id="31" name="Rounded Rectangle 30"/>
-          <p:cNvSpPr/>
-          <p:nvPr/>
-        </p:nvSpPr>
-        <p:spPr>
-          <a:xfrm>
-            <a:off x="731520" y="5980176"/>
-            <a:ext cx="10515600" cy="548640"/>
-          </a:xfrm>
-          <a:prstGeom prst="roundRect">
-            <a:avLst/>
-          </a:prstGeom>
-          <a:solidFill>
-            <a:srgbClr val="27344A"/>
-          </a:solidFill>
-          <a:ln>
-            <a:noFill/>
-          </a:ln>
-        </p:spPr>
-        <p:style>
-          <a:lnRef idx="1">
-            <a:schemeClr val="accent1"/>
-          </a:lnRef>
-          <a:fillRef idx="3">
-            <a:schemeClr val="accent1"/>
-          </a:fillRef>
-          <a:effectRef idx="2">
-            <a:schemeClr val="accent1"/>
-          </a:effectRef>
-          <a:fontRef idx="minor">
-            <a:schemeClr val="lt1"/>
-          </a:fontRef>
-        </p:style>
-        <p:txBody>
-          <a:bodyPr rtlCol="0" anchor="ctr"/>
-          <a:lstStyle/>
-          <a:p>
-            <a:pPr algn="ctr"/>
-          </a:p>
-        </p:txBody>
-      </p:sp>
-      <p:sp>
-        <p:nvSpPr>
-          <p:cNvPr id="32" name="TextBox 31"/>
-          <p:cNvSpPr txBox="1"/>
-          <p:nvPr/>
-        </p:nvSpPr>
-        <p:spPr>
-          <a:xfrm>
-            <a:off x="914400" y="5998464"/>
-            <a:ext cx="365760" cy="274320"/>
-          </a:xfrm>
-          <a:prstGeom prst="rect">
-            <a:avLst/>
-          </a:prstGeom>
-          <a:noFill/>
-        </p:spPr>
-        <p:txBody>
-          <a:bodyPr wrap="square">
-            <a:spAutoFit/>
-          </a:bodyPr>
-          <a:lstStyle/>
-          <a:p>
-            <a:pPr algn="l">
-              <a:defRPr sz="1300" b="1">
-                <a:solidFill>
-                  <a:srgbClr val="FBBF24"/>
-                </a:solidFill>
-              </a:defRPr>
-            </a:pPr>
-            <a:r>
-              <a:t>✦</a:t>
-            </a:r>
-          </a:p>
-        </p:txBody>
-      </p:sp>
-      <p:sp>
-        <p:nvSpPr>
-          <p:cNvPr id="33" name="TextBox 32"/>
-          <p:cNvSpPr txBox="1"/>
-          <p:nvPr/>
-        </p:nvSpPr>
-        <p:spPr>
-          <a:xfrm>
-            <a:off x="1280160" y="5998464"/>
-            <a:ext cx="5029200" cy="274320"/>
-          </a:xfrm>
-          <a:prstGeom prst="rect">
-            <a:avLst/>
-          </a:prstGeom>
-          <a:noFill/>
-        </p:spPr>
-        <p:txBody>
-          <a:bodyPr wrap="square">
-            <a:spAutoFit/>
-          </a:bodyPr>
-          <a:lstStyle/>
-          <a:p>
-            <a:pPr algn="l">
-              <a:defRPr sz="1300" b="1">
-                <a:solidFill>
-                  <a:srgbClr val="FBBF24"/>
-                </a:solidFill>
-              </a:defRPr>
-            </a:pPr>
-            <a:r>
-              <a:t>Errores de cloud deben surfacearse</a:t>
-            </a:r>
-          </a:p>
-        </p:txBody>
-      </p:sp>
-      <p:sp>
-        <p:nvSpPr>
-          <p:cNvPr id="34" name="TextBox 33"/>
-          <p:cNvSpPr txBox="1"/>
-          <p:nvPr/>
-        </p:nvSpPr>
-        <p:spPr>
-          <a:xfrm>
-            <a:off x="1280160" y="6254496"/>
-            <a:ext cx="9601200" cy="256032"/>
-          </a:xfrm>
-          <a:prstGeom prst="rect">
-            <a:avLst/>
-          </a:prstGeom>
-          <a:noFill/>
-        </p:spPr>
-        <p:txBody>
-          <a:bodyPr wrap="square">
-            <a:spAutoFit/>
-          </a:bodyPr>
-          <a:lstStyle/>
-          <a:p>
-            <a:pPr algn="l">
-              <a:defRPr sz="1100" b="0">
-                <a:solidFill>
-                  <a:srgbClr val="94A3B8"/>
-                </a:solidFill>
-              </a:defRPr>
-            </a:pPr>
-            <a:r>
-              <a:t>AWS lanza excepciones útiles → sin try/catch se convierten en 500 genéricos sin info accionable</a:t>
             </a:r>
           </a:p>
         </p:txBody>
@@ -13139,7 +13556,7 @@
 </file>
 
 <file path=ppt/slides/slide24.xml><?xml version="1.0" encoding="utf-8"?>
-<p:sld xmlns:a="http://schemas.openxmlformats.org/drawingml/2006/main" xmlns:p="http://schemas.openxmlformats.org/presentationml/2006/main" xmlns:r="http://schemas.openxmlformats.org/officeDocument/2006/relationships">
+<p:sld xmlns:a="http://schemas.openxmlformats.org/drawingml/2006/main" xmlns:r="http://schemas.openxmlformats.org/officeDocument/2006/relationships" xmlns:p="http://schemas.openxmlformats.org/presentationml/2006/main">
   <p:cSld>
     <p:bg>
       <p:bgPr>
@@ -13155,7 +13572,14 @@
         <p:cNvGrpSpPr/>
         <p:nvPr/>
       </p:nvGrpSpPr>
-      <p:grpSpPr/>
+      <p:grpSpPr>
+        <a:xfrm>
+          <a:off x="0" y="0"/>
+          <a:ext cx="0" cy="0"/>
+          <a:chOff x="0" y="0"/>
+          <a:chExt cx="0" cy="0"/>
+        </a:xfrm>
+      </p:grpSpPr>
       <p:sp>
         <p:nvSpPr>
           <p:cNvPr id="2" name="TextBox 1"/>
@@ -13266,6 +13690,7 @@
           <a:lstStyle/>
           <a:p>
             <a:pPr algn="ctr"/>
+            <a:endParaRPr/>
           </a:p>
         </p:txBody>
       </p:sp>
@@ -13278,7 +13703,7 @@
 </file>
 
 <file path=ppt/slides/slide25.xml><?xml version="1.0" encoding="utf-8"?>
-<p:sld xmlns:a="http://schemas.openxmlformats.org/drawingml/2006/main" xmlns:p="http://schemas.openxmlformats.org/presentationml/2006/main" xmlns:r="http://schemas.openxmlformats.org/officeDocument/2006/relationships">
+<p:sld xmlns:a="http://schemas.openxmlformats.org/drawingml/2006/main" xmlns:r="http://schemas.openxmlformats.org/officeDocument/2006/relationships" xmlns:p="http://schemas.openxmlformats.org/presentationml/2006/main">
   <p:cSld>
     <p:bg>
       <p:bgPr>
@@ -13294,7 +13719,14 @@
         <p:cNvGrpSpPr/>
         <p:nvPr/>
       </p:nvGrpSpPr>
-      <p:grpSpPr/>
+      <p:grpSpPr>
+        <a:xfrm>
+          <a:off x="0" y="0"/>
+          <a:ext cx="0" cy="0"/>
+          <a:chOff x="0" y="0"/>
+          <a:chExt cx="0" cy="0"/>
+        </a:xfrm>
+      </p:grpSpPr>
       <p:sp>
         <p:nvSpPr>
           <p:cNvPr id="2" name="TextBox 1"/>
@@ -13304,7 +13736,7 @@
         <p:spPr>
           <a:xfrm>
             <a:off x="731520" y="365760"/>
-            <a:ext cx="10058400" cy="548640"/>
+            <a:ext cx="10058400" cy="523220"/>
           </a:xfrm>
           <a:prstGeom prst="rect">
             <a:avLst/>
@@ -13325,7 +13757,8 @@
               </a:defRPr>
             </a:pPr>
             <a:r>
-              <a:t>Demo Script — 10 minutos</a:t>
+              <a:rPr dirty="0"/>
+              <a:t>Demo Script</a:t>
             </a:r>
           </a:p>
         </p:txBody>
@@ -13339,7 +13772,7 @@
         <p:spPr>
           <a:xfrm>
             <a:off x="365760" y="1554480"/>
-            <a:ext cx="2103120" cy="4754880"/>
+            <a:ext cx="2103120" cy="2331720"/>
           </a:xfrm>
           <a:prstGeom prst="roundRect">
             <a:avLst/>
@@ -13370,6 +13803,7 @@
           <a:lstStyle/>
           <a:p>
             <a:pPr algn="ctr"/>
+            <a:endParaRPr/>
           </a:p>
         </p:txBody>
       </p:sp>
@@ -13409,7 +13843,7 @@
           </a:fontRef>
         </p:style>
         <p:txBody>
-          <a:bodyPr rtlCol="0" anchor="ctr" wrap="square"/>
+          <a:bodyPr wrap="square" rtlCol="0" anchor="ctr"/>
           <a:lstStyle/>
           <a:p>
             <a:pPr algn="ctr">
@@ -13469,7 +13903,7 @@
         <p:spPr>
           <a:xfrm>
             <a:off x="475488" y="2651760"/>
-            <a:ext cx="1874519" cy="3474720"/>
+            <a:ext cx="1874519" cy="600164"/>
           </a:xfrm>
           <a:prstGeom prst="rect">
             <a:avLst/>
@@ -13490,24 +13924,35 @@
               </a:defRPr>
             </a:pPr>
             <a:r>
-              <a:t>Provider: Ollama</a:t>
-            </a:r>
-            <a:br/>
-            <a:r>
-              <a:t>Mock: "Cambiar texto del botón"</a:t>
-            </a:r>
-            <a:br/>
-            <a:br/>
-            <a:r>
-              <a:t>Solo clarity + ux</a:t>
-            </a:r>
-            <a:br/>
-            <a:r>
-              <a:t>qa/technical/compliance</a:t>
-            </a:r>
-            <a:br/>
-            <a:r>
-              <a:t>skipeados con razón</a:t>
+              <a:rPr dirty="0"/>
+              <a:t>Provider: </a:t>
+            </a:r>
+            <a:r>
+              <a:rPr dirty="0" err="1"/>
+              <a:t>Ollama</a:t>
+            </a:r>
+            <a:br>
+              <a:rPr dirty="0"/>
+            </a:br>
+            <a:r>
+              <a:rPr dirty="0"/>
+              <a:t>Mock: "Cambiar </a:t>
+            </a:r>
+            <a:r>
+              <a:rPr dirty="0" err="1"/>
+              <a:t>texto</a:t>
+            </a:r>
+            <a:r>
+              <a:rPr dirty="0"/>
+              <a:t> del </a:t>
+            </a:r>
+            <a:r>
+              <a:rPr dirty="0" err="1"/>
+              <a:t>botón</a:t>
+            </a:r>
+            <a:r>
+              <a:rPr dirty="0"/>
+              <a:t>"</a:t>
             </a:r>
           </a:p>
         </p:txBody>
@@ -13521,7 +13966,7 @@
         <p:spPr>
           <a:xfrm>
             <a:off x="2697479" y="1554480"/>
-            <a:ext cx="2103120" cy="4754880"/>
+            <a:ext cx="2103120" cy="2331720"/>
           </a:xfrm>
           <a:prstGeom prst="roundRect">
             <a:avLst/>
@@ -13552,6 +13997,7 @@
           <a:lstStyle/>
           <a:p>
             <a:pPr algn="ctr"/>
+            <a:endParaRPr/>
           </a:p>
         </p:txBody>
       </p:sp>
@@ -13591,7 +14037,7 @@
           </a:fontRef>
         </p:style>
         <p:txBody>
-          <a:bodyPr rtlCol="0" anchor="ctr" wrap="square"/>
+          <a:bodyPr wrap="square" rtlCol="0" anchor="ctr"/>
           <a:lstStyle/>
           <a:p>
             <a:pPr algn="ctr">
@@ -13655,7 +14101,7 @@
         <p:spPr>
           <a:xfrm>
             <a:off x="2807207" y="2651760"/>
-            <a:ext cx="1874519" cy="3474720"/>
+            <a:ext cx="1874519" cy="430887"/>
           </a:xfrm>
           <a:prstGeom prst="rect">
             <a:avLst/>
@@ -13676,24 +14122,35 @@
               </a:defRPr>
             </a:pPr>
             <a:r>
-              <a:t>Provider: Ollama</a:t>
-            </a:r>
-            <a:br/>
-            <a:r>
-              <a:t>Mock: "Resetear contraseña"</a:t>
-            </a:r>
-            <a:br/>
-            <a:br/>
-            <a:r>
-              <a:t>clarity + qa + ux</a:t>
-            </a:r>
-            <a:br/>
-            <a:r>
-              <a:t>status yellow</a:t>
-            </a:r>
-            <a:br/>
-            <a:r>
-              <a:t>panel de issues</a:t>
+              <a:rPr dirty="0"/>
+              <a:t>Provider: </a:t>
+            </a:r>
+            <a:r>
+              <a:rPr dirty="0" err="1"/>
+              <a:t>Ollama</a:t>
+            </a:r>
+            <a:br>
+              <a:rPr dirty="0"/>
+            </a:br>
+            <a:r>
+              <a:rPr dirty="0"/>
+              <a:t>Mock: "</a:t>
+            </a:r>
+            <a:r>
+              <a:rPr dirty="0" err="1"/>
+              <a:t>Resetear</a:t>
+            </a:r>
+            <a:r>
+              <a:rPr dirty="0"/>
+              <a:t> </a:t>
+            </a:r>
+            <a:r>
+              <a:rPr dirty="0" err="1"/>
+              <a:t>contraseña</a:t>
+            </a:r>
+            <a:r>
+              <a:rPr dirty="0"/>
+              <a:t>"</a:t>
             </a:r>
           </a:p>
         </p:txBody>
@@ -13707,7 +14164,7 @@
         <p:spPr>
           <a:xfrm>
             <a:off x="5029200" y="1554480"/>
-            <a:ext cx="2103120" cy="4754880"/>
+            <a:ext cx="2103120" cy="2331720"/>
           </a:xfrm>
           <a:prstGeom prst="roundRect">
             <a:avLst/>
@@ -13738,6 +14195,7 @@
           <a:lstStyle/>
           <a:p>
             <a:pPr algn="ctr"/>
+            <a:endParaRPr/>
           </a:p>
         </p:txBody>
       </p:sp>
@@ -13777,7 +14235,7 @@
           </a:fontRef>
         </p:style>
         <p:txBody>
-          <a:bodyPr rtlCol="0" anchor="ctr" wrap="square"/>
+          <a:bodyPr wrap="square" rtlCol="0" anchor="ctr"/>
           <a:lstStyle/>
           <a:p>
             <a:pPr algn="ctr">
@@ -13837,7 +14295,7 @@
         <p:spPr>
           <a:xfrm>
             <a:off x="5138928" y="2651760"/>
-            <a:ext cx="1874519" cy="3474720"/>
+            <a:ext cx="1874519" cy="430887"/>
           </a:xfrm>
           <a:prstGeom prst="rect">
             <a:avLst/>
@@ -13858,24 +14316,27 @@
               </a:defRPr>
             </a:pPr>
             <a:r>
-              <a:t>Provider: Ollama</a:t>
-            </a:r>
-            <a:br/>
-            <a:r>
-              <a:t>Mock: "Retries automáticos"</a:t>
-            </a:r>
-            <a:br/>
-            <a:br/>
-            <a:r>
-              <a:t>clarity + qa + technical</a:t>
-            </a:r>
-            <a:br/>
-            <a:r>
-              <a:t>ux skipeado</a:t>
-            </a:r>
-            <a:br/>
-            <a:r>
-              <a:t>idempotencia detectada</a:t>
+              <a:rPr dirty="0"/>
+              <a:t>Provider: </a:t>
+            </a:r>
+            <a:r>
+              <a:rPr dirty="0" err="1"/>
+              <a:t>Ollama</a:t>
+            </a:r>
+            <a:br>
+              <a:rPr dirty="0"/>
+            </a:br>
+            <a:r>
+              <a:rPr dirty="0"/>
+              <a:t>Mock: "Retries </a:t>
+            </a:r>
+            <a:r>
+              <a:rPr dirty="0" err="1"/>
+              <a:t>automáticos</a:t>
+            </a:r>
+            <a:r>
+              <a:rPr dirty="0"/>
+              <a:t>"</a:t>
             </a:r>
           </a:p>
         </p:txBody>
@@ -13888,8 +14349,8 @@
         </p:nvSpPr>
         <p:spPr>
           <a:xfrm>
-            <a:off x="7360919" y="1554480"/>
-            <a:ext cx="2103120" cy="4754880"/>
+            <a:off x="7360919" y="1554479"/>
+            <a:ext cx="2103120" cy="2331719"/>
           </a:xfrm>
           <a:prstGeom prst="roundRect">
             <a:avLst/>
@@ -13920,6 +14381,7 @@
           <a:lstStyle/>
           <a:p>
             <a:pPr algn="ctr"/>
+            <a:endParaRPr/>
           </a:p>
         </p:txBody>
       </p:sp>
@@ -13959,7 +14421,7 @@
           </a:fontRef>
         </p:style>
         <p:txBody>
-          <a:bodyPr rtlCol="0" anchor="ctr" wrap="square"/>
+          <a:bodyPr wrap="square" rtlCol="0" anchor="ctr"/>
           <a:lstStyle/>
           <a:p>
             <a:pPr algn="ctr">
@@ -14023,7 +14485,7 @@
         <p:spPr>
           <a:xfrm>
             <a:off x="7470647" y="2651760"/>
-            <a:ext cx="1874519" cy="3474720"/>
+            <a:ext cx="1874519" cy="600164"/>
           </a:xfrm>
           <a:prstGeom prst="rect">
             <a:avLst/>
@@ -14044,28 +14506,38 @@
               </a:defRPr>
             </a:pPr>
             <a:r>
+              <a:rPr dirty="0"/>
               <a:t>Provider: Bedrock</a:t>
             </a:r>
-            <a:br/>
-            <a:r>
-              <a:t>Mock: "Descarga datos</a:t>
-            </a:r>
-            <a:br/>
-            <a:r>
-              <a:t>personales"</a:t>
-            </a:r>
-            <a:br/>
-            <a:br/>
-            <a:r>
-              <a:t>compliance activado</a:t>
-            </a:r>
-            <a:br/>
-            <a:r>
-              <a:t>status red</a:t>
-            </a:r>
-            <a:br/>
-            <a:r>
-              <a:t>distinto proveedor</a:t>
+            <a:br>
+              <a:rPr dirty="0"/>
+            </a:br>
+            <a:r>
+              <a:rPr dirty="0"/>
+              <a:t>Mock: "</a:t>
+            </a:r>
+            <a:r>
+              <a:rPr dirty="0" err="1"/>
+              <a:t>Descarga</a:t>
+            </a:r>
+            <a:r>
+              <a:rPr dirty="0"/>
+              <a:t> </a:t>
+            </a:r>
+            <a:r>
+              <a:rPr dirty="0" err="1"/>
+              <a:t>datos</a:t>
+            </a:r>
+            <a:br>
+              <a:rPr dirty="0"/>
+            </a:br>
+            <a:r>
+              <a:rPr dirty="0" err="1"/>
+              <a:t>personales</a:t>
+            </a:r>
+            <a:r>
+              <a:rPr dirty="0"/>
+              <a:t>"</a:t>
             </a:r>
           </a:p>
         </p:txBody>
@@ -14079,7 +14551,7 @@
         <p:spPr>
           <a:xfrm>
             <a:off x="9692640" y="1554480"/>
-            <a:ext cx="2103120" cy="4754880"/>
+            <a:ext cx="2103120" cy="2331720"/>
           </a:xfrm>
           <a:prstGeom prst="roundRect">
             <a:avLst/>
@@ -14110,6 +14582,7 @@
           <a:lstStyle/>
           <a:p>
             <a:pPr algn="ctr"/>
+            <a:endParaRPr/>
           </a:p>
         </p:txBody>
       </p:sp>
@@ -14149,7 +14622,7 @@
           </a:fontRef>
         </p:style>
         <p:txBody>
-          <a:bodyPr rtlCol="0" anchor="ctr" wrap="square"/>
+          <a:bodyPr wrap="square" rtlCol="0" anchor="ctr"/>
           <a:lstStyle/>
           <a:p>
             <a:pPr algn="ctr">
@@ -14234,25 +14707,65 @@
               </a:defRPr>
             </a:pPr>
             <a:r>
-              <a:t>Provider: cualquiera</a:t>
-            </a:r>
-            <a:br/>
-            <a:r>
-              <a:t>Mock: historia ya corrida x2</a:t>
-            </a:r>
-            <a:br/>
-            <a:br/>
-            <a:r>
+              <a:rPr dirty="0"/>
+              <a:t>Provider: </a:t>
+            </a:r>
+            <a:r>
+              <a:rPr dirty="0" err="1"/>
+              <a:t>cualquiera</a:t>
+            </a:r>
+            <a:br>
+              <a:rPr dirty="0"/>
+            </a:br>
+            <a:r>
+              <a:rPr dirty="0"/>
+              <a:t>Mock: </a:t>
+            </a:r>
+            <a:r>
+              <a:rPr dirty="0" err="1"/>
+              <a:t>historia</a:t>
+            </a:r>
+            <a:r>
+              <a:rPr dirty="0"/>
+              <a:t> </a:t>
+            </a:r>
+            <a:r>
+              <a:rPr dirty="0" err="1"/>
+              <a:t>ya</a:t>
+            </a:r>
+            <a:r>
+              <a:rPr dirty="0"/>
+              <a:t> corrida x2</a:t>
+            </a:r>
+            <a:br>
+              <a:rPr dirty="0"/>
+            </a:br>
+            <a:br>
+              <a:rPr dirty="0"/>
+            </a:br>
+            <a:r>
+              <a:rPr dirty="0"/>
               <a:t>Tab History</a:t>
             </a:r>
-            <a:br/>
-            <a:r>
+            <a:br>
+              <a:rPr dirty="0"/>
+            </a:br>
+            <a:r>
+              <a:rPr dirty="0"/>
               <a:t>→ Tab Compare</a:t>
             </a:r>
-            <a:br/>
-            <a:r>
-              <a:t>→ pares semánticos</a:t>
-            </a:r>
+            <a:br>
+              <a:rPr dirty="0"/>
+            </a:br>
+            <a:r>
+              <a:rPr dirty="0"/>
+              <a:t>→ pares </a:t>
+            </a:r>
+            <a:r>
+              <a:rPr dirty="0" err="1"/>
+              <a:t>semánticos</a:t>
+            </a:r>
+            <a:endParaRPr dirty="0"/>
           </a:p>
         </p:txBody>
       </p:sp>
@@ -14265,7 +14778,7 @@
 </file>
 
 <file path=ppt/slides/slide26.xml><?xml version="1.0" encoding="utf-8"?>
-<p:sld xmlns:a="http://schemas.openxmlformats.org/drawingml/2006/main" xmlns:p="http://schemas.openxmlformats.org/presentationml/2006/main" xmlns:r="http://schemas.openxmlformats.org/officeDocument/2006/relationships">
+<p:sld xmlns:a="http://schemas.openxmlformats.org/drawingml/2006/main" xmlns:r="http://schemas.openxmlformats.org/officeDocument/2006/relationships" xmlns:p="http://schemas.openxmlformats.org/presentationml/2006/main">
   <p:cSld>
     <p:bg>
       <p:bgPr>
@@ -14281,7 +14794,14 @@
         <p:cNvGrpSpPr/>
         <p:nvPr/>
       </p:nvGrpSpPr>
-      <p:grpSpPr/>
+      <p:grpSpPr>
+        <a:xfrm>
+          <a:off x="0" y="0"/>
+          <a:ext cx="0" cy="0"/>
+          <a:chOff x="0" y="0"/>
+          <a:chExt cx="0" cy="0"/>
+        </a:xfrm>
+      </p:grpSpPr>
       <p:sp>
         <p:nvSpPr>
           <p:cNvPr id="2" name="TextBox 1"/>
@@ -14291,7 +14811,7 @@
         <p:spPr>
           <a:xfrm>
             <a:off x="914400" y="2286000"/>
-            <a:ext cx="10058400" cy="914400"/>
+            <a:ext cx="10058400" cy="707886"/>
           </a:xfrm>
           <a:prstGeom prst="rect">
             <a:avLst/>
@@ -14312,43 +14832,10 @@
               </a:defRPr>
             </a:pPr>
             <a:r>
-              <a:t>PARTE 8</a:t>
-            </a:r>
-          </a:p>
-        </p:txBody>
-      </p:sp>
-      <p:sp>
-        <p:nvSpPr>
-          <p:cNvPr id="3" name="TextBox 2"/>
-          <p:cNvSpPr txBox="1"/>
-          <p:nvPr/>
-        </p:nvSpPr>
-        <p:spPr>
-          <a:xfrm>
-            <a:off x="914400" y="3291840"/>
-            <a:ext cx="10058400" cy="548640"/>
-          </a:xfrm>
-          <a:prstGeom prst="rect">
-            <a:avLst/>
-          </a:prstGeom>
-          <a:noFill/>
-        </p:spPr>
-        <p:txBody>
-          <a:bodyPr wrap="square">
-            <a:spAutoFit/>
-          </a:bodyPr>
-          <a:lstStyle/>
-          <a:p>
-            <a:pPr algn="ctr">
-              <a:defRPr sz="2000" b="0">
-                <a:solidFill>
-                  <a:srgbClr val="94A3B8"/>
-                </a:solidFill>
-              </a:defRPr>
-            </a:pPr>
-            <a:r>
+              <a:rPr lang="en-US" dirty="0" err="1"/>
               <a:t>Resumen</a:t>
             </a:r>
+            <a:endParaRPr dirty="0"/>
           </a:p>
         </p:txBody>
       </p:sp>
@@ -14360,7 +14847,7 @@
         </p:nvSpPr>
         <p:spPr>
           <a:xfrm>
-            <a:off x="5029200" y="3063240"/>
+            <a:off x="4892040" y="3063240"/>
             <a:ext cx="2103120" cy="38100"/>
           </a:xfrm>
           <a:prstGeom prst="rect">
@@ -14392,6 +14879,7 @@
           <a:lstStyle/>
           <a:p>
             <a:pPr algn="ctr"/>
+            <a:endParaRPr/>
           </a:p>
         </p:txBody>
       </p:sp>
@@ -14404,7 +14892,7 @@
 </file>
 
 <file path=ppt/slides/slide27.xml><?xml version="1.0" encoding="utf-8"?>
-<p:sld xmlns:a="http://schemas.openxmlformats.org/drawingml/2006/main" xmlns:p="http://schemas.openxmlformats.org/presentationml/2006/main" xmlns:r="http://schemas.openxmlformats.org/officeDocument/2006/relationships">
+<p:sld xmlns:a="http://schemas.openxmlformats.org/drawingml/2006/main" xmlns:r="http://schemas.openxmlformats.org/officeDocument/2006/relationships" xmlns:p="http://schemas.openxmlformats.org/presentationml/2006/main">
   <p:cSld>
     <p:bg>
       <p:bgPr>
@@ -14420,7 +14908,14 @@
         <p:cNvGrpSpPr/>
         <p:nvPr/>
       </p:nvGrpSpPr>
-      <p:grpSpPr/>
+      <p:grpSpPr>
+        <a:xfrm>
+          <a:off x="0" y="0"/>
+          <a:ext cx="0" cy="0"/>
+          <a:chOff x="0" y="0"/>
+          <a:chExt cx="0" cy="0"/>
+        </a:xfrm>
+      </p:grpSpPr>
       <p:sp>
         <p:nvSpPr>
           <p:cNvPr id="2" name="TextBox 1"/>
@@ -14496,6 +14991,7 @@
           <a:lstStyle/>
           <a:p>
             <a:pPr algn="ctr"/>
+            <a:endParaRPr/>
           </a:p>
         </p:txBody>
       </p:sp>
@@ -14644,6 +15140,7 @@
           <a:lstStyle/>
           <a:p>
             <a:pPr algn="ctr"/>
+            <a:endParaRPr/>
           </a:p>
         </p:txBody>
       </p:sp>
@@ -14792,6 +15289,7 @@
           <a:lstStyle/>
           <a:p>
             <a:pPr algn="ctr"/>
+            <a:endParaRPr/>
           </a:p>
         </p:txBody>
       </p:sp>
@@ -14940,6 +15438,7 @@
           <a:lstStyle/>
           <a:p>
             <a:pPr algn="ctr"/>
+            <a:endParaRPr/>
           </a:p>
         </p:txBody>
       </p:sp>
@@ -15088,6 +15587,7 @@
           <a:lstStyle/>
           <a:p>
             <a:pPr algn="ctr"/>
+            <a:endParaRPr/>
           </a:p>
         </p:txBody>
       </p:sp>
@@ -15236,6 +15736,7 @@
           <a:lstStyle/>
           <a:p>
             <a:pPr algn="ctr"/>
+            <a:endParaRPr/>
           </a:p>
         </p:txBody>
       </p:sp>
@@ -15353,7 +15854,7 @@
 </file>
 
 <file path=ppt/slides/slide28.xml><?xml version="1.0" encoding="utf-8"?>
-<p:sld xmlns:a="http://schemas.openxmlformats.org/drawingml/2006/main" xmlns:p="http://schemas.openxmlformats.org/presentationml/2006/main" xmlns:r="http://schemas.openxmlformats.org/officeDocument/2006/relationships">
+<p:sld xmlns:a="http://schemas.openxmlformats.org/drawingml/2006/main" xmlns:r="http://schemas.openxmlformats.org/officeDocument/2006/relationships" xmlns:p="http://schemas.openxmlformats.org/presentationml/2006/main">
   <p:cSld>
     <p:bg>
       <p:bgPr>
@@ -15369,7 +15870,14 @@
         <p:cNvGrpSpPr/>
         <p:nvPr/>
       </p:nvGrpSpPr>
-      <p:grpSpPr/>
+      <p:grpSpPr>
+        <a:xfrm>
+          <a:off x="0" y="0"/>
+          <a:ext cx="0" cy="0"/>
+          <a:chOff x="0" y="0"/>
+          <a:chExt cx="0" cy="0"/>
+        </a:xfrm>
+      </p:grpSpPr>
       <p:sp>
         <p:nvSpPr>
           <p:cNvPr id="2" name="TextBox 1"/>
@@ -15445,6 +15953,7 @@
           <a:lstStyle/>
           <a:p>
             <a:pPr algn="ctr"/>
+            <a:endParaRPr/>
           </a:p>
         </p:txBody>
       </p:sp>
@@ -15488,6 +15997,7 @@
           <a:lstStyle/>
           <a:p>
             <a:pPr algn="ctr"/>
+            <a:endParaRPr/>
           </a:p>
         </p:txBody>
       </p:sp>
@@ -15601,6 +16111,7 @@
           <a:lstStyle/>
           <a:p>
             <a:pPr algn="ctr"/>
+            <a:endParaRPr/>
           </a:p>
         </p:txBody>
       </p:sp>
@@ -15644,6 +16155,7 @@
           <a:lstStyle/>
           <a:p>
             <a:pPr algn="ctr"/>
+            <a:endParaRPr/>
           </a:p>
         </p:txBody>
       </p:sp>
@@ -15757,6 +16269,7 @@
           <a:lstStyle/>
           <a:p>
             <a:pPr algn="ctr"/>
+            <a:endParaRPr/>
           </a:p>
         </p:txBody>
       </p:sp>
@@ -15800,6 +16313,7 @@
           <a:lstStyle/>
           <a:p>
             <a:pPr algn="ctr"/>
+            <a:endParaRPr/>
           </a:p>
         </p:txBody>
       </p:sp>
@@ -15913,6 +16427,7 @@
           <a:lstStyle/>
           <a:p>
             <a:pPr algn="ctr"/>
+            <a:endParaRPr/>
           </a:p>
         </p:txBody>
       </p:sp>
@@ -15956,6 +16471,7 @@
           <a:lstStyle/>
           <a:p>
             <a:pPr algn="ctr"/>
+            <a:endParaRPr/>
           </a:p>
         </p:txBody>
       </p:sp>
@@ -16069,6 +16585,7 @@
           <a:lstStyle/>
           <a:p>
             <a:pPr algn="ctr"/>
+            <a:endParaRPr/>
           </a:p>
         </p:txBody>
       </p:sp>
@@ -16112,6 +16629,7 @@
           <a:lstStyle/>
           <a:p>
             <a:pPr algn="ctr"/>
+            <a:endParaRPr/>
           </a:p>
         </p:txBody>
       </p:sp>
@@ -16225,6 +16743,7 @@
           <a:lstStyle/>
           <a:p>
             <a:pPr algn="ctr"/>
+            <a:endParaRPr/>
           </a:p>
         </p:txBody>
       </p:sp>
@@ -16268,6 +16787,7 @@
           <a:lstStyle/>
           <a:p>
             <a:pPr algn="ctr"/>
+            <a:endParaRPr/>
           </a:p>
         </p:txBody>
       </p:sp>
@@ -16381,6 +16901,7 @@
           <a:lstStyle/>
           <a:p>
             <a:pPr algn="ctr"/>
+            <a:endParaRPr/>
           </a:p>
         </p:txBody>
       </p:sp>
@@ -16424,6 +16945,7 @@
           <a:lstStyle/>
           <a:p>
             <a:pPr algn="ctr"/>
+            <a:endParaRPr/>
           </a:p>
         </p:txBody>
       </p:sp>
@@ -16506,7 +17028,7 @@
 </file>
 
 <file path=ppt/slides/slide29.xml><?xml version="1.0" encoding="utf-8"?>
-<p:sld xmlns:a="http://schemas.openxmlformats.org/drawingml/2006/main" xmlns:p="http://schemas.openxmlformats.org/presentationml/2006/main" xmlns:r="http://schemas.openxmlformats.org/officeDocument/2006/relationships">
+<p:sld xmlns:a="http://schemas.openxmlformats.org/drawingml/2006/main" xmlns:r="http://schemas.openxmlformats.org/officeDocument/2006/relationships" xmlns:p="http://schemas.openxmlformats.org/presentationml/2006/main">
   <p:cSld>
     <p:bg>
       <p:bgPr>
@@ -16522,7 +17044,14 @@
         <p:cNvGrpSpPr/>
         <p:nvPr/>
       </p:nvGrpSpPr>
-      <p:grpSpPr/>
+      <p:grpSpPr>
+        <a:xfrm>
+          <a:off x="0" y="0"/>
+          <a:ext cx="0" cy="0"/>
+          <a:chOff x="0" y="0"/>
+          <a:chExt cx="0" cy="0"/>
+        </a:xfrm>
+      </p:grpSpPr>
       <p:sp>
         <p:nvSpPr>
           <p:cNvPr id="2" name="TextBox 1"/>
@@ -16598,6 +17127,7 @@
           <a:lstStyle/>
           <a:p>
             <a:pPr algn="ctr"/>
+            <a:endParaRPr/>
           </a:p>
         </p:txBody>
       </p:sp>
@@ -16715,7 +17245,7 @@
 </file>
 
 <file path=ppt/slides/slide3.xml><?xml version="1.0" encoding="utf-8"?>
-<p:sld xmlns:a="http://schemas.openxmlformats.org/drawingml/2006/main" xmlns:p="http://schemas.openxmlformats.org/presentationml/2006/main" xmlns:r="http://schemas.openxmlformats.org/officeDocument/2006/relationships">
+<p:sld xmlns:a="http://schemas.openxmlformats.org/drawingml/2006/main" xmlns:r="http://schemas.openxmlformats.org/officeDocument/2006/relationships" xmlns:p="http://schemas.openxmlformats.org/presentationml/2006/main">
   <p:cSld>
     <p:bg>
       <p:bgPr>
@@ -16731,7 +17261,14 @@
         <p:cNvGrpSpPr/>
         <p:nvPr/>
       </p:nvGrpSpPr>
-      <p:grpSpPr/>
+      <p:grpSpPr>
+        <a:xfrm>
+          <a:off x="0" y="0"/>
+          <a:ext cx="0" cy="0"/>
+          <a:chOff x="0" y="0"/>
+          <a:chExt cx="0" cy="0"/>
+        </a:xfrm>
+      </p:grpSpPr>
       <p:sp>
         <p:nvSpPr>
           <p:cNvPr id="2" name="TextBox 1"/>
@@ -16842,6 +17379,7 @@
           <a:lstStyle/>
           <a:p>
             <a:pPr algn="ctr"/>
+            <a:endParaRPr/>
           </a:p>
         </p:txBody>
       </p:sp>
@@ -16854,7 +17392,7 @@
 </file>
 
 <file path=ppt/slides/slide4.xml><?xml version="1.0" encoding="utf-8"?>
-<p:sld xmlns:a="http://schemas.openxmlformats.org/drawingml/2006/main" xmlns:p="http://schemas.openxmlformats.org/presentationml/2006/main" xmlns:r="http://schemas.openxmlformats.org/officeDocument/2006/relationships">
+<p:sld xmlns:a="http://schemas.openxmlformats.org/drawingml/2006/main" xmlns:r="http://schemas.openxmlformats.org/officeDocument/2006/relationships" xmlns:p="http://schemas.openxmlformats.org/presentationml/2006/main">
   <p:cSld>
     <p:bg>
       <p:bgPr>
@@ -16870,7 +17408,14 @@
         <p:cNvGrpSpPr/>
         <p:nvPr/>
       </p:nvGrpSpPr>
-      <p:grpSpPr/>
+      <p:grpSpPr>
+        <a:xfrm>
+          <a:off x="0" y="0"/>
+          <a:ext cx="0" cy="0"/>
+          <a:chOff x="0" y="0"/>
+          <a:chExt cx="0" cy="0"/>
+        </a:xfrm>
+      </p:grpSpPr>
       <p:sp>
         <p:nvSpPr>
           <p:cNvPr id="2" name="TextBox 1"/>
@@ -16915,7 +17460,7 @@
         <p:spPr>
           <a:xfrm>
             <a:off x="731520" y="1371600"/>
-            <a:ext cx="10515600" cy="914400"/>
+            <a:ext cx="10515600" cy="584775"/>
           </a:xfrm>
           <a:prstGeom prst="rect">
             <a:avLst/>
@@ -16936,7 +17481,168 @@
               </a:defRPr>
             </a:pPr>
             <a:r>
-              <a:t>Un Sistema Multi-Agente (MAS) es una arquitectura donde múltiples entidades autónomas y especializadas — llamadas agentes — colaboran para resolver un problema que está más allá de la capacidad de un solo agente trabajando individualmente.</a:t>
+              <a:rPr dirty="0"/>
+              <a:t>Un Sistema Multi-</a:t>
+            </a:r>
+            <a:r>
+              <a:rPr dirty="0" err="1"/>
+              <a:t>Agente</a:t>
+            </a:r>
+            <a:r>
+              <a:rPr dirty="0"/>
+              <a:t> es </a:t>
+            </a:r>
+            <a:r>
+              <a:rPr dirty="0" err="1"/>
+              <a:t>una</a:t>
+            </a:r>
+            <a:r>
+              <a:rPr dirty="0"/>
+              <a:t> </a:t>
+            </a:r>
+            <a:r>
+              <a:rPr dirty="0" err="1"/>
+              <a:t>arquitectura</a:t>
+            </a:r>
+            <a:r>
+              <a:rPr dirty="0"/>
+              <a:t> </a:t>
+            </a:r>
+            <a:r>
+              <a:rPr dirty="0" err="1"/>
+              <a:t>donde</a:t>
+            </a:r>
+            <a:r>
+              <a:rPr dirty="0"/>
+              <a:t> </a:t>
+            </a:r>
+            <a:r>
+              <a:rPr dirty="0" err="1"/>
+              <a:t>múltiples</a:t>
+            </a:r>
+            <a:r>
+              <a:rPr dirty="0"/>
+              <a:t> </a:t>
+            </a:r>
+            <a:r>
+              <a:rPr dirty="0" err="1"/>
+              <a:t>entidades</a:t>
+            </a:r>
+            <a:r>
+              <a:rPr dirty="0"/>
+              <a:t> </a:t>
+            </a:r>
+            <a:r>
+              <a:rPr dirty="0" err="1"/>
+              <a:t>autónomas</a:t>
+            </a:r>
+            <a:r>
+              <a:rPr dirty="0"/>
+              <a:t> y </a:t>
+            </a:r>
+            <a:r>
+              <a:rPr dirty="0" err="1"/>
+              <a:t>especializadas</a:t>
+            </a:r>
+            <a:r>
+              <a:rPr dirty="0"/>
+              <a:t> — </a:t>
+            </a:r>
+            <a:r>
+              <a:rPr dirty="0" err="1"/>
+              <a:t>llamadas</a:t>
+            </a:r>
+            <a:r>
+              <a:rPr dirty="0"/>
+              <a:t> </a:t>
+            </a:r>
+            <a:r>
+              <a:rPr dirty="0" err="1"/>
+              <a:t>agentes</a:t>
+            </a:r>
+            <a:r>
+              <a:rPr dirty="0"/>
+              <a:t> — </a:t>
+            </a:r>
+            <a:r>
+              <a:rPr dirty="0" err="1"/>
+              <a:t>colaboran</a:t>
+            </a:r>
+            <a:r>
+              <a:rPr dirty="0"/>
+              <a:t> para resolver un </a:t>
+            </a:r>
+            <a:r>
+              <a:rPr dirty="0" err="1"/>
+              <a:t>problema</a:t>
+            </a:r>
+            <a:r>
+              <a:rPr dirty="0"/>
+              <a:t> </a:t>
+            </a:r>
+            <a:r>
+              <a:rPr dirty="0" err="1"/>
+              <a:t>que</a:t>
+            </a:r>
+            <a:r>
+              <a:rPr dirty="0"/>
+              <a:t> </a:t>
+            </a:r>
+            <a:r>
+              <a:rPr dirty="0" err="1"/>
+              <a:t>está</a:t>
+            </a:r>
+            <a:r>
+              <a:rPr dirty="0"/>
+              <a:t> </a:t>
+            </a:r>
+            <a:r>
+              <a:rPr dirty="0" err="1"/>
+              <a:t>más</a:t>
+            </a:r>
+            <a:r>
+              <a:rPr dirty="0"/>
+              <a:t> </a:t>
+            </a:r>
+            <a:r>
+              <a:rPr dirty="0" err="1"/>
+              <a:t>allá</a:t>
+            </a:r>
+            <a:r>
+              <a:rPr dirty="0"/>
+              <a:t> de la </a:t>
+            </a:r>
+            <a:r>
+              <a:rPr dirty="0" err="1"/>
+              <a:t>capacidad</a:t>
+            </a:r>
+            <a:r>
+              <a:rPr dirty="0"/>
+              <a:t> de un solo </a:t>
+            </a:r>
+            <a:r>
+              <a:rPr dirty="0" err="1"/>
+              <a:t>agente</a:t>
+            </a:r>
+            <a:r>
+              <a:rPr dirty="0"/>
+              <a:t> </a:t>
+            </a:r>
+            <a:r>
+              <a:rPr dirty="0" err="1"/>
+              <a:t>trabajando</a:t>
+            </a:r>
+            <a:r>
+              <a:rPr dirty="0"/>
+              <a:t> </a:t>
+            </a:r>
+            <a:r>
+              <a:rPr dirty="0" err="1"/>
+              <a:t>individualmente</a:t>
+            </a:r>
+            <a:r>
+              <a:rPr dirty="0"/>
+              <a:t>.</a:t>
             </a:r>
           </a:p>
         </p:txBody>
@@ -16981,6 +17687,7 @@
           <a:lstStyle/>
           <a:p>
             <a:pPr algn="ctr"/>
+            <a:endParaRPr/>
           </a:p>
         </p:txBody>
       </p:sp>
@@ -17024,6 +17731,7 @@
           <a:lstStyle/>
           <a:p>
             <a:pPr algn="ctr"/>
+            <a:endParaRPr/>
           </a:p>
         </p:txBody>
       </p:sp>
@@ -17145,6 +17853,7 @@
           <a:lstStyle/>
           <a:p>
             <a:pPr algn="ctr"/>
+            <a:endParaRPr/>
           </a:p>
         </p:txBody>
       </p:sp>
@@ -17188,6 +17897,7 @@
           <a:lstStyle/>
           <a:p>
             <a:pPr algn="ctr"/>
+            <a:endParaRPr/>
           </a:p>
         </p:txBody>
       </p:sp>
@@ -17309,6 +18019,7 @@
           <a:lstStyle/>
           <a:p>
             <a:pPr algn="ctr"/>
+            <a:endParaRPr/>
           </a:p>
         </p:txBody>
       </p:sp>
@@ -17352,6 +18063,7 @@
           <a:lstStyle/>
           <a:p>
             <a:pPr algn="ctr"/>
+            <a:endParaRPr/>
           </a:p>
         </p:txBody>
       </p:sp>
@@ -17473,6 +18185,7 @@
           <a:lstStyle/>
           <a:p>
             <a:pPr algn="ctr"/>
+            <a:endParaRPr/>
           </a:p>
         </p:txBody>
       </p:sp>
@@ -17516,6 +18229,7 @@
           <a:lstStyle/>
           <a:p>
             <a:pPr algn="ctr"/>
+            <a:endParaRPr/>
           </a:p>
         </p:txBody>
       </p:sp>
@@ -17627,7 +18341,128 @@
               </a:defRPr>
             </a:pPr>
             <a:r>
-              <a:t>En sistemas basados en LLM, cada agente envuelve un modelo de lenguaje con un rol definido, instrucciones específicas y un formato de salida estructurado.</a:t>
+              <a:rPr dirty="0"/>
+              <a:t>En </a:t>
+            </a:r>
+            <a:r>
+              <a:rPr dirty="0" err="1"/>
+              <a:t>sistemas</a:t>
+            </a:r>
+            <a:r>
+              <a:rPr dirty="0"/>
+              <a:t> </a:t>
+            </a:r>
+            <a:r>
+              <a:rPr dirty="0" err="1"/>
+              <a:t>basados</a:t>
+            </a:r>
+            <a:r>
+              <a:rPr dirty="0"/>
+              <a:t> </a:t>
+            </a:r>
+            <a:r>
+              <a:rPr dirty="0" err="1"/>
+              <a:t>en</a:t>
+            </a:r>
+            <a:r>
+              <a:rPr dirty="0"/>
+              <a:t> LLM, </a:t>
+            </a:r>
+            <a:r>
+              <a:rPr dirty="0" err="1"/>
+              <a:t>cada</a:t>
+            </a:r>
+            <a:r>
+              <a:rPr dirty="0"/>
+              <a:t> </a:t>
+            </a:r>
+            <a:r>
+              <a:rPr dirty="0" err="1"/>
+              <a:t>agente</a:t>
+            </a:r>
+            <a:r>
+              <a:rPr dirty="0"/>
+              <a:t> </a:t>
+            </a:r>
+            <a:r>
+              <a:rPr dirty="0" err="1"/>
+              <a:t>envuelve</a:t>
+            </a:r>
+            <a:r>
+              <a:rPr dirty="0"/>
+              <a:t> un </a:t>
+            </a:r>
+            <a:r>
+              <a:rPr dirty="0" err="1"/>
+              <a:t>modelo</a:t>
+            </a:r>
+            <a:r>
+              <a:rPr dirty="0"/>
+              <a:t> de </a:t>
+            </a:r>
+            <a:r>
+              <a:rPr dirty="0" err="1"/>
+              <a:t>lenguaje</a:t>
+            </a:r>
+            <a:r>
+              <a:rPr dirty="0"/>
+              <a:t> con un </a:t>
+            </a:r>
+            <a:r>
+              <a:rPr dirty="0" err="1"/>
+              <a:t>rol</a:t>
+            </a:r>
+            <a:r>
+              <a:rPr dirty="0"/>
+              <a:t> </a:t>
+            </a:r>
+            <a:r>
+              <a:rPr dirty="0" err="1"/>
+              <a:t>definido</a:t>
+            </a:r>
+            <a:r>
+              <a:rPr dirty="0"/>
+              <a:t>, </a:t>
+            </a:r>
+            <a:r>
+              <a:rPr dirty="0" err="1"/>
+              <a:t>instrucciones</a:t>
+            </a:r>
+            <a:r>
+              <a:rPr dirty="0"/>
+              <a:t> </a:t>
+            </a:r>
+            <a:r>
+              <a:rPr dirty="0" err="1"/>
+              <a:t>específicas</a:t>
+            </a:r>
+            <a:r>
+              <a:rPr dirty="0"/>
+              <a:t> y un </a:t>
+            </a:r>
+            <a:r>
+              <a:rPr dirty="0" err="1"/>
+              <a:t>formato</a:t>
+            </a:r>
+            <a:r>
+              <a:rPr dirty="0"/>
+              <a:t> de </a:t>
+            </a:r>
+            <a:r>
+              <a:rPr dirty="0" err="1"/>
+              <a:t>salida</a:t>
+            </a:r>
+            <a:r>
+              <a:rPr dirty="0"/>
+              <a:t> </a:t>
+            </a:r>
+            <a:r>
+              <a:rPr dirty="0" err="1"/>
+              <a:t>estructurado</a:t>
+            </a:r>
+            <a:r>
+              <a:rPr dirty="0"/>
+              <a:t>.</a:t>
             </a:r>
           </a:p>
         </p:txBody>
@@ -17641,7 +18476,7 @@
 </file>
 
 <file path=ppt/slides/slide5.xml><?xml version="1.0" encoding="utf-8"?>
-<p:sld xmlns:a="http://schemas.openxmlformats.org/drawingml/2006/main" xmlns:p="http://schemas.openxmlformats.org/presentationml/2006/main" xmlns:r="http://schemas.openxmlformats.org/officeDocument/2006/relationships">
+<p:sld xmlns:a="http://schemas.openxmlformats.org/drawingml/2006/main" xmlns:r="http://schemas.openxmlformats.org/officeDocument/2006/relationships" xmlns:p="http://schemas.openxmlformats.org/presentationml/2006/main">
   <p:cSld>
     <p:bg>
       <p:bgPr>
@@ -17657,7 +18492,14 @@
         <p:cNvGrpSpPr/>
         <p:nvPr/>
       </p:nvGrpSpPr>
-      <p:grpSpPr/>
+      <p:grpSpPr>
+        <a:xfrm>
+          <a:off x="0" y="0"/>
+          <a:ext cx="0" cy="0"/>
+          <a:chOff x="0" y="0"/>
+          <a:chExt cx="0" cy="0"/>
+        </a:xfrm>
+      </p:grpSpPr>
       <p:sp>
         <p:nvSpPr>
           <p:cNvPr id="2" name="TextBox 1"/>
@@ -17768,6 +18610,7 @@
           <a:lstStyle/>
           <a:p>
             <a:pPr algn="ctr"/>
+            <a:endParaRPr/>
           </a:p>
         </p:txBody>
       </p:sp>
@@ -17959,6 +18802,7 @@
           <a:lstStyle/>
           <a:p>
             <a:pPr algn="ctr"/>
+            <a:endParaRPr/>
           </a:p>
         </p:txBody>
       </p:sp>
@@ -18030,8 +18874,54 @@
               </a:defRPr>
             </a:pPr>
             <a:r>
-              <a:t>•  Cada perspectiva tiene su propio contexto de razonamiento</a:t>
-            </a:r>
+              <a:rPr dirty="0"/>
+              <a:t>•  Cada </a:t>
+            </a:r>
+            <a:r>
+              <a:rPr dirty="0" err="1"/>
+              <a:t>perspectiva</a:t>
+            </a:r>
+            <a:r>
+              <a:rPr dirty="0"/>
+              <a:t> </a:t>
+            </a:r>
+            <a:r>
+              <a:rPr dirty="0" err="1"/>
+              <a:t>tiene</a:t>
+            </a:r>
+            <a:r>
+              <a:rPr dirty="0"/>
+              <a:t> </a:t>
+            </a:r>
+            <a:r>
+              <a:rPr dirty="0" err="1"/>
+              <a:t>su</a:t>
+            </a:r>
+            <a:r>
+              <a:rPr dirty="0"/>
+              <a:t> </a:t>
+            </a:r>
+            <a:r>
+              <a:rPr dirty="0" err="1"/>
+              <a:t>propio</a:t>
+            </a:r>
+            <a:r>
+              <a:rPr dirty="0"/>
+              <a:t> </a:t>
+            </a:r>
+            <a:r>
+              <a:rPr dirty="0" err="1"/>
+              <a:t>contexto</a:t>
+            </a:r>
+            <a:r>
+              <a:rPr dirty="0"/>
+              <a:t> de </a:t>
+            </a:r>
+            <a:r>
+              <a:rPr dirty="0" err="1"/>
+              <a:t>razonamiento</a:t>
+            </a:r>
+            <a:endParaRPr dirty="0"/>
           </a:p>
           <a:p>
             <a:pPr>
@@ -18045,8 +18935,62 @@
               </a:defRPr>
             </a:pPr>
             <a:r>
-              <a:t>•  Resultados trazables: quién dijo qué y por qué</a:t>
-            </a:r>
+              <a:rPr dirty="0"/>
+              <a:t>•  </a:t>
+            </a:r>
+            <a:r>
+              <a:rPr dirty="0" err="1"/>
+              <a:t>Resultados</a:t>
+            </a:r>
+            <a:r>
+              <a:rPr dirty="0"/>
+              <a:t> </a:t>
+            </a:r>
+            <a:r>
+              <a:rPr dirty="0" err="1"/>
+              <a:t>trazables</a:t>
+            </a:r>
+            <a:r>
+              <a:rPr dirty="0"/>
+              <a:t>: </a:t>
+            </a:r>
+            <a:r>
+              <a:rPr dirty="0" err="1"/>
+              <a:t>quién</a:t>
+            </a:r>
+            <a:r>
+              <a:rPr dirty="0"/>
+              <a:t> </a:t>
+            </a:r>
+            <a:r>
+              <a:rPr dirty="0" err="1"/>
+              <a:t>dijo</a:t>
+            </a:r>
+            <a:r>
+              <a:rPr dirty="0"/>
+              <a:t> </a:t>
+            </a:r>
+            <a:r>
+              <a:rPr dirty="0" err="1"/>
+              <a:t>qué</a:t>
+            </a:r>
+            <a:r>
+              <a:rPr dirty="0"/>
+              <a:t> y </a:t>
+            </a:r>
+            <a:r>
+              <a:rPr dirty="0" err="1"/>
+              <a:t>por</a:t>
+            </a:r>
+            <a:r>
+              <a:rPr dirty="0"/>
+              <a:t> </a:t>
+            </a:r>
+            <a:r>
+              <a:rPr dirty="0" err="1"/>
+              <a:t>qué</a:t>
+            </a:r>
+            <a:endParaRPr dirty="0"/>
           </a:p>
           <a:p>
             <a:pPr>
@@ -18060,8 +19004,46 @@
               </a:defRPr>
             </a:pPr>
             <a:r>
-              <a:t>•  Invocación selectiva — solo los agentes relevantes</a:t>
-            </a:r>
+              <a:rPr dirty="0"/>
+              <a:t>•  </a:t>
+            </a:r>
+            <a:r>
+              <a:rPr dirty="0" err="1"/>
+              <a:t>Invocación</a:t>
+            </a:r>
+            <a:r>
+              <a:rPr dirty="0"/>
+              <a:t> </a:t>
+            </a:r>
+            <a:r>
+              <a:rPr dirty="0" err="1"/>
+              <a:t>selectiva</a:t>
+            </a:r>
+            <a:r>
+              <a:rPr dirty="0"/>
+              <a:t> — solo </a:t>
+            </a:r>
+            <a:r>
+              <a:rPr dirty="0" err="1"/>
+              <a:t>los</a:t>
+            </a:r>
+            <a:r>
+              <a:rPr dirty="0"/>
+              <a:t> </a:t>
+            </a:r>
+            <a:r>
+              <a:rPr dirty="0" err="1"/>
+              <a:t>agentes</a:t>
+            </a:r>
+            <a:r>
+              <a:rPr dirty="0"/>
+              <a:t> </a:t>
+            </a:r>
+            <a:r>
+              <a:rPr dirty="0" err="1"/>
+              <a:t>relevantes</a:t>
+            </a:r>
+            <a:endParaRPr dirty="0"/>
           </a:p>
           <a:p>
             <a:pPr>
@@ -18075,8 +19057,38 @@
               </a:defRPr>
             </a:pPr>
             <a:r>
-              <a:t>•  Salida estructurada y agregable por agente</a:t>
-            </a:r>
+              <a:rPr dirty="0"/>
+              <a:t>•  Salida </a:t>
+            </a:r>
+            <a:r>
+              <a:rPr dirty="0" err="1"/>
+              <a:t>estructurada</a:t>
+            </a:r>
+            <a:r>
+              <a:rPr dirty="0"/>
+              <a:t> y </a:t>
+            </a:r>
+            <a:r>
+              <a:rPr dirty="0" err="1"/>
+              <a:t>agregable</a:t>
+            </a:r>
+            <a:r>
+              <a:rPr dirty="0"/>
+              <a:t> </a:t>
+            </a:r>
+            <a:r>
+              <a:rPr dirty="0" err="1"/>
+              <a:t>por</a:t>
+            </a:r>
+            <a:r>
+              <a:rPr dirty="0"/>
+              <a:t> </a:t>
+            </a:r>
+            <a:r>
+              <a:rPr dirty="0" err="1"/>
+              <a:t>agente</a:t>
+            </a:r>
+            <a:endParaRPr dirty="0"/>
           </a:p>
           <a:p>
             <a:pPr>
@@ -18090,8 +19102,38 @@
               </a:defRPr>
             </a:pPr>
             <a:r>
-              <a:t>•  Ejecución en paralelo reduce la latencia</a:t>
-            </a:r>
+              <a:rPr dirty="0"/>
+              <a:t>•  </a:t>
+            </a:r>
+            <a:r>
+              <a:rPr dirty="0" err="1"/>
+              <a:t>Ejecución</a:t>
+            </a:r>
+            <a:r>
+              <a:rPr dirty="0"/>
+              <a:t> </a:t>
+            </a:r>
+            <a:r>
+              <a:rPr dirty="0" err="1"/>
+              <a:t>en</a:t>
+            </a:r>
+            <a:r>
+              <a:rPr dirty="0"/>
+              <a:t> </a:t>
+            </a:r>
+            <a:r>
+              <a:rPr dirty="0" err="1"/>
+              <a:t>paralelo</a:t>
+            </a:r>
+            <a:r>
+              <a:rPr dirty="0"/>
+              <a:t> reduce la </a:t>
+            </a:r>
+            <a:r>
+              <a:rPr dirty="0" err="1"/>
+              <a:t>latencia</a:t>
+            </a:r>
+            <a:endParaRPr dirty="0"/>
           </a:p>
           <a:p>
             <a:pPr>
@@ -18105,8 +19147,30 @@
               </a:defRPr>
             </a:pPr>
             <a:r>
-              <a:t>•  Degradación graceful ante fallos individuales</a:t>
-            </a:r>
+              <a:rPr dirty="0"/>
+              <a:t>•  </a:t>
+            </a:r>
+            <a:r>
+              <a:rPr dirty="0" err="1"/>
+              <a:t>Degradación</a:t>
+            </a:r>
+            <a:r>
+              <a:rPr dirty="0"/>
+              <a:t> graceful ante </a:t>
+            </a:r>
+            <a:r>
+              <a:rPr dirty="0" err="1"/>
+              <a:t>fallos</a:t>
+            </a:r>
+            <a:r>
+              <a:rPr dirty="0"/>
+              <a:t> </a:t>
+            </a:r>
+            <a:r>
+              <a:rPr dirty="0" err="1"/>
+              <a:t>individuales</a:t>
+            </a:r>
+            <a:endParaRPr dirty="0"/>
           </a:p>
         </p:txBody>
       </p:sp>
@@ -18119,7 +19183,7 @@
 </file>
 
 <file path=ppt/slides/slide6.xml><?xml version="1.0" encoding="utf-8"?>
-<p:sld xmlns:a="http://schemas.openxmlformats.org/drawingml/2006/main" xmlns:p="http://schemas.openxmlformats.org/presentationml/2006/main" xmlns:r="http://schemas.openxmlformats.org/officeDocument/2006/relationships">
+<p:sld xmlns:a="http://schemas.openxmlformats.org/drawingml/2006/main" xmlns:r="http://schemas.openxmlformats.org/officeDocument/2006/relationships" xmlns:p="http://schemas.openxmlformats.org/presentationml/2006/main">
   <p:cSld>
     <p:bg>
       <p:bgPr>
@@ -18135,7 +19199,14 @@
         <p:cNvGrpSpPr/>
         <p:nvPr/>
       </p:nvGrpSpPr>
-      <p:grpSpPr/>
+      <p:grpSpPr>
+        <a:xfrm>
+          <a:off x="0" y="0"/>
+          <a:ext cx="0" cy="0"/>
+          <a:chOff x="0" y="0"/>
+          <a:chExt cx="0" cy="0"/>
+        </a:xfrm>
+      </p:grpSpPr>
       <p:sp>
         <p:nvSpPr>
           <p:cNvPr id="2" name="TextBox 1"/>
@@ -18246,6 +19317,7 @@
           <a:lstStyle/>
           <a:p>
             <a:pPr algn="ctr"/>
+            <a:endParaRPr/>
           </a:p>
         </p:txBody>
       </p:sp>
@@ -18289,6 +19361,7 @@
           <a:lstStyle/>
           <a:p>
             <a:pPr algn="ctr"/>
+            <a:endParaRPr/>
           </a:p>
         </p:txBody>
       </p:sp>
@@ -18427,6 +19500,7 @@
           <a:lstStyle/>
           <a:p>
             <a:pPr algn="ctr"/>
+            <a:endParaRPr/>
           </a:p>
         </p:txBody>
       </p:sp>
@@ -18470,6 +19544,7 @@
           <a:lstStyle/>
           <a:p>
             <a:pPr algn="ctr"/>
+            <a:endParaRPr/>
           </a:p>
         </p:txBody>
       </p:sp>
@@ -18609,6 +19684,7 @@
           <a:lstStyle/>
           <a:p>
             <a:pPr algn="ctr"/>
+            <a:endParaRPr/>
           </a:p>
         </p:txBody>
       </p:sp>
@@ -18652,6 +19728,7 @@
           <a:lstStyle/>
           <a:p>
             <a:pPr algn="ctr"/>
+            <a:endParaRPr/>
           </a:p>
         </p:txBody>
       </p:sp>
@@ -18791,6 +19868,7 @@
           <a:lstStyle/>
           <a:p>
             <a:pPr algn="ctr"/>
+            <a:endParaRPr/>
           </a:p>
         </p:txBody>
       </p:sp>
@@ -18834,6 +19912,7 @@
           <a:lstStyle/>
           <a:p>
             <a:pPr algn="ctr"/>
+            <a:endParaRPr/>
           </a:p>
         </p:txBody>
       </p:sp>
@@ -18938,7 +20017,7 @@
 </file>
 
 <file path=ppt/slides/slide7.xml><?xml version="1.0" encoding="utf-8"?>
-<p:sld xmlns:a="http://schemas.openxmlformats.org/drawingml/2006/main" xmlns:p="http://schemas.openxmlformats.org/presentationml/2006/main" xmlns:r="http://schemas.openxmlformats.org/officeDocument/2006/relationships">
+<p:sld xmlns:a="http://schemas.openxmlformats.org/drawingml/2006/main" xmlns:r="http://schemas.openxmlformats.org/officeDocument/2006/relationships" xmlns:p="http://schemas.openxmlformats.org/presentationml/2006/main">
   <p:cSld>
     <p:bg>
       <p:bgPr>
@@ -18954,7 +20033,14 @@
         <p:cNvGrpSpPr/>
         <p:nvPr/>
       </p:nvGrpSpPr>
-      <p:grpSpPr/>
+      <p:grpSpPr>
+        <a:xfrm>
+          <a:off x="0" y="0"/>
+          <a:ext cx="0" cy="0"/>
+          <a:chOff x="0" y="0"/>
+          <a:chExt cx="0" cy="0"/>
+        </a:xfrm>
+      </p:grpSpPr>
       <p:sp>
         <p:nvSpPr>
           <p:cNvPr id="2" name="TextBox 1"/>
@@ -19065,6 +20151,7 @@
           <a:lstStyle/>
           <a:p>
             <a:pPr algn="ctr"/>
+            <a:endParaRPr/>
           </a:p>
         </p:txBody>
       </p:sp>
@@ -19108,6 +20195,7 @@
           <a:lstStyle/>
           <a:p>
             <a:pPr algn="ctr"/>
+            <a:endParaRPr/>
           </a:p>
         </p:txBody>
       </p:sp>
@@ -19264,6 +20352,7 @@
           <a:lstStyle/>
           <a:p>
             <a:pPr algn="ctr"/>
+            <a:endParaRPr/>
           </a:p>
         </p:txBody>
       </p:sp>
@@ -19307,6 +20396,7 @@
           <a:lstStyle/>
           <a:p>
             <a:pPr algn="ctr"/>
+            <a:endParaRPr/>
           </a:p>
         </p:txBody>
       </p:sp>
@@ -19467,6 +20557,7 @@
           <a:lstStyle/>
           <a:p>
             <a:pPr algn="ctr"/>
+            <a:endParaRPr/>
           </a:p>
         </p:txBody>
       </p:sp>
@@ -19510,6 +20601,7 @@
           <a:lstStyle/>
           <a:p>
             <a:pPr algn="ctr"/>
+            <a:endParaRPr/>
           </a:p>
         </p:txBody>
       </p:sp>
@@ -19666,6 +20758,7 @@
           <a:lstStyle/>
           <a:p>
             <a:pPr algn="ctr"/>
+            <a:endParaRPr/>
           </a:p>
         </p:txBody>
       </p:sp>
@@ -19709,6 +20802,7 @@
           <a:lstStyle/>
           <a:p>
             <a:pPr algn="ctr"/>
+            <a:endParaRPr/>
           </a:p>
         </p:txBody>
       </p:sp>
@@ -19869,6 +20963,7 @@
           <a:lstStyle/>
           <a:p>
             <a:pPr algn="ctr"/>
+            <a:endParaRPr/>
           </a:p>
         </p:txBody>
       </p:sp>
@@ -19912,6 +21007,7 @@
           <a:lstStyle/>
           <a:p>
             <a:pPr algn="ctr"/>
+            <a:endParaRPr/>
           </a:p>
         </p:txBody>
       </p:sp>
@@ -20072,6 +21168,7 @@
           <a:lstStyle/>
           <a:p>
             <a:pPr algn="ctr"/>
+            <a:endParaRPr/>
           </a:p>
         </p:txBody>
       </p:sp>
@@ -20115,6 +21212,7 @@
           <a:lstStyle/>
           <a:p>
             <a:pPr algn="ctr"/>
+            <a:endParaRPr/>
           </a:p>
         </p:txBody>
       </p:sp>
@@ -20275,6 +21373,7 @@
           <a:lstStyle/>
           <a:p>
             <a:pPr algn="ctr"/>
+            <a:endParaRPr/>
           </a:p>
         </p:txBody>
       </p:sp>
@@ -20318,6 +21417,7 @@
           <a:lstStyle/>
           <a:p>
             <a:pPr algn="ctr"/>
+            <a:endParaRPr/>
           </a:p>
         </p:txBody>
       </p:sp>
@@ -20455,7 +21555,7 @@
 </file>
 
 <file path=ppt/slides/slide8.xml><?xml version="1.0" encoding="utf-8"?>
-<p:sld xmlns:a="http://schemas.openxmlformats.org/drawingml/2006/main" xmlns:p="http://schemas.openxmlformats.org/presentationml/2006/main" xmlns:r="http://schemas.openxmlformats.org/officeDocument/2006/relationships">
+<p:sld xmlns:a="http://schemas.openxmlformats.org/drawingml/2006/main" xmlns:r="http://schemas.openxmlformats.org/officeDocument/2006/relationships" xmlns:p="http://schemas.openxmlformats.org/presentationml/2006/main">
   <p:cSld>
     <p:bg>
       <p:bgPr>
@@ -20471,7 +21571,14 @@
         <p:cNvGrpSpPr/>
         <p:nvPr/>
       </p:nvGrpSpPr>
-      <p:grpSpPr/>
+      <p:grpSpPr>
+        <a:xfrm>
+          <a:off x="0" y="0"/>
+          <a:ext cx="0" cy="0"/>
+          <a:chOff x="0" y="0"/>
+          <a:chExt cx="0" cy="0"/>
+        </a:xfrm>
+      </p:grpSpPr>
       <p:sp>
         <p:nvSpPr>
           <p:cNvPr id="2" name="TextBox 1"/>
@@ -20582,6 +21689,7 @@
           <a:lstStyle/>
           <a:p>
             <a:pPr algn="ctr"/>
+            <a:endParaRPr/>
           </a:p>
         </p:txBody>
       </p:sp>
@@ -20625,6 +21733,7 @@
           <a:lstStyle/>
           <a:p>
             <a:pPr algn="ctr"/>
+            <a:endParaRPr/>
           </a:p>
         </p:txBody>
       </p:sp>
@@ -20750,6 +21859,7 @@
           <a:lstStyle/>
           <a:p>
             <a:pPr algn="ctr"/>
+            <a:endParaRPr/>
           </a:p>
         </p:txBody>
       </p:sp>
@@ -20793,6 +21903,7 @@
           <a:lstStyle/>
           <a:p>
             <a:pPr algn="ctr"/>
+            <a:endParaRPr/>
           </a:p>
         </p:txBody>
       </p:sp>
@@ -20918,6 +22029,7 @@
           <a:lstStyle/>
           <a:p>
             <a:pPr algn="ctr"/>
+            <a:endParaRPr/>
           </a:p>
         </p:txBody>
       </p:sp>
@@ -20961,6 +22073,7 @@
           <a:lstStyle/>
           <a:p>
             <a:pPr algn="ctr"/>
+            <a:endParaRPr/>
           </a:p>
         </p:txBody>
       </p:sp>
@@ -21086,6 +22199,7 @@
           <a:lstStyle/>
           <a:p>
             <a:pPr algn="ctr"/>
+            <a:endParaRPr/>
           </a:p>
         </p:txBody>
       </p:sp>
@@ -21129,6 +22243,7 @@
           <a:lstStyle/>
           <a:p>
             <a:pPr algn="ctr"/>
+            <a:endParaRPr/>
           </a:p>
         </p:txBody>
       </p:sp>
@@ -21254,6 +22369,7 @@
           <a:lstStyle/>
           <a:p>
             <a:pPr algn="ctr"/>
+            <a:endParaRPr/>
           </a:p>
         </p:txBody>
       </p:sp>
@@ -21297,6 +22413,7 @@
           <a:lstStyle/>
           <a:p>
             <a:pPr algn="ctr"/>
+            <a:endParaRPr/>
           </a:p>
         </p:txBody>
       </p:sp>
@@ -21422,6 +22539,7 @@
           <a:lstStyle/>
           <a:p>
             <a:pPr algn="ctr"/>
+            <a:endParaRPr/>
           </a:p>
         </p:txBody>
       </p:sp>
@@ -21465,6 +22583,7 @@
           <a:lstStyle/>
           <a:p>
             <a:pPr algn="ctr"/>
+            <a:endParaRPr/>
           </a:p>
         </p:txBody>
       </p:sp>
@@ -21602,7 +22721,7 @@
 </file>
 
 <file path=ppt/slides/slide9.xml><?xml version="1.0" encoding="utf-8"?>
-<p:sld xmlns:a="http://schemas.openxmlformats.org/drawingml/2006/main" xmlns:p="http://schemas.openxmlformats.org/presentationml/2006/main" xmlns:r="http://schemas.openxmlformats.org/officeDocument/2006/relationships">
+<p:sld xmlns:a="http://schemas.openxmlformats.org/drawingml/2006/main" xmlns:r="http://schemas.openxmlformats.org/officeDocument/2006/relationships" xmlns:p="http://schemas.openxmlformats.org/presentationml/2006/main">
   <p:cSld>
     <p:bg>
       <p:bgPr>
@@ -21618,7 +22737,14 @@
         <p:cNvGrpSpPr/>
         <p:nvPr/>
       </p:nvGrpSpPr>
-      <p:grpSpPr/>
+      <p:grpSpPr>
+        <a:xfrm>
+          <a:off x="0" y="0"/>
+          <a:ext cx="0" cy="0"/>
+          <a:chOff x="0" y="0"/>
+          <a:chExt cx="0" cy="0"/>
+        </a:xfrm>
+      </p:grpSpPr>
       <p:sp>
         <p:nvSpPr>
           <p:cNvPr id="2" name="TextBox 1"/>
@@ -21729,6 +22855,7 @@
           <a:lstStyle/>
           <a:p>
             <a:pPr algn="ctr"/>
+            <a:endParaRPr/>
           </a:p>
         </p:txBody>
       </p:sp>
@@ -22058,4 +23185,10 @@
   </a:objectDefaults>
   <a:extraClrSchemeLst/>
 </a:theme>
+</file>
+
+<file path=docMetadata/LabelInfo.xml><?xml version="1.0" encoding="utf-8"?>
+<clbl:labelList xmlns:clbl="http://schemas.microsoft.com/office/2020/mipLabelMetadata">
+  <clbl:label id="{63de93b7-8949-4e3d-a08b-0d778f7f5cab}" enabled="1" method="Standard" siteId="{0b3fc178-b730-4e8b-9843-e81259237b77}" contentBits="0" removed="0"/>
+</clbl:labelList>
 </file>
--- a/documentation/Presentacion_MultiAgentLab_Javier_Ariel.pptx
+++ b/documentation/Presentacion_MultiAgentLab_Javier_Ariel.pptx
@@ -26,14 +26,12 @@
     <p:sldId id="274" r:id="rId20"/>
     <p:sldId id="275" r:id="rId21"/>
     <p:sldId id="276" r:id="rId22"/>
-    <p:sldId id="277" r:id="rId23"/>
-    <p:sldId id="278" r:id="rId24"/>
-    <p:sldId id="279" r:id="rId25"/>
-    <p:sldId id="280" r:id="rId26"/>
-    <p:sldId id="281" r:id="rId27"/>
-    <p:sldId id="282" r:id="rId28"/>
-    <p:sldId id="283" r:id="rId29"/>
-    <p:sldId id="284" r:id="rId30"/>
+    <p:sldId id="279" r:id="rId23"/>
+    <p:sldId id="280" r:id="rId24"/>
+    <p:sldId id="277" r:id="rId25"/>
+    <p:sldId id="278" r:id="rId26"/>
+    <p:sldId id="283" r:id="rId27"/>
+    <p:sldId id="284" r:id="rId28"/>
   </p:sldIdLst>
   <p:sldSz cx="12192000" cy="6858000"/>
   <p:notesSz cx="6858000" cy="9144000"/>
@@ -330,7 +328,7 @@
           <a:p>
             <a:fld id="{5BCAD085-E8A6-8845-BD4E-CB4CCA059FC4}" type="datetimeFigureOut">
               <a:rPr lang="en-US" smtClean="0"/>
-              <a:t>5/14/2026</a:t>
+              <a:t>5/15/2026</a:t>
             </a:fld>
             <a:endParaRPr lang="en-US"/>
           </a:p>
@@ -498,7 +496,7 @@
           <a:p>
             <a:fld id="{5BCAD085-E8A6-8845-BD4E-CB4CCA059FC4}" type="datetimeFigureOut">
               <a:rPr lang="en-US" smtClean="0"/>
-              <a:t>5/14/2026</a:t>
+              <a:t>5/15/2026</a:t>
             </a:fld>
             <a:endParaRPr lang="en-US"/>
           </a:p>
@@ -676,7 +674,7 @@
           <a:p>
             <a:fld id="{5BCAD085-E8A6-8845-BD4E-CB4CCA059FC4}" type="datetimeFigureOut">
               <a:rPr lang="en-US" smtClean="0"/>
-              <a:t>5/14/2026</a:t>
+              <a:t>5/15/2026</a:t>
             </a:fld>
             <a:endParaRPr lang="en-US"/>
           </a:p>
@@ -844,7 +842,7 @@
           <a:p>
             <a:fld id="{5BCAD085-E8A6-8845-BD4E-CB4CCA059FC4}" type="datetimeFigureOut">
               <a:rPr lang="en-US" smtClean="0"/>
-              <a:t>5/14/2026</a:t>
+              <a:t>5/15/2026</a:t>
             </a:fld>
             <a:endParaRPr lang="en-US"/>
           </a:p>
@@ -1089,7 +1087,7 @@
           <a:p>
             <a:fld id="{5BCAD085-E8A6-8845-BD4E-CB4CCA059FC4}" type="datetimeFigureOut">
               <a:rPr lang="en-US" smtClean="0"/>
-              <a:t>5/14/2026</a:t>
+              <a:t>5/15/2026</a:t>
             </a:fld>
             <a:endParaRPr lang="en-US"/>
           </a:p>
@@ -1374,7 +1372,7 @@
           <a:p>
             <a:fld id="{5BCAD085-E8A6-8845-BD4E-CB4CCA059FC4}" type="datetimeFigureOut">
               <a:rPr lang="en-US" smtClean="0"/>
-              <a:t>5/14/2026</a:t>
+              <a:t>5/15/2026</a:t>
             </a:fld>
             <a:endParaRPr lang="en-US"/>
           </a:p>
@@ -1793,7 +1791,7 @@
           <a:p>
             <a:fld id="{5BCAD085-E8A6-8845-BD4E-CB4CCA059FC4}" type="datetimeFigureOut">
               <a:rPr lang="en-US" smtClean="0"/>
-              <a:t>5/14/2026</a:t>
+              <a:t>5/15/2026</a:t>
             </a:fld>
             <a:endParaRPr lang="en-US"/>
           </a:p>
@@ -1910,7 +1908,7 @@
           <a:p>
             <a:fld id="{5BCAD085-E8A6-8845-BD4E-CB4CCA059FC4}" type="datetimeFigureOut">
               <a:rPr lang="en-US" smtClean="0"/>
-              <a:t>5/14/2026</a:t>
+              <a:t>5/15/2026</a:t>
             </a:fld>
             <a:endParaRPr lang="en-US"/>
           </a:p>
@@ -2005,7 +2003,7 @@
           <a:p>
             <a:fld id="{5BCAD085-E8A6-8845-BD4E-CB4CCA059FC4}" type="datetimeFigureOut">
               <a:rPr lang="en-US" smtClean="0"/>
-              <a:t>5/14/2026</a:t>
+              <a:t>5/15/2026</a:t>
             </a:fld>
             <a:endParaRPr lang="en-US"/>
           </a:p>
@@ -2280,7 +2278,7 @@
           <a:p>
             <a:fld id="{5BCAD085-E8A6-8845-BD4E-CB4CCA059FC4}" type="datetimeFigureOut">
               <a:rPr lang="en-US" smtClean="0"/>
-              <a:t>5/14/2026</a:t>
+              <a:t>5/15/2026</a:t>
             </a:fld>
             <a:endParaRPr lang="en-US"/>
           </a:p>
@@ -2532,7 +2530,7 @@
           <a:p>
             <a:fld id="{5BCAD085-E8A6-8845-BD4E-CB4CCA059FC4}" type="datetimeFigureOut">
               <a:rPr lang="en-US" smtClean="0"/>
-              <a:t>5/14/2026</a:t>
+              <a:t>5/15/2026</a:t>
             </a:fld>
             <a:endParaRPr lang="en-US"/>
           </a:p>
@@ -2743,7 +2741,7 @@
           <a:p>
             <a:fld id="{5BCAD085-E8A6-8845-BD4E-CB4CCA059FC4}" type="datetimeFigureOut">
               <a:rPr lang="en-US" smtClean="0"/>
-              <a:t>5/14/2026</a:t>
+              <a:t>5/15/2026</a:t>
             </a:fld>
             <a:endParaRPr lang="en-US"/>
           </a:p>
@@ -10885,6 +10883,7 @@
               </a:defRPr>
             </a:pPr>
             <a:r>
+              <a:rPr dirty="0"/>
               <a:t>•  Auth: AWS credentials / IAM</a:t>
             </a:r>
           </a:p>
@@ -10900,6 +10899,7 @@
               </a:defRPr>
             </a:pPr>
             <a:r>
+              <a:rPr dirty="0"/>
               <a:t>•  Claude 3.5 Haiku · Sonnet · Nova · Llama</a:t>
             </a:r>
           </a:p>
@@ -10915,7 +10915,24 @@
               </a:defRPr>
             </a:pPr>
             <a:r>
-              <a:t>•  Demo: modelos enterprise, integración cloud</a:t>
+              <a:rPr dirty="0"/>
+              <a:t>•  Demo: </a:t>
+            </a:r>
+            <a:r>
+              <a:rPr dirty="0" err="1"/>
+              <a:t>modelos</a:t>
+            </a:r>
+            <a:r>
+              <a:rPr dirty="0"/>
+              <a:t> enterprise, </a:t>
+            </a:r>
+            <a:r>
+              <a:rPr dirty="0" err="1"/>
+              <a:t>integración</a:t>
+            </a:r>
+            <a:r>
+              <a:rPr dirty="0"/>
+              <a:t> cloud</a:t>
             </a:r>
           </a:p>
         </p:txBody>
@@ -12201,7 +12218,7 @@
         <p:spPr>
           <a:xfrm>
             <a:off x="914400" y="2286000"/>
-            <a:ext cx="10058400" cy="914400"/>
+            <a:ext cx="10058400" cy="707886"/>
           </a:xfrm>
           <a:prstGeom prst="rect">
             <a:avLst/>
@@ -12222,8 +12239,14 @@
               </a:defRPr>
             </a:pPr>
             <a:r>
-              <a:t>PARTE 6</a:t>
-            </a:r>
+              <a:rPr dirty="0"/>
+              <a:t>PARTE </a:t>
+            </a:r>
+            <a:r>
+              <a:rPr lang="en-US" dirty="0"/>
+              <a:t>6</a:t>
+            </a:r>
+            <a:endParaRPr dirty="0"/>
           </a:p>
         </p:txBody>
       </p:sp>
@@ -12257,7 +12280,7 @@
               </a:defRPr>
             </a:pPr>
             <a:r>
-              <a:t>Lo que Aprendimos</a:t>
+              <a:t>Demo</a:t>
             </a:r>
           </a:p>
         </p:txBody>
@@ -12348,7 +12371,7 @@
         <p:spPr>
           <a:xfrm>
             <a:off x="731520" y="365760"/>
-            <a:ext cx="10058400" cy="548640"/>
+            <a:ext cx="10058400" cy="523220"/>
           </a:xfrm>
           <a:prstGeom prst="rect">
             <a:avLst/>
@@ -12369,7 +12392,8 @@
               </a:defRPr>
             </a:pPr>
             <a:r>
-              <a:t>Lo que aprendimos</a:t>
+              <a:rPr dirty="0"/>
+              <a:t>Demo Script</a:t>
             </a:r>
           </a:p>
         </p:txBody>
@@ -12382,8 +12406,8 @@
         </p:nvSpPr>
         <p:spPr>
           <a:xfrm>
-            <a:off x="731520" y="1371600"/>
-            <a:ext cx="10515600" cy="548640"/>
+            <a:off x="365760" y="1554480"/>
+            <a:ext cx="2103120" cy="2331720"/>
           </a:xfrm>
           <a:prstGeom prst="roundRect">
             <a:avLst/>
@@ -12420,27 +12444,79 @@
       </p:sp>
       <p:sp>
         <p:nvSpPr>
-          <p:cNvPr id="4" name="TextBox 3"/>
-          <p:cNvSpPr txBox="1"/>
-          <p:nvPr/>
-        </p:nvSpPr>
-        <p:spPr>
-          <a:xfrm>
-            <a:off x="914400" y="1389888"/>
-            <a:ext cx="365760" cy="274320"/>
-          </a:xfrm>
-          <a:prstGeom prst="rect">
-            <a:avLst/>
-          </a:prstGeom>
-          <a:noFill/>
-        </p:spPr>
-        <p:txBody>
-          <a:bodyPr wrap="square">
-            <a:spAutoFit/>
-          </a:bodyPr>
-          <a:lstStyle/>
-          <a:p>
-            <a:pPr algn="l">
+          <p:cNvPr id="4" name="Oval 3"/>
+          <p:cNvSpPr/>
+          <p:nvPr/>
+        </p:nvSpPr>
+        <p:spPr>
+          <a:xfrm>
+            <a:off x="1051560" y="1280160"/>
+            <a:ext cx="640080" cy="640080"/>
+          </a:xfrm>
+          <a:prstGeom prst="ellipse">
+            <a:avLst/>
+          </a:prstGeom>
+          <a:solidFill>
+            <a:srgbClr val="60A5FA"/>
+          </a:solidFill>
+          <a:ln>
+            <a:noFill/>
+          </a:ln>
+        </p:spPr>
+        <p:style>
+          <a:lnRef idx="1">
+            <a:schemeClr val="accent1"/>
+          </a:lnRef>
+          <a:fillRef idx="3">
+            <a:schemeClr val="accent1"/>
+          </a:fillRef>
+          <a:effectRef idx="2">
+            <a:schemeClr val="accent1"/>
+          </a:effectRef>
+          <a:fontRef idx="minor">
+            <a:schemeClr val="lt1"/>
+          </a:fontRef>
+        </p:style>
+        <p:txBody>
+          <a:bodyPr wrap="square" rtlCol="0" anchor="ctr"/>
+          <a:lstStyle/>
+          <a:p>
+            <a:pPr algn="ctr">
+              <a:defRPr sz="2200" b="1">
+                <a:solidFill>
+                  <a:srgbClr val="0F172A"/>
+                </a:solidFill>
+              </a:defRPr>
+            </a:pPr>
+            <a:r>
+              <a:t>1</a:t>
+            </a:r>
+          </a:p>
+        </p:txBody>
+      </p:sp>
+      <p:sp>
+        <p:nvSpPr>
+          <p:cNvPr id="5" name="TextBox 4"/>
+          <p:cNvSpPr txBox="1"/>
+          <p:nvPr/>
+        </p:nvSpPr>
+        <p:spPr>
+          <a:xfrm>
+            <a:off x="475488" y="2103120"/>
+            <a:ext cx="1874519" cy="502920"/>
+          </a:xfrm>
+          <a:prstGeom prst="rect">
+            <a:avLst/>
+          </a:prstGeom>
+          <a:noFill/>
+        </p:spPr>
+        <p:txBody>
+          <a:bodyPr wrap="square">
+            <a:spAutoFit/>
+          </a:bodyPr>
+          <a:lstStyle/>
+          <a:p>
+            <a:pPr algn="ctr">
               <a:defRPr sz="1300" b="1">
                 <a:solidFill>
                   <a:srgbClr val="60A5FA"/>
@@ -12448,42 +12524,7 @@
               </a:defRPr>
             </a:pPr>
             <a:r>
-              <a:t>✦</a:t>
-            </a:r>
-          </a:p>
-        </p:txBody>
-      </p:sp>
-      <p:sp>
-        <p:nvSpPr>
-          <p:cNvPr id="5" name="TextBox 4"/>
-          <p:cNvSpPr txBox="1"/>
-          <p:nvPr/>
-        </p:nvSpPr>
-        <p:spPr>
-          <a:xfrm>
-            <a:off x="1280160" y="1389888"/>
-            <a:ext cx="5029200" cy="274320"/>
-          </a:xfrm>
-          <a:prstGeom prst="rect">
-            <a:avLst/>
-          </a:prstGeom>
-          <a:noFill/>
-        </p:spPr>
-        <p:txBody>
-          <a:bodyPr wrap="square">
-            <a:spAutoFit/>
-          </a:bodyPr>
-          <a:lstStyle/>
-          <a:p>
-            <a:pPr algn="l">
-              <a:defRPr sz="1300" b="1">
-                <a:solidFill>
-                  <a:srgbClr val="60A5FA"/>
-                </a:solidFill>
-              </a:defRPr>
-            </a:pPr>
-            <a:r>
-              <a:t>Keywords es suficiente para un POC</a:t>
+              <a:t>Caso simple</a:t>
             </a:r>
           </a:p>
         </p:txBody>
@@ -12496,21 +12537,21 @@
         </p:nvSpPr>
         <p:spPr>
           <a:xfrm>
-            <a:off x="1280160" y="1645920"/>
-            <a:ext cx="9601200" cy="256032"/>
-          </a:xfrm>
-          <a:prstGeom prst="rect">
-            <a:avLst/>
-          </a:prstGeom>
-          <a:noFill/>
-        </p:spPr>
-        <p:txBody>
-          <a:bodyPr wrap="square">
-            <a:spAutoFit/>
-          </a:bodyPr>
-          <a:lstStyle/>
-          <a:p>
-            <a:pPr algn="l">
+            <a:off x="475488" y="2651760"/>
+            <a:ext cx="1874519" cy="600164"/>
+          </a:xfrm>
+          <a:prstGeom prst="rect">
+            <a:avLst/>
+          </a:prstGeom>
+          <a:noFill/>
+        </p:spPr>
+        <p:txBody>
+          <a:bodyPr wrap="square">
+            <a:spAutoFit/>
+          </a:bodyPr>
+          <a:lstStyle/>
+          <a:p>
+            <a:pPr algn="ctr">
               <a:defRPr sz="1100" b="0">
                 <a:solidFill>
                   <a:srgbClr val="94A3B8"/>
@@ -12518,7 +12559,35 @@
               </a:defRPr>
             </a:pPr>
             <a:r>
-              <a:t>Predecible · costo cero · para producción se puede upgradear a clasificación con LLM</a:t>
+              <a:rPr dirty="0"/>
+              <a:t>Provider: </a:t>
+            </a:r>
+            <a:r>
+              <a:rPr dirty="0" err="1"/>
+              <a:t>Ollama</a:t>
+            </a:r>
+            <a:br>
+              <a:rPr dirty="0"/>
+            </a:br>
+            <a:r>
+              <a:rPr dirty="0"/>
+              <a:t>Mock: "Cambiar </a:t>
+            </a:r>
+            <a:r>
+              <a:rPr dirty="0" err="1"/>
+              <a:t>texto</a:t>
+            </a:r>
+            <a:r>
+              <a:rPr dirty="0"/>
+              <a:t> del </a:t>
+            </a:r>
+            <a:r>
+              <a:rPr dirty="0" err="1"/>
+              <a:t>botón</a:t>
+            </a:r>
+            <a:r>
+              <a:rPr dirty="0"/>
+              <a:t>"</a:t>
             </a:r>
           </a:p>
         </p:txBody>
@@ -12531,8 +12600,8 @@
         </p:nvSpPr>
         <p:spPr>
           <a:xfrm>
-            <a:off x="731520" y="2029967"/>
-            <a:ext cx="10515600" cy="548640"/>
+            <a:off x="2697479" y="1554480"/>
+            <a:ext cx="2103120" cy="2331720"/>
           </a:xfrm>
           <a:prstGeom prst="roundRect">
             <a:avLst/>
@@ -12569,27 +12638,79 @@
       </p:sp>
       <p:sp>
         <p:nvSpPr>
-          <p:cNvPr id="8" name="TextBox 7"/>
-          <p:cNvSpPr txBox="1"/>
-          <p:nvPr/>
-        </p:nvSpPr>
-        <p:spPr>
-          <a:xfrm>
-            <a:off x="914400" y="2048255"/>
-            <a:ext cx="365760" cy="274320"/>
-          </a:xfrm>
-          <a:prstGeom prst="rect">
-            <a:avLst/>
-          </a:prstGeom>
-          <a:noFill/>
-        </p:spPr>
-        <p:txBody>
-          <a:bodyPr wrap="square">
-            <a:spAutoFit/>
-          </a:bodyPr>
-          <a:lstStyle/>
-          <a:p>
-            <a:pPr algn="l">
+          <p:cNvPr id="8" name="Oval 7"/>
+          <p:cNvSpPr/>
+          <p:nvPr/>
+        </p:nvSpPr>
+        <p:spPr>
+          <a:xfrm>
+            <a:off x="3383279" y="1280160"/>
+            <a:ext cx="640080" cy="640080"/>
+          </a:xfrm>
+          <a:prstGeom prst="ellipse">
+            <a:avLst/>
+          </a:prstGeom>
+          <a:solidFill>
+            <a:srgbClr val="34D399"/>
+          </a:solidFill>
+          <a:ln>
+            <a:noFill/>
+          </a:ln>
+        </p:spPr>
+        <p:style>
+          <a:lnRef idx="1">
+            <a:schemeClr val="accent1"/>
+          </a:lnRef>
+          <a:fillRef idx="3">
+            <a:schemeClr val="accent1"/>
+          </a:fillRef>
+          <a:effectRef idx="2">
+            <a:schemeClr val="accent1"/>
+          </a:effectRef>
+          <a:fontRef idx="minor">
+            <a:schemeClr val="lt1"/>
+          </a:fontRef>
+        </p:style>
+        <p:txBody>
+          <a:bodyPr wrap="square" rtlCol="0" anchor="ctr"/>
+          <a:lstStyle/>
+          <a:p>
+            <a:pPr algn="ctr">
+              <a:defRPr sz="2200" b="1">
+                <a:solidFill>
+                  <a:srgbClr val="0F172A"/>
+                </a:solidFill>
+              </a:defRPr>
+            </a:pPr>
+            <a:r>
+              <a:t>2</a:t>
+            </a:r>
+          </a:p>
+        </p:txBody>
+      </p:sp>
+      <p:sp>
+        <p:nvSpPr>
+          <p:cNvPr id="9" name="TextBox 8"/>
+          <p:cNvSpPr txBox="1"/>
+          <p:nvPr/>
+        </p:nvSpPr>
+        <p:spPr>
+          <a:xfrm>
+            <a:off x="2807207" y="2103120"/>
+            <a:ext cx="1874519" cy="502920"/>
+          </a:xfrm>
+          <a:prstGeom prst="rect">
+            <a:avLst/>
+          </a:prstGeom>
+          <a:noFill/>
+        </p:spPr>
+        <p:txBody>
+          <a:bodyPr wrap="square">
+            <a:spAutoFit/>
+          </a:bodyPr>
+          <a:lstStyle/>
+          <a:p>
+            <a:pPr algn="ctr">
               <a:defRPr sz="1300" b="1">
                 <a:solidFill>
                   <a:srgbClr val="34D399"/>
@@ -12597,42 +12718,11 @@
               </a:defRPr>
             </a:pPr>
             <a:r>
-              <a:t>✦</a:t>
-            </a:r>
-          </a:p>
-        </p:txBody>
-      </p:sp>
-      <p:sp>
-        <p:nvSpPr>
-          <p:cNvPr id="9" name="TextBox 8"/>
-          <p:cNvSpPr txBox="1"/>
-          <p:nvPr/>
-        </p:nvSpPr>
-        <p:spPr>
-          <a:xfrm>
-            <a:off x="1280160" y="2048255"/>
-            <a:ext cx="5029200" cy="274320"/>
-          </a:xfrm>
-          <a:prstGeom prst="rect">
-            <a:avLst/>
-          </a:prstGeom>
-          <a:noFill/>
-        </p:spPr>
-        <p:txBody>
-          <a:bodyPr wrap="square">
-            <a:spAutoFit/>
-          </a:bodyPr>
-          <a:lstStyle/>
-          <a:p>
-            <a:pPr algn="l">
-              <a:defRPr sz="1300" b="1">
-                <a:solidFill>
-                  <a:srgbClr val="34D399"/>
-                </a:solidFill>
-              </a:defRPr>
-            </a:pPr>
-            <a:r>
-              <a:t>El parsing defensivo es no negociable</a:t>
+              <a:t>Historia funcional</a:t>
+            </a:r>
+            <a:br/>
+            <a:r>
+              <a:t>con UI</a:t>
             </a:r>
           </a:p>
         </p:txBody>
@@ -12645,21 +12735,21 @@
         </p:nvSpPr>
         <p:spPr>
           <a:xfrm>
-            <a:off x="1280160" y="2304287"/>
-            <a:ext cx="9601200" cy="256032"/>
-          </a:xfrm>
-          <a:prstGeom prst="rect">
-            <a:avLst/>
-          </a:prstGeom>
-          <a:noFill/>
-        </p:spPr>
-        <p:txBody>
-          <a:bodyPr wrap="square">
-            <a:spAutoFit/>
-          </a:bodyPr>
-          <a:lstStyle/>
-          <a:p>
-            <a:pPr algn="l">
+            <a:off x="2807207" y="2651760"/>
+            <a:ext cx="1874519" cy="430887"/>
+          </a:xfrm>
+          <a:prstGeom prst="rect">
+            <a:avLst/>
+          </a:prstGeom>
+          <a:noFill/>
+        </p:spPr>
+        <p:txBody>
+          <a:bodyPr wrap="square">
+            <a:spAutoFit/>
+          </a:bodyPr>
+          <a:lstStyle/>
+          <a:p>
+            <a:pPr algn="ctr">
               <a:defRPr sz="1100" b="0">
                 <a:solidFill>
                   <a:srgbClr val="94A3B8"/>
@@ -12667,7 +12757,35 @@
               </a:defRPr>
             </a:pPr>
             <a:r>
-              <a:t>Modelos truncan · agregan fences · omiten brackets → RepairJson + TryCompleteJson desde día uno</a:t>
+              <a:rPr dirty="0"/>
+              <a:t>Provider: </a:t>
+            </a:r>
+            <a:r>
+              <a:rPr dirty="0" err="1"/>
+              <a:t>Ollama</a:t>
+            </a:r>
+            <a:br>
+              <a:rPr dirty="0"/>
+            </a:br>
+            <a:r>
+              <a:rPr dirty="0"/>
+              <a:t>Mock: "</a:t>
+            </a:r>
+            <a:r>
+              <a:rPr dirty="0" err="1"/>
+              <a:t>Resetear</a:t>
+            </a:r>
+            <a:r>
+              <a:rPr dirty="0"/>
+              <a:t> </a:t>
+            </a:r>
+            <a:r>
+              <a:rPr dirty="0" err="1"/>
+              <a:t>contraseña</a:t>
+            </a:r>
+            <a:r>
+              <a:rPr dirty="0"/>
+              <a:t>"</a:t>
             </a:r>
           </a:p>
         </p:txBody>
@@ -12680,8 +12798,8 @@
         </p:nvSpPr>
         <p:spPr>
           <a:xfrm>
-            <a:off x="731520" y="2688336"/>
-            <a:ext cx="10515600" cy="548640"/>
+            <a:off x="5029200" y="1554480"/>
+            <a:ext cx="2103120" cy="2331720"/>
           </a:xfrm>
           <a:prstGeom prst="roundRect">
             <a:avLst/>
@@ -12718,27 +12836,79 @@
       </p:sp>
       <p:sp>
         <p:nvSpPr>
-          <p:cNvPr id="12" name="TextBox 11"/>
-          <p:cNvSpPr txBox="1"/>
-          <p:nvPr/>
-        </p:nvSpPr>
-        <p:spPr>
-          <a:xfrm>
-            <a:off x="914400" y="2706624"/>
-            <a:ext cx="365760" cy="274320"/>
-          </a:xfrm>
-          <a:prstGeom prst="rect">
-            <a:avLst/>
-          </a:prstGeom>
-          <a:noFill/>
-        </p:spPr>
-        <p:txBody>
-          <a:bodyPr wrap="square">
-            <a:spAutoFit/>
-          </a:bodyPr>
-          <a:lstStyle/>
-          <a:p>
-            <a:pPr algn="l">
+          <p:cNvPr id="12" name="Oval 11"/>
+          <p:cNvSpPr/>
+          <p:nvPr/>
+        </p:nvSpPr>
+        <p:spPr>
+          <a:xfrm>
+            <a:off x="5715000" y="1280160"/>
+            <a:ext cx="640080" cy="640080"/>
+          </a:xfrm>
+          <a:prstGeom prst="ellipse">
+            <a:avLst/>
+          </a:prstGeom>
+          <a:solidFill>
+            <a:srgbClr val="FBBF24"/>
+          </a:solidFill>
+          <a:ln>
+            <a:noFill/>
+          </a:ln>
+        </p:spPr>
+        <p:style>
+          <a:lnRef idx="1">
+            <a:schemeClr val="accent1"/>
+          </a:lnRef>
+          <a:fillRef idx="3">
+            <a:schemeClr val="accent1"/>
+          </a:fillRef>
+          <a:effectRef idx="2">
+            <a:schemeClr val="accent1"/>
+          </a:effectRef>
+          <a:fontRef idx="minor">
+            <a:schemeClr val="lt1"/>
+          </a:fontRef>
+        </p:style>
+        <p:txBody>
+          <a:bodyPr wrap="square" rtlCol="0" anchor="ctr"/>
+          <a:lstStyle/>
+          <a:p>
+            <a:pPr algn="ctr">
+              <a:defRPr sz="2200" b="1">
+                <a:solidFill>
+                  <a:srgbClr val="0F172A"/>
+                </a:solidFill>
+              </a:defRPr>
+            </a:pPr>
+            <a:r>
+              <a:t>3</a:t>
+            </a:r>
+          </a:p>
+        </p:txBody>
+      </p:sp>
+      <p:sp>
+        <p:nvSpPr>
+          <p:cNvPr id="13" name="TextBox 12"/>
+          <p:cNvSpPr txBox="1"/>
+          <p:nvPr/>
+        </p:nvSpPr>
+        <p:spPr>
+          <a:xfrm>
+            <a:off x="5138928" y="2103120"/>
+            <a:ext cx="1874519" cy="502920"/>
+          </a:xfrm>
+          <a:prstGeom prst="rect">
+            <a:avLst/>
+          </a:prstGeom>
+          <a:noFill/>
+        </p:spPr>
+        <p:txBody>
+          <a:bodyPr wrap="square">
+            <a:spAutoFit/>
+          </a:bodyPr>
+          <a:lstStyle/>
+          <a:p>
+            <a:pPr algn="ctr">
               <a:defRPr sz="1300" b="1">
                 <a:solidFill>
                   <a:srgbClr val="FBBF24"/>
@@ -12746,42 +12916,7 @@
               </a:defRPr>
             </a:pPr>
             <a:r>
-              <a:t>✦</a:t>
-            </a:r>
-          </a:p>
-        </p:txBody>
-      </p:sp>
-      <p:sp>
-        <p:nvSpPr>
-          <p:cNvPr id="13" name="TextBox 12"/>
-          <p:cNvSpPr txBox="1"/>
-          <p:nvPr/>
-        </p:nvSpPr>
-        <p:spPr>
-          <a:xfrm>
-            <a:off x="1280160" y="2706624"/>
-            <a:ext cx="5029200" cy="274320"/>
-          </a:xfrm>
-          <a:prstGeom prst="rect">
-            <a:avLst/>
-          </a:prstGeom>
-          <a:noFill/>
-        </p:spPr>
-        <p:txBody>
-          <a:bodyPr wrap="square">
-            <a:spAutoFit/>
-          </a:bodyPr>
-          <a:lstStyle/>
-          <a:p>
-            <a:pPr algn="l">
-              <a:defRPr sz="1300" b="1">
-                <a:solidFill>
-                  <a:srgbClr val="FBBF24"/>
-                </a:solidFill>
-              </a:defRPr>
-            </a:pPr>
-            <a:r>
-              <a:t>maxTokens es un fallo silencioso</a:t>
+              <a:t>Historia backend</a:t>
             </a:r>
           </a:p>
         </p:txBody>
@@ -12794,21 +12929,21 @@
         </p:nvSpPr>
         <p:spPr>
           <a:xfrm>
-            <a:off x="1280160" y="2962656"/>
-            <a:ext cx="9601200" cy="256032"/>
-          </a:xfrm>
-          <a:prstGeom prst="rect">
-            <a:avLst/>
-          </a:prstGeom>
-          <a:noFill/>
-        </p:spPr>
-        <p:txBody>
-          <a:bodyPr wrap="square">
-            <a:spAutoFit/>
-          </a:bodyPr>
-          <a:lstStyle/>
-          <a:p>
-            <a:pPr algn="l">
+            <a:off x="5138928" y="2651760"/>
+            <a:ext cx="1874519" cy="430887"/>
+          </a:xfrm>
+          <a:prstGeom prst="rect">
+            <a:avLst/>
+          </a:prstGeom>
+          <a:noFill/>
+        </p:spPr>
+        <p:txBody>
+          <a:bodyPr wrap="square">
+            <a:spAutoFit/>
+          </a:bodyPr>
+          <a:lstStyle/>
+          <a:p>
+            <a:pPr algn="ctr">
               <a:defRPr sz="1100" b="0">
                 <a:solidFill>
                   <a:srgbClr val="94A3B8"/>
@@ -12816,21 +12951,41 @@
               </a:defRPr>
             </a:pPr>
             <a:r>
-              <a:t>Respuesta truncada se ve como normal — sin señal de error · siempre configurar MaxTokens explícito</a:t>
-            </a:r>
-          </a:p>
-        </p:txBody>
-      </p:sp>
-      <p:sp>
-        <p:nvSpPr>
-          <p:cNvPr id="19" name="Rounded Rectangle 18"/>
+              <a:rPr dirty="0"/>
+              <a:t>Provider: </a:t>
+            </a:r>
+            <a:r>
+              <a:rPr dirty="0" err="1"/>
+              <a:t>Ollama</a:t>
+            </a:r>
+            <a:br>
+              <a:rPr dirty="0"/>
+            </a:br>
+            <a:r>
+              <a:rPr dirty="0"/>
+              <a:t>Mock: "Retries </a:t>
+            </a:r>
+            <a:r>
+              <a:rPr dirty="0" err="1"/>
+              <a:t>automáticos</a:t>
+            </a:r>
+            <a:r>
+              <a:rPr dirty="0"/>
+              <a:t>"</a:t>
+            </a:r>
+          </a:p>
+        </p:txBody>
+      </p:sp>
+      <p:sp>
+        <p:nvSpPr>
+          <p:cNvPr id="15" name="Rounded Rectangle 14"/>
           <p:cNvSpPr/>
           <p:nvPr/>
         </p:nvSpPr>
         <p:spPr>
           <a:xfrm>
-            <a:off x="731520" y="3355848"/>
-            <a:ext cx="10515600" cy="548640"/>
+            <a:off x="7360919" y="1554479"/>
+            <a:ext cx="2103120" cy="2331719"/>
           </a:xfrm>
           <a:prstGeom prst="roundRect">
             <a:avLst/>
@@ -12867,210 +13022,171 @@
       </p:sp>
       <p:sp>
         <p:nvSpPr>
-          <p:cNvPr id="20" name="TextBox 19"/>
-          <p:cNvSpPr txBox="1"/>
-          <p:nvPr/>
-        </p:nvSpPr>
-        <p:spPr>
-          <a:xfrm>
-            <a:off x="914400" y="3374136"/>
-            <a:ext cx="365760" cy="274320"/>
-          </a:xfrm>
-          <a:prstGeom prst="rect">
-            <a:avLst/>
-          </a:prstGeom>
-          <a:noFill/>
-        </p:spPr>
-        <p:txBody>
-          <a:bodyPr wrap="square">
-            <a:spAutoFit/>
-          </a:bodyPr>
-          <a:lstStyle/>
-          <a:p>
-            <a:pPr algn="l">
+          <p:cNvPr id="16" name="Oval 15"/>
+          <p:cNvSpPr/>
+          <p:nvPr/>
+        </p:nvSpPr>
+        <p:spPr>
+          <a:xfrm>
+            <a:off x="8046719" y="1280160"/>
+            <a:ext cx="640080" cy="640080"/>
+          </a:xfrm>
+          <a:prstGeom prst="ellipse">
+            <a:avLst/>
+          </a:prstGeom>
+          <a:solidFill>
+            <a:srgbClr val="F472B6"/>
+          </a:solidFill>
+          <a:ln>
+            <a:noFill/>
+          </a:ln>
+        </p:spPr>
+        <p:style>
+          <a:lnRef idx="1">
+            <a:schemeClr val="accent1"/>
+          </a:lnRef>
+          <a:fillRef idx="3">
+            <a:schemeClr val="accent1"/>
+          </a:fillRef>
+          <a:effectRef idx="2">
+            <a:schemeClr val="accent1"/>
+          </a:effectRef>
+          <a:fontRef idx="minor">
+            <a:schemeClr val="lt1"/>
+          </a:fontRef>
+        </p:style>
+        <p:txBody>
+          <a:bodyPr wrap="square" rtlCol="0" anchor="ctr"/>
+          <a:lstStyle/>
+          <a:p>
+            <a:pPr algn="ctr">
+              <a:defRPr sz="2200" b="1">
+                <a:solidFill>
+                  <a:srgbClr val="0F172A"/>
+                </a:solidFill>
+              </a:defRPr>
+            </a:pPr>
+            <a:r>
+              <a:t>4</a:t>
+            </a:r>
+          </a:p>
+        </p:txBody>
+      </p:sp>
+      <p:sp>
+        <p:nvSpPr>
+          <p:cNvPr id="17" name="TextBox 16"/>
+          <p:cNvSpPr txBox="1"/>
+          <p:nvPr/>
+        </p:nvSpPr>
+        <p:spPr>
+          <a:xfrm>
+            <a:off x="7470647" y="2103120"/>
+            <a:ext cx="1874519" cy="502920"/>
+          </a:xfrm>
+          <a:prstGeom prst="rect">
+            <a:avLst/>
+          </a:prstGeom>
+          <a:noFill/>
+        </p:spPr>
+        <p:txBody>
+          <a:bodyPr wrap="square">
+            <a:spAutoFit/>
+          </a:bodyPr>
+          <a:lstStyle/>
+          <a:p>
+            <a:pPr algn="ctr">
               <a:defRPr sz="1300" b="1">
                 <a:solidFill>
-                  <a:srgbClr val="A78BFA"/>
-                </a:solidFill>
-              </a:defRPr>
-            </a:pPr>
-            <a:r>
-              <a:t>✦</a:t>
-            </a:r>
-          </a:p>
-        </p:txBody>
-      </p:sp>
-      <p:sp>
-        <p:nvSpPr>
-          <p:cNvPr id="21" name="TextBox 20"/>
-          <p:cNvSpPr txBox="1"/>
-          <p:nvPr/>
-        </p:nvSpPr>
-        <p:spPr>
-          <a:xfrm>
-            <a:off x="1280160" y="3374136"/>
-            <a:ext cx="5029200" cy="292388"/>
-          </a:xfrm>
-          <a:prstGeom prst="rect">
-            <a:avLst/>
-          </a:prstGeom>
-          <a:noFill/>
-        </p:spPr>
-        <p:txBody>
-          <a:bodyPr wrap="square">
-            <a:spAutoFit/>
-          </a:bodyPr>
-          <a:lstStyle/>
-          <a:p>
-            <a:pPr algn="l">
-              <a:defRPr sz="1300" b="1">
-                <a:solidFill>
-                  <a:srgbClr val="A78BFA"/>
+                  <a:srgbClr val="F472B6"/>
+                </a:solidFill>
+              </a:defRPr>
+            </a:pPr>
+            <a:r>
+              <a:t>Activación</a:t>
+            </a:r>
+            <a:br/>
+            <a:r>
+              <a:t>compliance</a:t>
+            </a:r>
+          </a:p>
+        </p:txBody>
+      </p:sp>
+      <p:sp>
+        <p:nvSpPr>
+          <p:cNvPr id="18" name="TextBox 17"/>
+          <p:cNvSpPr txBox="1"/>
+          <p:nvPr/>
+        </p:nvSpPr>
+        <p:spPr>
+          <a:xfrm>
+            <a:off x="7470647" y="2651760"/>
+            <a:ext cx="1874519" cy="600164"/>
+          </a:xfrm>
+          <a:prstGeom prst="rect">
+            <a:avLst/>
+          </a:prstGeom>
+          <a:noFill/>
+        </p:spPr>
+        <p:txBody>
+          <a:bodyPr wrap="square">
+            <a:spAutoFit/>
+          </a:bodyPr>
+          <a:lstStyle/>
+          <a:p>
+            <a:pPr algn="ctr">
+              <a:defRPr sz="1100" b="0">
+                <a:solidFill>
+                  <a:srgbClr val="94A3B8"/>
                 </a:solidFill>
               </a:defRPr>
             </a:pPr>
             <a:r>
               <a:rPr dirty="0"/>
-              <a:t>La </a:t>
+              <a:t>Provider: Bedrock</a:t>
+            </a:r>
+            <a:br>
+              <a:rPr dirty="0"/>
+            </a:br>
+            <a:r>
+              <a:rPr dirty="0"/>
+              <a:t>Mock: "</a:t>
             </a:r>
             <a:r>
               <a:rPr dirty="0" err="1"/>
-              <a:t>abstracción</a:t>
-            </a:r>
-            <a:r>
-              <a:rPr dirty="0"/>
-              <a:t> de </a:t>
-            </a:r>
-            <a:r>
-              <a:rPr dirty="0" err="1"/>
-              <a:t>proveedor</a:t>
+              <a:t>Descarga</a:t>
             </a:r>
             <a:r>
               <a:rPr dirty="0"/>
               <a:t> </a:t>
             </a:r>
             <a:r>
-              <a:rPr lang="en-US" dirty="0"/>
-              <a:t>da </a:t>
-            </a:r>
-            <a:r>
-              <a:rPr lang="en-US" dirty="0" err="1"/>
-              <a:t>mucha</a:t>
-            </a:r>
-            <a:r>
-              <a:rPr lang="en-US" dirty="0"/>
-              <a:t> </a:t>
-            </a:r>
-            <a:r>
-              <a:rPr lang="en-US" dirty="0" err="1"/>
-              <a:t>flexibilidad</a:t>
-            </a:r>
-            <a:endParaRPr dirty="0"/>
-          </a:p>
-        </p:txBody>
-      </p:sp>
-      <p:sp>
-        <p:nvSpPr>
-          <p:cNvPr id="22" name="TextBox 21"/>
-          <p:cNvSpPr txBox="1"/>
-          <p:nvPr/>
-        </p:nvSpPr>
-        <p:spPr>
-          <a:xfrm>
-            <a:off x="1280160" y="3630168"/>
-            <a:ext cx="9601200" cy="256032"/>
-          </a:xfrm>
-          <a:prstGeom prst="rect">
-            <a:avLst/>
-          </a:prstGeom>
-          <a:noFill/>
-        </p:spPr>
-        <p:txBody>
-          <a:bodyPr wrap="square">
-            <a:spAutoFit/>
-          </a:bodyPr>
-          <a:lstStyle/>
-          <a:p>
-            <a:pPr algn="l">
-              <a:defRPr sz="1100" b="0">
-                <a:solidFill>
-                  <a:srgbClr val="94A3B8"/>
-                </a:solidFill>
-              </a:defRPr>
-            </a:pPr>
-            <a:r>
+              <a:rPr dirty="0" err="1"/>
+              <a:t>datos</a:t>
+            </a:r>
+            <a:br>
               <a:rPr dirty="0"/>
-              <a:t>Cambiar de </a:t>
-            </a:r>
+            </a:br>
             <a:r>
               <a:rPr dirty="0" err="1"/>
-              <a:t>Ollama</a:t>
+              <a:t>personales</a:t>
             </a:r>
             <a:r>
               <a:rPr dirty="0"/>
-              <a:t> a Bedrock no </a:t>
-            </a:r>
-            <a:r>
-              <a:rPr dirty="0" err="1"/>
-              <a:t>requirió</a:t>
-            </a:r>
-            <a:r>
-              <a:rPr dirty="0"/>
-              <a:t> </a:t>
-            </a:r>
-            <a:r>
-              <a:rPr dirty="0" err="1"/>
-              <a:t>tocar</a:t>
-            </a:r>
-            <a:r>
-              <a:rPr dirty="0"/>
-              <a:t> </a:t>
-            </a:r>
-            <a:r>
-              <a:rPr dirty="0" err="1"/>
-              <a:t>ningún</a:t>
-            </a:r>
-            <a:r>
-              <a:rPr dirty="0"/>
-              <a:t> </a:t>
-            </a:r>
-            <a:r>
-              <a:rPr dirty="0" err="1"/>
-              <a:t>agente</a:t>
-            </a:r>
-            <a:r>
-              <a:rPr dirty="0"/>
-              <a:t> </a:t>
-            </a:r>
-            <a:r>
-              <a:rPr dirty="0" err="1"/>
-              <a:t>ni</a:t>
-            </a:r>
-            <a:r>
-              <a:rPr dirty="0"/>
-              <a:t> </a:t>
-            </a:r>
-            <a:r>
-              <a:rPr dirty="0" err="1"/>
-              <a:t>el</a:t>
-            </a:r>
-            <a:r>
-              <a:rPr dirty="0"/>
-              <a:t> supervisor</a:t>
-            </a:r>
-          </a:p>
-        </p:txBody>
-      </p:sp>
-      <p:sp>
-        <p:nvSpPr>
-          <p:cNvPr id="23" name="Rounded Rectangle 22"/>
+              <a:t>"</a:t>
+            </a:r>
+          </a:p>
+        </p:txBody>
+      </p:sp>
+      <p:sp>
+        <p:nvSpPr>
+          <p:cNvPr id="19" name="Rounded Rectangle 18"/>
           <p:cNvSpPr/>
           <p:nvPr/>
         </p:nvSpPr>
         <p:spPr>
           <a:xfrm>
-            <a:off x="731520" y="4014216"/>
-            <a:ext cx="10515600" cy="548640"/>
+            <a:off x="9692640" y="1554480"/>
+            <a:ext cx="2103120" cy="2331720"/>
           </a:xfrm>
           <a:prstGeom prst="roundRect">
             <a:avLst/>
@@ -13107,313 +13223,20 @@
       </p:sp>
       <p:sp>
         <p:nvSpPr>
-          <p:cNvPr id="24" name="TextBox 23"/>
-          <p:cNvSpPr txBox="1"/>
-          <p:nvPr/>
-        </p:nvSpPr>
-        <p:spPr>
-          <a:xfrm>
-            <a:off x="914400" y="4032504"/>
-            <a:ext cx="365760" cy="274320"/>
-          </a:xfrm>
-          <a:prstGeom prst="rect">
-            <a:avLst/>
-          </a:prstGeom>
-          <a:noFill/>
-        </p:spPr>
-        <p:txBody>
-          <a:bodyPr wrap="square">
-            <a:spAutoFit/>
-          </a:bodyPr>
-          <a:lstStyle/>
-          <a:p>
-            <a:pPr algn="l">
-              <a:defRPr sz="1300" b="1">
-                <a:solidFill>
-                  <a:srgbClr val="F472B6"/>
-                </a:solidFill>
-              </a:defRPr>
-            </a:pPr>
-            <a:r>
-              <a:t>✦</a:t>
-            </a:r>
-          </a:p>
-        </p:txBody>
-      </p:sp>
-      <p:sp>
-        <p:nvSpPr>
-          <p:cNvPr id="25" name="TextBox 24"/>
-          <p:cNvSpPr txBox="1"/>
-          <p:nvPr/>
-        </p:nvSpPr>
-        <p:spPr>
-          <a:xfrm>
-            <a:off x="1280159" y="4032504"/>
-            <a:ext cx="8522602" cy="292388"/>
-          </a:xfrm>
-          <a:prstGeom prst="rect">
-            <a:avLst/>
-          </a:prstGeom>
-          <a:noFill/>
-        </p:spPr>
-        <p:txBody>
-          <a:bodyPr wrap="square">
-            <a:spAutoFit/>
-          </a:bodyPr>
-          <a:lstStyle/>
-          <a:p>
-            <a:pPr algn="l">
-              <a:defRPr sz="1300" b="1">
-                <a:solidFill>
-                  <a:srgbClr val="F472B6"/>
-                </a:solidFill>
-              </a:defRPr>
-            </a:pPr>
-            <a:r>
-              <a:rPr lang="en-US" dirty="0"/>
-              <a:t>En la </a:t>
-            </a:r>
-            <a:r>
-              <a:rPr lang="en-US" dirty="0" err="1"/>
-              <a:t>comparacion</a:t>
-            </a:r>
-            <a:r>
-              <a:rPr lang="en-US" dirty="0"/>
-              <a:t> de </a:t>
-            </a:r>
-            <a:r>
-              <a:rPr lang="en-US" dirty="0" err="1"/>
-              <a:t>resultados</a:t>
-            </a:r>
-            <a:r>
-              <a:rPr lang="en-US" dirty="0"/>
-              <a:t> de </a:t>
-            </a:r>
-            <a:r>
-              <a:rPr lang="en-US" dirty="0" err="1"/>
-              <a:t>diferentes</a:t>
-            </a:r>
-            <a:r>
-              <a:rPr lang="en-US" dirty="0"/>
-              <a:t> </a:t>
-            </a:r>
-            <a:r>
-              <a:rPr lang="en-US" dirty="0" err="1"/>
-              <a:t>modelos</a:t>
-            </a:r>
-            <a:r>
-              <a:rPr lang="en-US" dirty="0"/>
-              <a:t> </a:t>
-            </a:r>
-            <a:r>
-              <a:rPr lang="en-US" dirty="0" err="1"/>
-              <a:t>el</a:t>
-            </a:r>
-            <a:r>
-              <a:rPr lang="en-US" dirty="0"/>
-              <a:t> </a:t>
-            </a:r>
-            <a:r>
-              <a:rPr lang="en-US" dirty="0" err="1"/>
-              <a:t>analisis</a:t>
-            </a:r>
-            <a:r>
-              <a:rPr lang="en-US" dirty="0"/>
-              <a:t> </a:t>
-            </a:r>
-            <a:r>
-              <a:rPr dirty="0" err="1"/>
-              <a:t>semántico</a:t>
-            </a:r>
-            <a:r>
-              <a:rPr dirty="0"/>
-              <a:t> </a:t>
-            </a:r>
-            <a:r>
-              <a:rPr dirty="0" err="1"/>
-              <a:t>supera</a:t>
-            </a:r>
-            <a:r>
-              <a:rPr dirty="0"/>
-              <a:t> a</a:t>
-            </a:r>
-            <a:r>
-              <a:rPr lang="en-US" dirty="0"/>
-              <a:t> la </a:t>
-            </a:r>
-            <a:r>
-              <a:rPr lang="en-US" dirty="0" err="1"/>
-              <a:t>comparacion</a:t>
-            </a:r>
-            <a:r>
-              <a:rPr lang="en-US" dirty="0"/>
-              <a:t> de </a:t>
-            </a:r>
-            <a:r>
-              <a:rPr lang="en-US" dirty="0" err="1"/>
-              <a:t>texto</a:t>
-            </a:r>
-            <a:r>
-              <a:rPr lang="en-US" dirty="0"/>
-              <a:t> </a:t>
-            </a:r>
-            <a:r>
-              <a:rPr dirty="0" err="1"/>
-              <a:t>exacto</a:t>
-            </a:r>
-            <a:endParaRPr dirty="0"/>
-          </a:p>
-        </p:txBody>
-      </p:sp>
-      <p:sp>
-        <p:nvSpPr>
-          <p:cNvPr id="26" name="TextBox 25"/>
-          <p:cNvSpPr txBox="1"/>
-          <p:nvPr/>
-        </p:nvSpPr>
-        <p:spPr>
-          <a:xfrm>
-            <a:off x="1280160" y="4288536"/>
-            <a:ext cx="9601200" cy="261610"/>
-          </a:xfrm>
-          <a:prstGeom prst="rect">
-            <a:avLst/>
-          </a:prstGeom>
-          <a:noFill/>
-        </p:spPr>
-        <p:txBody>
-          <a:bodyPr wrap="square">
-            <a:spAutoFit/>
-          </a:bodyPr>
-          <a:lstStyle/>
-          <a:p>
-            <a:pPr algn="l">
-              <a:defRPr sz="1100" b="0">
-                <a:solidFill>
-                  <a:srgbClr val="94A3B8"/>
-                </a:solidFill>
-              </a:defRPr>
-            </a:pPr>
-            <a:r>
-              <a:rPr dirty="0"/>
-              <a:t>"</a:t>
-            </a:r>
-            <a:r>
-              <a:rPr dirty="0" err="1"/>
-              <a:t>Expiración</a:t>
-            </a:r>
-            <a:r>
-              <a:rPr dirty="0"/>
-              <a:t> del link" ≠ "</a:t>
-            </a:r>
-            <a:r>
-              <a:rPr dirty="0" err="1"/>
-              <a:t>regla</a:t>
-            </a:r>
-            <a:r>
-              <a:rPr dirty="0"/>
-              <a:t> de </a:t>
-            </a:r>
-            <a:r>
-              <a:rPr dirty="0" err="1"/>
-              <a:t>vencimiento</a:t>
-            </a:r>
-            <a:r>
-              <a:rPr lang="en-US" dirty="0"/>
-              <a:t> de </a:t>
-            </a:r>
-            <a:r>
-              <a:rPr lang="en-US" dirty="0" err="1"/>
-              <a:t>validación</a:t>
-            </a:r>
-            <a:r>
-              <a:rPr lang="en-US" dirty="0"/>
-              <a:t> de email</a:t>
-            </a:r>
-            <a:r>
-              <a:rPr dirty="0"/>
-              <a:t>" </a:t>
-            </a:r>
-            <a:r>
-              <a:rPr dirty="0" err="1"/>
-              <a:t>en</a:t>
-            </a:r>
-            <a:r>
-              <a:rPr dirty="0"/>
-              <a:t> </a:t>
-            </a:r>
-            <a:r>
-              <a:rPr lang="en-US" dirty="0"/>
-              <a:t> </a:t>
-            </a:r>
-            <a:r>
-              <a:rPr lang="en-US" dirty="0" err="1"/>
-              <a:t>comparación</a:t>
-            </a:r>
-            <a:r>
-              <a:rPr lang="en-US" dirty="0"/>
-              <a:t> de </a:t>
-            </a:r>
-            <a:r>
-              <a:rPr lang="en-US" dirty="0" err="1"/>
-              <a:t>texto</a:t>
-            </a:r>
-            <a:r>
-              <a:rPr lang="en-US" dirty="0"/>
-              <a:t> </a:t>
-            </a:r>
-            <a:r>
-              <a:rPr lang="en-US" dirty="0" err="1"/>
-              <a:t>exacto</a:t>
-            </a:r>
-            <a:r>
-              <a:rPr lang="en-US" dirty="0"/>
-              <a:t> </a:t>
-            </a:r>
-            <a:r>
-              <a:rPr dirty="0"/>
-              <a:t>— </a:t>
-            </a:r>
-            <a:r>
-              <a:rPr dirty="0" err="1"/>
-              <a:t>pero</a:t>
-            </a:r>
-            <a:r>
-              <a:rPr dirty="0"/>
-              <a:t> son la </a:t>
-            </a:r>
-            <a:r>
-              <a:rPr dirty="0" err="1"/>
-              <a:t>misma</a:t>
-            </a:r>
-            <a:r>
-              <a:rPr dirty="0"/>
-              <a:t> </a:t>
-            </a:r>
-            <a:r>
-              <a:rPr dirty="0" err="1"/>
-              <a:t>preocupación</a:t>
-            </a:r>
-            <a:endParaRPr dirty="0"/>
-          </a:p>
-        </p:txBody>
-      </p:sp>
-      <p:sp>
-        <p:nvSpPr>
-          <p:cNvPr id="27" name="Rounded Rectangle 26"/>
+          <p:cNvPr id="20" name="Oval 19"/>
           <p:cNvSpPr/>
           <p:nvPr/>
         </p:nvSpPr>
         <p:spPr>
           <a:xfrm>
-            <a:off x="731520" y="4672584"/>
-            <a:ext cx="10515600" cy="548640"/>
-          </a:xfrm>
-          <a:prstGeom prst="roundRect">
+            <a:off x="10378440" y="1280160"/>
+            <a:ext cx="640080" cy="640080"/>
+          </a:xfrm>
+          <a:prstGeom prst="ellipse">
             <a:avLst/>
           </a:prstGeom>
           <a:solidFill>
-            <a:srgbClr val="27344A"/>
+            <a:srgbClr val="A78BFA"/>
           </a:solidFill>
           <a:ln>
             <a:noFill/>
@@ -13434,107 +13257,84 @@
           </a:fontRef>
         </p:style>
         <p:txBody>
-          <a:bodyPr rtlCol="0" anchor="ctr"/>
-          <a:lstStyle/>
-          <a:p>
-            <a:pPr algn="ctr"/>
-            <a:endParaRPr/>
-          </a:p>
-        </p:txBody>
-      </p:sp>
-      <p:sp>
-        <p:nvSpPr>
-          <p:cNvPr id="28" name="TextBox 27"/>
-          <p:cNvSpPr txBox="1"/>
-          <p:nvPr/>
-        </p:nvSpPr>
-        <p:spPr>
-          <a:xfrm>
-            <a:off x="914400" y="4690872"/>
-            <a:ext cx="365760" cy="274320"/>
-          </a:xfrm>
-          <a:prstGeom prst="rect">
-            <a:avLst/>
-          </a:prstGeom>
-          <a:noFill/>
-        </p:spPr>
-        <p:txBody>
-          <a:bodyPr wrap="square">
-            <a:spAutoFit/>
-          </a:bodyPr>
-          <a:lstStyle/>
-          <a:p>
-            <a:pPr algn="l">
+          <a:bodyPr wrap="square" rtlCol="0" anchor="ctr"/>
+          <a:lstStyle/>
+          <a:p>
+            <a:pPr algn="ctr">
+              <a:defRPr sz="2200" b="1">
+                <a:solidFill>
+                  <a:srgbClr val="0F172A"/>
+                </a:solidFill>
+              </a:defRPr>
+            </a:pPr>
+            <a:r>
+              <a:t>5</a:t>
+            </a:r>
+          </a:p>
+        </p:txBody>
+      </p:sp>
+      <p:sp>
+        <p:nvSpPr>
+          <p:cNvPr id="21" name="TextBox 20"/>
+          <p:cNvSpPr txBox="1"/>
+          <p:nvPr/>
+        </p:nvSpPr>
+        <p:spPr>
+          <a:xfrm>
+            <a:off x="9802368" y="2103120"/>
+            <a:ext cx="1874519" cy="502920"/>
+          </a:xfrm>
+          <a:prstGeom prst="rect">
+            <a:avLst/>
+          </a:prstGeom>
+          <a:noFill/>
+        </p:spPr>
+        <p:txBody>
+          <a:bodyPr wrap="square">
+            <a:spAutoFit/>
+          </a:bodyPr>
+          <a:lstStyle/>
+          <a:p>
+            <a:pPr algn="ctr">
               <a:defRPr sz="1300" b="1">
                 <a:solidFill>
-                  <a:srgbClr val="60A5FA"/>
-                </a:solidFill>
-              </a:defRPr>
-            </a:pPr>
-            <a:r>
-              <a:t>✦</a:t>
-            </a:r>
-          </a:p>
-        </p:txBody>
-      </p:sp>
-      <p:sp>
-        <p:nvSpPr>
-          <p:cNvPr id="29" name="TextBox 28"/>
-          <p:cNvSpPr txBox="1"/>
-          <p:nvPr/>
-        </p:nvSpPr>
-        <p:spPr>
-          <a:xfrm>
-            <a:off x="1280160" y="4690872"/>
-            <a:ext cx="5029200" cy="274320"/>
-          </a:xfrm>
-          <a:prstGeom prst="rect">
-            <a:avLst/>
-          </a:prstGeom>
-          <a:noFill/>
-        </p:spPr>
-        <p:txBody>
-          <a:bodyPr wrap="square">
-            <a:spAutoFit/>
-          </a:bodyPr>
-          <a:lstStyle/>
-          <a:p>
-            <a:pPr algn="l">
-              <a:defRPr sz="1300" b="1">
-                <a:solidFill>
-                  <a:srgbClr val="60A5FA"/>
-                </a:solidFill>
-              </a:defRPr>
-            </a:pPr>
-            <a:r>
-              <a:t>Prompts necesitan schema de output explícito</a:t>
-            </a:r>
-          </a:p>
-        </p:txBody>
-      </p:sp>
-      <p:sp>
-        <p:nvSpPr>
-          <p:cNvPr id="30" name="TextBox 29"/>
-          <p:cNvSpPr txBox="1"/>
-          <p:nvPr/>
-        </p:nvSpPr>
-        <p:spPr>
-          <a:xfrm>
-            <a:off x="1280160" y="4946904"/>
-            <a:ext cx="9601200" cy="256032"/>
-          </a:xfrm>
-          <a:prstGeom prst="rect">
-            <a:avLst/>
-          </a:prstGeom>
-          <a:noFill/>
-        </p:spPr>
-        <p:txBody>
-          <a:bodyPr wrap="square">
-            <a:spAutoFit/>
-          </a:bodyPr>
-          <a:lstStyle/>
-          <a:p>
-            <a:pPr algn="l">
+                  <a:srgbClr val="A78BFA"/>
+                </a:solidFill>
+              </a:defRPr>
+            </a:pPr>
+            <a:r>
+              <a:t>History +</a:t>
+            </a:r>
+            <a:br/>
+            <a:r>
+              <a:t>Semantic Compare</a:t>
+            </a:r>
+          </a:p>
+        </p:txBody>
+      </p:sp>
+      <p:sp>
+        <p:nvSpPr>
+          <p:cNvPr id="22" name="TextBox 21"/>
+          <p:cNvSpPr txBox="1"/>
+          <p:nvPr/>
+        </p:nvSpPr>
+        <p:spPr>
+          <a:xfrm>
+            <a:off x="9802368" y="2651760"/>
+            <a:ext cx="1874519" cy="3474720"/>
+          </a:xfrm>
+          <a:prstGeom prst="rect">
+            <a:avLst/>
+          </a:prstGeom>
+          <a:noFill/>
+        </p:spPr>
+        <p:txBody>
+          <a:bodyPr wrap="square">
+            <a:spAutoFit/>
+          </a:bodyPr>
+          <a:lstStyle/>
+          <a:p>
+            <a:pPr algn="ctr">
               <a:defRPr sz="1100" b="0">
                 <a:solidFill>
                   <a:srgbClr val="94A3B8"/>
@@ -13542,8 +13342,65 @@
               </a:defRPr>
             </a:pPr>
             <a:r>
-              <a:t>Incluir nombres de propiedades + tipos + ejemplo → parse success rate dramáticamente mayor</a:t>
-            </a:r>
+              <a:rPr dirty="0"/>
+              <a:t>Provider: </a:t>
+            </a:r>
+            <a:r>
+              <a:rPr dirty="0" err="1"/>
+              <a:t>cualquiera</a:t>
+            </a:r>
+            <a:br>
+              <a:rPr dirty="0"/>
+            </a:br>
+            <a:r>
+              <a:rPr dirty="0"/>
+              <a:t>Mock: </a:t>
+            </a:r>
+            <a:r>
+              <a:rPr dirty="0" err="1"/>
+              <a:t>historia</a:t>
+            </a:r>
+            <a:r>
+              <a:rPr dirty="0"/>
+              <a:t> </a:t>
+            </a:r>
+            <a:r>
+              <a:rPr dirty="0" err="1"/>
+              <a:t>ya</a:t>
+            </a:r>
+            <a:r>
+              <a:rPr dirty="0"/>
+              <a:t> corrida x2</a:t>
+            </a:r>
+            <a:br>
+              <a:rPr dirty="0"/>
+            </a:br>
+            <a:br>
+              <a:rPr dirty="0"/>
+            </a:br>
+            <a:r>
+              <a:rPr dirty="0"/>
+              <a:t>Tab History</a:t>
+            </a:r>
+            <a:br>
+              <a:rPr dirty="0"/>
+            </a:br>
+            <a:r>
+              <a:rPr dirty="0"/>
+              <a:t>→ Tab Compare</a:t>
+            </a:r>
+            <a:br>
+              <a:rPr dirty="0"/>
+            </a:br>
+            <a:r>
+              <a:rPr dirty="0"/>
+              <a:t>→ pares </a:t>
+            </a:r>
+            <a:r>
+              <a:rPr dirty="0" err="1"/>
+              <a:t>semánticos</a:t>
+            </a:r>
+            <a:endParaRPr dirty="0"/>
           </a:p>
         </p:txBody>
       </p:sp>
@@ -13589,7 +13446,7 @@
         <p:spPr>
           <a:xfrm>
             <a:off x="914400" y="2286000"/>
-            <a:ext cx="10058400" cy="914400"/>
+            <a:ext cx="10058400" cy="707886"/>
           </a:xfrm>
           <a:prstGeom prst="rect">
             <a:avLst/>
@@ -13610,8 +13467,14 @@
               </a:defRPr>
             </a:pPr>
             <a:r>
-              <a:t>PARTE 7</a:t>
-            </a:r>
+              <a:rPr dirty="0"/>
+              <a:t>PARTE </a:t>
+            </a:r>
+            <a:r>
+              <a:rPr lang="en-US" dirty="0"/>
+              <a:t>7</a:t>
+            </a:r>
+            <a:endParaRPr dirty="0"/>
           </a:p>
         </p:txBody>
       </p:sp>
@@ -13645,7 +13508,7 @@
               </a:defRPr>
             </a:pPr>
             <a:r>
-              <a:t>Demo</a:t>
+              <a:t>Lo que Aprendimos</a:t>
             </a:r>
           </a:p>
         </p:txBody>
@@ -13736,7 +13599,7 @@
         <p:spPr>
           <a:xfrm>
             <a:off x="731520" y="365760"/>
-            <a:ext cx="10058400" cy="523220"/>
+            <a:ext cx="10058400" cy="548640"/>
           </a:xfrm>
           <a:prstGeom prst="rect">
             <a:avLst/>
@@ -13757,8 +13620,7 @@
               </a:defRPr>
             </a:pPr>
             <a:r>
-              <a:rPr dirty="0"/>
-              <a:t>Demo Script</a:t>
+              <a:t>Lo que aprendimos</a:t>
             </a:r>
           </a:p>
         </p:txBody>
@@ -13771,8 +13633,8 @@
         </p:nvSpPr>
         <p:spPr>
           <a:xfrm>
-            <a:off x="365760" y="1554480"/>
-            <a:ext cx="2103120" cy="2331720"/>
+            <a:off x="731520" y="1371600"/>
+            <a:ext cx="10515600" cy="548640"/>
           </a:xfrm>
           <a:prstGeom prst="roundRect">
             <a:avLst/>
@@ -13809,52 +13671,35 @@
       </p:sp>
       <p:sp>
         <p:nvSpPr>
-          <p:cNvPr id="4" name="Oval 3"/>
-          <p:cNvSpPr/>
-          <p:nvPr/>
-        </p:nvSpPr>
-        <p:spPr>
-          <a:xfrm>
-            <a:off x="1051560" y="1280160"/>
-            <a:ext cx="640080" cy="640080"/>
-          </a:xfrm>
-          <a:prstGeom prst="ellipse">
-            <a:avLst/>
-          </a:prstGeom>
-          <a:solidFill>
-            <a:srgbClr val="60A5FA"/>
-          </a:solidFill>
-          <a:ln>
-            <a:noFill/>
-          </a:ln>
-        </p:spPr>
-        <p:style>
-          <a:lnRef idx="1">
-            <a:schemeClr val="accent1"/>
-          </a:lnRef>
-          <a:fillRef idx="3">
-            <a:schemeClr val="accent1"/>
-          </a:fillRef>
-          <a:effectRef idx="2">
-            <a:schemeClr val="accent1"/>
-          </a:effectRef>
-          <a:fontRef idx="minor">
-            <a:schemeClr val="lt1"/>
-          </a:fontRef>
-        </p:style>
-        <p:txBody>
-          <a:bodyPr wrap="square" rtlCol="0" anchor="ctr"/>
-          <a:lstStyle/>
-          <a:p>
-            <a:pPr algn="ctr">
-              <a:defRPr sz="2200" b="1">
-                <a:solidFill>
-                  <a:srgbClr val="0F172A"/>
-                </a:solidFill>
-              </a:defRPr>
-            </a:pPr>
-            <a:r>
-              <a:t>1</a:t>
+          <p:cNvPr id="4" name="TextBox 3"/>
+          <p:cNvSpPr txBox="1"/>
+          <p:nvPr/>
+        </p:nvSpPr>
+        <p:spPr>
+          <a:xfrm>
+            <a:off x="914400" y="1389888"/>
+            <a:ext cx="365760" cy="274320"/>
+          </a:xfrm>
+          <a:prstGeom prst="rect">
+            <a:avLst/>
+          </a:prstGeom>
+          <a:noFill/>
+        </p:spPr>
+        <p:txBody>
+          <a:bodyPr wrap="square">
+            <a:spAutoFit/>
+          </a:bodyPr>
+          <a:lstStyle/>
+          <a:p>
+            <a:pPr algn="l">
+              <a:defRPr sz="1300" b="1">
+                <a:solidFill>
+                  <a:srgbClr val="60A5FA"/>
+                </a:solidFill>
+              </a:defRPr>
+            </a:pPr>
+            <a:r>
+              <a:t>✦</a:t>
             </a:r>
           </a:p>
         </p:txBody>
@@ -13867,21 +13712,21 @@
         </p:nvSpPr>
         <p:spPr>
           <a:xfrm>
-            <a:off x="475488" y="2103120"/>
-            <a:ext cx="1874519" cy="502920"/>
-          </a:xfrm>
-          <a:prstGeom prst="rect">
-            <a:avLst/>
-          </a:prstGeom>
-          <a:noFill/>
-        </p:spPr>
-        <p:txBody>
-          <a:bodyPr wrap="square">
-            <a:spAutoFit/>
-          </a:bodyPr>
-          <a:lstStyle/>
-          <a:p>
-            <a:pPr algn="ctr">
+            <a:off x="1280160" y="1389888"/>
+            <a:ext cx="5029200" cy="274320"/>
+          </a:xfrm>
+          <a:prstGeom prst="rect">
+            <a:avLst/>
+          </a:prstGeom>
+          <a:noFill/>
+        </p:spPr>
+        <p:txBody>
+          <a:bodyPr wrap="square">
+            <a:spAutoFit/>
+          </a:bodyPr>
+          <a:lstStyle/>
+          <a:p>
+            <a:pPr algn="l">
               <a:defRPr sz="1300" b="1">
                 <a:solidFill>
                   <a:srgbClr val="60A5FA"/>
@@ -13889,7 +13734,7 @@
               </a:defRPr>
             </a:pPr>
             <a:r>
-              <a:t>Caso simple</a:t>
+              <a:t>Keywords es suficiente para un POC</a:t>
             </a:r>
           </a:p>
         </p:txBody>
@@ -13902,21 +13747,21 @@
         </p:nvSpPr>
         <p:spPr>
           <a:xfrm>
-            <a:off x="475488" y="2651760"/>
-            <a:ext cx="1874519" cy="600164"/>
-          </a:xfrm>
-          <a:prstGeom prst="rect">
-            <a:avLst/>
-          </a:prstGeom>
-          <a:noFill/>
-        </p:spPr>
-        <p:txBody>
-          <a:bodyPr wrap="square">
-            <a:spAutoFit/>
-          </a:bodyPr>
-          <a:lstStyle/>
-          <a:p>
-            <a:pPr algn="ctr">
+            <a:off x="1280160" y="1645920"/>
+            <a:ext cx="9601200" cy="256032"/>
+          </a:xfrm>
+          <a:prstGeom prst="rect">
+            <a:avLst/>
+          </a:prstGeom>
+          <a:noFill/>
+        </p:spPr>
+        <p:txBody>
+          <a:bodyPr wrap="square">
+            <a:spAutoFit/>
+          </a:bodyPr>
+          <a:lstStyle/>
+          <a:p>
+            <a:pPr algn="l">
               <a:defRPr sz="1100" b="0">
                 <a:solidFill>
                   <a:srgbClr val="94A3B8"/>
@@ -13924,35 +13769,7 @@
               </a:defRPr>
             </a:pPr>
             <a:r>
-              <a:rPr dirty="0"/>
-              <a:t>Provider: </a:t>
-            </a:r>
-            <a:r>
-              <a:rPr dirty="0" err="1"/>
-              <a:t>Ollama</a:t>
-            </a:r>
-            <a:br>
-              <a:rPr dirty="0"/>
-            </a:br>
-            <a:r>
-              <a:rPr dirty="0"/>
-              <a:t>Mock: "Cambiar </a:t>
-            </a:r>
-            <a:r>
-              <a:rPr dirty="0" err="1"/>
-              <a:t>texto</a:t>
-            </a:r>
-            <a:r>
-              <a:rPr dirty="0"/>
-              <a:t> del </a:t>
-            </a:r>
-            <a:r>
-              <a:rPr dirty="0" err="1"/>
-              <a:t>botón</a:t>
-            </a:r>
-            <a:r>
-              <a:rPr dirty="0"/>
-              <a:t>"</a:t>
+              <a:t>Predecible · costo cero · para producción se puede upgradear a clasificación con LLM</a:t>
             </a:r>
           </a:p>
         </p:txBody>
@@ -13965,8 +13782,8 @@
         </p:nvSpPr>
         <p:spPr>
           <a:xfrm>
-            <a:off x="2697479" y="1554480"/>
-            <a:ext cx="2103120" cy="2331720"/>
+            <a:off x="731520" y="2029967"/>
+            <a:ext cx="10515600" cy="548640"/>
           </a:xfrm>
           <a:prstGeom prst="roundRect">
             <a:avLst/>
@@ -14003,52 +13820,35 @@
       </p:sp>
       <p:sp>
         <p:nvSpPr>
-          <p:cNvPr id="8" name="Oval 7"/>
-          <p:cNvSpPr/>
-          <p:nvPr/>
-        </p:nvSpPr>
-        <p:spPr>
-          <a:xfrm>
-            <a:off x="3383279" y="1280160"/>
-            <a:ext cx="640080" cy="640080"/>
-          </a:xfrm>
-          <a:prstGeom prst="ellipse">
-            <a:avLst/>
-          </a:prstGeom>
-          <a:solidFill>
-            <a:srgbClr val="34D399"/>
-          </a:solidFill>
-          <a:ln>
-            <a:noFill/>
-          </a:ln>
-        </p:spPr>
-        <p:style>
-          <a:lnRef idx="1">
-            <a:schemeClr val="accent1"/>
-          </a:lnRef>
-          <a:fillRef idx="3">
-            <a:schemeClr val="accent1"/>
-          </a:fillRef>
-          <a:effectRef idx="2">
-            <a:schemeClr val="accent1"/>
-          </a:effectRef>
-          <a:fontRef idx="minor">
-            <a:schemeClr val="lt1"/>
-          </a:fontRef>
-        </p:style>
-        <p:txBody>
-          <a:bodyPr wrap="square" rtlCol="0" anchor="ctr"/>
-          <a:lstStyle/>
-          <a:p>
-            <a:pPr algn="ctr">
-              <a:defRPr sz="2200" b="1">
-                <a:solidFill>
-                  <a:srgbClr val="0F172A"/>
-                </a:solidFill>
-              </a:defRPr>
-            </a:pPr>
-            <a:r>
-              <a:t>2</a:t>
+          <p:cNvPr id="8" name="TextBox 7"/>
+          <p:cNvSpPr txBox="1"/>
+          <p:nvPr/>
+        </p:nvSpPr>
+        <p:spPr>
+          <a:xfrm>
+            <a:off x="914400" y="2048255"/>
+            <a:ext cx="365760" cy="274320"/>
+          </a:xfrm>
+          <a:prstGeom prst="rect">
+            <a:avLst/>
+          </a:prstGeom>
+          <a:noFill/>
+        </p:spPr>
+        <p:txBody>
+          <a:bodyPr wrap="square">
+            <a:spAutoFit/>
+          </a:bodyPr>
+          <a:lstStyle/>
+          <a:p>
+            <a:pPr algn="l">
+              <a:defRPr sz="1300" b="1">
+                <a:solidFill>
+                  <a:srgbClr val="34D399"/>
+                </a:solidFill>
+              </a:defRPr>
+            </a:pPr>
+            <a:r>
+              <a:t>✦</a:t>
             </a:r>
           </a:p>
         </p:txBody>
@@ -14061,21 +13861,21 @@
         </p:nvSpPr>
         <p:spPr>
           <a:xfrm>
-            <a:off x="2807207" y="2103120"/>
-            <a:ext cx="1874519" cy="502920"/>
-          </a:xfrm>
-          <a:prstGeom prst="rect">
-            <a:avLst/>
-          </a:prstGeom>
-          <a:noFill/>
-        </p:spPr>
-        <p:txBody>
-          <a:bodyPr wrap="square">
-            <a:spAutoFit/>
-          </a:bodyPr>
-          <a:lstStyle/>
-          <a:p>
-            <a:pPr algn="ctr">
+            <a:off x="1280160" y="2048255"/>
+            <a:ext cx="5029200" cy="274320"/>
+          </a:xfrm>
+          <a:prstGeom prst="rect">
+            <a:avLst/>
+          </a:prstGeom>
+          <a:noFill/>
+        </p:spPr>
+        <p:txBody>
+          <a:bodyPr wrap="square">
+            <a:spAutoFit/>
+          </a:bodyPr>
+          <a:lstStyle/>
+          <a:p>
+            <a:pPr algn="l">
               <a:defRPr sz="1300" b="1">
                 <a:solidFill>
                   <a:srgbClr val="34D399"/>
@@ -14083,11 +13883,7 @@
               </a:defRPr>
             </a:pPr>
             <a:r>
-              <a:t>Historia funcional</a:t>
-            </a:r>
-            <a:br/>
-            <a:r>
-              <a:t>con UI</a:t>
+              <a:t>El parsing defensivo es no negociable</a:t>
             </a:r>
           </a:p>
         </p:txBody>
@@ -14100,21 +13896,21 @@
         </p:nvSpPr>
         <p:spPr>
           <a:xfrm>
-            <a:off x="2807207" y="2651760"/>
-            <a:ext cx="1874519" cy="430887"/>
-          </a:xfrm>
-          <a:prstGeom prst="rect">
-            <a:avLst/>
-          </a:prstGeom>
-          <a:noFill/>
-        </p:spPr>
-        <p:txBody>
-          <a:bodyPr wrap="square">
-            <a:spAutoFit/>
-          </a:bodyPr>
-          <a:lstStyle/>
-          <a:p>
-            <a:pPr algn="ctr">
+            <a:off x="1280160" y="2304287"/>
+            <a:ext cx="9601200" cy="256032"/>
+          </a:xfrm>
+          <a:prstGeom prst="rect">
+            <a:avLst/>
+          </a:prstGeom>
+          <a:noFill/>
+        </p:spPr>
+        <p:txBody>
+          <a:bodyPr wrap="square">
+            <a:spAutoFit/>
+          </a:bodyPr>
+          <a:lstStyle/>
+          <a:p>
+            <a:pPr algn="l">
               <a:defRPr sz="1100" b="0">
                 <a:solidFill>
                   <a:srgbClr val="94A3B8"/>
@@ -14122,35 +13918,7 @@
               </a:defRPr>
             </a:pPr>
             <a:r>
-              <a:rPr dirty="0"/>
-              <a:t>Provider: </a:t>
-            </a:r>
-            <a:r>
-              <a:rPr dirty="0" err="1"/>
-              <a:t>Ollama</a:t>
-            </a:r>
-            <a:br>
-              <a:rPr dirty="0"/>
-            </a:br>
-            <a:r>
-              <a:rPr dirty="0"/>
-              <a:t>Mock: "</a:t>
-            </a:r>
-            <a:r>
-              <a:rPr dirty="0" err="1"/>
-              <a:t>Resetear</a:t>
-            </a:r>
-            <a:r>
-              <a:rPr dirty="0"/>
-              <a:t> </a:t>
-            </a:r>
-            <a:r>
-              <a:rPr dirty="0" err="1"/>
-              <a:t>contraseña</a:t>
-            </a:r>
-            <a:r>
-              <a:rPr dirty="0"/>
-              <a:t>"</a:t>
+              <a:t>Modelos truncan · agregan fences · omiten brackets → RepairJson + TryCompleteJson desde día uno</a:t>
             </a:r>
           </a:p>
         </p:txBody>
@@ -14163,8 +13931,8 @@
         </p:nvSpPr>
         <p:spPr>
           <a:xfrm>
-            <a:off x="5029200" y="1554480"/>
-            <a:ext cx="2103120" cy="2331720"/>
+            <a:off x="731520" y="2688336"/>
+            <a:ext cx="10515600" cy="548640"/>
           </a:xfrm>
           <a:prstGeom prst="roundRect">
             <a:avLst/>
@@ -14201,156 +13969,119 @@
       </p:sp>
       <p:sp>
         <p:nvSpPr>
-          <p:cNvPr id="12" name="Oval 11"/>
+          <p:cNvPr id="12" name="TextBox 11"/>
+          <p:cNvSpPr txBox="1"/>
+          <p:nvPr/>
+        </p:nvSpPr>
+        <p:spPr>
+          <a:xfrm>
+            <a:off x="914400" y="2706624"/>
+            <a:ext cx="365760" cy="274320"/>
+          </a:xfrm>
+          <a:prstGeom prst="rect">
+            <a:avLst/>
+          </a:prstGeom>
+          <a:noFill/>
+        </p:spPr>
+        <p:txBody>
+          <a:bodyPr wrap="square">
+            <a:spAutoFit/>
+          </a:bodyPr>
+          <a:lstStyle/>
+          <a:p>
+            <a:pPr algn="l">
+              <a:defRPr sz="1300" b="1">
+                <a:solidFill>
+                  <a:srgbClr val="FBBF24"/>
+                </a:solidFill>
+              </a:defRPr>
+            </a:pPr>
+            <a:r>
+              <a:t>✦</a:t>
+            </a:r>
+          </a:p>
+        </p:txBody>
+      </p:sp>
+      <p:sp>
+        <p:nvSpPr>
+          <p:cNvPr id="13" name="TextBox 12"/>
+          <p:cNvSpPr txBox="1"/>
+          <p:nvPr/>
+        </p:nvSpPr>
+        <p:spPr>
+          <a:xfrm>
+            <a:off x="1280160" y="2706624"/>
+            <a:ext cx="5029200" cy="274320"/>
+          </a:xfrm>
+          <a:prstGeom prst="rect">
+            <a:avLst/>
+          </a:prstGeom>
+          <a:noFill/>
+        </p:spPr>
+        <p:txBody>
+          <a:bodyPr wrap="square">
+            <a:spAutoFit/>
+          </a:bodyPr>
+          <a:lstStyle/>
+          <a:p>
+            <a:pPr algn="l">
+              <a:defRPr sz="1300" b="1">
+                <a:solidFill>
+                  <a:srgbClr val="FBBF24"/>
+                </a:solidFill>
+              </a:defRPr>
+            </a:pPr>
+            <a:r>
+              <a:t>maxTokens es un fallo silencioso</a:t>
+            </a:r>
+          </a:p>
+        </p:txBody>
+      </p:sp>
+      <p:sp>
+        <p:nvSpPr>
+          <p:cNvPr id="14" name="TextBox 13"/>
+          <p:cNvSpPr txBox="1"/>
+          <p:nvPr/>
+        </p:nvSpPr>
+        <p:spPr>
+          <a:xfrm>
+            <a:off x="1280160" y="2962656"/>
+            <a:ext cx="9601200" cy="256032"/>
+          </a:xfrm>
+          <a:prstGeom prst="rect">
+            <a:avLst/>
+          </a:prstGeom>
+          <a:noFill/>
+        </p:spPr>
+        <p:txBody>
+          <a:bodyPr wrap="square">
+            <a:spAutoFit/>
+          </a:bodyPr>
+          <a:lstStyle/>
+          <a:p>
+            <a:pPr algn="l">
+              <a:defRPr sz="1100" b="0">
+                <a:solidFill>
+                  <a:srgbClr val="94A3B8"/>
+                </a:solidFill>
+              </a:defRPr>
+            </a:pPr>
+            <a:r>
+              <a:t>Respuesta truncada se ve como normal — sin señal de error · siempre configurar MaxTokens explícito</a:t>
+            </a:r>
+          </a:p>
+        </p:txBody>
+      </p:sp>
+      <p:sp>
+        <p:nvSpPr>
+          <p:cNvPr id="19" name="Rounded Rectangle 18"/>
           <p:cNvSpPr/>
           <p:nvPr/>
         </p:nvSpPr>
         <p:spPr>
           <a:xfrm>
-            <a:off x="5715000" y="1280160"/>
-            <a:ext cx="640080" cy="640080"/>
-          </a:xfrm>
-          <a:prstGeom prst="ellipse">
-            <a:avLst/>
-          </a:prstGeom>
-          <a:solidFill>
-            <a:srgbClr val="FBBF24"/>
-          </a:solidFill>
-          <a:ln>
-            <a:noFill/>
-          </a:ln>
-        </p:spPr>
-        <p:style>
-          <a:lnRef idx="1">
-            <a:schemeClr val="accent1"/>
-          </a:lnRef>
-          <a:fillRef idx="3">
-            <a:schemeClr val="accent1"/>
-          </a:fillRef>
-          <a:effectRef idx="2">
-            <a:schemeClr val="accent1"/>
-          </a:effectRef>
-          <a:fontRef idx="minor">
-            <a:schemeClr val="lt1"/>
-          </a:fontRef>
-        </p:style>
-        <p:txBody>
-          <a:bodyPr wrap="square" rtlCol="0" anchor="ctr"/>
-          <a:lstStyle/>
-          <a:p>
-            <a:pPr algn="ctr">
-              <a:defRPr sz="2200" b="1">
-                <a:solidFill>
-                  <a:srgbClr val="0F172A"/>
-                </a:solidFill>
-              </a:defRPr>
-            </a:pPr>
-            <a:r>
-              <a:t>3</a:t>
-            </a:r>
-          </a:p>
-        </p:txBody>
-      </p:sp>
-      <p:sp>
-        <p:nvSpPr>
-          <p:cNvPr id="13" name="TextBox 12"/>
-          <p:cNvSpPr txBox="1"/>
-          <p:nvPr/>
-        </p:nvSpPr>
-        <p:spPr>
-          <a:xfrm>
-            <a:off x="5138928" y="2103120"/>
-            <a:ext cx="1874519" cy="502920"/>
-          </a:xfrm>
-          <a:prstGeom prst="rect">
-            <a:avLst/>
-          </a:prstGeom>
-          <a:noFill/>
-        </p:spPr>
-        <p:txBody>
-          <a:bodyPr wrap="square">
-            <a:spAutoFit/>
-          </a:bodyPr>
-          <a:lstStyle/>
-          <a:p>
-            <a:pPr algn="ctr">
-              <a:defRPr sz="1300" b="1">
-                <a:solidFill>
-                  <a:srgbClr val="FBBF24"/>
-                </a:solidFill>
-              </a:defRPr>
-            </a:pPr>
-            <a:r>
-              <a:t>Historia backend</a:t>
-            </a:r>
-          </a:p>
-        </p:txBody>
-      </p:sp>
-      <p:sp>
-        <p:nvSpPr>
-          <p:cNvPr id="14" name="TextBox 13"/>
-          <p:cNvSpPr txBox="1"/>
-          <p:nvPr/>
-        </p:nvSpPr>
-        <p:spPr>
-          <a:xfrm>
-            <a:off x="5138928" y="2651760"/>
-            <a:ext cx="1874519" cy="430887"/>
-          </a:xfrm>
-          <a:prstGeom prst="rect">
-            <a:avLst/>
-          </a:prstGeom>
-          <a:noFill/>
-        </p:spPr>
-        <p:txBody>
-          <a:bodyPr wrap="square">
-            <a:spAutoFit/>
-          </a:bodyPr>
-          <a:lstStyle/>
-          <a:p>
-            <a:pPr algn="ctr">
-              <a:defRPr sz="1100" b="0">
-                <a:solidFill>
-                  <a:srgbClr val="94A3B8"/>
-                </a:solidFill>
-              </a:defRPr>
-            </a:pPr>
-            <a:r>
-              <a:rPr dirty="0"/>
-              <a:t>Provider: </a:t>
-            </a:r>
-            <a:r>
-              <a:rPr dirty="0" err="1"/>
-              <a:t>Ollama</a:t>
-            </a:r>
-            <a:br>
-              <a:rPr dirty="0"/>
-            </a:br>
-            <a:r>
-              <a:rPr dirty="0"/>
-              <a:t>Mock: "Retries </a:t>
-            </a:r>
-            <a:r>
-              <a:rPr dirty="0" err="1"/>
-              <a:t>automáticos</a:t>
-            </a:r>
-            <a:r>
-              <a:rPr dirty="0"/>
-              <a:t>"</a:t>
-            </a:r>
-          </a:p>
-        </p:txBody>
-      </p:sp>
-      <p:sp>
-        <p:nvSpPr>
-          <p:cNvPr id="15" name="Rounded Rectangle 14"/>
-          <p:cNvSpPr/>
-          <p:nvPr/>
-        </p:nvSpPr>
-        <p:spPr>
-          <a:xfrm>
-            <a:off x="7360919" y="1554479"/>
-            <a:ext cx="2103120" cy="2331719"/>
+            <a:off x="731520" y="3355848"/>
+            <a:ext cx="10515600" cy="548640"/>
           </a:xfrm>
           <a:prstGeom prst="roundRect">
             <a:avLst/>
@@ -14387,171 +14118,210 @@
       </p:sp>
       <p:sp>
         <p:nvSpPr>
-          <p:cNvPr id="16" name="Oval 15"/>
-          <p:cNvSpPr/>
-          <p:nvPr/>
-        </p:nvSpPr>
-        <p:spPr>
-          <a:xfrm>
-            <a:off x="8046719" y="1280160"/>
-            <a:ext cx="640080" cy="640080"/>
-          </a:xfrm>
-          <a:prstGeom prst="ellipse">
-            <a:avLst/>
-          </a:prstGeom>
-          <a:solidFill>
-            <a:srgbClr val="F472B6"/>
-          </a:solidFill>
-          <a:ln>
-            <a:noFill/>
-          </a:ln>
-        </p:spPr>
-        <p:style>
-          <a:lnRef idx="1">
-            <a:schemeClr val="accent1"/>
-          </a:lnRef>
-          <a:fillRef idx="3">
-            <a:schemeClr val="accent1"/>
-          </a:fillRef>
-          <a:effectRef idx="2">
-            <a:schemeClr val="accent1"/>
-          </a:effectRef>
-          <a:fontRef idx="minor">
-            <a:schemeClr val="lt1"/>
-          </a:fontRef>
-        </p:style>
-        <p:txBody>
-          <a:bodyPr wrap="square" rtlCol="0" anchor="ctr"/>
-          <a:lstStyle/>
-          <a:p>
-            <a:pPr algn="ctr">
-              <a:defRPr sz="2200" b="1">
-                <a:solidFill>
-                  <a:srgbClr val="0F172A"/>
-                </a:solidFill>
-              </a:defRPr>
-            </a:pPr>
-            <a:r>
-              <a:t>4</a:t>
-            </a:r>
-          </a:p>
-        </p:txBody>
-      </p:sp>
-      <p:sp>
-        <p:nvSpPr>
-          <p:cNvPr id="17" name="TextBox 16"/>
-          <p:cNvSpPr txBox="1"/>
-          <p:nvPr/>
-        </p:nvSpPr>
-        <p:spPr>
-          <a:xfrm>
-            <a:off x="7470647" y="2103120"/>
-            <a:ext cx="1874519" cy="502920"/>
-          </a:xfrm>
-          <a:prstGeom prst="rect">
-            <a:avLst/>
-          </a:prstGeom>
-          <a:noFill/>
-        </p:spPr>
-        <p:txBody>
-          <a:bodyPr wrap="square">
-            <a:spAutoFit/>
-          </a:bodyPr>
-          <a:lstStyle/>
-          <a:p>
-            <a:pPr algn="ctr">
+          <p:cNvPr id="20" name="TextBox 19"/>
+          <p:cNvSpPr txBox="1"/>
+          <p:nvPr/>
+        </p:nvSpPr>
+        <p:spPr>
+          <a:xfrm>
+            <a:off x="914400" y="3374136"/>
+            <a:ext cx="365760" cy="274320"/>
+          </a:xfrm>
+          <a:prstGeom prst="rect">
+            <a:avLst/>
+          </a:prstGeom>
+          <a:noFill/>
+        </p:spPr>
+        <p:txBody>
+          <a:bodyPr wrap="square">
+            <a:spAutoFit/>
+          </a:bodyPr>
+          <a:lstStyle/>
+          <a:p>
+            <a:pPr algn="l">
               <a:defRPr sz="1300" b="1">
                 <a:solidFill>
-                  <a:srgbClr val="F472B6"/>
-                </a:solidFill>
-              </a:defRPr>
-            </a:pPr>
-            <a:r>
-              <a:t>Activación</a:t>
-            </a:r>
-            <a:br/>
-            <a:r>
-              <a:t>compliance</a:t>
-            </a:r>
-          </a:p>
-        </p:txBody>
-      </p:sp>
-      <p:sp>
-        <p:nvSpPr>
-          <p:cNvPr id="18" name="TextBox 17"/>
-          <p:cNvSpPr txBox="1"/>
-          <p:nvPr/>
-        </p:nvSpPr>
-        <p:spPr>
-          <a:xfrm>
-            <a:off x="7470647" y="2651760"/>
-            <a:ext cx="1874519" cy="600164"/>
-          </a:xfrm>
-          <a:prstGeom prst="rect">
-            <a:avLst/>
-          </a:prstGeom>
-          <a:noFill/>
-        </p:spPr>
-        <p:txBody>
-          <a:bodyPr wrap="square">
-            <a:spAutoFit/>
-          </a:bodyPr>
-          <a:lstStyle/>
-          <a:p>
-            <a:pPr algn="ctr">
-              <a:defRPr sz="1100" b="0">
-                <a:solidFill>
-                  <a:srgbClr val="94A3B8"/>
+                  <a:srgbClr val="A78BFA"/>
+                </a:solidFill>
+              </a:defRPr>
+            </a:pPr>
+            <a:r>
+              <a:t>✦</a:t>
+            </a:r>
+          </a:p>
+        </p:txBody>
+      </p:sp>
+      <p:sp>
+        <p:nvSpPr>
+          <p:cNvPr id="21" name="TextBox 20"/>
+          <p:cNvSpPr txBox="1"/>
+          <p:nvPr/>
+        </p:nvSpPr>
+        <p:spPr>
+          <a:xfrm>
+            <a:off x="1280160" y="3374136"/>
+            <a:ext cx="5029200" cy="292388"/>
+          </a:xfrm>
+          <a:prstGeom prst="rect">
+            <a:avLst/>
+          </a:prstGeom>
+          <a:noFill/>
+        </p:spPr>
+        <p:txBody>
+          <a:bodyPr wrap="square">
+            <a:spAutoFit/>
+          </a:bodyPr>
+          <a:lstStyle/>
+          <a:p>
+            <a:pPr algn="l">
+              <a:defRPr sz="1300" b="1">
+                <a:solidFill>
+                  <a:srgbClr val="A78BFA"/>
                 </a:solidFill>
               </a:defRPr>
             </a:pPr>
             <a:r>
               <a:rPr dirty="0"/>
-              <a:t>Provider: Bedrock</a:t>
-            </a:r>
-            <a:br>
+              <a:t>La </a:t>
+            </a:r>
+            <a:r>
+              <a:rPr dirty="0" err="1"/>
+              <a:t>abstracción</a:t>
+            </a:r>
+            <a:r>
               <a:rPr dirty="0"/>
-            </a:br>
-            <a:r>
-              <a:rPr dirty="0"/>
-              <a:t>Mock: "</a:t>
+              <a:t> de </a:t>
             </a:r>
             <a:r>
               <a:rPr dirty="0" err="1"/>
-              <a:t>Descarga</a:t>
+              <a:t>proveedor</a:t>
             </a:r>
             <a:r>
               <a:rPr dirty="0"/>
               <a:t> </a:t>
             </a:r>
             <a:r>
+              <a:rPr lang="en-US" dirty="0"/>
+              <a:t>da </a:t>
+            </a:r>
+            <a:r>
+              <a:rPr lang="en-US" dirty="0" err="1"/>
+              <a:t>mucha</a:t>
+            </a:r>
+            <a:r>
+              <a:rPr lang="en-US" dirty="0"/>
+              <a:t> </a:t>
+            </a:r>
+            <a:r>
+              <a:rPr lang="en-US" dirty="0" err="1"/>
+              <a:t>flexibilidad</a:t>
+            </a:r>
+            <a:endParaRPr dirty="0"/>
+          </a:p>
+        </p:txBody>
+      </p:sp>
+      <p:sp>
+        <p:nvSpPr>
+          <p:cNvPr id="22" name="TextBox 21"/>
+          <p:cNvSpPr txBox="1"/>
+          <p:nvPr/>
+        </p:nvSpPr>
+        <p:spPr>
+          <a:xfrm>
+            <a:off x="1280160" y="3630168"/>
+            <a:ext cx="9601200" cy="256032"/>
+          </a:xfrm>
+          <a:prstGeom prst="rect">
+            <a:avLst/>
+          </a:prstGeom>
+          <a:noFill/>
+        </p:spPr>
+        <p:txBody>
+          <a:bodyPr wrap="square">
+            <a:spAutoFit/>
+          </a:bodyPr>
+          <a:lstStyle/>
+          <a:p>
+            <a:pPr algn="l">
+              <a:defRPr sz="1100" b="0">
+                <a:solidFill>
+                  <a:srgbClr val="94A3B8"/>
+                </a:solidFill>
+              </a:defRPr>
+            </a:pPr>
+            <a:r>
+              <a:rPr dirty="0"/>
+              <a:t>Cambiar de </a:t>
+            </a:r>
+            <a:r>
               <a:rPr dirty="0" err="1"/>
-              <a:t>datos</a:t>
-            </a:r>
-            <a:br>
+              <a:t>Ollama</a:t>
+            </a:r>
+            <a:r>
               <a:rPr dirty="0"/>
-            </a:br>
+              <a:t> a Bedrock no </a:t>
+            </a:r>
             <a:r>
               <a:rPr dirty="0" err="1"/>
-              <a:t>personales</a:t>
+              <a:t>requirió</a:t>
             </a:r>
             <a:r>
               <a:rPr dirty="0"/>
-              <a:t>"</a:t>
-            </a:r>
-          </a:p>
-        </p:txBody>
-      </p:sp>
-      <p:sp>
-        <p:nvSpPr>
-          <p:cNvPr id="19" name="Rounded Rectangle 18"/>
+              <a:t> </a:t>
+            </a:r>
+            <a:r>
+              <a:rPr dirty="0" err="1"/>
+              <a:t>tocar</a:t>
+            </a:r>
+            <a:r>
+              <a:rPr dirty="0"/>
+              <a:t> </a:t>
+            </a:r>
+            <a:r>
+              <a:rPr dirty="0" err="1"/>
+              <a:t>ningún</a:t>
+            </a:r>
+            <a:r>
+              <a:rPr dirty="0"/>
+              <a:t> </a:t>
+            </a:r>
+            <a:r>
+              <a:rPr dirty="0" err="1"/>
+              <a:t>agente</a:t>
+            </a:r>
+            <a:r>
+              <a:rPr dirty="0"/>
+              <a:t> </a:t>
+            </a:r>
+            <a:r>
+              <a:rPr dirty="0" err="1"/>
+              <a:t>ni</a:t>
+            </a:r>
+            <a:r>
+              <a:rPr dirty="0"/>
+              <a:t> </a:t>
+            </a:r>
+            <a:r>
+              <a:rPr dirty="0" err="1"/>
+              <a:t>el</a:t>
+            </a:r>
+            <a:r>
+              <a:rPr dirty="0"/>
+              <a:t> supervisor</a:t>
+            </a:r>
+          </a:p>
+        </p:txBody>
+      </p:sp>
+      <p:sp>
+        <p:nvSpPr>
+          <p:cNvPr id="23" name="Rounded Rectangle 22"/>
           <p:cNvSpPr/>
           <p:nvPr/>
         </p:nvSpPr>
         <p:spPr>
           <a:xfrm>
-            <a:off x="9692640" y="1554480"/>
-            <a:ext cx="2103120" cy="2331720"/>
+            <a:off x="731520" y="4014216"/>
+            <a:ext cx="10515600" cy="548640"/>
           </a:xfrm>
           <a:prstGeom prst="roundRect">
             <a:avLst/>
@@ -14588,20 +14358,313 @@
       </p:sp>
       <p:sp>
         <p:nvSpPr>
-          <p:cNvPr id="20" name="Oval 19"/>
+          <p:cNvPr id="24" name="TextBox 23"/>
+          <p:cNvSpPr txBox="1"/>
+          <p:nvPr/>
+        </p:nvSpPr>
+        <p:spPr>
+          <a:xfrm>
+            <a:off x="914400" y="4032504"/>
+            <a:ext cx="365760" cy="274320"/>
+          </a:xfrm>
+          <a:prstGeom prst="rect">
+            <a:avLst/>
+          </a:prstGeom>
+          <a:noFill/>
+        </p:spPr>
+        <p:txBody>
+          <a:bodyPr wrap="square">
+            <a:spAutoFit/>
+          </a:bodyPr>
+          <a:lstStyle/>
+          <a:p>
+            <a:pPr algn="l">
+              <a:defRPr sz="1300" b="1">
+                <a:solidFill>
+                  <a:srgbClr val="F472B6"/>
+                </a:solidFill>
+              </a:defRPr>
+            </a:pPr>
+            <a:r>
+              <a:t>✦</a:t>
+            </a:r>
+          </a:p>
+        </p:txBody>
+      </p:sp>
+      <p:sp>
+        <p:nvSpPr>
+          <p:cNvPr id="25" name="TextBox 24"/>
+          <p:cNvSpPr txBox="1"/>
+          <p:nvPr/>
+        </p:nvSpPr>
+        <p:spPr>
+          <a:xfrm>
+            <a:off x="1280159" y="4032504"/>
+            <a:ext cx="8522602" cy="292388"/>
+          </a:xfrm>
+          <a:prstGeom prst="rect">
+            <a:avLst/>
+          </a:prstGeom>
+          <a:noFill/>
+        </p:spPr>
+        <p:txBody>
+          <a:bodyPr wrap="square">
+            <a:spAutoFit/>
+          </a:bodyPr>
+          <a:lstStyle/>
+          <a:p>
+            <a:pPr algn="l">
+              <a:defRPr sz="1300" b="1">
+                <a:solidFill>
+                  <a:srgbClr val="F472B6"/>
+                </a:solidFill>
+              </a:defRPr>
+            </a:pPr>
+            <a:r>
+              <a:rPr lang="en-US" dirty="0"/>
+              <a:t>En la </a:t>
+            </a:r>
+            <a:r>
+              <a:rPr lang="en-US" dirty="0" err="1"/>
+              <a:t>comparacion</a:t>
+            </a:r>
+            <a:r>
+              <a:rPr lang="en-US" dirty="0"/>
+              <a:t> de </a:t>
+            </a:r>
+            <a:r>
+              <a:rPr lang="en-US" dirty="0" err="1"/>
+              <a:t>resultados</a:t>
+            </a:r>
+            <a:r>
+              <a:rPr lang="en-US" dirty="0"/>
+              <a:t> de </a:t>
+            </a:r>
+            <a:r>
+              <a:rPr lang="en-US" dirty="0" err="1"/>
+              <a:t>diferentes</a:t>
+            </a:r>
+            <a:r>
+              <a:rPr lang="en-US" dirty="0"/>
+              <a:t> </a:t>
+            </a:r>
+            <a:r>
+              <a:rPr lang="en-US" dirty="0" err="1"/>
+              <a:t>modelos</a:t>
+            </a:r>
+            <a:r>
+              <a:rPr lang="en-US" dirty="0"/>
+              <a:t> </a:t>
+            </a:r>
+            <a:r>
+              <a:rPr lang="en-US" dirty="0" err="1"/>
+              <a:t>el</a:t>
+            </a:r>
+            <a:r>
+              <a:rPr lang="en-US" dirty="0"/>
+              <a:t> </a:t>
+            </a:r>
+            <a:r>
+              <a:rPr lang="en-US" dirty="0" err="1"/>
+              <a:t>analisis</a:t>
+            </a:r>
+            <a:r>
+              <a:rPr lang="en-US" dirty="0"/>
+              <a:t> </a:t>
+            </a:r>
+            <a:r>
+              <a:rPr dirty="0" err="1"/>
+              <a:t>semántico</a:t>
+            </a:r>
+            <a:r>
+              <a:rPr dirty="0"/>
+              <a:t> </a:t>
+            </a:r>
+            <a:r>
+              <a:rPr dirty="0" err="1"/>
+              <a:t>supera</a:t>
+            </a:r>
+            <a:r>
+              <a:rPr dirty="0"/>
+              <a:t> a</a:t>
+            </a:r>
+            <a:r>
+              <a:rPr lang="en-US" dirty="0"/>
+              <a:t> la </a:t>
+            </a:r>
+            <a:r>
+              <a:rPr lang="en-US" dirty="0" err="1"/>
+              <a:t>comparacion</a:t>
+            </a:r>
+            <a:r>
+              <a:rPr lang="en-US" dirty="0"/>
+              <a:t> de </a:t>
+            </a:r>
+            <a:r>
+              <a:rPr lang="en-US" dirty="0" err="1"/>
+              <a:t>texto</a:t>
+            </a:r>
+            <a:r>
+              <a:rPr lang="en-US" dirty="0"/>
+              <a:t> </a:t>
+            </a:r>
+            <a:r>
+              <a:rPr dirty="0" err="1"/>
+              <a:t>exacto</a:t>
+            </a:r>
+            <a:endParaRPr dirty="0"/>
+          </a:p>
+        </p:txBody>
+      </p:sp>
+      <p:sp>
+        <p:nvSpPr>
+          <p:cNvPr id="26" name="TextBox 25"/>
+          <p:cNvSpPr txBox="1"/>
+          <p:nvPr/>
+        </p:nvSpPr>
+        <p:spPr>
+          <a:xfrm>
+            <a:off x="1280160" y="4288536"/>
+            <a:ext cx="9601200" cy="261610"/>
+          </a:xfrm>
+          <a:prstGeom prst="rect">
+            <a:avLst/>
+          </a:prstGeom>
+          <a:noFill/>
+        </p:spPr>
+        <p:txBody>
+          <a:bodyPr wrap="square">
+            <a:spAutoFit/>
+          </a:bodyPr>
+          <a:lstStyle/>
+          <a:p>
+            <a:pPr algn="l">
+              <a:defRPr sz="1100" b="0">
+                <a:solidFill>
+                  <a:srgbClr val="94A3B8"/>
+                </a:solidFill>
+              </a:defRPr>
+            </a:pPr>
+            <a:r>
+              <a:rPr dirty="0"/>
+              <a:t>"</a:t>
+            </a:r>
+            <a:r>
+              <a:rPr dirty="0" err="1"/>
+              <a:t>Expiración</a:t>
+            </a:r>
+            <a:r>
+              <a:rPr dirty="0"/>
+              <a:t> del link" ≠ "</a:t>
+            </a:r>
+            <a:r>
+              <a:rPr dirty="0" err="1"/>
+              <a:t>regla</a:t>
+            </a:r>
+            <a:r>
+              <a:rPr dirty="0"/>
+              <a:t> de </a:t>
+            </a:r>
+            <a:r>
+              <a:rPr dirty="0" err="1"/>
+              <a:t>vencimiento</a:t>
+            </a:r>
+            <a:r>
+              <a:rPr lang="en-US" dirty="0"/>
+              <a:t> de </a:t>
+            </a:r>
+            <a:r>
+              <a:rPr lang="en-US" dirty="0" err="1"/>
+              <a:t>validación</a:t>
+            </a:r>
+            <a:r>
+              <a:rPr lang="en-US" dirty="0"/>
+              <a:t> de email</a:t>
+            </a:r>
+            <a:r>
+              <a:rPr dirty="0"/>
+              <a:t>" </a:t>
+            </a:r>
+            <a:r>
+              <a:rPr dirty="0" err="1"/>
+              <a:t>en</a:t>
+            </a:r>
+            <a:r>
+              <a:rPr dirty="0"/>
+              <a:t> </a:t>
+            </a:r>
+            <a:r>
+              <a:rPr lang="en-US" dirty="0"/>
+              <a:t> </a:t>
+            </a:r>
+            <a:r>
+              <a:rPr lang="en-US" dirty="0" err="1"/>
+              <a:t>comparación</a:t>
+            </a:r>
+            <a:r>
+              <a:rPr lang="en-US" dirty="0"/>
+              <a:t> de </a:t>
+            </a:r>
+            <a:r>
+              <a:rPr lang="en-US" dirty="0" err="1"/>
+              <a:t>texto</a:t>
+            </a:r>
+            <a:r>
+              <a:rPr lang="en-US" dirty="0"/>
+              <a:t> </a:t>
+            </a:r>
+            <a:r>
+              <a:rPr lang="en-US" dirty="0" err="1"/>
+              <a:t>exacto</a:t>
+            </a:r>
+            <a:r>
+              <a:rPr lang="en-US" dirty="0"/>
+              <a:t> </a:t>
+            </a:r>
+            <a:r>
+              <a:rPr dirty="0"/>
+              <a:t>— </a:t>
+            </a:r>
+            <a:r>
+              <a:rPr dirty="0" err="1"/>
+              <a:t>pero</a:t>
+            </a:r>
+            <a:r>
+              <a:rPr dirty="0"/>
+              <a:t> son la </a:t>
+            </a:r>
+            <a:r>
+              <a:rPr dirty="0" err="1"/>
+              <a:t>misma</a:t>
+            </a:r>
+            <a:r>
+              <a:rPr dirty="0"/>
+              <a:t> </a:t>
+            </a:r>
+            <a:r>
+              <a:rPr dirty="0" err="1"/>
+              <a:t>preocupación</a:t>
+            </a:r>
+            <a:endParaRPr dirty="0"/>
+          </a:p>
+        </p:txBody>
+      </p:sp>
+      <p:sp>
+        <p:nvSpPr>
+          <p:cNvPr id="27" name="Rounded Rectangle 26"/>
           <p:cNvSpPr/>
           <p:nvPr/>
         </p:nvSpPr>
         <p:spPr>
           <a:xfrm>
-            <a:off x="10378440" y="1280160"/>
-            <a:ext cx="640080" cy="640080"/>
-          </a:xfrm>
-          <a:prstGeom prst="ellipse">
+            <a:off x="731520" y="4672584"/>
+            <a:ext cx="10515600" cy="548640"/>
+          </a:xfrm>
+          <a:prstGeom prst="roundRect">
             <a:avLst/>
           </a:prstGeom>
           <a:solidFill>
-            <a:srgbClr val="A78BFA"/>
+            <a:srgbClr val="27344A"/>
           </a:solidFill>
           <a:ln>
             <a:noFill/>
@@ -14622,84 +14685,107 @@
           </a:fontRef>
         </p:style>
         <p:txBody>
-          <a:bodyPr wrap="square" rtlCol="0" anchor="ctr"/>
-          <a:lstStyle/>
-          <a:p>
-            <a:pPr algn="ctr">
-              <a:defRPr sz="2200" b="1">
-                <a:solidFill>
-                  <a:srgbClr val="0F172A"/>
-                </a:solidFill>
-              </a:defRPr>
-            </a:pPr>
-            <a:r>
-              <a:t>5</a:t>
-            </a:r>
-          </a:p>
-        </p:txBody>
-      </p:sp>
-      <p:sp>
-        <p:nvSpPr>
-          <p:cNvPr id="21" name="TextBox 20"/>
-          <p:cNvSpPr txBox="1"/>
-          <p:nvPr/>
-        </p:nvSpPr>
-        <p:spPr>
-          <a:xfrm>
-            <a:off x="9802368" y="2103120"/>
-            <a:ext cx="1874519" cy="502920"/>
-          </a:xfrm>
-          <a:prstGeom prst="rect">
-            <a:avLst/>
-          </a:prstGeom>
-          <a:noFill/>
-        </p:spPr>
-        <p:txBody>
-          <a:bodyPr wrap="square">
-            <a:spAutoFit/>
-          </a:bodyPr>
-          <a:lstStyle/>
-          <a:p>
-            <a:pPr algn="ctr">
+          <a:bodyPr rtlCol="0" anchor="ctr"/>
+          <a:lstStyle/>
+          <a:p>
+            <a:pPr algn="ctr"/>
+            <a:endParaRPr/>
+          </a:p>
+        </p:txBody>
+      </p:sp>
+      <p:sp>
+        <p:nvSpPr>
+          <p:cNvPr id="28" name="TextBox 27"/>
+          <p:cNvSpPr txBox="1"/>
+          <p:nvPr/>
+        </p:nvSpPr>
+        <p:spPr>
+          <a:xfrm>
+            <a:off x="914400" y="4690872"/>
+            <a:ext cx="365760" cy="274320"/>
+          </a:xfrm>
+          <a:prstGeom prst="rect">
+            <a:avLst/>
+          </a:prstGeom>
+          <a:noFill/>
+        </p:spPr>
+        <p:txBody>
+          <a:bodyPr wrap="square">
+            <a:spAutoFit/>
+          </a:bodyPr>
+          <a:lstStyle/>
+          <a:p>
+            <a:pPr algn="l">
               <a:defRPr sz="1300" b="1">
                 <a:solidFill>
-                  <a:srgbClr val="A78BFA"/>
-                </a:solidFill>
-              </a:defRPr>
-            </a:pPr>
-            <a:r>
-              <a:t>History +</a:t>
-            </a:r>
-            <a:br/>
-            <a:r>
-              <a:t>Semantic Compare</a:t>
-            </a:r>
-          </a:p>
-        </p:txBody>
-      </p:sp>
-      <p:sp>
-        <p:nvSpPr>
-          <p:cNvPr id="22" name="TextBox 21"/>
-          <p:cNvSpPr txBox="1"/>
-          <p:nvPr/>
-        </p:nvSpPr>
-        <p:spPr>
-          <a:xfrm>
-            <a:off x="9802368" y="2651760"/>
-            <a:ext cx="1874519" cy="3474720"/>
-          </a:xfrm>
-          <a:prstGeom prst="rect">
-            <a:avLst/>
-          </a:prstGeom>
-          <a:noFill/>
-        </p:spPr>
-        <p:txBody>
-          <a:bodyPr wrap="square">
-            <a:spAutoFit/>
-          </a:bodyPr>
-          <a:lstStyle/>
-          <a:p>
-            <a:pPr algn="ctr">
+                  <a:srgbClr val="60A5FA"/>
+                </a:solidFill>
+              </a:defRPr>
+            </a:pPr>
+            <a:r>
+              <a:t>✦</a:t>
+            </a:r>
+          </a:p>
+        </p:txBody>
+      </p:sp>
+      <p:sp>
+        <p:nvSpPr>
+          <p:cNvPr id="29" name="TextBox 28"/>
+          <p:cNvSpPr txBox="1"/>
+          <p:nvPr/>
+        </p:nvSpPr>
+        <p:spPr>
+          <a:xfrm>
+            <a:off x="1280160" y="4690872"/>
+            <a:ext cx="5029200" cy="274320"/>
+          </a:xfrm>
+          <a:prstGeom prst="rect">
+            <a:avLst/>
+          </a:prstGeom>
+          <a:noFill/>
+        </p:spPr>
+        <p:txBody>
+          <a:bodyPr wrap="square">
+            <a:spAutoFit/>
+          </a:bodyPr>
+          <a:lstStyle/>
+          <a:p>
+            <a:pPr algn="l">
+              <a:defRPr sz="1300" b="1">
+                <a:solidFill>
+                  <a:srgbClr val="60A5FA"/>
+                </a:solidFill>
+              </a:defRPr>
+            </a:pPr>
+            <a:r>
+              <a:t>Prompts necesitan schema de output explícito</a:t>
+            </a:r>
+          </a:p>
+        </p:txBody>
+      </p:sp>
+      <p:sp>
+        <p:nvSpPr>
+          <p:cNvPr id="30" name="TextBox 29"/>
+          <p:cNvSpPr txBox="1"/>
+          <p:nvPr/>
+        </p:nvSpPr>
+        <p:spPr>
+          <a:xfrm>
+            <a:off x="1280160" y="4946904"/>
+            <a:ext cx="9601200" cy="256032"/>
+          </a:xfrm>
+          <a:prstGeom prst="rect">
+            <a:avLst/>
+          </a:prstGeom>
+          <a:noFill/>
+        </p:spPr>
+        <p:txBody>
+          <a:bodyPr wrap="square">
+            <a:spAutoFit/>
+          </a:bodyPr>
+          <a:lstStyle/>
+          <a:p>
+            <a:pPr algn="l">
               <a:defRPr sz="1100" b="0">
                 <a:solidFill>
                   <a:srgbClr val="94A3B8"/>
@@ -14707,65 +14793,8 @@
               </a:defRPr>
             </a:pPr>
             <a:r>
-              <a:rPr dirty="0"/>
-              <a:t>Provider: </a:t>
-            </a:r>
-            <a:r>
-              <a:rPr dirty="0" err="1"/>
-              <a:t>cualquiera</a:t>
-            </a:r>
-            <a:br>
-              <a:rPr dirty="0"/>
-            </a:br>
-            <a:r>
-              <a:rPr dirty="0"/>
-              <a:t>Mock: </a:t>
-            </a:r>
-            <a:r>
-              <a:rPr dirty="0" err="1"/>
-              <a:t>historia</a:t>
-            </a:r>
-            <a:r>
-              <a:rPr dirty="0"/>
-              <a:t> </a:t>
-            </a:r>
-            <a:r>
-              <a:rPr dirty="0" err="1"/>
-              <a:t>ya</a:t>
-            </a:r>
-            <a:r>
-              <a:rPr dirty="0"/>
-              <a:t> corrida x2</a:t>
-            </a:r>
-            <a:br>
-              <a:rPr dirty="0"/>
-            </a:br>
-            <a:br>
-              <a:rPr dirty="0"/>
-            </a:br>
-            <a:r>
-              <a:rPr dirty="0"/>
-              <a:t>Tab History</a:t>
-            </a:r>
-            <a:br>
-              <a:rPr dirty="0"/>
-            </a:br>
-            <a:r>
-              <a:rPr dirty="0"/>
-              <a:t>→ Tab Compare</a:t>
-            </a:r>
-            <a:br>
-              <a:rPr dirty="0"/>
-            </a:br>
-            <a:r>
-              <a:rPr dirty="0"/>
-              <a:t>→ pares </a:t>
-            </a:r>
-            <a:r>
-              <a:rPr dirty="0" err="1"/>
-              <a:t>semánticos</a:t>
-            </a:r>
-            <a:endParaRPr dirty="0"/>
+              <a:t>Incluir nombres de propiedades + tipos + ejemplo → parse success rate dramáticamente mayor</a:t>
+            </a:r>
           </a:p>
         </p:txBody>
       </p:sp>
@@ -14778,120 +14807,6 @@
 </file>
 
 <file path=ppt/slides/slide26.xml><?xml version="1.0" encoding="utf-8"?>
-<p:sld xmlns:a="http://schemas.openxmlformats.org/drawingml/2006/main" xmlns:r="http://schemas.openxmlformats.org/officeDocument/2006/relationships" xmlns:p="http://schemas.openxmlformats.org/presentationml/2006/main">
-  <p:cSld>
-    <p:bg>
-      <p:bgPr>
-        <a:solidFill>
-          <a:srgbClr val="1E293B"/>
-        </a:solidFill>
-        <a:effectLst/>
-      </p:bgPr>
-    </p:bg>
-    <p:spTree>
-      <p:nvGrpSpPr>
-        <p:cNvPr id="1" name=""/>
-        <p:cNvGrpSpPr/>
-        <p:nvPr/>
-      </p:nvGrpSpPr>
-      <p:grpSpPr>
-        <a:xfrm>
-          <a:off x="0" y="0"/>
-          <a:ext cx="0" cy="0"/>
-          <a:chOff x="0" y="0"/>
-          <a:chExt cx="0" cy="0"/>
-        </a:xfrm>
-      </p:grpSpPr>
-      <p:sp>
-        <p:nvSpPr>
-          <p:cNvPr id="2" name="TextBox 1"/>
-          <p:cNvSpPr txBox="1"/>
-          <p:nvPr/>
-        </p:nvSpPr>
-        <p:spPr>
-          <a:xfrm>
-            <a:off x="914400" y="2286000"/>
-            <a:ext cx="10058400" cy="707886"/>
-          </a:xfrm>
-          <a:prstGeom prst="rect">
-            <a:avLst/>
-          </a:prstGeom>
-          <a:noFill/>
-        </p:spPr>
-        <p:txBody>
-          <a:bodyPr wrap="square">
-            <a:spAutoFit/>
-          </a:bodyPr>
-          <a:lstStyle/>
-          <a:p>
-            <a:pPr algn="ctr">
-              <a:defRPr sz="4000" b="1">
-                <a:solidFill>
-                  <a:srgbClr val="FFFFFF"/>
-                </a:solidFill>
-              </a:defRPr>
-            </a:pPr>
-            <a:r>
-              <a:rPr lang="en-US" dirty="0" err="1"/>
-              <a:t>Resumen</a:t>
-            </a:r>
-            <a:endParaRPr dirty="0"/>
-          </a:p>
-        </p:txBody>
-      </p:sp>
-      <p:sp>
-        <p:nvSpPr>
-          <p:cNvPr id="4" name="Rectangle 3"/>
-          <p:cNvSpPr/>
-          <p:nvPr/>
-        </p:nvSpPr>
-        <p:spPr>
-          <a:xfrm>
-            <a:off x="4892040" y="3063240"/>
-            <a:ext cx="2103120" cy="38100"/>
-          </a:xfrm>
-          <a:prstGeom prst="rect">
-            <a:avLst/>
-          </a:prstGeom>
-          <a:solidFill>
-            <a:srgbClr val="60A5FA"/>
-          </a:solidFill>
-          <a:ln>
-            <a:noFill/>
-          </a:ln>
-        </p:spPr>
-        <p:style>
-          <a:lnRef idx="1">
-            <a:schemeClr val="accent1"/>
-          </a:lnRef>
-          <a:fillRef idx="3">
-            <a:schemeClr val="accent1"/>
-          </a:fillRef>
-          <a:effectRef idx="2">
-            <a:schemeClr val="accent1"/>
-          </a:effectRef>
-          <a:fontRef idx="minor">
-            <a:schemeClr val="lt1"/>
-          </a:fontRef>
-        </p:style>
-        <p:txBody>
-          <a:bodyPr rtlCol="0" anchor="ctr"/>
-          <a:lstStyle/>
-          <a:p>
-            <a:pPr algn="ctr"/>
-            <a:endParaRPr/>
-          </a:p>
-        </p:txBody>
-      </p:sp>
-    </p:spTree>
-  </p:cSld>
-  <p:clrMapOvr>
-    <a:masterClrMapping/>
-  </p:clrMapOvr>
-</p:sld>
-</file>
-
-<file path=ppt/slides/slide27.xml><?xml version="1.0" encoding="utf-8"?>
 <p:sld xmlns:a="http://schemas.openxmlformats.org/drawingml/2006/main" xmlns:r="http://schemas.openxmlformats.org/officeDocument/2006/relationships" xmlns:p="http://schemas.openxmlformats.org/presentationml/2006/main">
   <p:cSld>
     <p:bg>
@@ -14946,7 +14861,7 @@
               </a:defRPr>
             </a:pPr>
             <a:r>
-              <a:t>¿Qué demuestra este POC?</a:t>
+              <a:t>Stack técnico</a:t>
             </a:r>
           </a:p>
         </p:txBody>
@@ -14960,7 +14875,7 @@
         <p:spPr>
           <a:xfrm>
             <a:off x="731520" y="1463040"/>
-            <a:ext cx="10515600" cy="685800"/>
+            <a:ext cx="10515600" cy="594360"/>
           </a:xfrm>
           <a:prstGeom prst="roundRect">
             <a:avLst/>
@@ -14997,36 +14912,45 @@
       </p:sp>
       <p:sp>
         <p:nvSpPr>
-          <p:cNvPr id="4" name="TextBox 3"/>
-          <p:cNvSpPr txBox="1"/>
-          <p:nvPr/>
-        </p:nvSpPr>
-        <p:spPr>
-          <a:xfrm>
-            <a:off x="914400" y="1508760"/>
-            <a:ext cx="457200" cy="320040"/>
-          </a:xfrm>
-          <a:prstGeom prst="rect">
-            <a:avLst/>
-          </a:prstGeom>
-          <a:noFill/>
-        </p:spPr>
-        <p:txBody>
-          <a:bodyPr wrap="square">
-            <a:spAutoFit/>
-          </a:bodyPr>
-          <a:lstStyle/>
-          <a:p>
-            <a:pPr algn="l">
-              <a:defRPr sz="1600" b="0">
-                <a:solidFill>
-                  <a:srgbClr val="60A5FA"/>
-                </a:solidFill>
-              </a:defRPr>
-            </a:pPr>
-            <a:r>
-              <a:t>✅</a:t>
-            </a:r>
+          <p:cNvPr id="4" name="Rectangle 3"/>
+          <p:cNvSpPr/>
+          <p:nvPr/>
+        </p:nvSpPr>
+        <p:spPr>
+          <a:xfrm>
+            <a:off x="731520" y="1463040"/>
+            <a:ext cx="137160" cy="50800"/>
+          </a:xfrm>
+          <a:prstGeom prst="rect">
+            <a:avLst/>
+          </a:prstGeom>
+          <a:solidFill>
+            <a:srgbClr val="60A5FA"/>
+          </a:solidFill>
+          <a:ln>
+            <a:noFill/>
+          </a:ln>
+        </p:spPr>
+        <p:style>
+          <a:lnRef idx="1">
+            <a:schemeClr val="accent1"/>
+          </a:lnRef>
+          <a:fillRef idx="3">
+            <a:schemeClr val="accent1"/>
+          </a:fillRef>
+          <a:effectRef idx="2">
+            <a:schemeClr val="accent1"/>
+          </a:effectRef>
+          <a:fontRef idx="minor">
+            <a:schemeClr val="lt1"/>
+          </a:fontRef>
+        </p:style>
+        <p:txBody>
+          <a:bodyPr rtlCol="0" anchor="ctr"/>
+          <a:lstStyle/>
+          <a:p>
+            <a:pPr algn="ctr"/>
+            <a:endParaRPr/>
           </a:p>
         </p:txBody>
       </p:sp>
@@ -15038,8 +14962,8 @@
         </p:nvSpPr>
         <p:spPr>
           <a:xfrm>
-            <a:off x="1371600" y="1508760"/>
-            <a:ext cx="3200400" cy="320040"/>
+            <a:off x="1097280" y="1536192"/>
+            <a:ext cx="3200400" cy="365760"/>
           </a:xfrm>
           <a:prstGeom prst="rect">
             <a:avLst/>
@@ -15060,7 +14984,7 @@
               </a:defRPr>
             </a:pPr>
             <a:r>
-              <a:t>Selección dinámica</a:t>
+              <a:t>Backend</a:t>
             </a:r>
           </a:p>
         </p:txBody>
@@ -15073,8 +14997,8 @@
         </p:nvSpPr>
         <p:spPr>
           <a:xfrm>
-            <a:off x="1371600" y="1828800"/>
-            <a:ext cx="9144000" cy="274320"/>
+            <a:off x="4572000" y="1536192"/>
+            <a:ext cx="6400800" cy="365760"/>
           </a:xfrm>
           <a:prstGeom prst="rect">
             <a:avLst/>
@@ -15088,14 +15012,14 @@
           <a:lstStyle/>
           <a:p>
             <a:pPr algn="l">
-              <a:defRPr sz="1300" b="0">
-                <a:solidFill>
-                  <a:srgbClr val="94A3B8"/>
-                </a:solidFill>
-              </a:defRPr>
-            </a:pPr>
-            <a:r>
-              <a:t>No todos los agentes corren siempre — con razones explícitas</a:t>
+              <a:defRPr sz="1400" b="0">
+                <a:solidFill>
+                  <a:srgbClr val="E2E8F0"/>
+                </a:solidFill>
+              </a:defRPr>
+            </a:pPr>
+            <a:r>
+              <a:t>C# / .NET 9  —  Minimal APIs</a:t>
             </a:r>
           </a:p>
         </p:txBody>
@@ -15108,8 +15032,8 @@
         </p:nvSpPr>
         <p:spPr>
           <a:xfrm>
-            <a:off x="731520" y="2286000"/>
-            <a:ext cx="10515600" cy="685800"/>
+            <a:off x="731520" y="2176272"/>
+            <a:ext cx="10515600" cy="594360"/>
           </a:xfrm>
           <a:prstGeom prst="roundRect">
             <a:avLst/>
@@ -15146,36 +15070,45 @@
       </p:sp>
       <p:sp>
         <p:nvSpPr>
-          <p:cNvPr id="8" name="TextBox 7"/>
-          <p:cNvSpPr txBox="1"/>
-          <p:nvPr/>
-        </p:nvSpPr>
-        <p:spPr>
-          <a:xfrm>
-            <a:off x="914400" y="2331720"/>
-            <a:ext cx="457200" cy="320040"/>
-          </a:xfrm>
-          <a:prstGeom prst="rect">
-            <a:avLst/>
-          </a:prstGeom>
-          <a:noFill/>
-        </p:spPr>
-        <p:txBody>
-          <a:bodyPr wrap="square">
-            <a:spAutoFit/>
-          </a:bodyPr>
-          <a:lstStyle/>
-          <a:p>
-            <a:pPr algn="l">
-              <a:defRPr sz="1600" b="0">
-                <a:solidFill>
-                  <a:srgbClr val="34D399"/>
-                </a:solidFill>
-              </a:defRPr>
-            </a:pPr>
-            <a:r>
-              <a:t>✅</a:t>
-            </a:r>
+          <p:cNvPr id="8" name="Rectangle 7"/>
+          <p:cNvSpPr/>
+          <p:nvPr/>
+        </p:nvSpPr>
+        <p:spPr>
+          <a:xfrm>
+            <a:off x="731520" y="2176272"/>
+            <a:ext cx="137160" cy="50800"/>
+          </a:xfrm>
+          <a:prstGeom prst="rect">
+            <a:avLst/>
+          </a:prstGeom>
+          <a:solidFill>
+            <a:srgbClr val="34D399"/>
+          </a:solidFill>
+          <a:ln>
+            <a:noFill/>
+          </a:ln>
+        </p:spPr>
+        <p:style>
+          <a:lnRef idx="1">
+            <a:schemeClr val="accent1"/>
+          </a:lnRef>
+          <a:fillRef idx="3">
+            <a:schemeClr val="accent1"/>
+          </a:fillRef>
+          <a:effectRef idx="2">
+            <a:schemeClr val="accent1"/>
+          </a:effectRef>
+          <a:fontRef idx="minor">
+            <a:schemeClr val="lt1"/>
+          </a:fontRef>
+        </p:style>
+        <p:txBody>
+          <a:bodyPr rtlCol="0" anchor="ctr"/>
+          <a:lstStyle/>
+          <a:p>
+            <a:pPr algn="ctr"/>
+            <a:endParaRPr/>
           </a:p>
         </p:txBody>
       </p:sp>
@@ -15187,8 +15120,8 @@
         </p:nvSpPr>
         <p:spPr>
           <a:xfrm>
-            <a:off x="1371600" y="2331720"/>
-            <a:ext cx="3200400" cy="320040"/>
+            <a:off x="1097280" y="2249424"/>
+            <a:ext cx="3200400" cy="365760"/>
           </a:xfrm>
           <a:prstGeom prst="rect">
             <a:avLst/>
@@ -15209,7 +15142,7 @@
               </a:defRPr>
             </a:pPr>
             <a:r>
-              <a:t>Especialización real</a:t>
+              <a:t>Orquestación</a:t>
             </a:r>
           </a:p>
         </p:txBody>
@@ -15222,8 +15155,8 @@
         </p:nvSpPr>
         <p:spPr>
           <a:xfrm>
-            <a:off x="1371600" y="2651760"/>
-            <a:ext cx="9144000" cy="274320"/>
+            <a:off x="4572000" y="2249424"/>
+            <a:ext cx="6400800" cy="365760"/>
           </a:xfrm>
           <a:prstGeom prst="rect">
             <a:avLst/>
@@ -15237,14 +15170,14 @@
           <a:lstStyle/>
           <a:p>
             <a:pPr algn="l">
-              <a:defRPr sz="1300" b="0">
-                <a:solidFill>
-                  <a:srgbClr val="94A3B8"/>
-                </a:solidFill>
-              </a:defRPr>
-            </a:pPr>
-            <a:r>
-              <a:t>Cada agente detecta su dimensión, no lo mismo con distinto nombre</a:t>
+              <a:defRPr sz="1400" b="0">
+                <a:solidFill>
+                  <a:srgbClr val="E2E8F0"/>
+                </a:solidFill>
+              </a:defRPr>
+            </a:pPr>
+            <a:r>
+              <a:t>ReviewSupervisor + Task.WhenAll en proceso</a:t>
             </a:r>
           </a:p>
         </p:txBody>
@@ -15257,8 +15190,8 @@
         </p:nvSpPr>
         <p:spPr>
           <a:xfrm>
-            <a:off x="731520" y="3108960"/>
-            <a:ext cx="10515600" cy="685800"/>
+            <a:off x="731520" y="2889504"/>
+            <a:ext cx="10515600" cy="594360"/>
           </a:xfrm>
           <a:prstGeom prst="roundRect">
             <a:avLst/>
@@ -15295,36 +15228,45 @@
       </p:sp>
       <p:sp>
         <p:nvSpPr>
-          <p:cNvPr id="12" name="TextBox 11"/>
-          <p:cNvSpPr txBox="1"/>
-          <p:nvPr/>
-        </p:nvSpPr>
-        <p:spPr>
-          <a:xfrm>
-            <a:off x="914400" y="3154680"/>
-            <a:ext cx="457200" cy="320040"/>
-          </a:xfrm>
-          <a:prstGeom prst="rect">
-            <a:avLst/>
-          </a:prstGeom>
-          <a:noFill/>
-        </p:spPr>
-        <p:txBody>
-          <a:bodyPr wrap="square">
-            <a:spAutoFit/>
-          </a:bodyPr>
-          <a:lstStyle/>
-          <a:p>
-            <a:pPr algn="l">
-              <a:defRPr sz="1600" b="0">
-                <a:solidFill>
-                  <a:srgbClr val="FBBF24"/>
-                </a:solidFill>
-              </a:defRPr>
-            </a:pPr>
-            <a:r>
-              <a:t>✅</a:t>
-            </a:r>
+          <p:cNvPr id="12" name="Rectangle 11"/>
+          <p:cNvSpPr/>
+          <p:nvPr/>
+        </p:nvSpPr>
+        <p:spPr>
+          <a:xfrm>
+            <a:off x="731520" y="2889504"/>
+            <a:ext cx="137160" cy="50800"/>
+          </a:xfrm>
+          <a:prstGeom prst="rect">
+            <a:avLst/>
+          </a:prstGeom>
+          <a:solidFill>
+            <a:srgbClr val="FBBF24"/>
+          </a:solidFill>
+          <a:ln>
+            <a:noFill/>
+          </a:ln>
+        </p:spPr>
+        <p:style>
+          <a:lnRef idx="1">
+            <a:schemeClr val="accent1"/>
+          </a:lnRef>
+          <a:fillRef idx="3">
+            <a:schemeClr val="accent1"/>
+          </a:fillRef>
+          <a:effectRef idx="2">
+            <a:schemeClr val="accent1"/>
+          </a:effectRef>
+          <a:fontRef idx="minor">
+            <a:schemeClr val="lt1"/>
+          </a:fontRef>
+        </p:style>
+        <p:txBody>
+          <a:bodyPr rtlCol="0" anchor="ctr"/>
+          <a:lstStyle/>
+          <a:p>
+            <a:pPr algn="ctr"/>
+            <a:endParaRPr/>
           </a:p>
         </p:txBody>
       </p:sp>
@@ -15336,8 +15278,8 @@
         </p:nvSpPr>
         <p:spPr>
           <a:xfrm>
-            <a:off x="1371600" y="3154680"/>
-            <a:ext cx="3200400" cy="320040"/>
+            <a:off x="1097280" y="2962656"/>
+            <a:ext cx="3200400" cy="365760"/>
           </a:xfrm>
           <a:prstGeom prst="rect">
             <a:avLst/>
@@ -15358,7 +15300,7 @@
               </a:defRPr>
             </a:pPr>
             <a:r>
-              <a:t>Abstracción LLM</a:t>
+              <a:t>Proveedores LLM</a:t>
             </a:r>
           </a:p>
         </p:txBody>
@@ -15371,8 +15313,8 @@
         </p:nvSpPr>
         <p:spPr>
           <a:xfrm>
-            <a:off x="1371600" y="3474720"/>
-            <a:ext cx="9144000" cy="274320"/>
+            <a:off x="4572000" y="2962656"/>
+            <a:ext cx="6400800" cy="365760"/>
           </a:xfrm>
           <a:prstGeom prst="rect">
             <a:avLst/>
@@ -15386,14 +15328,14 @@
           <a:lstStyle/>
           <a:p>
             <a:pPr algn="l">
-              <a:defRPr sz="1300" b="0">
-                <a:solidFill>
-                  <a:srgbClr val="94A3B8"/>
-                </a:solidFill>
-              </a:defRPr>
-            </a:pPr>
-            <a:r>
-              <a:t>Bedrock y Ollama intercambiables sin tocar lógica de negocio</a:t>
+              <a:defRPr sz="1400" b="0">
+                <a:solidFill>
+                  <a:srgbClr val="E2E8F0"/>
+                </a:solidFill>
+              </a:defRPr>
+            </a:pPr>
+            <a:r>
+              <a:t>Amazon Bedrock SDK  ·  Ollama HTTP API</a:t>
             </a:r>
           </a:p>
         </p:txBody>
@@ -15406,8 +15348,8 @@
         </p:nvSpPr>
         <p:spPr>
           <a:xfrm>
-            <a:off x="731520" y="3931920"/>
-            <a:ext cx="10515600" cy="685800"/>
+            <a:off x="731520" y="3602736"/>
+            <a:ext cx="10515600" cy="594360"/>
           </a:xfrm>
           <a:prstGeom prst="roundRect">
             <a:avLst/>
@@ -15444,36 +15386,45 @@
       </p:sp>
       <p:sp>
         <p:nvSpPr>
-          <p:cNvPr id="16" name="TextBox 15"/>
-          <p:cNvSpPr txBox="1"/>
-          <p:nvPr/>
-        </p:nvSpPr>
-        <p:spPr>
-          <a:xfrm>
-            <a:off x="914400" y="3977640"/>
-            <a:ext cx="457200" cy="320040"/>
-          </a:xfrm>
-          <a:prstGeom prst="rect">
-            <a:avLst/>
-          </a:prstGeom>
-          <a:noFill/>
-        </p:spPr>
-        <p:txBody>
-          <a:bodyPr wrap="square">
-            <a:spAutoFit/>
-          </a:bodyPr>
-          <a:lstStyle/>
-          <a:p>
-            <a:pPr algn="l">
-              <a:defRPr sz="1600" b="0">
-                <a:solidFill>
-                  <a:srgbClr val="A78BFA"/>
-                </a:solidFill>
-              </a:defRPr>
-            </a:pPr>
-            <a:r>
-              <a:t>✅</a:t>
-            </a:r>
+          <p:cNvPr id="16" name="Rectangle 15"/>
+          <p:cNvSpPr/>
+          <p:nvPr/>
+        </p:nvSpPr>
+        <p:spPr>
+          <a:xfrm>
+            <a:off x="731520" y="3602736"/>
+            <a:ext cx="137160" cy="50800"/>
+          </a:xfrm>
+          <a:prstGeom prst="rect">
+            <a:avLst/>
+          </a:prstGeom>
+          <a:solidFill>
+            <a:srgbClr val="A78BFA"/>
+          </a:solidFill>
+          <a:ln>
+            <a:noFill/>
+          </a:ln>
+        </p:spPr>
+        <p:style>
+          <a:lnRef idx="1">
+            <a:schemeClr val="accent1"/>
+          </a:lnRef>
+          <a:fillRef idx="3">
+            <a:schemeClr val="accent1"/>
+          </a:fillRef>
+          <a:effectRef idx="2">
+            <a:schemeClr val="accent1"/>
+          </a:effectRef>
+          <a:fontRef idx="minor">
+            <a:schemeClr val="lt1"/>
+          </a:fontRef>
+        </p:style>
+        <p:txBody>
+          <a:bodyPr rtlCol="0" anchor="ctr"/>
+          <a:lstStyle/>
+          <a:p>
+            <a:pPr algn="ctr"/>
+            <a:endParaRPr/>
           </a:p>
         </p:txBody>
       </p:sp>
@@ -15485,8 +15436,8 @@
         </p:nvSpPr>
         <p:spPr>
           <a:xfrm>
-            <a:off x="1371600" y="3977640"/>
-            <a:ext cx="3200400" cy="320040"/>
+            <a:off x="1097280" y="3675888"/>
+            <a:ext cx="3200400" cy="365760"/>
           </a:xfrm>
           <a:prstGeom prst="rect">
             <a:avLst/>
@@ -15507,7 +15458,7 @@
               </a:defRPr>
             </a:pPr>
             <a:r>
-              <a:t>Trazabilidad completa</a:t>
+              <a:t>Persistencia</a:t>
             </a:r>
           </a:p>
         </p:txBody>
@@ -15520,8 +15471,8 @@
         </p:nvSpPr>
         <p:spPr>
           <a:xfrm>
-            <a:off x="1371600" y="4297680"/>
-            <a:ext cx="9144000" cy="274320"/>
+            <a:off x="4572000" y="3675888"/>
+            <a:ext cx="6400800" cy="365760"/>
           </a:xfrm>
           <a:prstGeom prst="rect">
             <a:avLst/>
@@ -15535,14 +15486,14 @@
           <a:lstStyle/>
           <a:p>
             <a:pPr algn="l">
-              <a:defRPr sz="1300" b="0">
-                <a:solidFill>
-                  <a:srgbClr val="94A3B8"/>
-                </a:solidFill>
-              </a:defRPr>
-            </a:pPr>
-            <a:r>
-              <a:t>Cada decisión, prompt y respuesta queda en el log JSONL</a:t>
+              <a:defRPr sz="1400" b="0">
+                <a:solidFill>
+                  <a:srgbClr val="E2E8F0"/>
+                </a:solidFill>
+              </a:defRPr>
+            </a:pPr>
+            <a:r>
+              <a:t>JSONL append-only — un archivo por ejecución</a:t>
             </a:r>
           </a:p>
         </p:txBody>
@@ -15555,8 +15506,8 @@
         </p:nvSpPr>
         <p:spPr>
           <a:xfrm>
-            <a:off x="731520" y="4754880"/>
-            <a:ext cx="10515600" cy="685800"/>
+            <a:off x="731520" y="4315968"/>
+            <a:ext cx="10515600" cy="594360"/>
           </a:xfrm>
           <a:prstGeom prst="roundRect">
             <a:avLst/>
@@ -15593,36 +15544,45 @@
       </p:sp>
       <p:sp>
         <p:nvSpPr>
-          <p:cNvPr id="20" name="TextBox 19"/>
-          <p:cNvSpPr txBox="1"/>
-          <p:nvPr/>
-        </p:nvSpPr>
-        <p:spPr>
-          <a:xfrm>
-            <a:off x="914400" y="4800600"/>
-            <a:ext cx="457200" cy="320040"/>
-          </a:xfrm>
-          <a:prstGeom prst="rect">
-            <a:avLst/>
-          </a:prstGeom>
-          <a:noFill/>
-        </p:spPr>
-        <p:txBody>
-          <a:bodyPr wrap="square">
-            <a:spAutoFit/>
-          </a:bodyPr>
-          <a:lstStyle/>
-          <a:p>
-            <a:pPr algn="l">
-              <a:defRPr sz="1600" b="0">
-                <a:solidFill>
-                  <a:srgbClr val="F472B6"/>
-                </a:solidFill>
-              </a:defRPr>
-            </a:pPr>
-            <a:r>
-              <a:t>✅</a:t>
-            </a:r>
+          <p:cNvPr id="20" name="Rectangle 19"/>
+          <p:cNvSpPr/>
+          <p:nvPr/>
+        </p:nvSpPr>
+        <p:spPr>
+          <a:xfrm>
+            <a:off x="731520" y="4315968"/>
+            <a:ext cx="137160" cy="50800"/>
+          </a:xfrm>
+          <a:prstGeom prst="rect">
+            <a:avLst/>
+          </a:prstGeom>
+          <a:solidFill>
+            <a:srgbClr val="F472B6"/>
+          </a:solidFill>
+          <a:ln>
+            <a:noFill/>
+          </a:ln>
+        </p:spPr>
+        <p:style>
+          <a:lnRef idx="1">
+            <a:schemeClr val="accent1"/>
+          </a:lnRef>
+          <a:fillRef idx="3">
+            <a:schemeClr val="accent1"/>
+          </a:fillRef>
+          <a:effectRef idx="2">
+            <a:schemeClr val="accent1"/>
+          </a:effectRef>
+          <a:fontRef idx="minor">
+            <a:schemeClr val="lt1"/>
+          </a:fontRef>
+        </p:style>
+        <p:txBody>
+          <a:bodyPr rtlCol="0" anchor="ctr"/>
+          <a:lstStyle/>
+          <a:p>
+            <a:pPr algn="ctr"/>
+            <a:endParaRPr/>
           </a:p>
         </p:txBody>
       </p:sp>
@@ -15634,8 +15594,8 @@
         </p:nvSpPr>
         <p:spPr>
           <a:xfrm>
-            <a:off x="1371600" y="4800600"/>
-            <a:ext cx="3200400" cy="320040"/>
+            <a:off x="1097280" y="4389120"/>
+            <a:ext cx="3200400" cy="365760"/>
           </a:xfrm>
           <a:prstGeom prst="rect">
             <a:avLst/>
@@ -15656,7 +15616,7 @@
               </a:defRPr>
             </a:pPr>
             <a:r>
-              <a:t>Resiliencia LLM</a:t>
+              <a:t>Frontend</a:t>
             </a:r>
           </a:p>
         </p:txBody>
@@ -15669,8 +15629,8 @@
         </p:nvSpPr>
         <p:spPr>
           <a:xfrm>
-            <a:off x="1371600" y="5120640"/>
-            <a:ext cx="9144000" cy="274320"/>
+            <a:off x="4572000" y="4389120"/>
+            <a:ext cx="6400800" cy="365760"/>
           </a:xfrm>
           <a:prstGeom prst="rect">
             <a:avLst/>
@@ -15684,14 +15644,14 @@
           <a:lstStyle/>
           <a:p>
             <a:pPr algn="l">
-              <a:defRPr sz="1300" b="0">
-                <a:solidFill>
-                  <a:srgbClr val="94A3B8"/>
-                </a:solidFill>
-              </a:defRPr>
-            </a:pPr>
-            <a:r>
-              <a:t>Parsing defensivo, fallbacks, status degradados</a:t>
+              <a:defRPr sz="1400" b="0">
+                <a:solidFill>
+                  <a:srgbClr val="E2E8F0"/>
+                </a:solidFill>
+              </a:defRPr>
+            </a:pPr>
+            <a:r>
+              <a:t>Angular 19 standalone  ·  Angular Material  ·  Signals</a:t>
             </a:r>
           </a:p>
         </p:txBody>
@@ -15704,8 +15664,8 @@
         </p:nvSpPr>
         <p:spPr>
           <a:xfrm>
-            <a:off x="731520" y="5577840"/>
-            <a:ext cx="10515600" cy="685800"/>
+            <a:off x="731520" y="5029200"/>
+            <a:ext cx="10515600" cy="594360"/>
           </a:xfrm>
           <a:prstGeom prst="roundRect">
             <a:avLst/>
@@ -15742,36 +15702,45 @@
       </p:sp>
       <p:sp>
         <p:nvSpPr>
-          <p:cNvPr id="24" name="TextBox 23"/>
-          <p:cNvSpPr txBox="1"/>
-          <p:nvPr/>
-        </p:nvSpPr>
-        <p:spPr>
-          <a:xfrm>
-            <a:off x="914400" y="5623560"/>
-            <a:ext cx="457200" cy="320040"/>
-          </a:xfrm>
-          <a:prstGeom prst="rect">
-            <a:avLst/>
-          </a:prstGeom>
-          <a:noFill/>
-        </p:spPr>
-        <p:txBody>
-          <a:bodyPr wrap="square">
-            <a:spAutoFit/>
-          </a:bodyPr>
-          <a:lstStyle/>
-          <a:p>
-            <a:pPr algn="l">
-              <a:defRPr sz="1600" b="0">
-                <a:solidFill>
-                  <a:srgbClr val="60A5FA"/>
-                </a:solidFill>
-              </a:defRPr>
-            </a:pPr>
-            <a:r>
-              <a:t>✅</a:t>
-            </a:r>
+          <p:cNvPr id="24" name="Rectangle 23"/>
+          <p:cNvSpPr/>
+          <p:nvPr/>
+        </p:nvSpPr>
+        <p:spPr>
+          <a:xfrm>
+            <a:off x="731520" y="5029200"/>
+            <a:ext cx="137160" cy="50800"/>
+          </a:xfrm>
+          <a:prstGeom prst="rect">
+            <a:avLst/>
+          </a:prstGeom>
+          <a:solidFill>
+            <a:srgbClr val="60A5FA"/>
+          </a:solidFill>
+          <a:ln>
+            <a:noFill/>
+          </a:ln>
+        </p:spPr>
+        <p:style>
+          <a:lnRef idx="1">
+            <a:schemeClr val="accent1"/>
+          </a:lnRef>
+          <a:fillRef idx="3">
+            <a:schemeClr val="accent1"/>
+          </a:fillRef>
+          <a:effectRef idx="2">
+            <a:schemeClr val="accent1"/>
+          </a:effectRef>
+          <a:fontRef idx="minor">
+            <a:schemeClr val="lt1"/>
+          </a:fontRef>
+        </p:style>
+        <p:txBody>
+          <a:bodyPr rtlCol="0" anchor="ctr"/>
+          <a:lstStyle/>
+          <a:p>
+            <a:pPr algn="ctr"/>
+            <a:endParaRPr/>
           </a:p>
         </p:txBody>
       </p:sp>
@@ -15783,8 +15752,8 @@
         </p:nvSpPr>
         <p:spPr>
           <a:xfrm>
-            <a:off x="1371600" y="5623560"/>
-            <a:ext cx="3200400" cy="320040"/>
+            <a:off x="1097280" y="5102352"/>
+            <a:ext cx="3200400" cy="365760"/>
           </a:xfrm>
           <a:prstGeom prst="rect">
             <a:avLst/>
@@ -15805,7 +15774,7 @@
               </a:defRPr>
             </a:pPr>
             <a:r>
-              <a:t>Comparación cross-model</a:t>
+              <a:t>Comunicación UI↔API</a:t>
             </a:r>
           </a:p>
         </p:txBody>
@@ -15818,8 +15787,8 @@
         </p:nvSpPr>
         <p:spPr>
           <a:xfrm>
-            <a:off x="1371600" y="5943600"/>
-            <a:ext cx="9144000" cy="274320"/>
+            <a:off x="4572000" y="5102352"/>
+            <a:ext cx="6400800" cy="365760"/>
           </a:xfrm>
           <a:prstGeom prst="rect">
             <a:avLst/>
@@ -15833,14 +15802,172 @@
           <a:lstStyle/>
           <a:p>
             <a:pPr algn="l">
-              <a:defRPr sz="1300" b="0">
-                <a:solidFill>
-                  <a:srgbClr val="94A3B8"/>
-                </a:solidFill>
-              </a:defRPr>
-            </a:pPr>
-            <a:r>
-              <a:t>Diff semántico — no solo string-match</a:t>
+              <a:defRPr sz="1400" b="0">
+                <a:solidFill>
+                  <a:srgbClr val="E2E8F0"/>
+                </a:solidFill>
+              </a:defRPr>
+            </a:pPr>
+            <a:r>
+              <a:t>HTTP polling + REST endpoints</a:t>
+            </a:r>
+          </a:p>
+        </p:txBody>
+      </p:sp>
+      <p:sp>
+        <p:nvSpPr>
+          <p:cNvPr id="27" name="Rounded Rectangle 26"/>
+          <p:cNvSpPr/>
+          <p:nvPr/>
+        </p:nvSpPr>
+        <p:spPr>
+          <a:xfrm>
+            <a:off x="731520" y="5742431"/>
+            <a:ext cx="10515600" cy="594360"/>
+          </a:xfrm>
+          <a:prstGeom prst="roundRect">
+            <a:avLst/>
+          </a:prstGeom>
+          <a:solidFill>
+            <a:srgbClr val="27344A"/>
+          </a:solidFill>
+          <a:ln>
+            <a:noFill/>
+          </a:ln>
+        </p:spPr>
+        <p:style>
+          <a:lnRef idx="1">
+            <a:schemeClr val="accent1"/>
+          </a:lnRef>
+          <a:fillRef idx="3">
+            <a:schemeClr val="accent1"/>
+          </a:fillRef>
+          <a:effectRef idx="2">
+            <a:schemeClr val="accent1"/>
+          </a:effectRef>
+          <a:fontRef idx="minor">
+            <a:schemeClr val="lt1"/>
+          </a:fontRef>
+        </p:style>
+        <p:txBody>
+          <a:bodyPr rtlCol="0" anchor="ctr"/>
+          <a:lstStyle/>
+          <a:p>
+            <a:pPr algn="ctr"/>
+            <a:endParaRPr/>
+          </a:p>
+        </p:txBody>
+      </p:sp>
+      <p:sp>
+        <p:nvSpPr>
+          <p:cNvPr id="28" name="Rectangle 27"/>
+          <p:cNvSpPr/>
+          <p:nvPr/>
+        </p:nvSpPr>
+        <p:spPr>
+          <a:xfrm>
+            <a:off x="731520" y="5742431"/>
+            <a:ext cx="137160" cy="50800"/>
+          </a:xfrm>
+          <a:prstGeom prst="rect">
+            <a:avLst/>
+          </a:prstGeom>
+          <a:solidFill>
+            <a:srgbClr val="34D399"/>
+          </a:solidFill>
+          <a:ln>
+            <a:noFill/>
+          </a:ln>
+        </p:spPr>
+        <p:style>
+          <a:lnRef idx="1">
+            <a:schemeClr val="accent1"/>
+          </a:lnRef>
+          <a:fillRef idx="3">
+            <a:schemeClr val="accent1"/>
+          </a:fillRef>
+          <a:effectRef idx="2">
+            <a:schemeClr val="accent1"/>
+          </a:effectRef>
+          <a:fontRef idx="minor">
+            <a:schemeClr val="lt1"/>
+          </a:fontRef>
+        </p:style>
+        <p:txBody>
+          <a:bodyPr rtlCol="0" anchor="ctr"/>
+          <a:lstStyle/>
+          <a:p>
+            <a:pPr algn="ctr"/>
+            <a:endParaRPr/>
+          </a:p>
+        </p:txBody>
+      </p:sp>
+      <p:sp>
+        <p:nvSpPr>
+          <p:cNvPr id="29" name="TextBox 28"/>
+          <p:cNvSpPr txBox="1"/>
+          <p:nvPr/>
+        </p:nvSpPr>
+        <p:spPr>
+          <a:xfrm>
+            <a:off x="1097280" y="5815583"/>
+            <a:ext cx="3200400" cy="365760"/>
+          </a:xfrm>
+          <a:prstGeom prst="rect">
+            <a:avLst/>
+          </a:prstGeom>
+          <a:noFill/>
+        </p:spPr>
+        <p:txBody>
+          <a:bodyPr wrap="square">
+            <a:spAutoFit/>
+          </a:bodyPr>
+          <a:lstStyle/>
+          <a:p>
+            <a:pPr algn="l">
+              <a:defRPr sz="1500" b="1">
+                <a:solidFill>
+                  <a:srgbClr val="34D399"/>
+                </a:solidFill>
+              </a:defRPr>
+            </a:pPr>
+            <a:r>
+              <a:t>Comparación semántica</a:t>
+            </a:r>
+          </a:p>
+        </p:txBody>
+      </p:sp>
+      <p:sp>
+        <p:nvSpPr>
+          <p:cNvPr id="30" name="TextBox 29"/>
+          <p:cNvSpPr txBox="1"/>
+          <p:nvPr/>
+        </p:nvSpPr>
+        <p:spPr>
+          <a:xfrm>
+            <a:off x="4572000" y="5815583"/>
+            <a:ext cx="6400800" cy="365760"/>
+          </a:xfrm>
+          <a:prstGeom prst="rect">
+            <a:avLst/>
+          </a:prstGeom>
+          <a:noFill/>
+        </p:spPr>
+        <p:txBody>
+          <a:bodyPr wrap="square">
+            <a:spAutoFit/>
+          </a:bodyPr>
+          <a:lstStyle/>
+          <a:p>
+            <a:pPr algn="l">
+              <a:defRPr sz="1400" b="0">
+                <a:solidFill>
+                  <a:srgbClr val="E2E8F0"/>
+                </a:solidFill>
+              </a:defRPr>
+            </a:pPr>
+            <a:r>
+              <a:t>LLM prompt engineering + JSON parsing defensivo</a:t>
             </a:r>
           </a:p>
         </p:txBody>
@@ -15853,1181 +15980,7 @@
 </p:sld>
 </file>
 
-<file path=ppt/slides/slide28.xml><?xml version="1.0" encoding="utf-8"?>
-<p:sld xmlns:a="http://schemas.openxmlformats.org/drawingml/2006/main" xmlns:r="http://schemas.openxmlformats.org/officeDocument/2006/relationships" xmlns:p="http://schemas.openxmlformats.org/presentationml/2006/main">
-  <p:cSld>
-    <p:bg>
-      <p:bgPr>
-        <a:solidFill>
-          <a:srgbClr val="0F172A"/>
-        </a:solidFill>
-        <a:effectLst/>
-      </p:bgPr>
-    </p:bg>
-    <p:spTree>
-      <p:nvGrpSpPr>
-        <p:cNvPr id="1" name=""/>
-        <p:cNvGrpSpPr/>
-        <p:nvPr/>
-      </p:nvGrpSpPr>
-      <p:grpSpPr>
-        <a:xfrm>
-          <a:off x="0" y="0"/>
-          <a:ext cx="0" cy="0"/>
-          <a:chOff x="0" y="0"/>
-          <a:chExt cx="0" cy="0"/>
-        </a:xfrm>
-      </p:grpSpPr>
-      <p:sp>
-        <p:nvSpPr>
-          <p:cNvPr id="2" name="TextBox 1"/>
-          <p:cNvSpPr txBox="1"/>
-          <p:nvPr/>
-        </p:nvSpPr>
-        <p:spPr>
-          <a:xfrm>
-            <a:off x="731520" y="365760"/>
-            <a:ext cx="10058400" cy="548640"/>
-          </a:xfrm>
-          <a:prstGeom prst="rect">
-            <a:avLst/>
-          </a:prstGeom>
-          <a:noFill/>
-        </p:spPr>
-        <p:txBody>
-          <a:bodyPr wrap="square">
-            <a:spAutoFit/>
-          </a:bodyPr>
-          <a:lstStyle/>
-          <a:p>
-            <a:pPr algn="l">
-              <a:defRPr sz="2800" b="1">
-                <a:solidFill>
-                  <a:srgbClr val="FFFFFF"/>
-                </a:solidFill>
-              </a:defRPr>
-            </a:pPr>
-            <a:r>
-              <a:t>Stack técnico</a:t>
-            </a:r>
-          </a:p>
-        </p:txBody>
-      </p:sp>
-      <p:sp>
-        <p:nvSpPr>
-          <p:cNvPr id="3" name="Rounded Rectangle 2"/>
-          <p:cNvSpPr/>
-          <p:nvPr/>
-        </p:nvSpPr>
-        <p:spPr>
-          <a:xfrm>
-            <a:off x="731520" y="1463040"/>
-            <a:ext cx="10515600" cy="594360"/>
-          </a:xfrm>
-          <a:prstGeom prst="roundRect">
-            <a:avLst/>
-          </a:prstGeom>
-          <a:solidFill>
-            <a:srgbClr val="27344A"/>
-          </a:solidFill>
-          <a:ln>
-            <a:noFill/>
-          </a:ln>
-        </p:spPr>
-        <p:style>
-          <a:lnRef idx="1">
-            <a:schemeClr val="accent1"/>
-          </a:lnRef>
-          <a:fillRef idx="3">
-            <a:schemeClr val="accent1"/>
-          </a:fillRef>
-          <a:effectRef idx="2">
-            <a:schemeClr val="accent1"/>
-          </a:effectRef>
-          <a:fontRef idx="minor">
-            <a:schemeClr val="lt1"/>
-          </a:fontRef>
-        </p:style>
-        <p:txBody>
-          <a:bodyPr rtlCol="0" anchor="ctr"/>
-          <a:lstStyle/>
-          <a:p>
-            <a:pPr algn="ctr"/>
-            <a:endParaRPr/>
-          </a:p>
-        </p:txBody>
-      </p:sp>
-      <p:sp>
-        <p:nvSpPr>
-          <p:cNvPr id="4" name="Rectangle 3"/>
-          <p:cNvSpPr/>
-          <p:nvPr/>
-        </p:nvSpPr>
-        <p:spPr>
-          <a:xfrm>
-            <a:off x="731520" y="1463040"/>
-            <a:ext cx="137160" cy="50800"/>
-          </a:xfrm>
-          <a:prstGeom prst="rect">
-            <a:avLst/>
-          </a:prstGeom>
-          <a:solidFill>
-            <a:srgbClr val="60A5FA"/>
-          </a:solidFill>
-          <a:ln>
-            <a:noFill/>
-          </a:ln>
-        </p:spPr>
-        <p:style>
-          <a:lnRef idx="1">
-            <a:schemeClr val="accent1"/>
-          </a:lnRef>
-          <a:fillRef idx="3">
-            <a:schemeClr val="accent1"/>
-          </a:fillRef>
-          <a:effectRef idx="2">
-            <a:schemeClr val="accent1"/>
-          </a:effectRef>
-          <a:fontRef idx="minor">
-            <a:schemeClr val="lt1"/>
-          </a:fontRef>
-        </p:style>
-        <p:txBody>
-          <a:bodyPr rtlCol="0" anchor="ctr"/>
-          <a:lstStyle/>
-          <a:p>
-            <a:pPr algn="ctr"/>
-            <a:endParaRPr/>
-          </a:p>
-        </p:txBody>
-      </p:sp>
-      <p:sp>
-        <p:nvSpPr>
-          <p:cNvPr id="5" name="TextBox 4"/>
-          <p:cNvSpPr txBox="1"/>
-          <p:nvPr/>
-        </p:nvSpPr>
-        <p:spPr>
-          <a:xfrm>
-            <a:off x="1097280" y="1536192"/>
-            <a:ext cx="3200400" cy="365760"/>
-          </a:xfrm>
-          <a:prstGeom prst="rect">
-            <a:avLst/>
-          </a:prstGeom>
-          <a:noFill/>
-        </p:spPr>
-        <p:txBody>
-          <a:bodyPr wrap="square">
-            <a:spAutoFit/>
-          </a:bodyPr>
-          <a:lstStyle/>
-          <a:p>
-            <a:pPr algn="l">
-              <a:defRPr sz="1500" b="1">
-                <a:solidFill>
-                  <a:srgbClr val="60A5FA"/>
-                </a:solidFill>
-              </a:defRPr>
-            </a:pPr>
-            <a:r>
-              <a:t>Backend</a:t>
-            </a:r>
-          </a:p>
-        </p:txBody>
-      </p:sp>
-      <p:sp>
-        <p:nvSpPr>
-          <p:cNvPr id="6" name="TextBox 5"/>
-          <p:cNvSpPr txBox="1"/>
-          <p:nvPr/>
-        </p:nvSpPr>
-        <p:spPr>
-          <a:xfrm>
-            <a:off x="4572000" y="1536192"/>
-            <a:ext cx="6400800" cy="365760"/>
-          </a:xfrm>
-          <a:prstGeom prst="rect">
-            <a:avLst/>
-          </a:prstGeom>
-          <a:noFill/>
-        </p:spPr>
-        <p:txBody>
-          <a:bodyPr wrap="square">
-            <a:spAutoFit/>
-          </a:bodyPr>
-          <a:lstStyle/>
-          <a:p>
-            <a:pPr algn="l">
-              <a:defRPr sz="1400" b="0">
-                <a:solidFill>
-                  <a:srgbClr val="E2E8F0"/>
-                </a:solidFill>
-              </a:defRPr>
-            </a:pPr>
-            <a:r>
-              <a:t>C# / .NET 9  —  Minimal APIs</a:t>
-            </a:r>
-          </a:p>
-        </p:txBody>
-      </p:sp>
-      <p:sp>
-        <p:nvSpPr>
-          <p:cNvPr id="7" name="Rounded Rectangle 6"/>
-          <p:cNvSpPr/>
-          <p:nvPr/>
-        </p:nvSpPr>
-        <p:spPr>
-          <a:xfrm>
-            <a:off x="731520" y="2176272"/>
-            <a:ext cx="10515600" cy="594360"/>
-          </a:xfrm>
-          <a:prstGeom prst="roundRect">
-            <a:avLst/>
-          </a:prstGeom>
-          <a:solidFill>
-            <a:srgbClr val="27344A"/>
-          </a:solidFill>
-          <a:ln>
-            <a:noFill/>
-          </a:ln>
-        </p:spPr>
-        <p:style>
-          <a:lnRef idx="1">
-            <a:schemeClr val="accent1"/>
-          </a:lnRef>
-          <a:fillRef idx="3">
-            <a:schemeClr val="accent1"/>
-          </a:fillRef>
-          <a:effectRef idx="2">
-            <a:schemeClr val="accent1"/>
-          </a:effectRef>
-          <a:fontRef idx="minor">
-            <a:schemeClr val="lt1"/>
-          </a:fontRef>
-        </p:style>
-        <p:txBody>
-          <a:bodyPr rtlCol="0" anchor="ctr"/>
-          <a:lstStyle/>
-          <a:p>
-            <a:pPr algn="ctr"/>
-            <a:endParaRPr/>
-          </a:p>
-        </p:txBody>
-      </p:sp>
-      <p:sp>
-        <p:nvSpPr>
-          <p:cNvPr id="8" name="Rectangle 7"/>
-          <p:cNvSpPr/>
-          <p:nvPr/>
-        </p:nvSpPr>
-        <p:spPr>
-          <a:xfrm>
-            <a:off x="731520" y="2176272"/>
-            <a:ext cx="137160" cy="50800"/>
-          </a:xfrm>
-          <a:prstGeom prst="rect">
-            <a:avLst/>
-          </a:prstGeom>
-          <a:solidFill>
-            <a:srgbClr val="34D399"/>
-          </a:solidFill>
-          <a:ln>
-            <a:noFill/>
-          </a:ln>
-        </p:spPr>
-        <p:style>
-          <a:lnRef idx="1">
-            <a:schemeClr val="accent1"/>
-          </a:lnRef>
-          <a:fillRef idx="3">
-            <a:schemeClr val="accent1"/>
-          </a:fillRef>
-          <a:effectRef idx="2">
-            <a:schemeClr val="accent1"/>
-          </a:effectRef>
-          <a:fontRef idx="minor">
-            <a:schemeClr val="lt1"/>
-          </a:fontRef>
-        </p:style>
-        <p:txBody>
-          <a:bodyPr rtlCol="0" anchor="ctr"/>
-          <a:lstStyle/>
-          <a:p>
-            <a:pPr algn="ctr"/>
-            <a:endParaRPr/>
-          </a:p>
-        </p:txBody>
-      </p:sp>
-      <p:sp>
-        <p:nvSpPr>
-          <p:cNvPr id="9" name="TextBox 8"/>
-          <p:cNvSpPr txBox="1"/>
-          <p:nvPr/>
-        </p:nvSpPr>
-        <p:spPr>
-          <a:xfrm>
-            <a:off x="1097280" y="2249424"/>
-            <a:ext cx="3200400" cy="365760"/>
-          </a:xfrm>
-          <a:prstGeom prst="rect">
-            <a:avLst/>
-          </a:prstGeom>
-          <a:noFill/>
-        </p:spPr>
-        <p:txBody>
-          <a:bodyPr wrap="square">
-            <a:spAutoFit/>
-          </a:bodyPr>
-          <a:lstStyle/>
-          <a:p>
-            <a:pPr algn="l">
-              <a:defRPr sz="1500" b="1">
-                <a:solidFill>
-                  <a:srgbClr val="34D399"/>
-                </a:solidFill>
-              </a:defRPr>
-            </a:pPr>
-            <a:r>
-              <a:t>Orquestación</a:t>
-            </a:r>
-          </a:p>
-        </p:txBody>
-      </p:sp>
-      <p:sp>
-        <p:nvSpPr>
-          <p:cNvPr id="10" name="TextBox 9"/>
-          <p:cNvSpPr txBox="1"/>
-          <p:nvPr/>
-        </p:nvSpPr>
-        <p:spPr>
-          <a:xfrm>
-            <a:off x="4572000" y="2249424"/>
-            <a:ext cx="6400800" cy="365760"/>
-          </a:xfrm>
-          <a:prstGeom prst="rect">
-            <a:avLst/>
-          </a:prstGeom>
-          <a:noFill/>
-        </p:spPr>
-        <p:txBody>
-          <a:bodyPr wrap="square">
-            <a:spAutoFit/>
-          </a:bodyPr>
-          <a:lstStyle/>
-          <a:p>
-            <a:pPr algn="l">
-              <a:defRPr sz="1400" b="0">
-                <a:solidFill>
-                  <a:srgbClr val="E2E8F0"/>
-                </a:solidFill>
-              </a:defRPr>
-            </a:pPr>
-            <a:r>
-              <a:t>ReviewSupervisor + Task.WhenAll en proceso</a:t>
-            </a:r>
-          </a:p>
-        </p:txBody>
-      </p:sp>
-      <p:sp>
-        <p:nvSpPr>
-          <p:cNvPr id="11" name="Rounded Rectangle 10"/>
-          <p:cNvSpPr/>
-          <p:nvPr/>
-        </p:nvSpPr>
-        <p:spPr>
-          <a:xfrm>
-            <a:off x="731520" y="2889504"/>
-            <a:ext cx="10515600" cy="594360"/>
-          </a:xfrm>
-          <a:prstGeom prst="roundRect">
-            <a:avLst/>
-          </a:prstGeom>
-          <a:solidFill>
-            <a:srgbClr val="27344A"/>
-          </a:solidFill>
-          <a:ln>
-            <a:noFill/>
-          </a:ln>
-        </p:spPr>
-        <p:style>
-          <a:lnRef idx="1">
-            <a:schemeClr val="accent1"/>
-          </a:lnRef>
-          <a:fillRef idx="3">
-            <a:schemeClr val="accent1"/>
-          </a:fillRef>
-          <a:effectRef idx="2">
-            <a:schemeClr val="accent1"/>
-          </a:effectRef>
-          <a:fontRef idx="minor">
-            <a:schemeClr val="lt1"/>
-          </a:fontRef>
-        </p:style>
-        <p:txBody>
-          <a:bodyPr rtlCol="0" anchor="ctr"/>
-          <a:lstStyle/>
-          <a:p>
-            <a:pPr algn="ctr"/>
-            <a:endParaRPr/>
-          </a:p>
-        </p:txBody>
-      </p:sp>
-      <p:sp>
-        <p:nvSpPr>
-          <p:cNvPr id="12" name="Rectangle 11"/>
-          <p:cNvSpPr/>
-          <p:nvPr/>
-        </p:nvSpPr>
-        <p:spPr>
-          <a:xfrm>
-            <a:off x="731520" y="2889504"/>
-            <a:ext cx="137160" cy="50800"/>
-          </a:xfrm>
-          <a:prstGeom prst="rect">
-            <a:avLst/>
-          </a:prstGeom>
-          <a:solidFill>
-            <a:srgbClr val="FBBF24"/>
-          </a:solidFill>
-          <a:ln>
-            <a:noFill/>
-          </a:ln>
-        </p:spPr>
-        <p:style>
-          <a:lnRef idx="1">
-            <a:schemeClr val="accent1"/>
-          </a:lnRef>
-          <a:fillRef idx="3">
-            <a:schemeClr val="accent1"/>
-          </a:fillRef>
-          <a:effectRef idx="2">
-            <a:schemeClr val="accent1"/>
-          </a:effectRef>
-          <a:fontRef idx="minor">
-            <a:schemeClr val="lt1"/>
-          </a:fontRef>
-        </p:style>
-        <p:txBody>
-          <a:bodyPr rtlCol="0" anchor="ctr"/>
-          <a:lstStyle/>
-          <a:p>
-            <a:pPr algn="ctr"/>
-            <a:endParaRPr/>
-          </a:p>
-        </p:txBody>
-      </p:sp>
-      <p:sp>
-        <p:nvSpPr>
-          <p:cNvPr id="13" name="TextBox 12"/>
-          <p:cNvSpPr txBox="1"/>
-          <p:nvPr/>
-        </p:nvSpPr>
-        <p:spPr>
-          <a:xfrm>
-            <a:off x="1097280" y="2962656"/>
-            <a:ext cx="3200400" cy="365760"/>
-          </a:xfrm>
-          <a:prstGeom prst="rect">
-            <a:avLst/>
-          </a:prstGeom>
-          <a:noFill/>
-        </p:spPr>
-        <p:txBody>
-          <a:bodyPr wrap="square">
-            <a:spAutoFit/>
-          </a:bodyPr>
-          <a:lstStyle/>
-          <a:p>
-            <a:pPr algn="l">
-              <a:defRPr sz="1500" b="1">
-                <a:solidFill>
-                  <a:srgbClr val="FBBF24"/>
-                </a:solidFill>
-              </a:defRPr>
-            </a:pPr>
-            <a:r>
-              <a:t>Proveedores LLM</a:t>
-            </a:r>
-          </a:p>
-        </p:txBody>
-      </p:sp>
-      <p:sp>
-        <p:nvSpPr>
-          <p:cNvPr id="14" name="TextBox 13"/>
-          <p:cNvSpPr txBox="1"/>
-          <p:nvPr/>
-        </p:nvSpPr>
-        <p:spPr>
-          <a:xfrm>
-            <a:off x="4572000" y="2962656"/>
-            <a:ext cx="6400800" cy="365760"/>
-          </a:xfrm>
-          <a:prstGeom prst="rect">
-            <a:avLst/>
-          </a:prstGeom>
-          <a:noFill/>
-        </p:spPr>
-        <p:txBody>
-          <a:bodyPr wrap="square">
-            <a:spAutoFit/>
-          </a:bodyPr>
-          <a:lstStyle/>
-          <a:p>
-            <a:pPr algn="l">
-              <a:defRPr sz="1400" b="0">
-                <a:solidFill>
-                  <a:srgbClr val="E2E8F0"/>
-                </a:solidFill>
-              </a:defRPr>
-            </a:pPr>
-            <a:r>
-              <a:t>Amazon Bedrock SDK  ·  Ollama HTTP API</a:t>
-            </a:r>
-          </a:p>
-        </p:txBody>
-      </p:sp>
-      <p:sp>
-        <p:nvSpPr>
-          <p:cNvPr id="15" name="Rounded Rectangle 14"/>
-          <p:cNvSpPr/>
-          <p:nvPr/>
-        </p:nvSpPr>
-        <p:spPr>
-          <a:xfrm>
-            <a:off x="731520" y="3602736"/>
-            <a:ext cx="10515600" cy="594360"/>
-          </a:xfrm>
-          <a:prstGeom prst="roundRect">
-            <a:avLst/>
-          </a:prstGeom>
-          <a:solidFill>
-            <a:srgbClr val="27344A"/>
-          </a:solidFill>
-          <a:ln>
-            <a:noFill/>
-          </a:ln>
-        </p:spPr>
-        <p:style>
-          <a:lnRef idx="1">
-            <a:schemeClr val="accent1"/>
-          </a:lnRef>
-          <a:fillRef idx="3">
-            <a:schemeClr val="accent1"/>
-          </a:fillRef>
-          <a:effectRef idx="2">
-            <a:schemeClr val="accent1"/>
-          </a:effectRef>
-          <a:fontRef idx="minor">
-            <a:schemeClr val="lt1"/>
-          </a:fontRef>
-        </p:style>
-        <p:txBody>
-          <a:bodyPr rtlCol="0" anchor="ctr"/>
-          <a:lstStyle/>
-          <a:p>
-            <a:pPr algn="ctr"/>
-            <a:endParaRPr/>
-          </a:p>
-        </p:txBody>
-      </p:sp>
-      <p:sp>
-        <p:nvSpPr>
-          <p:cNvPr id="16" name="Rectangle 15"/>
-          <p:cNvSpPr/>
-          <p:nvPr/>
-        </p:nvSpPr>
-        <p:spPr>
-          <a:xfrm>
-            <a:off x="731520" y="3602736"/>
-            <a:ext cx="137160" cy="50800"/>
-          </a:xfrm>
-          <a:prstGeom prst="rect">
-            <a:avLst/>
-          </a:prstGeom>
-          <a:solidFill>
-            <a:srgbClr val="A78BFA"/>
-          </a:solidFill>
-          <a:ln>
-            <a:noFill/>
-          </a:ln>
-        </p:spPr>
-        <p:style>
-          <a:lnRef idx="1">
-            <a:schemeClr val="accent1"/>
-          </a:lnRef>
-          <a:fillRef idx="3">
-            <a:schemeClr val="accent1"/>
-          </a:fillRef>
-          <a:effectRef idx="2">
-            <a:schemeClr val="accent1"/>
-          </a:effectRef>
-          <a:fontRef idx="minor">
-            <a:schemeClr val="lt1"/>
-          </a:fontRef>
-        </p:style>
-        <p:txBody>
-          <a:bodyPr rtlCol="0" anchor="ctr"/>
-          <a:lstStyle/>
-          <a:p>
-            <a:pPr algn="ctr"/>
-            <a:endParaRPr/>
-          </a:p>
-        </p:txBody>
-      </p:sp>
-      <p:sp>
-        <p:nvSpPr>
-          <p:cNvPr id="17" name="TextBox 16"/>
-          <p:cNvSpPr txBox="1"/>
-          <p:nvPr/>
-        </p:nvSpPr>
-        <p:spPr>
-          <a:xfrm>
-            <a:off x="1097280" y="3675888"/>
-            <a:ext cx="3200400" cy="365760"/>
-          </a:xfrm>
-          <a:prstGeom prst="rect">
-            <a:avLst/>
-          </a:prstGeom>
-          <a:noFill/>
-        </p:spPr>
-        <p:txBody>
-          <a:bodyPr wrap="square">
-            <a:spAutoFit/>
-          </a:bodyPr>
-          <a:lstStyle/>
-          <a:p>
-            <a:pPr algn="l">
-              <a:defRPr sz="1500" b="1">
-                <a:solidFill>
-                  <a:srgbClr val="A78BFA"/>
-                </a:solidFill>
-              </a:defRPr>
-            </a:pPr>
-            <a:r>
-              <a:t>Persistencia</a:t>
-            </a:r>
-          </a:p>
-        </p:txBody>
-      </p:sp>
-      <p:sp>
-        <p:nvSpPr>
-          <p:cNvPr id="18" name="TextBox 17"/>
-          <p:cNvSpPr txBox="1"/>
-          <p:nvPr/>
-        </p:nvSpPr>
-        <p:spPr>
-          <a:xfrm>
-            <a:off x="4572000" y="3675888"/>
-            <a:ext cx="6400800" cy="365760"/>
-          </a:xfrm>
-          <a:prstGeom prst="rect">
-            <a:avLst/>
-          </a:prstGeom>
-          <a:noFill/>
-        </p:spPr>
-        <p:txBody>
-          <a:bodyPr wrap="square">
-            <a:spAutoFit/>
-          </a:bodyPr>
-          <a:lstStyle/>
-          <a:p>
-            <a:pPr algn="l">
-              <a:defRPr sz="1400" b="0">
-                <a:solidFill>
-                  <a:srgbClr val="E2E8F0"/>
-                </a:solidFill>
-              </a:defRPr>
-            </a:pPr>
-            <a:r>
-              <a:t>JSONL append-only — un archivo por ejecución</a:t>
-            </a:r>
-          </a:p>
-        </p:txBody>
-      </p:sp>
-      <p:sp>
-        <p:nvSpPr>
-          <p:cNvPr id="19" name="Rounded Rectangle 18"/>
-          <p:cNvSpPr/>
-          <p:nvPr/>
-        </p:nvSpPr>
-        <p:spPr>
-          <a:xfrm>
-            <a:off x="731520" y="4315968"/>
-            <a:ext cx="10515600" cy="594360"/>
-          </a:xfrm>
-          <a:prstGeom prst="roundRect">
-            <a:avLst/>
-          </a:prstGeom>
-          <a:solidFill>
-            <a:srgbClr val="27344A"/>
-          </a:solidFill>
-          <a:ln>
-            <a:noFill/>
-          </a:ln>
-        </p:spPr>
-        <p:style>
-          <a:lnRef idx="1">
-            <a:schemeClr val="accent1"/>
-          </a:lnRef>
-          <a:fillRef idx="3">
-            <a:schemeClr val="accent1"/>
-          </a:fillRef>
-          <a:effectRef idx="2">
-            <a:schemeClr val="accent1"/>
-          </a:effectRef>
-          <a:fontRef idx="minor">
-            <a:schemeClr val="lt1"/>
-          </a:fontRef>
-        </p:style>
-        <p:txBody>
-          <a:bodyPr rtlCol="0" anchor="ctr"/>
-          <a:lstStyle/>
-          <a:p>
-            <a:pPr algn="ctr"/>
-            <a:endParaRPr/>
-          </a:p>
-        </p:txBody>
-      </p:sp>
-      <p:sp>
-        <p:nvSpPr>
-          <p:cNvPr id="20" name="Rectangle 19"/>
-          <p:cNvSpPr/>
-          <p:nvPr/>
-        </p:nvSpPr>
-        <p:spPr>
-          <a:xfrm>
-            <a:off x="731520" y="4315968"/>
-            <a:ext cx="137160" cy="50800"/>
-          </a:xfrm>
-          <a:prstGeom prst="rect">
-            <a:avLst/>
-          </a:prstGeom>
-          <a:solidFill>
-            <a:srgbClr val="F472B6"/>
-          </a:solidFill>
-          <a:ln>
-            <a:noFill/>
-          </a:ln>
-        </p:spPr>
-        <p:style>
-          <a:lnRef idx="1">
-            <a:schemeClr val="accent1"/>
-          </a:lnRef>
-          <a:fillRef idx="3">
-            <a:schemeClr val="accent1"/>
-          </a:fillRef>
-          <a:effectRef idx="2">
-            <a:schemeClr val="accent1"/>
-          </a:effectRef>
-          <a:fontRef idx="minor">
-            <a:schemeClr val="lt1"/>
-          </a:fontRef>
-        </p:style>
-        <p:txBody>
-          <a:bodyPr rtlCol="0" anchor="ctr"/>
-          <a:lstStyle/>
-          <a:p>
-            <a:pPr algn="ctr"/>
-            <a:endParaRPr/>
-          </a:p>
-        </p:txBody>
-      </p:sp>
-      <p:sp>
-        <p:nvSpPr>
-          <p:cNvPr id="21" name="TextBox 20"/>
-          <p:cNvSpPr txBox="1"/>
-          <p:nvPr/>
-        </p:nvSpPr>
-        <p:spPr>
-          <a:xfrm>
-            <a:off x="1097280" y="4389120"/>
-            <a:ext cx="3200400" cy="365760"/>
-          </a:xfrm>
-          <a:prstGeom prst="rect">
-            <a:avLst/>
-          </a:prstGeom>
-          <a:noFill/>
-        </p:spPr>
-        <p:txBody>
-          <a:bodyPr wrap="square">
-            <a:spAutoFit/>
-          </a:bodyPr>
-          <a:lstStyle/>
-          <a:p>
-            <a:pPr algn="l">
-              <a:defRPr sz="1500" b="1">
-                <a:solidFill>
-                  <a:srgbClr val="F472B6"/>
-                </a:solidFill>
-              </a:defRPr>
-            </a:pPr>
-            <a:r>
-              <a:t>Frontend</a:t>
-            </a:r>
-          </a:p>
-        </p:txBody>
-      </p:sp>
-      <p:sp>
-        <p:nvSpPr>
-          <p:cNvPr id="22" name="TextBox 21"/>
-          <p:cNvSpPr txBox="1"/>
-          <p:nvPr/>
-        </p:nvSpPr>
-        <p:spPr>
-          <a:xfrm>
-            <a:off x="4572000" y="4389120"/>
-            <a:ext cx="6400800" cy="365760"/>
-          </a:xfrm>
-          <a:prstGeom prst="rect">
-            <a:avLst/>
-          </a:prstGeom>
-          <a:noFill/>
-        </p:spPr>
-        <p:txBody>
-          <a:bodyPr wrap="square">
-            <a:spAutoFit/>
-          </a:bodyPr>
-          <a:lstStyle/>
-          <a:p>
-            <a:pPr algn="l">
-              <a:defRPr sz="1400" b="0">
-                <a:solidFill>
-                  <a:srgbClr val="E2E8F0"/>
-                </a:solidFill>
-              </a:defRPr>
-            </a:pPr>
-            <a:r>
-              <a:t>Angular 19 standalone  ·  Angular Material  ·  Signals</a:t>
-            </a:r>
-          </a:p>
-        </p:txBody>
-      </p:sp>
-      <p:sp>
-        <p:nvSpPr>
-          <p:cNvPr id="23" name="Rounded Rectangle 22"/>
-          <p:cNvSpPr/>
-          <p:nvPr/>
-        </p:nvSpPr>
-        <p:spPr>
-          <a:xfrm>
-            <a:off x="731520" y="5029200"/>
-            <a:ext cx="10515600" cy="594360"/>
-          </a:xfrm>
-          <a:prstGeom prst="roundRect">
-            <a:avLst/>
-          </a:prstGeom>
-          <a:solidFill>
-            <a:srgbClr val="27344A"/>
-          </a:solidFill>
-          <a:ln>
-            <a:noFill/>
-          </a:ln>
-        </p:spPr>
-        <p:style>
-          <a:lnRef idx="1">
-            <a:schemeClr val="accent1"/>
-          </a:lnRef>
-          <a:fillRef idx="3">
-            <a:schemeClr val="accent1"/>
-          </a:fillRef>
-          <a:effectRef idx="2">
-            <a:schemeClr val="accent1"/>
-          </a:effectRef>
-          <a:fontRef idx="minor">
-            <a:schemeClr val="lt1"/>
-          </a:fontRef>
-        </p:style>
-        <p:txBody>
-          <a:bodyPr rtlCol="0" anchor="ctr"/>
-          <a:lstStyle/>
-          <a:p>
-            <a:pPr algn="ctr"/>
-            <a:endParaRPr/>
-          </a:p>
-        </p:txBody>
-      </p:sp>
-      <p:sp>
-        <p:nvSpPr>
-          <p:cNvPr id="24" name="Rectangle 23"/>
-          <p:cNvSpPr/>
-          <p:nvPr/>
-        </p:nvSpPr>
-        <p:spPr>
-          <a:xfrm>
-            <a:off x="731520" y="5029200"/>
-            <a:ext cx="137160" cy="50800"/>
-          </a:xfrm>
-          <a:prstGeom prst="rect">
-            <a:avLst/>
-          </a:prstGeom>
-          <a:solidFill>
-            <a:srgbClr val="60A5FA"/>
-          </a:solidFill>
-          <a:ln>
-            <a:noFill/>
-          </a:ln>
-        </p:spPr>
-        <p:style>
-          <a:lnRef idx="1">
-            <a:schemeClr val="accent1"/>
-          </a:lnRef>
-          <a:fillRef idx="3">
-            <a:schemeClr val="accent1"/>
-          </a:fillRef>
-          <a:effectRef idx="2">
-            <a:schemeClr val="accent1"/>
-          </a:effectRef>
-          <a:fontRef idx="minor">
-            <a:schemeClr val="lt1"/>
-          </a:fontRef>
-        </p:style>
-        <p:txBody>
-          <a:bodyPr rtlCol="0" anchor="ctr"/>
-          <a:lstStyle/>
-          <a:p>
-            <a:pPr algn="ctr"/>
-            <a:endParaRPr/>
-          </a:p>
-        </p:txBody>
-      </p:sp>
-      <p:sp>
-        <p:nvSpPr>
-          <p:cNvPr id="25" name="TextBox 24"/>
-          <p:cNvSpPr txBox="1"/>
-          <p:nvPr/>
-        </p:nvSpPr>
-        <p:spPr>
-          <a:xfrm>
-            <a:off x="1097280" y="5102352"/>
-            <a:ext cx="3200400" cy="365760"/>
-          </a:xfrm>
-          <a:prstGeom prst="rect">
-            <a:avLst/>
-          </a:prstGeom>
-          <a:noFill/>
-        </p:spPr>
-        <p:txBody>
-          <a:bodyPr wrap="square">
-            <a:spAutoFit/>
-          </a:bodyPr>
-          <a:lstStyle/>
-          <a:p>
-            <a:pPr algn="l">
-              <a:defRPr sz="1500" b="1">
-                <a:solidFill>
-                  <a:srgbClr val="60A5FA"/>
-                </a:solidFill>
-              </a:defRPr>
-            </a:pPr>
-            <a:r>
-              <a:t>Comunicación UI↔API</a:t>
-            </a:r>
-          </a:p>
-        </p:txBody>
-      </p:sp>
-      <p:sp>
-        <p:nvSpPr>
-          <p:cNvPr id="26" name="TextBox 25"/>
-          <p:cNvSpPr txBox="1"/>
-          <p:nvPr/>
-        </p:nvSpPr>
-        <p:spPr>
-          <a:xfrm>
-            <a:off x="4572000" y="5102352"/>
-            <a:ext cx="6400800" cy="365760"/>
-          </a:xfrm>
-          <a:prstGeom prst="rect">
-            <a:avLst/>
-          </a:prstGeom>
-          <a:noFill/>
-        </p:spPr>
-        <p:txBody>
-          <a:bodyPr wrap="square">
-            <a:spAutoFit/>
-          </a:bodyPr>
-          <a:lstStyle/>
-          <a:p>
-            <a:pPr algn="l">
-              <a:defRPr sz="1400" b="0">
-                <a:solidFill>
-                  <a:srgbClr val="E2E8F0"/>
-                </a:solidFill>
-              </a:defRPr>
-            </a:pPr>
-            <a:r>
-              <a:t>HTTP polling + REST endpoints</a:t>
-            </a:r>
-          </a:p>
-        </p:txBody>
-      </p:sp>
-      <p:sp>
-        <p:nvSpPr>
-          <p:cNvPr id="27" name="Rounded Rectangle 26"/>
-          <p:cNvSpPr/>
-          <p:nvPr/>
-        </p:nvSpPr>
-        <p:spPr>
-          <a:xfrm>
-            <a:off x="731520" y="5742431"/>
-            <a:ext cx="10515600" cy="594360"/>
-          </a:xfrm>
-          <a:prstGeom prst="roundRect">
-            <a:avLst/>
-          </a:prstGeom>
-          <a:solidFill>
-            <a:srgbClr val="27344A"/>
-          </a:solidFill>
-          <a:ln>
-            <a:noFill/>
-          </a:ln>
-        </p:spPr>
-        <p:style>
-          <a:lnRef idx="1">
-            <a:schemeClr val="accent1"/>
-          </a:lnRef>
-          <a:fillRef idx="3">
-            <a:schemeClr val="accent1"/>
-          </a:fillRef>
-          <a:effectRef idx="2">
-            <a:schemeClr val="accent1"/>
-          </a:effectRef>
-          <a:fontRef idx="minor">
-            <a:schemeClr val="lt1"/>
-          </a:fontRef>
-        </p:style>
-        <p:txBody>
-          <a:bodyPr rtlCol="0" anchor="ctr"/>
-          <a:lstStyle/>
-          <a:p>
-            <a:pPr algn="ctr"/>
-            <a:endParaRPr/>
-          </a:p>
-        </p:txBody>
-      </p:sp>
-      <p:sp>
-        <p:nvSpPr>
-          <p:cNvPr id="28" name="Rectangle 27"/>
-          <p:cNvSpPr/>
-          <p:nvPr/>
-        </p:nvSpPr>
-        <p:spPr>
-          <a:xfrm>
-            <a:off x="731520" y="5742431"/>
-            <a:ext cx="137160" cy="50800"/>
-          </a:xfrm>
-          <a:prstGeom prst="rect">
-            <a:avLst/>
-          </a:prstGeom>
-          <a:solidFill>
-            <a:srgbClr val="34D399"/>
-          </a:solidFill>
-          <a:ln>
-            <a:noFill/>
-          </a:ln>
-        </p:spPr>
-        <p:style>
-          <a:lnRef idx="1">
-            <a:schemeClr val="accent1"/>
-          </a:lnRef>
-          <a:fillRef idx="3">
-            <a:schemeClr val="accent1"/>
-          </a:fillRef>
-          <a:effectRef idx="2">
-            <a:schemeClr val="accent1"/>
-          </a:effectRef>
-          <a:fontRef idx="minor">
-            <a:schemeClr val="lt1"/>
-          </a:fontRef>
-        </p:style>
-        <p:txBody>
-          <a:bodyPr rtlCol="0" anchor="ctr"/>
-          <a:lstStyle/>
-          <a:p>
-            <a:pPr algn="ctr"/>
-            <a:endParaRPr/>
-          </a:p>
-        </p:txBody>
-      </p:sp>
-      <p:sp>
-        <p:nvSpPr>
-          <p:cNvPr id="29" name="TextBox 28"/>
-          <p:cNvSpPr txBox="1"/>
-          <p:nvPr/>
-        </p:nvSpPr>
-        <p:spPr>
-          <a:xfrm>
-            <a:off x="1097280" y="5815583"/>
-            <a:ext cx="3200400" cy="365760"/>
-          </a:xfrm>
-          <a:prstGeom prst="rect">
-            <a:avLst/>
-          </a:prstGeom>
-          <a:noFill/>
-        </p:spPr>
-        <p:txBody>
-          <a:bodyPr wrap="square">
-            <a:spAutoFit/>
-          </a:bodyPr>
-          <a:lstStyle/>
-          <a:p>
-            <a:pPr algn="l">
-              <a:defRPr sz="1500" b="1">
-                <a:solidFill>
-                  <a:srgbClr val="34D399"/>
-                </a:solidFill>
-              </a:defRPr>
-            </a:pPr>
-            <a:r>
-              <a:t>Comparación semántica</a:t>
-            </a:r>
-          </a:p>
-        </p:txBody>
-      </p:sp>
-      <p:sp>
-        <p:nvSpPr>
-          <p:cNvPr id="30" name="TextBox 29"/>
-          <p:cNvSpPr txBox="1"/>
-          <p:nvPr/>
-        </p:nvSpPr>
-        <p:spPr>
-          <a:xfrm>
-            <a:off x="4572000" y="5815583"/>
-            <a:ext cx="6400800" cy="365760"/>
-          </a:xfrm>
-          <a:prstGeom prst="rect">
-            <a:avLst/>
-          </a:prstGeom>
-          <a:noFill/>
-        </p:spPr>
-        <p:txBody>
-          <a:bodyPr wrap="square">
-            <a:spAutoFit/>
-          </a:bodyPr>
-          <a:lstStyle/>
-          <a:p>
-            <a:pPr algn="l">
-              <a:defRPr sz="1400" b="0">
-                <a:solidFill>
-                  <a:srgbClr val="E2E8F0"/>
-                </a:solidFill>
-              </a:defRPr>
-            </a:pPr>
-            <a:r>
-              <a:t>LLM prompt engineering + JSON parsing defensivo</a:t>
-            </a:r>
-          </a:p>
-        </p:txBody>
-      </p:sp>
-    </p:spTree>
-  </p:cSld>
-  <p:clrMapOvr>
-    <a:masterClrMapping/>
-  </p:clrMapOvr>
-</p:sld>
-</file>
-
-<file path=ppt/slides/slide29.xml><?xml version="1.0" encoding="utf-8"?>
+<file path=ppt/slides/slide27.xml><?xml version="1.0" encoding="utf-8"?>
 <p:sld xmlns:a="http://schemas.openxmlformats.org/drawingml/2006/main" xmlns:r="http://schemas.openxmlformats.org/officeDocument/2006/relationships" xmlns:p="http://schemas.openxmlformats.org/presentationml/2006/main">
   <p:cSld>
     <p:bg>
